--- a/COMP2711/Materials/L00-Intro.pptx
+++ b/COMP2711/Materials/L00-Intro.pptx
@@ -5,7 +5,7 @@
     <p:sldMasterId id="2147483648" r:id="rId1"/>
   </p:sldMasterIdLst>
   <p:notesMasterIdLst>
-    <p:notesMasterId r:id="rId20"/>
+    <p:notesMasterId r:id="rId30"/>
   </p:notesMasterIdLst>
   <p:sldIdLst>
     <p:sldId id="811" r:id="rId2"/>
@@ -22,10 +22,20 @@
     <p:sldId id="1240" r:id="rId13"/>
     <p:sldId id="1244" r:id="rId14"/>
     <p:sldId id="1239" r:id="rId15"/>
-    <p:sldId id="1257" r:id="rId16"/>
-    <p:sldId id="1256" r:id="rId17"/>
-    <p:sldId id="1241" r:id="rId18"/>
-    <p:sldId id="1158" r:id="rId19"/>
+    <p:sldId id="1256" r:id="rId16"/>
+    <p:sldId id="1241" r:id="rId17"/>
+    <p:sldId id="1158" r:id="rId18"/>
+    <p:sldId id="1258" r:id="rId19"/>
+    <p:sldId id="1261" r:id="rId20"/>
+    <p:sldId id="1263" r:id="rId21"/>
+    <p:sldId id="1264" r:id="rId22"/>
+    <p:sldId id="1265" r:id="rId23"/>
+    <p:sldId id="1257" r:id="rId24"/>
+    <p:sldId id="1259" r:id="rId25"/>
+    <p:sldId id="1260" r:id="rId26"/>
+    <p:sldId id="1266" r:id="rId27"/>
+    <p:sldId id="1267" r:id="rId28"/>
+    <p:sldId id="1269" r:id="rId29"/>
   </p:sldIdLst>
   <p:sldSz cx="12192000" cy="6858000"/>
   <p:notesSz cx="6858000" cy="9144000"/>
@@ -214,7 +224,7 @@
           <a:p>
             <a:fld id="{25C994D2-5E16-4D9C-AEFB-2A261088A902}" type="datetimeFigureOut">
               <a:rPr lang="zh-CN" altLang="en-US" smtClean="0"/>
-              <a:t>2026/8/31</a:t>
+              <a:t>2026/8/30</a:t>
             </a:fld>
             <a:endParaRPr lang="zh-CN" altLang="en-US"/>
           </a:p>
@@ -560,114 +570,6 @@
   <p:cSld>
     <p:spTree>
       <p:nvGrpSpPr>
-        <p:cNvPr id="1" name="">
-          <a:extLst>
-            <a:ext uri="{FF2B5EF4-FFF2-40B4-BE49-F238E27FC236}">
-              <a16:creationId xmlns:a16="http://schemas.microsoft.com/office/drawing/2014/main" id="{2B7AF4C5-BF8C-F408-AE16-812D66BC29EA}"/>
-            </a:ext>
-          </a:extLst>
-        </p:cNvPr>
-        <p:cNvGrpSpPr/>
-        <p:nvPr/>
-      </p:nvGrpSpPr>
-      <p:grpSpPr>
-        <a:xfrm>
-          <a:off x="0" y="0"/>
-          <a:ext cx="0" cy="0"/>
-          <a:chOff x="0" y="0"/>
-          <a:chExt cx="0" cy="0"/>
-        </a:xfrm>
-      </p:grpSpPr>
-      <p:sp>
-        <p:nvSpPr>
-          <p:cNvPr id="2" name="Slide Image Placeholder 1">
-            <a:extLst>
-              <a:ext uri="{FF2B5EF4-FFF2-40B4-BE49-F238E27FC236}">
-                <a16:creationId xmlns:a16="http://schemas.microsoft.com/office/drawing/2014/main" id="{B630C16E-051E-05DC-1505-BAA2F32A78CC}"/>
-              </a:ext>
-            </a:extLst>
-          </p:cNvPr>
-          <p:cNvSpPr>
-            <a:spLocks noGrp="1" noRot="1" noChangeAspect="1"/>
-          </p:cNvSpPr>
-          <p:nvPr>
-            <p:ph type="sldImg"/>
-          </p:nvPr>
-        </p:nvSpPr>
-        <p:spPr/>
-      </p:sp>
-      <p:sp>
-        <p:nvSpPr>
-          <p:cNvPr id="3" name="Notes Placeholder 2">
-            <a:extLst>
-              <a:ext uri="{FF2B5EF4-FFF2-40B4-BE49-F238E27FC236}">
-                <a16:creationId xmlns:a16="http://schemas.microsoft.com/office/drawing/2014/main" id="{BDE6A8E9-6B7E-10B1-B698-150552231840}"/>
-              </a:ext>
-            </a:extLst>
-          </p:cNvPr>
-          <p:cNvSpPr>
-            <a:spLocks noGrp="1"/>
-          </p:cNvSpPr>
-          <p:nvPr>
-            <p:ph type="body" idx="1"/>
-          </p:nvPr>
-        </p:nvSpPr>
-        <p:spPr/>
-        <p:txBody>
-          <a:bodyPr/>
-          <a:lstStyle/>
-          <a:p>
-            <a:endParaRPr lang="en-US" dirty="0"/>
-          </a:p>
-        </p:txBody>
-      </p:sp>
-      <p:sp>
-        <p:nvSpPr>
-          <p:cNvPr id="4" name="Slide Number Placeholder 3">
-            <a:extLst>
-              <a:ext uri="{FF2B5EF4-FFF2-40B4-BE49-F238E27FC236}">
-                <a16:creationId xmlns:a16="http://schemas.microsoft.com/office/drawing/2014/main" id="{4940CB8A-7B78-F068-5913-A2203E88DA8D}"/>
-              </a:ext>
-            </a:extLst>
-          </p:cNvPr>
-          <p:cNvSpPr>
-            <a:spLocks noGrp="1"/>
-          </p:cNvSpPr>
-          <p:nvPr>
-            <p:ph type="sldNum" sz="quarter" idx="5"/>
-          </p:nvPr>
-        </p:nvSpPr>
-        <p:spPr/>
-        <p:txBody>
-          <a:bodyPr/>
-          <a:lstStyle/>
-          <a:p>
-            <a:fld id="{124B687B-81D5-4F44-AE6B-34CD1245FD04}" type="slidenum">
-              <a:rPr lang="zh-CN" altLang="en-US" smtClean="0"/>
-              <a:t>17</a:t>
-            </a:fld>
-            <a:endParaRPr lang="zh-CN" altLang="en-US"/>
-          </a:p>
-        </p:txBody>
-      </p:sp>
-    </p:spTree>
-    <p:extLst>
-      <p:ext uri="{BB962C8B-B14F-4D97-AF65-F5344CB8AC3E}">
-        <p14:creationId xmlns:p14="http://schemas.microsoft.com/office/powerpoint/2010/main" val="2243116380"/>
-      </p:ext>
-    </p:extLst>
-  </p:cSld>
-  <p:clrMapOvr>
-    <a:masterClrMapping/>
-  </p:clrMapOvr>
-</p:notes>
-</file>
-
-<file path=ppt/notesSlides/notesSlide11.xml><?xml version="1.0" encoding="utf-8"?>
-<p:notes xmlns:a="http://schemas.openxmlformats.org/drawingml/2006/main" xmlns:r="http://schemas.openxmlformats.org/officeDocument/2006/relationships" xmlns:p="http://schemas.openxmlformats.org/presentationml/2006/main">
-  <p:cSld>
-    <p:spTree>
-      <p:nvGrpSpPr>
         <p:cNvPr id="1" name=""/>
         <p:cNvGrpSpPr/>
         <p:nvPr/>
@@ -728,13 +630,18 @@
           <a:p>
             <a:fld id="{124B687B-81D5-4F44-AE6B-34CD1245FD04}" type="slidenum">
               <a:rPr lang="zh-CN" altLang="en-US" smtClean="0"/>
-              <a:t>18</a:t>
+              <a:t>25</a:t>
             </a:fld>
             <a:endParaRPr lang="zh-CN" altLang="en-US"/>
           </a:p>
         </p:txBody>
       </p:sp>
     </p:spTree>
+    <p:extLst>
+      <p:ext uri="{BB962C8B-B14F-4D97-AF65-F5344CB8AC3E}">
+        <p14:creationId xmlns:p14="http://schemas.microsoft.com/office/powerpoint/2010/main" val="13281838"/>
+      </p:ext>
+    </p:extLst>
   </p:cSld>
   <p:clrMapOvr>
     <a:masterClrMapping/>
@@ -1323,7 +1230,13 @@
   <p:cSld>
     <p:spTree>
       <p:nvGrpSpPr>
-        <p:cNvPr id="1" name=""/>
+        <p:cNvPr id="1" name="">
+          <a:extLst>
+            <a:ext uri="{FF2B5EF4-FFF2-40B4-BE49-F238E27FC236}">
+              <a16:creationId xmlns:a16="http://schemas.microsoft.com/office/drawing/2014/main" id="{2B7AF4C5-BF8C-F408-AE16-812D66BC29EA}"/>
+            </a:ext>
+          </a:extLst>
+        </p:cNvPr>
         <p:cNvGrpSpPr/>
         <p:nvPr/>
       </p:nvGrpSpPr>
@@ -1337,7 +1250,13 @@
       </p:grpSpPr>
       <p:sp>
         <p:nvSpPr>
-          <p:cNvPr id="2" name="Slide Image Placeholder 1"/>
+          <p:cNvPr id="2" name="Slide Image Placeholder 1">
+            <a:extLst>
+              <a:ext uri="{FF2B5EF4-FFF2-40B4-BE49-F238E27FC236}">
+                <a16:creationId xmlns:a16="http://schemas.microsoft.com/office/drawing/2014/main" id="{B630C16E-051E-05DC-1505-BAA2F32A78CC}"/>
+              </a:ext>
+            </a:extLst>
+          </p:cNvPr>
           <p:cNvSpPr>
             <a:spLocks noGrp="1" noRot="1" noChangeAspect="1"/>
           </p:cNvSpPr>
@@ -1349,7 +1268,13 @@
       </p:sp>
       <p:sp>
         <p:nvSpPr>
-          <p:cNvPr id="3" name="Notes Placeholder 2"/>
+          <p:cNvPr id="3" name="Notes Placeholder 2">
+            <a:extLst>
+              <a:ext uri="{FF2B5EF4-FFF2-40B4-BE49-F238E27FC236}">
+                <a16:creationId xmlns:a16="http://schemas.microsoft.com/office/drawing/2014/main" id="{BDE6A8E9-6B7E-10B1-B698-150552231840}"/>
+              </a:ext>
+            </a:extLst>
+          </p:cNvPr>
           <p:cNvSpPr>
             <a:spLocks noGrp="1"/>
           </p:cNvSpPr>
@@ -1368,7 +1293,13 @@
       </p:sp>
       <p:sp>
         <p:nvSpPr>
-          <p:cNvPr id="4" name="Slide Number Placeholder 3"/>
+          <p:cNvPr id="4" name="Slide Number Placeholder 3">
+            <a:extLst>
+              <a:ext uri="{FF2B5EF4-FFF2-40B4-BE49-F238E27FC236}">
+                <a16:creationId xmlns:a16="http://schemas.microsoft.com/office/drawing/2014/main" id="{4940CB8A-7B78-F068-5913-A2203E88DA8D}"/>
+              </a:ext>
+            </a:extLst>
+          </p:cNvPr>
           <p:cNvSpPr>
             <a:spLocks noGrp="1"/>
           </p:cNvSpPr>
@@ -1383,7 +1314,7 @@
           <a:p>
             <a:fld id="{124B687B-81D5-4F44-AE6B-34CD1245FD04}" type="slidenum">
               <a:rPr lang="zh-CN" altLang="en-US" smtClean="0"/>
-              <a:t>14</a:t>
+              <a:t>16</a:t>
             </a:fld>
             <a:endParaRPr lang="zh-CN" altLang="en-US"/>
           </a:p>
@@ -1392,7 +1323,7 @@
     </p:spTree>
     <p:extLst>
       <p:ext uri="{BB962C8B-B14F-4D97-AF65-F5344CB8AC3E}">
-        <p14:creationId xmlns:p14="http://schemas.microsoft.com/office/powerpoint/2010/main" val="3478614202"/>
+        <p14:creationId xmlns:p14="http://schemas.microsoft.com/office/powerpoint/2010/main" val="2243116380"/>
       </p:ext>
     </p:extLst>
   </p:cSld>
@@ -1407,13 +1338,7 @@
   <p:cSld>
     <p:spTree>
       <p:nvGrpSpPr>
-        <p:cNvPr id="1" name="">
-          <a:extLst>
-            <a:ext uri="{FF2B5EF4-FFF2-40B4-BE49-F238E27FC236}">
-              <a16:creationId xmlns:a16="http://schemas.microsoft.com/office/drawing/2014/main" id="{AED092CB-2E89-A4BA-C80E-548888B7603C}"/>
-            </a:ext>
-          </a:extLst>
-        </p:cNvPr>
+        <p:cNvPr id="1" name=""/>
         <p:cNvGrpSpPr/>
         <p:nvPr/>
       </p:nvGrpSpPr>
@@ -1427,13 +1352,7 @@
       </p:grpSpPr>
       <p:sp>
         <p:nvSpPr>
-          <p:cNvPr id="2" name="Slide Image Placeholder 1">
-            <a:extLst>
-              <a:ext uri="{FF2B5EF4-FFF2-40B4-BE49-F238E27FC236}">
-                <a16:creationId xmlns:a16="http://schemas.microsoft.com/office/drawing/2014/main" id="{6C747605-1F6D-E173-78C5-1983D4D5B921}"/>
-              </a:ext>
-            </a:extLst>
-          </p:cNvPr>
+          <p:cNvPr id="2" name="Slide Image Placeholder 1"/>
           <p:cNvSpPr>
             <a:spLocks noGrp="1" noRot="1" noChangeAspect="1"/>
           </p:cNvSpPr>
@@ -1445,13 +1364,7 @@
       </p:sp>
       <p:sp>
         <p:nvSpPr>
-          <p:cNvPr id="3" name="Notes Placeholder 2">
-            <a:extLst>
-              <a:ext uri="{FF2B5EF4-FFF2-40B4-BE49-F238E27FC236}">
-                <a16:creationId xmlns:a16="http://schemas.microsoft.com/office/drawing/2014/main" id="{0159D12D-C84F-B1D1-EB33-2F108136D156}"/>
-              </a:ext>
-            </a:extLst>
-          </p:cNvPr>
+          <p:cNvPr id="3" name="Notes Placeholder 2"/>
           <p:cNvSpPr>
             <a:spLocks noGrp="1"/>
           </p:cNvSpPr>
@@ -1470,13 +1383,7 @@
       </p:sp>
       <p:sp>
         <p:nvSpPr>
-          <p:cNvPr id="4" name="Slide Number Placeholder 3">
-            <a:extLst>
-              <a:ext uri="{FF2B5EF4-FFF2-40B4-BE49-F238E27FC236}">
-                <a16:creationId xmlns:a16="http://schemas.microsoft.com/office/drawing/2014/main" id="{FD2FDD47-2227-C44F-B502-A35DDA271490}"/>
-              </a:ext>
-            </a:extLst>
-          </p:cNvPr>
+          <p:cNvPr id="4" name="Slide Number Placeholder 3"/>
           <p:cNvSpPr>
             <a:spLocks noGrp="1"/>
           </p:cNvSpPr>
@@ -1491,18 +1398,13 @@
           <a:p>
             <a:fld id="{124B687B-81D5-4F44-AE6B-34CD1245FD04}" type="slidenum">
               <a:rPr lang="zh-CN" altLang="en-US" smtClean="0"/>
-              <a:t>15</a:t>
+              <a:t>17</a:t>
             </a:fld>
             <a:endParaRPr lang="zh-CN" altLang="en-US"/>
           </a:p>
         </p:txBody>
       </p:sp>
     </p:spTree>
-    <p:extLst>
-      <p:ext uri="{BB962C8B-B14F-4D97-AF65-F5344CB8AC3E}">
-        <p14:creationId xmlns:p14="http://schemas.microsoft.com/office/powerpoint/2010/main" val="4068259491"/>
-      </p:ext>
-    </p:extLst>
   </p:cSld>
   <p:clrMapOvr>
     <a:masterClrMapping/>
@@ -1639,7 +1541,7 @@
           <a:p>
             <a:fld id="{B55539BE-7814-4F40-9B13-ED058F5296F6}" type="datetime1">
               <a:rPr lang="en-US" altLang="zh-CN" smtClean="0"/>
-              <a:t>8/31/26</a:t>
+              <a:t>8/30/26</a:t>
             </a:fld>
             <a:endParaRPr lang="zh-CN" altLang="en-US"/>
           </a:p>
@@ -1802,7 +1704,7 @@
           <a:p>
             <a:fld id="{EEAFED07-9D19-3E4F-BFBB-DBA043D25E28}" type="datetime1">
               <a:rPr lang="en-US" altLang="zh-CN" smtClean="0"/>
-              <a:t>8/31/26</a:t>
+              <a:t>8/30/26</a:t>
             </a:fld>
             <a:endParaRPr lang="zh-CN" altLang="en-US"/>
           </a:p>
@@ -1975,7 +1877,7 @@
           <a:p>
             <a:fld id="{67330EEB-C08B-094A-93F5-FA783B6F7AB4}" type="datetime1">
               <a:rPr lang="en-US" altLang="zh-CN" smtClean="0"/>
-              <a:t>8/31/26</a:t>
+              <a:t>8/30/26</a:t>
             </a:fld>
             <a:endParaRPr lang="zh-CN" altLang="en-US"/>
           </a:p>
@@ -2138,7 +2040,7 @@
           <a:p>
             <a:fld id="{AEB879E7-7309-B744-8508-55BA062823BA}" type="datetime1">
               <a:rPr lang="en-US" altLang="zh-CN" smtClean="0"/>
-              <a:t>8/31/26</a:t>
+              <a:t>8/30/26</a:t>
             </a:fld>
             <a:endParaRPr lang="zh-CN" altLang="en-US"/>
           </a:p>
@@ -2378,7 +2280,7 @@
           <a:p>
             <a:fld id="{18A38E8C-83BF-0343-BA9D-CD8934766BEE}" type="datetime1">
               <a:rPr lang="en-US" altLang="zh-CN" smtClean="0"/>
-              <a:t>8/31/26</a:t>
+              <a:t>8/30/26</a:t>
             </a:fld>
             <a:endParaRPr lang="zh-CN" altLang="en-US"/>
           </a:p>
@@ -2602,7 +2504,7 @@
           <a:p>
             <a:fld id="{0D39572B-CB40-274D-8E20-0E4CAD31D592}" type="datetime1">
               <a:rPr lang="en-US" altLang="zh-CN" smtClean="0"/>
-              <a:t>8/31/26</a:t>
+              <a:t>8/30/26</a:t>
             </a:fld>
             <a:endParaRPr lang="zh-CN" altLang="en-US"/>
           </a:p>
@@ -2961,7 +2863,7 @@
           <a:p>
             <a:fld id="{24D5FE47-B48D-7047-923A-F9E5E9AACF6E}" type="datetime1">
               <a:rPr lang="en-US" altLang="zh-CN" smtClean="0"/>
-              <a:t>8/31/26</a:t>
+              <a:t>8/30/26</a:t>
             </a:fld>
             <a:endParaRPr lang="zh-CN" altLang="en-US"/>
           </a:p>
@@ -3073,7 +2975,7 @@
           <a:p>
             <a:fld id="{4A3127E9-7423-514E-8A91-6221CF408F22}" type="datetime1">
               <a:rPr lang="en-US" altLang="zh-CN" smtClean="0"/>
-              <a:t>8/31/26</a:t>
+              <a:t>8/30/26</a:t>
             </a:fld>
             <a:endParaRPr lang="zh-CN" altLang="en-US"/>
           </a:p>
@@ -3163,7 +3065,7 @@
           <a:p>
             <a:fld id="{D472ECE4-6FD7-4C49-ACA7-0491F2AA5E06}" type="datetime1">
               <a:rPr lang="en-US" altLang="zh-CN" smtClean="0"/>
-              <a:t>8/31/26</a:t>
+              <a:t>8/30/26</a:t>
             </a:fld>
             <a:endParaRPr lang="zh-CN" altLang="en-US"/>
           </a:p>
@@ -3433,7 +3335,7 @@
           <a:p>
             <a:fld id="{38B8077B-E76B-4B41-B17F-19AC0FC832B3}" type="datetime1">
               <a:rPr lang="en-US" altLang="zh-CN" smtClean="0"/>
-              <a:t>8/31/26</a:t>
+              <a:t>8/30/26</a:t>
             </a:fld>
             <a:endParaRPr lang="zh-CN" altLang="en-US"/>
           </a:p>
@@ -3680,7 +3582,7 @@
           <a:p>
             <a:fld id="{9EB24C7A-7D1C-8740-9D15-AD14720A28F9}" type="datetime1">
               <a:rPr lang="en-US" altLang="zh-CN" smtClean="0"/>
-              <a:t>8/31/26</a:t>
+              <a:t>8/30/26</a:t>
             </a:fld>
             <a:endParaRPr lang="zh-CN" altLang="en-US"/>
           </a:p>
@@ -3889,7 +3791,7 @@
           <a:p>
             <a:fld id="{9F63DA8F-0F2F-984A-A18D-D21C38A7121B}" type="datetime1">
               <a:rPr lang="en-US" altLang="zh-CN" smtClean="0"/>
-              <a:t>8/31/26</a:t>
+              <a:t>8/30/26</a:t>
             </a:fld>
             <a:endParaRPr lang="zh-CN" altLang="en-US"/>
           </a:p>
@@ -4772,22 +4674,7 @@
                 <a:latin typeface="Calibri" panose="020F0502020204030204" pitchFamily="34" charset="0"/>
                 <a:cs typeface="Calibri" panose="020F0502020204030204" pitchFamily="34" charset="0"/>
               </a:rPr>
-              <a:t>Everything starts here (take a picture </a:t>
-            </a:r>
-            <a:r>
-              <a:rPr lang="en-US" b="1" dirty="0">
-                <a:latin typeface="Calibri" panose="020F0502020204030204" pitchFamily="34" charset="0"/>
-                <a:cs typeface="Calibri" panose="020F0502020204030204" pitchFamily="34" charset="0"/>
-                <a:sym typeface="Wingdings" pitchFamily="2" charset="2"/>
-              </a:rPr>
-              <a:t></a:t>
-            </a:r>
-            <a:r>
-              <a:rPr lang="en-US" b="1" dirty="0">
-                <a:latin typeface="Calibri" panose="020F0502020204030204" pitchFamily="34" charset="0"/>
-                <a:cs typeface="Calibri" panose="020F0502020204030204" pitchFamily="34" charset="0"/>
-              </a:rPr>
-              <a:t>)</a:t>
+              <a:t>Everything starts here</a:t>
             </a:r>
             <a:endParaRPr lang="en-US" dirty="0"/>
           </a:p>
@@ -5309,6 +5196,15 @@
           </a:bodyPr>
           <a:lstStyle/>
           <a:p>
+            <a:pPr marL="457200" lvl="1" indent="0">
+              <a:buNone/>
+            </a:pPr>
+            <a:endParaRPr lang="en-US" sz="2800" i="1" dirty="0">
+              <a:latin typeface="Calibri" panose="020F0502020204030204" pitchFamily="34" charset="0"/>
+              <a:cs typeface="Calibri" panose="020F0502020204030204" pitchFamily="34" charset="0"/>
+            </a:endParaRPr>
+          </a:p>
+          <a:p>
             <a:r>
               <a:rPr lang="en-US" sz="3200" b="1" i="1" dirty="0">
                 <a:latin typeface="Calibri" panose="020F0502020204030204" pitchFamily="34" charset="0"/>
@@ -5439,17 +5335,14 @@
                 <a:latin typeface="Calibri" panose="020F0502020204030204" pitchFamily="34" charset="0"/>
                 <a:cs typeface="Calibri" panose="020F0502020204030204" pitchFamily="34" charset="0"/>
               </a:rPr>
-              <a:t>Tutorial / Q&amp;A sessions by TAs (starting week 2)</a:t>
+              <a:t>Recitation / Q&amp;A sessions (starting week 2)</a:t>
             </a:r>
           </a:p>
           <a:p>
             <a:pPr lvl="1"/>
             <a:r>
-              <a:rPr lang="en-US" sz="2800" dirty="0">
-                <a:latin typeface="Calibri" panose="020F0502020204030204" pitchFamily="34" charset="0"/>
-                <a:cs typeface="Calibri" panose="020F0502020204030204" pitchFamily="34" charset="0"/>
-              </a:rPr>
-              <a:t>Take what session that fits you</a:t>
+              <a:rPr lang="en-US" sz="2800" dirty="0"/>
+              <a:t>03:00PM - 03:50PM                 Lecture Theater C</a:t>
             </a:r>
             <a:endParaRPr lang="en-US" sz="2800" i="1" dirty="0">
               <a:latin typeface="Calibri" panose="020F0502020204030204" pitchFamily="34" charset="0"/>
@@ -5581,7 +5474,7 @@
         <p:spPr/>
         <p:txBody>
           <a:bodyPr>
-            <a:normAutofit fontScale="92500" lnSpcReduction="20000"/>
+            <a:normAutofit/>
           </a:bodyPr>
           <a:lstStyle/>
           <a:p>
@@ -5600,12 +5493,8 @@
                 <a:latin typeface="Calibri" panose="020F0502020204030204" pitchFamily="34" charset="0"/>
                 <a:cs typeface="Calibri" panose="020F0502020204030204" pitchFamily="34" charset="0"/>
               </a:rPr>
-              <a:t>Office hours / tutorial sessions</a:t>
-            </a:r>
-            <a:endParaRPr lang="en-US" sz="3200" b="1" dirty="0">
-              <a:latin typeface="Calibri" panose="020F0502020204030204" pitchFamily="34" charset="0"/>
-              <a:cs typeface="Calibri" panose="020F0502020204030204" pitchFamily="34" charset="0"/>
-            </a:endParaRPr>
+              <a:t>Canvas - Announcement</a:t>
+            </a:r>
           </a:p>
           <a:p>
             <a:pPr lvl="1"/>
@@ -5614,27 +5503,7 @@
                 <a:latin typeface="Calibri" panose="020F0502020204030204" pitchFamily="34" charset="0"/>
                 <a:cs typeface="Calibri" panose="020F0502020204030204" pitchFamily="34" charset="0"/>
               </a:rPr>
-              <a:t>Canvas - Announcement</a:t>
-            </a:r>
-          </a:p>
-          <a:p>
-            <a:pPr lvl="1"/>
-            <a:r>
-              <a:rPr lang="en-US" sz="3200" dirty="0">
-                <a:latin typeface="Calibri" panose="020F0502020204030204" pitchFamily="34" charset="0"/>
-                <a:cs typeface="Calibri" panose="020F0502020204030204" pitchFamily="34" charset="0"/>
-              </a:rPr>
-              <a:t>Canvas – Discussion</a:t>
-            </a:r>
-          </a:p>
-          <a:p>
-            <a:pPr lvl="1"/>
-            <a:r>
-              <a:rPr lang="en-US" sz="3200" dirty="0">
-                <a:latin typeface="Calibri" panose="020F0502020204030204" pitchFamily="34" charset="0"/>
-                <a:cs typeface="Calibri" panose="020F0502020204030204" pitchFamily="34" charset="0"/>
-              </a:rPr>
-              <a:t>Telegram group (find it on canvas)</a:t>
+              <a:t>Canvas - Discussion</a:t>
             </a:r>
           </a:p>
           <a:p>
@@ -5785,7 +5654,7 @@
         <p:spPr/>
         <p:txBody>
           <a:bodyPr>
-            <a:normAutofit/>
+            <a:normAutofit fontScale="92500" lnSpcReduction="20000"/>
           </a:bodyPr>
           <a:lstStyle/>
           <a:p>
@@ -5808,10 +5677,32 @@
             <a:pPr lvl="1"/>
             <a:r>
               <a:rPr lang="en-US" i="1" dirty="0">
-                <a:latin typeface="Calibri" panose="020F0502020204030204" pitchFamily="34" charset="0"/>
-                <a:cs typeface="Calibri" panose="020F0502020204030204" pitchFamily="34" charset="0"/>
-              </a:rPr>
-              <a:t>Recordings not guaranteed, but we will try</a:t>
+                <a:solidFill>
+                  <a:schemeClr val="accent6">
+                    <a:lumMod val="50000"/>
+                  </a:schemeClr>
+                </a:solidFill>
+                <a:latin typeface="Calibri" panose="020F0502020204030204" pitchFamily="34" charset="0"/>
+                <a:cs typeface="Calibri" panose="020F0502020204030204" pitchFamily="34" charset="0"/>
+              </a:rPr>
+              <a:t>Strongly recommended</a:t>
+            </a:r>
+            <a:r>
+              <a:rPr lang="en-US" i="1" dirty="0">
+                <a:latin typeface="Calibri" panose="020F0502020204030204" pitchFamily="34" charset="0"/>
+                <a:cs typeface="Calibri" panose="020F0502020204030204" pitchFamily="34" charset="0"/>
+              </a:rPr>
+              <a:t> </a:t>
+            </a:r>
+          </a:p>
+          <a:p>
+            <a:pPr lvl="1"/>
+            <a:r>
+              <a:rPr lang="en-US" i="1" dirty="0">
+                <a:latin typeface="Calibri" panose="020F0502020204030204" pitchFamily="34" charset="0"/>
+                <a:cs typeface="Calibri" panose="020F0502020204030204" pitchFamily="34" charset="0"/>
+              </a:rPr>
+              <a:t>Recordings not guaranteed …</a:t>
             </a:r>
           </a:p>
           <a:p>
@@ -5850,7 +5741,7 @@
                 <a:latin typeface="Calibri" panose="020F0502020204030204" pitchFamily="34" charset="0"/>
                 <a:cs typeface="Calibri" panose="020F0502020204030204" pitchFamily="34" charset="0"/>
               </a:rPr>
-              <a:t>4 units, each with 10-14 days window </a:t>
+              <a:t>4 units, each with 10-14 days window (tentative)</a:t>
             </a:r>
           </a:p>
           <a:p>
@@ -5860,37 +5751,17 @@
                 <a:latin typeface="Calibri" panose="020F0502020204030204" pitchFamily="34" charset="0"/>
                 <a:cs typeface="Calibri" panose="020F0502020204030204" pitchFamily="34" charset="0"/>
               </a:rPr>
-              <a:t>View / Submit: </a:t>
-            </a:r>
-          </a:p>
-          <a:p>
-            <a:pPr lvl="2"/>
+              <a:t>View / Submit: Canvas</a:t>
+            </a:r>
+          </a:p>
+          <a:p>
+            <a:pPr lvl="1"/>
             <a:r>
               <a:rPr lang="en-US" i="1" dirty="0">
                 <a:latin typeface="Calibri" panose="020F0502020204030204" pitchFamily="34" charset="0"/>
                 <a:cs typeface="Calibri" panose="020F0502020204030204" pitchFamily="34" charset="0"/>
               </a:rPr>
-              <a:t>Canvas</a:t>
-            </a:r>
-          </a:p>
-          <a:p>
-            <a:pPr lvl="2"/>
-            <a:r>
-              <a:rPr lang="en-US" i="1" dirty="0">
-                <a:latin typeface="Calibri" panose="020F0502020204030204" pitchFamily="34" charset="0"/>
-                <a:cs typeface="Calibri" panose="020F0502020204030204" pitchFamily="34" charset="0"/>
-              </a:rPr>
-              <a:t>1 pdf submission for each assignment (typeset or handwritten)</a:t>
-            </a:r>
-          </a:p>
-          <a:p>
-            <a:pPr lvl="1"/>
-            <a:r>
-              <a:rPr lang="en-US" i="1" dirty="0">
-                <a:latin typeface="Calibri" panose="020F0502020204030204" pitchFamily="34" charset="0"/>
-                <a:cs typeface="Calibri" panose="020F0502020204030204" pitchFamily="34" charset="0"/>
-              </a:rPr>
-              <a:t>AI / Collaboration Policy: declarative usage </a:t>
+              <a:t>AI Policy: declarative usage </a:t>
             </a:r>
             <a:r>
               <a:rPr lang="en-US" i="1" dirty="0">
@@ -5912,8 +5783,75 @@
                 <a:latin typeface="Calibri" panose="020F0502020204030204" pitchFamily="34" charset="0"/>
                 <a:cs typeface="Calibri" panose="020F0502020204030204" pitchFamily="34" charset="0"/>
               </a:rPr>
-              <a:t>Late Submission: 1 hour for 1 point deduction. </a:t>
-            </a:r>
+              <a:t>Late Date: Currently no</a:t>
+            </a:r>
+          </a:p>
+          <a:p>
+            <a:pPr marL="0" indent="0">
+              <a:buNone/>
+            </a:pPr>
+            <a:endParaRPr lang="en-US" i="1" dirty="0">
+              <a:latin typeface="Calibri" panose="020F0502020204030204" pitchFamily="34" charset="0"/>
+              <a:cs typeface="Calibri" panose="020F0502020204030204" pitchFamily="34" charset="0"/>
+            </a:endParaRPr>
+          </a:p>
+          <a:p>
+            <a:r>
+              <a:rPr lang="en-US" b="1" i="1" dirty="0">
+                <a:latin typeface="Calibri" panose="020F0502020204030204" pitchFamily="34" charset="0"/>
+                <a:cs typeface="Calibri" panose="020F0502020204030204" pitchFamily="34" charset="0"/>
+              </a:rPr>
+              <a:t>Mid-term </a:t>
+            </a:r>
+            <a:r>
+              <a:rPr lang="en-US" b="1" i="1" dirty="0">
+                <a:solidFill>
+                  <a:srgbClr val="C00000"/>
+                </a:solidFill>
+                <a:latin typeface="Calibri" panose="020F0502020204030204" pitchFamily="34" charset="0"/>
+                <a:cs typeface="Calibri" panose="020F0502020204030204" pitchFamily="34" charset="0"/>
+              </a:rPr>
+              <a:t>(35%) </a:t>
+            </a:r>
+            <a:r>
+              <a:rPr lang="en-US" b="1" i="1" dirty="0">
+                <a:latin typeface="Calibri" panose="020F0502020204030204" pitchFamily="34" charset="0"/>
+                <a:cs typeface="Calibri" panose="020F0502020204030204" pitchFamily="34" charset="0"/>
+              </a:rPr>
+              <a:t>Final Exam </a:t>
+            </a:r>
+            <a:r>
+              <a:rPr lang="en-US" b="1" i="1" dirty="0">
+                <a:solidFill>
+                  <a:srgbClr val="C00000"/>
+                </a:solidFill>
+                <a:latin typeface="Calibri" panose="020F0502020204030204" pitchFamily="34" charset="0"/>
+                <a:cs typeface="Calibri" panose="020F0502020204030204" pitchFamily="34" charset="0"/>
+              </a:rPr>
+              <a:t>(45%)</a:t>
+            </a:r>
+          </a:p>
+          <a:p>
+            <a:pPr lvl="1"/>
+            <a:r>
+              <a:rPr lang="en-US" i="1" dirty="0">
+                <a:latin typeface="Calibri" panose="020F0502020204030204" pitchFamily="34" charset="0"/>
+                <a:cs typeface="Calibri" panose="020F0502020204030204" pitchFamily="34" charset="0"/>
+              </a:rPr>
+              <a:t>In-person, so no AI </a:t>
+            </a:r>
+            <a:r>
+              <a:rPr lang="en-US" i="1" dirty="0">
+                <a:latin typeface="Calibri" panose="020F0502020204030204" pitchFamily="34" charset="0"/>
+                <a:cs typeface="Calibri" panose="020F0502020204030204" pitchFamily="34" charset="0"/>
+                <a:sym typeface="Wingdings" pitchFamily="2" charset="2"/>
+              </a:rPr>
+              <a:t></a:t>
+            </a:r>
+            <a:endParaRPr lang="en-US" i="1" dirty="0">
+              <a:latin typeface="Calibri" panose="020F0502020204030204" pitchFamily="34" charset="0"/>
+              <a:cs typeface="Calibri" panose="020F0502020204030204" pitchFamily="34" charset="0"/>
+            </a:endParaRPr>
           </a:p>
           <a:p>
             <a:endParaRPr lang="en-US" dirty="0"/>
@@ -5998,7 +5936,7 @@
                                         <p:tgtEl>
                                           <p:spTgt spid="3">
                                             <p:txEl>
-                                              <p:pRg st="3" end="3"/>
+                                              <p:pRg st="4" end="4"/>
                                             </p:txEl>
                                           </p:spTgt>
                                         </p:tgtEl>
@@ -6029,7 +5967,7 @@
                                         <p:tgtEl>
                                           <p:spTgt spid="3">
                                             <p:txEl>
-                                              <p:pRg st="4" end="4"/>
+                                              <p:pRg st="5" end="5"/>
                                             </p:txEl>
                                           </p:spTgt>
                                         </p:tgtEl>
@@ -6060,7 +5998,7 @@
                                         <p:tgtEl>
                                           <p:spTgt spid="3">
                                             <p:txEl>
-                                              <p:pRg st="5" end="5"/>
+                                              <p:pRg st="6" end="6"/>
                                             </p:txEl>
                                           </p:spTgt>
                                         </p:tgtEl>
@@ -6091,7 +6029,7 @@
                                         <p:tgtEl>
                                           <p:spTgt spid="3">
                                             <p:txEl>
-                                              <p:pRg st="6" end="6"/>
+                                              <p:pRg st="7" end="7"/>
                                             </p:txEl>
                                           </p:spTgt>
                                         </p:tgtEl>
@@ -6122,7 +6060,56 @@
                                         <p:tgtEl>
                                           <p:spTgt spid="3">
                                             <p:txEl>
-                                              <p:pRg st="7" end="7"/>
+                                              <p:pRg st="8" end="8"/>
+                                            </p:txEl>
+                                          </p:spTgt>
+                                        </p:tgtEl>
+                                        <p:attrNameLst>
+                                          <p:attrName>style.visibility</p:attrName>
+                                        </p:attrNameLst>
+                                      </p:cBhvr>
+                                      <p:to>
+                                        <p:strVal val="visible"/>
+                                      </p:to>
+                                    </p:set>
+                                  </p:childTnLst>
+                                </p:cTn>
+                              </p:par>
+                            </p:childTnLst>
+                          </p:cTn>
+                        </p:par>
+                      </p:childTnLst>
+                    </p:cTn>
+                  </p:par>
+                  <p:par>
+                    <p:cTn id="15" fill="hold">
+                      <p:stCondLst>
+                        <p:cond delay="indefinite"/>
+                      </p:stCondLst>
+                      <p:childTnLst>
+                        <p:par>
+                          <p:cTn id="16" fill="hold">
+                            <p:stCondLst>
+                              <p:cond delay="0"/>
+                            </p:stCondLst>
+                            <p:childTnLst>
+                              <p:par>
+                                <p:cTn id="17" presetID="1" presetClass="entr" presetSubtype="0" fill="hold" nodeType="clickEffect">
+                                  <p:stCondLst>
+                                    <p:cond delay="0"/>
+                                  </p:stCondLst>
+                                  <p:childTnLst>
+                                    <p:set>
+                                      <p:cBhvr>
+                                        <p:cTn id="18" dur="1" fill="hold">
+                                          <p:stCondLst>
+                                            <p:cond delay="0"/>
+                                          </p:stCondLst>
+                                        </p:cTn>
+                                        <p:tgtEl>
+                                          <p:spTgt spid="3">
+                                            <p:txEl>
+                                              <p:pRg st="10" end="10"/>
                                             </p:txEl>
                                           </p:spTgt>
                                         </p:tgtEl>
@@ -6138,14 +6125,14 @@
                                 </p:cTn>
                               </p:par>
                               <p:par>
-                                <p:cTn id="15" presetID="1" presetClass="entr" presetSubtype="0" fill="hold" nodeType="withEffect">
+                                <p:cTn id="19" presetID="1" presetClass="entr" presetSubtype="0" fill="hold" nodeType="withEffect">
                                   <p:stCondLst>
                                     <p:cond delay="0"/>
                                   </p:stCondLst>
                                   <p:childTnLst>
                                     <p:set>
                                       <p:cBhvr>
-                                        <p:cTn id="16" dur="1" fill="hold">
+                                        <p:cTn id="20" dur="1" fill="hold">
                                           <p:stCondLst>
                                             <p:cond delay="0"/>
                                           </p:stCondLst>
@@ -6153,38 +6140,7 @@
                                         <p:tgtEl>
                                           <p:spTgt spid="3">
                                             <p:txEl>
-                                              <p:pRg st="8" end="8"/>
-                                            </p:txEl>
-                                          </p:spTgt>
-                                        </p:tgtEl>
-                                        <p:attrNameLst>
-                                          <p:attrName>style.visibility</p:attrName>
-                                        </p:attrNameLst>
-                                      </p:cBhvr>
-                                      <p:to>
-                                        <p:strVal val="visible"/>
-                                      </p:to>
-                                    </p:set>
-                                  </p:childTnLst>
-                                </p:cTn>
-                              </p:par>
-                              <p:par>
-                                <p:cTn id="17" presetID="1" presetClass="entr" presetSubtype="0" fill="hold" nodeType="withEffect">
-                                  <p:stCondLst>
-                                    <p:cond delay="0"/>
-                                  </p:stCondLst>
-                                  <p:childTnLst>
-                                    <p:set>
-                                      <p:cBhvr>
-                                        <p:cTn id="18" dur="1" fill="hold">
-                                          <p:stCondLst>
-                                            <p:cond delay="0"/>
-                                          </p:stCondLst>
-                                        </p:cTn>
-                                        <p:tgtEl>
-                                          <p:spTgt spid="3">
-                                            <p:txEl>
-                                              <p:pRg st="9" end="9"/>
+                                              <p:pRg st="11" end="11"/>
                                             </p:txEl>
                                           </p:spTgt>
                                         </p:tgtEl>
@@ -6238,394 +6194,6 @@
         <p:cNvPr id="1" name="">
           <a:extLst>
             <a:ext uri="{FF2B5EF4-FFF2-40B4-BE49-F238E27FC236}">
-              <a16:creationId xmlns:a16="http://schemas.microsoft.com/office/drawing/2014/main" id="{767DC3ED-98B8-6854-A427-8E0EC8F36F88}"/>
-            </a:ext>
-          </a:extLst>
-        </p:cNvPr>
-        <p:cNvGrpSpPr/>
-        <p:nvPr/>
-      </p:nvGrpSpPr>
-      <p:grpSpPr>
-        <a:xfrm>
-          <a:off x="0" y="0"/>
-          <a:ext cx="0" cy="0"/>
-          <a:chOff x="0" y="0"/>
-          <a:chExt cx="0" cy="0"/>
-        </a:xfrm>
-      </p:grpSpPr>
-      <p:sp>
-        <p:nvSpPr>
-          <p:cNvPr id="2" name="Title 1">
-            <a:extLst>
-              <a:ext uri="{FF2B5EF4-FFF2-40B4-BE49-F238E27FC236}">
-                <a16:creationId xmlns:a16="http://schemas.microsoft.com/office/drawing/2014/main" id="{C637FFAA-60C7-5360-6045-D313F58F93EC}"/>
-              </a:ext>
-            </a:extLst>
-          </p:cNvPr>
-          <p:cNvSpPr>
-            <a:spLocks noGrp="1"/>
-          </p:cNvSpPr>
-          <p:nvPr>
-            <p:ph type="title"/>
-          </p:nvPr>
-        </p:nvSpPr>
-        <p:spPr/>
-        <p:txBody>
-          <a:bodyPr/>
-          <a:lstStyle/>
-          <a:p>
-            <a:r>
-              <a:rPr lang="en-US" b="1" dirty="0">
-                <a:latin typeface="Calibri" panose="020F0502020204030204" pitchFamily="34" charset="0"/>
-                <a:cs typeface="Calibri" panose="020F0502020204030204" pitchFamily="34" charset="0"/>
-              </a:rPr>
-              <a:t>Grading</a:t>
-            </a:r>
-            <a:endParaRPr lang="en-US" dirty="0"/>
-          </a:p>
-        </p:txBody>
-      </p:sp>
-      <p:sp>
-        <p:nvSpPr>
-          <p:cNvPr id="3" name="Content Placeholder 2">
-            <a:extLst>
-              <a:ext uri="{FF2B5EF4-FFF2-40B4-BE49-F238E27FC236}">
-                <a16:creationId xmlns:a16="http://schemas.microsoft.com/office/drawing/2014/main" id="{A0085730-7E3F-EC4A-B174-9F3E12BA6F6C}"/>
-              </a:ext>
-            </a:extLst>
-          </p:cNvPr>
-          <p:cNvSpPr>
-            <a:spLocks noGrp="1"/>
-          </p:cNvSpPr>
-          <p:nvPr>
-            <p:ph idx="1"/>
-          </p:nvPr>
-        </p:nvSpPr>
-        <p:spPr/>
-        <p:txBody>
-          <a:bodyPr>
-            <a:normAutofit/>
-          </a:bodyPr>
-          <a:lstStyle/>
-          <a:p>
-            <a:pPr marL="0" indent="0">
-              <a:buNone/>
-            </a:pPr>
-            <a:endParaRPr lang="en-US" i="1" dirty="0">
-              <a:latin typeface="Calibri" panose="020F0502020204030204" pitchFamily="34" charset="0"/>
-              <a:cs typeface="Calibri" panose="020F0502020204030204" pitchFamily="34" charset="0"/>
-            </a:endParaRPr>
-          </a:p>
-          <a:p>
-            <a:r>
-              <a:rPr lang="en-US" b="1" i="1" dirty="0">
-                <a:latin typeface="Calibri" panose="020F0502020204030204" pitchFamily="34" charset="0"/>
-                <a:cs typeface="Calibri" panose="020F0502020204030204" pitchFamily="34" charset="0"/>
-              </a:rPr>
-              <a:t>Mid-term </a:t>
-            </a:r>
-            <a:r>
-              <a:rPr lang="en-US" b="1" i="1" dirty="0">
-                <a:solidFill>
-                  <a:srgbClr val="C00000"/>
-                </a:solidFill>
-                <a:latin typeface="Calibri" panose="020F0502020204030204" pitchFamily="34" charset="0"/>
-                <a:cs typeface="Calibri" panose="020F0502020204030204" pitchFamily="34" charset="0"/>
-              </a:rPr>
-              <a:t>(35%) </a:t>
-            </a:r>
-            <a:r>
-              <a:rPr lang="en-US" b="1" i="1" dirty="0">
-                <a:latin typeface="Calibri" panose="020F0502020204030204" pitchFamily="34" charset="0"/>
-                <a:cs typeface="Calibri" panose="020F0502020204030204" pitchFamily="34" charset="0"/>
-              </a:rPr>
-              <a:t>Final Exam </a:t>
-            </a:r>
-            <a:r>
-              <a:rPr lang="en-US" b="1" i="1" dirty="0">
-                <a:solidFill>
-                  <a:srgbClr val="C00000"/>
-                </a:solidFill>
-                <a:latin typeface="Calibri" panose="020F0502020204030204" pitchFamily="34" charset="0"/>
-                <a:cs typeface="Calibri" panose="020F0502020204030204" pitchFamily="34" charset="0"/>
-              </a:rPr>
-              <a:t>(45%)</a:t>
-            </a:r>
-          </a:p>
-          <a:p>
-            <a:pPr lvl="1"/>
-            <a:r>
-              <a:rPr lang="en-US" i="1" dirty="0">
-                <a:latin typeface="Calibri" panose="020F0502020204030204" pitchFamily="34" charset="0"/>
-                <a:cs typeface="Calibri" panose="020F0502020204030204" pitchFamily="34" charset="0"/>
-              </a:rPr>
-              <a:t>In-person, so no AI </a:t>
-            </a:r>
-            <a:r>
-              <a:rPr lang="en-US" i="1" dirty="0">
-                <a:latin typeface="Calibri" panose="020F0502020204030204" pitchFamily="34" charset="0"/>
-                <a:cs typeface="Calibri" panose="020F0502020204030204" pitchFamily="34" charset="0"/>
-                <a:sym typeface="Wingdings" pitchFamily="2" charset="2"/>
-              </a:rPr>
-              <a:t></a:t>
-            </a:r>
-          </a:p>
-          <a:p>
-            <a:pPr lvl="1"/>
-            <a:r>
-              <a:rPr lang="en-US" i="1" dirty="0">
-                <a:latin typeface="Calibri" panose="020F0502020204030204" pitchFamily="34" charset="0"/>
-                <a:cs typeface="Calibri" panose="020F0502020204030204" pitchFamily="34" charset="0"/>
-                <a:sym typeface="Wingdings" pitchFamily="2" charset="2"/>
-              </a:rPr>
-              <a:t>One page of handwritten cheat sheet</a:t>
-            </a:r>
-          </a:p>
-          <a:p>
-            <a:pPr lvl="1"/>
-            <a:r>
-              <a:rPr lang="en-US" i="1" dirty="0">
-                <a:latin typeface="Calibri" panose="020F0502020204030204" pitchFamily="34" charset="0"/>
-                <a:cs typeface="Calibri" panose="020F0502020204030204" pitchFamily="34" charset="0"/>
-                <a:sym typeface="Wingdings" pitchFamily="2" charset="2"/>
-              </a:rPr>
-              <a:t>Date to be announced soon</a:t>
-            </a:r>
-            <a:endParaRPr lang="en-US" i="1" dirty="0">
-              <a:latin typeface="Calibri" panose="020F0502020204030204" pitchFamily="34" charset="0"/>
-              <a:cs typeface="Calibri" panose="020F0502020204030204" pitchFamily="34" charset="0"/>
-            </a:endParaRPr>
-          </a:p>
-          <a:p>
-            <a:endParaRPr lang="en-US" dirty="0"/>
-          </a:p>
-          <a:p>
-            <a:endParaRPr lang="en-US" dirty="0"/>
-          </a:p>
-        </p:txBody>
-      </p:sp>
-      <p:sp>
-        <p:nvSpPr>
-          <p:cNvPr id="4" name="Slide Number Placeholder 3">
-            <a:extLst>
-              <a:ext uri="{FF2B5EF4-FFF2-40B4-BE49-F238E27FC236}">
-                <a16:creationId xmlns:a16="http://schemas.microsoft.com/office/drawing/2014/main" id="{DE2DB85D-CD82-9607-A272-55FB2035DCDF}"/>
-              </a:ext>
-            </a:extLst>
-          </p:cNvPr>
-          <p:cNvSpPr>
-            <a:spLocks noGrp="1"/>
-          </p:cNvSpPr>
-          <p:nvPr>
-            <p:ph type="sldNum" sz="quarter" idx="12"/>
-          </p:nvPr>
-        </p:nvSpPr>
-        <p:spPr/>
-        <p:txBody>
-          <a:bodyPr/>
-          <a:lstStyle/>
-          <a:p>
-            <a:fld id="{8B4C9E33-6753-472F-9C09-83153B974C9D}" type="slidenum">
-              <a:rPr lang="zh-CN" altLang="en-US" smtClean="0"/>
-              <a:t>15</a:t>
-            </a:fld>
-            <a:endParaRPr lang="zh-CN" altLang="en-US"/>
-          </a:p>
-        </p:txBody>
-      </p:sp>
-    </p:spTree>
-    <p:extLst>
-      <p:ext uri="{BB962C8B-B14F-4D97-AF65-F5344CB8AC3E}">
-        <p14:creationId xmlns:p14="http://schemas.microsoft.com/office/powerpoint/2010/main" val="976501031"/>
-      </p:ext>
-    </p:extLst>
-  </p:cSld>
-  <p:clrMapOvr>
-    <a:masterClrMapping/>
-  </p:clrMapOvr>
-  <p:timing>
-    <p:tnLst>
-      <p:par>
-        <p:cTn id="1" dur="indefinite" restart="never" nodeType="tmRoot">
-          <p:childTnLst>
-            <p:seq concurrent="1" nextAc="seek">
-              <p:cTn id="2" dur="indefinite" nodeType="mainSeq">
-                <p:childTnLst>
-                  <p:par>
-                    <p:cTn id="3" fill="hold">
-                      <p:stCondLst>
-                        <p:cond delay="indefinite"/>
-                      </p:stCondLst>
-                      <p:childTnLst>
-                        <p:par>
-                          <p:cTn id="4" fill="hold">
-                            <p:stCondLst>
-                              <p:cond delay="0"/>
-                            </p:stCondLst>
-                            <p:childTnLst>
-                              <p:par>
-                                <p:cTn id="5" presetID="1" presetClass="entr" presetSubtype="0" fill="hold" nodeType="clickEffect">
-                                  <p:stCondLst>
-                                    <p:cond delay="0"/>
-                                  </p:stCondLst>
-                                  <p:childTnLst>
-                                    <p:set>
-                                      <p:cBhvr>
-                                        <p:cTn id="6" dur="1" fill="hold">
-                                          <p:stCondLst>
-                                            <p:cond delay="0"/>
-                                          </p:stCondLst>
-                                        </p:cTn>
-                                        <p:tgtEl>
-                                          <p:spTgt spid="3">
-                                            <p:txEl>
-                                              <p:pRg st="1" end="1"/>
-                                            </p:txEl>
-                                          </p:spTgt>
-                                        </p:tgtEl>
-                                        <p:attrNameLst>
-                                          <p:attrName>style.visibility</p:attrName>
-                                        </p:attrNameLst>
-                                      </p:cBhvr>
-                                      <p:to>
-                                        <p:strVal val="visible"/>
-                                      </p:to>
-                                    </p:set>
-                                  </p:childTnLst>
-                                </p:cTn>
-                              </p:par>
-                              <p:par>
-                                <p:cTn id="7" presetID="1" presetClass="entr" presetSubtype="0" fill="hold" nodeType="withEffect">
-                                  <p:stCondLst>
-                                    <p:cond delay="0"/>
-                                  </p:stCondLst>
-                                  <p:childTnLst>
-                                    <p:set>
-                                      <p:cBhvr>
-                                        <p:cTn id="8" dur="1" fill="hold">
-                                          <p:stCondLst>
-                                            <p:cond delay="0"/>
-                                          </p:stCondLst>
-                                        </p:cTn>
-                                        <p:tgtEl>
-                                          <p:spTgt spid="3">
-                                            <p:txEl>
-                                              <p:pRg st="2" end="2"/>
-                                            </p:txEl>
-                                          </p:spTgt>
-                                        </p:tgtEl>
-                                        <p:attrNameLst>
-                                          <p:attrName>style.visibility</p:attrName>
-                                        </p:attrNameLst>
-                                      </p:cBhvr>
-                                      <p:to>
-                                        <p:strVal val="visible"/>
-                                      </p:to>
-                                    </p:set>
-                                  </p:childTnLst>
-                                </p:cTn>
-                              </p:par>
-                              <p:par>
-                                <p:cTn id="9" presetID="1" presetClass="entr" presetSubtype="0" fill="hold" nodeType="withEffect">
-                                  <p:stCondLst>
-                                    <p:cond delay="0"/>
-                                  </p:stCondLst>
-                                  <p:childTnLst>
-                                    <p:set>
-                                      <p:cBhvr>
-                                        <p:cTn id="10" dur="1" fill="hold">
-                                          <p:stCondLst>
-                                            <p:cond delay="0"/>
-                                          </p:stCondLst>
-                                        </p:cTn>
-                                        <p:tgtEl>
-                                          <p:spTgt spid="3">
-                                            <p:txEl>
-                                              <p:pRg st="3" end="3"/>
-                                            </p:txEl>
-                                          </p:spTgt>
-                                        </p:tgtEl>
-                                        <p:attrNameLst>
-                                          <p:attrName>style.visibility</p:attrName>
-                                        </p:attrNameLst>
-                                      </p:cBhvr>
-                                      <p:to>
-                                        <p:strVal val="visible"/>
-                                      </p:to>
-                                    </p:set>
-                                  </p:childTnLst>
-                                </p:cTn>
-                              </p:par>
-                              <p:par>
-                                <p:cTn id="11" presetID="1" presetClass="entr" presetSubtype="0" fill="hold" nodeType="withEffect">
-                                  <p:stCondLst>
-                                    <p:cond delay="0"/>
-                                  </p:stCondLst>
-                                  <p:childTnLst>
-                                    <p:set>
-                                      <p:cBhvr>
-                                        <p:cTn id="12" dur="1" fill="hold">
-                                          <p:stCondLst>
-                                            <p:cond delay="0"/>
-                                          </p:stCondLst>
-                                        </p:cTn>
-                                        <p:tgtEl>
-                                          <p:spTgt spid="3">
-                                            <p:txEl>
-                                              <p:pRg st="4" end="4"/>
-                                            </p:txEl>
-                                          </p:spTgt>
-                                        </p:tgtEl>
-                                        <p:attrNameLst>
-                                          <p:attrName>style.visibility</p:attrName>
-                                        </p:attrNameLst>
-                                      </p:cBhvr>
-                                      <p:to>
-                                        <p:strVal val="visible"/>
-                                      </p:to>
-                                    </p:set>
-                                  </p:childTnLst>
-                                </p:cTn>
-                              </p:par>
-                            </p:childTnLst>
-                          </p:cTn>
-                        </p:par>
-                      </p:childTnLst>
-                    </p:cTn>
-                  </p:par>
-                </p:childTnLst>
-              </p:cTn>
-              <p:prevCondLst>
-                <p:cond evt="onPrev" delay="0">
-                  <p:tgtEl>
-                    <p:sldTgt/>
-                  </p:tgtEl>
-                </p:cond>
-              </p:prevCondLst>
-              <p:nextCondLst>
-                <p:cond evt="onNext" delay="0">
-                  <p:tgtEl>
-                    <p:sldTgt/>
-                  </p:tgtEl>
-                </p:cond>
-              </p:nextCondLst>
-            </p:seq>
-          </p:childTnLst>
-        </p:cTn>
-      </p:par>
-    </p:tnLst>
-  </p:timing>
-</p:sld>
-</file>
-
-<file path=ppt/slides/slide16.xml><?xml version="1.0" encoding="utf-8"?>
-<p:sld xmlns:a="http://schemas.openxmlformats.org/drawingml/2006/main" xmlns:r="http://schemas.openxmlformats.org/officeDocument/2006/relationships" xmlns:p="http://schemas.openxmlformats.org/presentationml/2006/main">
-  <p:cSld>
-    <p:spTree>
-      <p:nvGrpSpPr>
-        <p:cNvPr id="1" name="">
-          <a:extLst>
-            <a:ext uri="{FF2B5EF4-FFF2-40B4-BE49-F238E27FC236}">
               <a16:creationId xmlns:a16="http://schemas.microsoft.com/office/drawing/2014/main" id="{BC37CC9D-7421-B54B-27EC-F3BEDDCDB9F1}"/>
             </a:ext>
           </a:extLst>
@@ -6792,7 +6360,7 @@
           <a:p>
             <a:fld id="{8B4C9E33-6753-472F-9C09-83153B974C9D}" type="slidenum">
               <a:rPr lang="zh-CN" altLang="en-US" smtClean="0"/>
-              <a:t>16</a:t>
+              <a:t>15</a:t>
             </a:fld>
             <a:endParaRPr lang="zh-CN" altLang="en-US"/>
           </a:p>
@@ -6986,7 +6554,7 @@
 </p:sld>
 </file>
 
-<file path=ppt/slides/slide17.xml><?xml version="1.0" encoding="utf-8"?>
+<file path=ppt/slides/slide16.xml><?xml version="1.0" encoding="utf-8"?>
 <p:sld xmlns:a="http://schemas.openxmlformats.org/drawingml/2006/main" xmlns:r="http://schemas.openxmlformats.org/officeDocument/2006/relationships" xmlns:p="http://schemas.openxmlformats.org/presentationml/2006/main">
   <p:cSld>
     <p:spTree>
@@ -7242,7 +6810,7 @@
                 <a:latin typeface="Calibri" panose="020F0502020204030204" pitchFamily="34" charset="0"/>
                 <a:cs typeface="Calibri" panose="020F0502020204030204" pitchFamily="34" charset="0"/>
               </a:rPr>
-              <a:t>17</a:t>
+              <a:t>16</a:t>
             </a:fld>
             <a:endParaRPr lang="zh-CN" altLang="en-US">
               <a:latin typeface="Calibri" panose="020F0502020204030204" pitchFamily="34" charset="0"/>
@@ -7264,7 +6832,7 @@
 </p:sld>
 </file>
 
-<file path=ppt/slides/slide18.xml><?xml version="1.0" encoding="utf-8"?>
+<file path=ppt/slides/slide17.xml><?xml version="1.0" encoding="utf-8"?>
 <p:sld xmlns:a="http://schemas.openxmlformats.org/drawingml/2006/main" xmlns:r="http://schemas.openxmlformats.org/officeDocument/2006/relationships" xmlns:p="http://schemas.openxmlformats.org/presentationml/2006/main">
   <p:cSld>
     <p:spTree>
@@ -7336,7 +6904,7 @@
                 <a:latin typeface="Calibri" panose="020F0502020204030204" pitchFamily="34" charset="0"/>
                 <a:cs typeface="Calibri" panose="020F0502020204030204" pitchFamily="34" charset="0"/>
               </a:rPr>
-              <a:t>18</a:t>
+              <a:t>17</a:t>
             </a:fld>
             <a:endParaRPr lang="zh-CN" altLang="en-US">
               <a:latin typeface="Calibri" panose="020F0502020204030204" pitchFamily="34" charset="0"/>
@@ -7346,6 +6914,504 @@
         </p:txBody>
       </p:sp>
     </p:spTree>
+  </p:cSld>
+  <p:clrMapOvr>
+    <a:masterClrMapping/>
+  </p:clrMapOvr>
+</p:sld>
+</file>
+
+<file path=ppt/slides/slide18.xml><?xml version="1.0" encoding="utf-8"?>
+<p:sld xmlns:a="http://schemas.openxmlformats.org/drawingml/2006/main" xmlns:r="http://schemas.openxmlformats.org/officeDocument/2006/relationships" xmlns:p="http://schemas.openxmlformats.org/presentationml/2006/main">
+  <p:cSld>
+    <p:bg>
+      <p:bgPr>
+        <a:solidFill>
+          <a:schemeClr val="accent6">
+            <a:lumMod val="20000"/>
+            <a:lumOff val="80000"/>
+          </a:schemeClr>
+        </a:solidFill>
+        <a:effectLst/>
+      </p:bgPr>
+    </p:bg>
+    <p:spTree>
+      <p:nvGrpSpPr>
+        <p:cNvPr id="1" name="">
+          <a:extLst>
+            <a:ext uri="{FF2B5EF4-FFF2-40B4-BE49-F238E27FC236}">
+              <a16:creationId xmlns:a16="http://schemas.microsoft.com/office/drawing/2014/main" id="{496742D0-A9ED-698E-A043-784CDA0918A5}"/>
+            </a:ext>
+          </a:extLst>
+        </p:cNvPr>
+        <p:cNvGrpSpPr/>
+        <p:nvPr/>
+      </p:nvGrpSpPr>
+      <p:grpSpPr>
+        <a:xfrm>
+          <a:off x="0" y="0"/>
+          <a:ext cx="0" cy="0"/>
+          <a:chOff x="0" y="0"/>
+          <a:chExt cx="0" cy="0"/>
+        </a:xfrm>
+      </p:grpSpPr>
+      <p:sp>
+        <p:nvSpPr>
+          <p:cNvPr id="5" name="Title 1">
+            <a:extLst>
+              <a:ext uri="{FF2B5EF4-FFF2-40B4-BE49-F238E27FC236}">
+                <a16:creationId xmlns:a16="http://schemas.microsoft.com/office/drawing/2014/main" id="{D32B7EBD-9B6E-51DE-DB8D-E14D642D5A01}"/>
+              </a:ext>
+            </a:extLst>
+          </p:cNvPr>
+          <p:cNvSpPr>
+            <a:spLocks noGrp="1"/>
+          </p:cNvSpPr>
+          <p:nvPr>
+            <p:ph type="title"/>
+          </p:nvPr>
+        </p:nvSpPr>
+        <p:spPr>
+          <a:xfrm>
+            <a:off x="1997672" y="2766218"/>
+            <a:ext cx="10515600" cy="1325563"/>
+          </a:xfrm>
+        </p:spPr>
+        <p:txBody>
+          <a:bodyPr>
+            <a:normAutofit/>
+          </a:bodyPr>
+          <a:lstStyle/>
+          <a:p>
+            <a:pPr algn="l">
+              <a:buNone/>
+            </a:pPr>
+            <a:r>
+              <a:rPr lang="en-US" sz="7200" b="1" dirty="0">
+                <a:latin typeface="Calibri" panose="020F0502020204030204" pitchFamily="34" charset="0"/>
+                <a:cs typeface="Calibri" panose="020F0502020204030204" pitchFamily="34" charset="0"/>
+              </a:rPr>
+              <a:t>Motivating Problems</a:t>
+            </a:r>
+          </a:p>
+        </p:txBody>
+      </p:sp>
+    </p:spTree>
+    <p:extLst>
+      <p:ext uri="{BB962C8B-B14F-4D97-AF65-F5344CB8AC3E}">
+        <p14:creationId xmlns:p14="http://schemas.microsoft.com/office/powerpoint/2010/main" val="1076077993"/>
+      </p:ext>
+    </p:extLst>
+  </p:cSld>
+  <p:clrMapOvr>
+    <a:masterClrMapping/>
+  </p:clrMapOvr>
+</p:sld>
+</file>
+
+<file path=ppt/slides/slide19.xml><?xml version="1.0" encoding="utf-8"?>
+<p:sld xmlns:a="http://schemas.openxmlformats.org/drawingml/2006/main" xmlns:r="http://schemas.openxmlformats.org/officeDocument/2006/relationships" xmlns:p="http://schemas.openxmlformats.org/presentationml/2006/main">
+  <p:cSld>
+    <p:spTree>
+      <p:nvGrpSpPr>
+        <p:cNvPr id="1" name=""/>
+        <p:cNvGrpSpPr/>
+        <p:nvPr/>
+      </p:nvGrpSpPr>
+      <p:grpSpPr>
+        <a:xfrm>
+          <a:off x="0" y="0"/>
+          <a:ext cx="0" cy="0"/>
+          <a:chOff x="0" y="0"/>
+          <a:chExt cx="0" cy="0"/>
+        </a:xfrm>
+      </p:grpSpPr>
+      <p:sp>
+        <p:nvSpPr>
+          <p:cNvPr id="2" name="Title 1">
+            <a:extLst>
+              <a:ext uri="{FF2B5EF4-FFF2-40B4-BE49-F238E27FC236}">
+                <a16:creationId xmlns:a16="http://schemas.microsoft.com/office/drawing/2014/main" id="{C234EEB8-25C8-8EA7-B700-801E01DB3840}"/>
+              </a:ext>
+            </a:extLst>
+          </p:cNvPr>
+          <p:cNvSpPr>
+            <a:spLocks noGrp="1"/>
+          </p:cNvSpPr>
+          <p:nvPr>
+            <p:ph type="title"/>
+          </p:nvPr>
+        </p:nvSpPr>
+        <p:spPr/>
+        <p:txBody>
+          <a:bodyPr/>
+          <a:lstStyle/>
+          <a:p>
+            <a:r>
+              <a:rPr lang="en-US" dirty="0">
+                <a:latin typeface="Calibri" panose="020F0502020204030204" pitchFamily="34" charset="0"/>
+                <a:cs typeface="Calibri" panose="020F0502020204030204" pitchFamily="34" charset="0"/>
+              </a:rPr>
+              <a:t>Three boxes and one rabbit</a:t>
+            </a:r>
+          </a:p>
+        </p:txBody>
+      </p:sp>
+      <p:sp>
+        <p:nvSpPr>
+          <p:cNvPr id="4" name="Slide Number Placeholder 3">
+            <a:extLst>
+              <a:ext uri="{FF2B5EF4-FFF2-40B4-BE49-F238E27FC236}">
+                <a16:creationId xmlns:a16="http://schemas.microsoft.com/office/drawing/2014/main" id="{F76D6A6A-841D-ED93-DB84-04DF1A85BF8A}"/>
+              </a:ext>
+            </a:extLst>
+          </p:cNvPr>
+          <p:cNvSpPr>
+            <a:spLocks noGrp="1"/>
+          </p:cNvSpPr>
+          <p:nvPr>
+            <p:ph type="sldNum" sz="quarter" idx="12"/>
+          </p:nvPr>
+        </p:nvSpPr>
+        <p:spPr/>
+        <p:txBody>
+          <a:bodyPr/>
+          <a:lstStyle/>
+          <a:p>
+            <a:fld id="{8B4C9E33-6753-472F-9C09-83153B974C9D}" type="slidenum">
+              <a:rPr lang="zh-CN" altLang="en-US" smtClean="0"/>
+              <a:t>19</a:t>
+            </a:fld>
+            <a:endParaRPr lang="zh-CN" altLang="en-US" dirty="0"/>
+          </a:p>
+        </p:txBody>
+      </p:sp>
+      <p:sp>
+        <p:nvSpPr>
+          <p:cNvPr id="5" name="Rounded Rectangle 4">
+            <a:extLst>
+              <a:ext uri="{FF2B5EF4-FFF2-40B4-BE49-F238E27FC236}">
+                <a16:creationId xmlns:a16="http://schemas.microsoft.com/office/drawing/2014/main" id="{842BCC72-F0E6-D421-2191-E1C261757B99}"/>
+              </a:ext>
+            </a:extLst>
+          </p:cNvPr>
+          <p:cNvSpPr/>
+          <p:nvPr/>
+        </p:nvSpPr>
+        <p:spPr>
+          <a:xfrm>
+            <a:off x="1279450" y="2046768"/>
+            <a:ext cx="2190307" cy="1382233"/>
+          </a:xfrm>
+          <a:prstGeom prst="roundRect">
+            <a:avLst/>
+          </a:prstGeom>
+        </p:spPr>
+        <p:style>
+          <a:lnRef idx="2">
+            <a:schemeClr val="accent1">
+              <a:shade val="15000"/>
+            </a:schemeClr>
+          </a:lnRef>
+          <a:fillRef idx="1">
+            <a:schemeClr val="accent1"/>
+          </a:fillRef>
+          <a:effectRef idx="0">
+            <a:schemeClr val="accent1"/>
+          </a:effectRef>
+          <a:fontRef idx="minor">
+            <a:schemeClr val="lt1"/>
+          </a:fontRef>
+        </p:style>
+        <p:txBody>
+          <a:bodyPr rtlCol="0" anchor="ctr"/>
+          <a:lstStyle/>
+          <a:p>
+            <a:pPr algn="ctr"/>
+            <a:r>
+              <a:rPr lang="en-US" sz="5400" dirty="0"/>
+              <a:t>A</a:t>
+            </a:r>
+          </a:p>
+        </p:txBody>
+      </p:sp>
+      <p:pic>
+        <p:nvPicPr>
+          <p:cNvPr id="6" name="Picture 5" descr="Rabbit - Free animals icons">
+            <a:extLst>
+              <a:ext uri="{FF2B5EF4-FFF2-40B4-BE49-F238E27FC236}">
+                <a16:creationId xmlns:a16="http://schemas.microsoft.com/office/drawing/2014/main" id="{A2A22029-665E-C498-00C9-40742406DAAD}"/>
+              </a:ext>
+            </a:extLst>
+          </p:cNvPr>
+          <p:cNvPicPr>
+            <a:picLocks noChangeAspect="1"/>
+          </p:cNvPicPr>
+          <p:nvPr/>
+        </p:nvPicPr>
+        <p:blipFill>
+          <a:blip r:embed="rId2"/>
+          <a:stretch>
+            <a:fillRect/>
+          </a:stretch>
+        </p:blipFill>
+        <p:spPr>
+          <a:xfrm>
+            <a:off x="7449681" y="365125"/>
+            <a:ext cx="1091610" cy="1091610"/>
+          </a:xfrm>
+          <a:prstGeom prst="rect">
+            <a:avLst/>
+          </a:prstGeom>
+        </p:spPr>
+      </p:pic>
+      <p:sp>
+        <p:nvSpPr>
+          <p:cNvPr id="7" name="TextBox 6">
+            <a:extLst>
+              <a:ext uri="{FF2B5EF4-FFF2-40B4-BE49-F238E27FC236}">
+                <a16:creationId xmlns:a16="http://schemas.microsoft.com/office/drawing/2014/main" id="{5717B4C2-CEA0-7B2A-DA4E-32D66D3B1D39}"/>
+              </a:ext>
+            </a:extLst>
+          </p:cNvPr>
+          <p:cNvSpPr txBox="1"/>
+          <p:nvPr/>
+        </p:nvSpPr>
+        <p:spPr>
+          <a:xfrm>
+            <a:off x="1105787" y="3651019"/>
+            <a:ext cx="2893741" cy="646331"/>
+          </a:xfrm>
+          <a:prstGeom prst="rect">
+            <a:avLst/>
+          </a:prstGeom>
+          <a:noFill/>
+        </p:spPr>
+        <p:txBody>
+          <a:bodyPr wrap="none" rtlCol="0">
+            <a:spAutoFit/>
+          </a:bodyPr>
+          <a:lstStyle/>
+          <a:p>
+            <a:r>
+              <a:rPr lang="en-US" sz="3600" dirty="0"/>
+              <a:t>“It’s in box B.”</a:t>
+            </a:r>
+          </a:p>
+        </p:txBody>
+      </p:sp>
+      <p:sp>
+        <p:nvSpPr>
+          <p:cNvPr id="8" name="Rounded Rectangle 7">
+            <a:extLst>
+              <a:ext uri="{FF2B5EF4-FFF2-40B4-BE49-F238E27FC236}">
+                <a16:creationId xmlns:a16="http://schemas.microsoft.com/office/drawing/2014/main" id="{00DB2010-B312-9B3F-41BE-50DF47CC9620}"/>
+              </a:ext>
+            </a:extLst>
+          </p:cNvPr>
+          <p:cNvSpPr/>
+          <p:nvPr/>
+        </p:nvSpPr>
+        <p:spPr>
+          <a:xfrm>
+            <a:off x="5000846" y="2046767"/>
+            <a:ext cx="2190307" cy="1382233"/>
+          </a:xfrm>
+          <a:prstGeom prst="roundRect">
+            <a:avLst/>
+          </a:prstGeom>
+        </p:spPr>
+        <p:style>
+          <a:lnRef idx="2">
+            <a:schemeClr val="accent1">
+              <a:shade val="15000"/>
+            </a:schemeClr>
+          </a:lnRef>
+          <a:fillRef idx="1">
+            <a:schemeClr val="accent1"/>
+          </a:fillRef>
+          <a:effectRef idx="0">
+            <a:schemeClr val="accent1"/>
+          </a:effectRef>
+          <a:fontRef idx="minor">
+            <a:schemeClr val="lt1"/>
+          </a:fontRef>
+        </p:style>
+        <p:txBody>
+          <a:bodyPr rtlCol="0" anchor="ctr"/>
+          <a:lstStyle/>
+          <a:p>
+            <a:pPr algn="ctr"/>
+            <a:r>
+              <a:rPr lang="en-US" sz="5400" dirty="0"/>
+              <a:t>B</a:t>
+            </a:r>
+          </a:p>
+        </p:txBody>
+      </p:sp>
+      <p:sp>
+        <p:nvSpPr>
+          <p:cNvPr id="9" name="TextBox 8">
+            <a:extLst>
+              <a:ext uri="{FF2B5EF4-FFF2-40B4-BE49-F238E27FC236}">
+                <a16:creationId xmlns:a16="http://schemas.microsoft.com/office/drawing/2014/main" id="{3D000AD8-DA3E-71EA-E759-8F7908AEE570}"/>
+              </a:ext>
+            </a:extLst>
+          </p:cNvPr>
+          <p:cNvSpPr txBox="1"/>
+          <p:nvPr/>
+        </p:nvSpPr>
+        <p:spPr>
+          <a:xfrm>
+            <a:off x="4410850" y="3651019"/>
+            <a:ext cx="3584636" cy="646331"/>
+          </a:xfrm>
+          <a:prstGeom prst="rect">
+            <a:avLst/>
+          </a:prstGeom>
+          <a:noFill/>
+        </p:spPr>
+        <p:txBody>
+          <a:bodyPr wrap="none" rtlCol="0">
+            <a:spAutoFit/>
+          </a:bodyPr>
+          <a:lstStyle/>
+          <a:p>
+            <a:r>
+              <a:rPr lang="en-US" sz="3600" dirty="0"/>
+              <a:t>“It’s not in box B”</a:t>
+            </a:r>
+          </a:p>
+        </p:txBody>
+      </p:sp>
+      <p:sp>
+        <p:nvSpPr>
+          <p:cNvPr id="10" name="Rounded Rectangle 9">
+            <a:extLst>
+              <a:ext uri="{FF2B5EF4-FFF2-40B4-BE49-F238E27FC236}">
+                <a16:creationId xmlns:a16="http://schemas.microsoft.com/office/drawing/2014/main" id="{42BDD4B2-8E54-E7B1-5C5B-5532B7171ECC}"/>
+              </a:ext>
+            </a:extLst>
+          </p:cNvPr>
+          <p:cNvSpPr/>
+          <p:nvPr/>
+        </p:nvSpPr>
+        <p:spPr>
+          <a:xfrm>
+            <a:off x="8406809" y="2046767"/>
+            <a:ext cx="2190307" cy="1382233"/>
+          </a:xfrm>
+          <a:prstGeom prst="roundRect">
+            <a:avLst/>
+          </a:prstGeom>
+        </p:spPr>
+        <p:style>
+          <a:lnRef idx="2">
+            <a:schemeClr val="accent1">
+              <a:shade val="15000"/>
+            </a:schemeClr>
+          </a:lnRef>
+          <a:fillRef idx="1">
+            <a:schemeClr val="accent1"/>
+          </a:fillRef>
+          <a:effectRef idx="0">
+            <a:schemeClr val="accent1"/>
+          </a:effectRef>
+          <a:fontRef idx="minor">
+            <a:schemeClr val="lt1"/>
+          </a:fontRef>
+        </p:style>
+        <p:txBody>
+          <a:bodyPr rtlCol="0" anchor="ctr"/>
+          <a:lstStyle/>
+          <a:p>
+            <a:pPr algn="ctr"/>
+            <a:r>
+              <a:rPr lang="en-US" sz="5400" dirty="0"/>
+              <a:t>c</a:t>
+            </a:r>
+          </a:p>
+        </p:txBody>
+      </p:sp>
+      <p:sp>
+        <p:nvSpPr>
+          <p:cNvPr id="11" name="TextBox 10">
+            <a:extLst>
+              <a:ext uri="{FF2B5EF4-FFF2-40B4-BE49-F238E27FC236}">
+                <a16:creationId xmlns:a16="http://schemas.microsoft.com/office/drawing/2014/main" id="{ABFEBE20-5450-86E2-80D9-897F6E555E0F}"/>
+              </a:ext>
+            </a:extLst>
+          </p:cNvPr>
+          <p:cNvSpPr txBox="1"/>
+          <p:nvPr/>
+        </p:nvSpPr>
+        <p:spPr>
+          <a:xfrm>
+            <a:off x="8117016" y="3681796"/>
+            <a:ext cx="3619902" cy="646331"/>
+          </a:xfrm>
+          <a:prstGeom prst="rect">
+            <a:avLst/>
+          </a:prstGeom>
+          <a:noFill/>
+        </p:spPr>
+        <p:txBody>
+          <a:bodyPr wrap="none" rtlCol="0">
+            <a:spAutoFit/>
+          </a:bodyPr>
+          <a:lstStyle/>
+          <a:p>
+            <a:r>
+              <a:rPr lang="en-US" sz="3600" dirty="0"/>
+              <a:t>“It’s not in box A”</a:t>
+            </a:r>
+          </a:p>
+        </p:txBody>
+      </p:sp>
+      <p:sp>
+        <p:nvSpPr>
+          <p:cNvPr id="12" name="TextBox 11">
+            <a:extLst>
+              <a:ext uri="{FF2B5EF4-FFF2-40B4-BE49-F238E27FC236}">
+                <a16:creationId xmlns:a16="http://schemas.microsoft.com/office/drawing/2014/main" id="{D48702BA-9493-2490-28D0-5F75DDE4507C}"/>
+              </a:ext>
+            </a:extLst>
+          </p:cNvPr>
+          <p:cNvSpPr txBox="1"/>
+          <p:nvPr/>
+        </p:nvSpPr>
+        <p:spPr>
+          <a:xfrm>
+            <a:off x="1860937" y="4757464"/>
+            <a:ext cx="8760988" cy="584775"/>
+          </a:xfrm>
+          <a:prstGeom prst="rect">
+            <a:avLst/>
+          </a:prstGeom>
+          <a:noFill/>
+        </p:spPr>
+        <p:txBody>
+          <a:bodyPr wrap="none" rtlCol="0">
+            <a:spAutoFit/>
+          </a:bodyPr>
+          <a:lstStyle/>
+          <a:p>
+            <a:r>
+              <a:rPr lang="en-US" sz="3200" i="1" dirty="0">
+                <a:latin typeface="Calibri" panose="020F0502020204030204" pitchFamily="34" charset="0"/>
+                <a:cs typeface="Calibri" panose="020F0502020204030204" pitchFamily="34" charset="0"/>
+              </a:rPr>
+              <a:t>Only one description is correct. Where’s the rabbit?</a:t>
+            </a:r>
+          </a:p>
+        </p:txBody>
+      </p:sp>
+    </p:spTree>
+    <p:extLst>
+      <p:ext uri="{BB962C8B-B14F-4D97-AF65-F5344CB8AC3E}">
+        <p14:creationId xmlns:p14="http://schemas.microsoft.com/office/powerpoint/2010/main" val="3707350670"/>
+      </p:ext>
+    </p:extLst>
   </p:cSld>
   <p:clrMapOvr>
     <a:masterClrMapping/>
@@ -7423,43 +7489,6 @@
             <a:normAutofit/>
           </a:bodyPr>
           <a:lstStyle/>
-          <a:p>
-            <a:r>
-              <a:rPr lang="en-US" dirty="0">
-                <a:latin typeface="Calibri" panose="020F0502020204030204" pitchFamily="34" charset="0"/>
-                <a:cs typeface="Calibri" panose="020F0502020204030204" pitchFamily="34" charset="0"/>
-              </a:rPr>
-              <a:t>Mingxu</a:t>
-            </a:r>
-            <a:r>
-              <a:rPr lang="en-US" altLang="zh-CN" dirty="0">
-                <a:latin typeface="Calibri" panose="020F0502020204030204" pitchFamily="34" charset="0"/>
-                <a:cs typeface="Calibri" panose="020F0502020204030204" pitchFamily="34" charset="0"/>
-              </a:rPr>
-              <a:t>n Zhou (</a:t>
-            </a:r>
-            <a:r>
-              <a:rPr lang="ja-JP" altLang="en-US" b="1"/>
-              <a:t>周銘洵</a:t>
-            </a:r>
-            <a:r>
-              <a:rPr lang="en-US" altLang="zh-CN" dirty="0">
-                <a:latin typeface="Calibri" panose="020F0502020204030204" pitchFamily="34" charset="0"/>
-                <a:cs typeface="Calibri" panose="020F0502020204030204" pitchFamily="34" charset="0"/>
-              </a:rPr>
-              <a:t>)</a:t>
-            </a:r>
-            <a:endParaRPr lang="en-US" dirty="0">
-              <a:latin typeface="Calibri" panose="020F0502020204030204" pitchFamily="34" charset="0"/>
-              <a:cs typeface="Calibri" panose="020F0502020204030204" pitchFamily="34" charset="0"/>
-            </a:endParaRPr>
-          </a:p>
-          <a:p>
-            <a:endParaRPr lang="en-US" dirty="0">
-              <a:latin typeface="Calibri" panose="020F0502020204030204" pitchFamily="34" charset="0"/>
-              <a:cs typeface="Calibri" panose="020F0502020204030204" pitchFamily="34" charset="0"/>
-            </a:endParaRPr>
-          </a:p>
           <a:p>
             <a:r>
               <a:rPr lang="en-US" dirty="0">
@@ -7621,6 +7650,3242 @@
   <p:clrMapOvr>
     <a:masterClrMapping/>
   </p:clrMapOvr>
+</p:sld>
+</file>
+
+<file path=ppt/slides/slide20.xml><?xml version="1.0" encoding="utf-8"?>
+<p:sld xmlns:a="http://schemas.openxmlformats.org/drawingml/2006/main" xmlns:r="http://schemas.openxmlformats.org/officeDocument/2006/relationships" xmlns:p="http://schemas.openxmlformats.org/presentationml/2006/main">
+  <p:cSld>
+    <p:spTree>
+      <p:nvGrpSpPr>
+        <p:cNvPr id="1" name="">
+          <a:extLst>
+            <a:ext uri="{FF2B5EF4-FFF2-40B4-BE49-F238E27FC236}">
+              <a16:creationId xmlns:a16="http://schemas.microsoft.com/office/drawing/2014/main" id="{7FCF96AC-2BFB-1A61-5A04-855466CC5729}"/>
+            </a:ext>
+          </a:extLst>
+        </p:cNvPr>
+        <p:cNvGrpSpPr/>
+        <p:nvPr/>
+      </p:nvGrpSpPr>
+      <p:grpSpPr>
+        <a:xfrm>
+          <a:off x="0" y="0"/>
+          <a:ext cx="0" cy="0"/>
+          <a:chOff x="0" y="0"/>
+          <a:chExt cx="0" cy="0"/>
+        </a:xfrm>
+      </p:grpSpPr>
+      <p:sp>
+        <p:nvSpPr>
+          <p:cNvPr id="2" name="Title 1">
+            <a:extLst>
+              <a:ext uri="{FF2B5EF4-FFF2-40B4-BE49-F238E27FC236}">
+                <a16:creationId xmlns:a16="http://schemas.microsoft.com/office/drawing/2014/main" id="{E8539E68-BC61-5E91-C504-C5B0EACCB20E}"/>
+              </a:ext>
+            </a:extLst>
+          </p:cNvPr>
+          <p:cNvSpPr>
+            <a:spLocks noGrp="1"/>
+          </p:cNvSpPr>
+          <p:nvPr>
+            <p:ph type="title"/>
+          </p:nvPr>
+        </p:nvSpPr>
+        <p:spPr/>
+        <p:txBody>
+          <a:bodyPr/>
+          <a:lstStyle/>
+          <a:p>
+            <a:r>
+              <a:rPr lang="en-US" dirty="0">
+                <a:latin typeface="Calibri" panose="020F0502020204030204" pitchFamily="34" charset="0"/>
+                <a:cs typeface="Calibri" panose="020F0502020204030204" pitchFamily="34" charset="0"/>
+              </a:rPr>
+              <a:t>Three boxes and one rabbit</a:t>
+            </a:r>
+          </a:p>
+        </p:txBody>
+      </p:sp>
+      <p:sp>
+        <p:nvSpPr>
+          <p:cNvPr id="4" name="Slide Number Placeholder 3">
+            <a:extLst>
+              <a:ext uri="{FF2B5EF4-FFF2-40B4-BE49-F238E27FC236}">
+                <a16:creationId xmlns:a16="http://schemas.microsoft.com/office/drawing/2014/main" id="{E9628912-3A8B-4232-5B39-DA1EA468E6DF}"/>
+              </a:ext>
+            </a:extLst>
+          </p:cNvPr>
+          <p:cNvSpPr>
+            <a:spLocks noGrp="1"/>
+          </p:cNvSpPr>
+          <p:nvPr>
+            <p:ph type="sldNum" sz="quarter" idx="12"/>
+          </p:nvPr>
+        </p:nvSpPr>
+        <p:spPr/>
+        <p:txBody>
+          <a:bodyPr/>
+          <a:lstStyle/>
+          <a:p>
+            <a:fld id="{8B4C9E33-6753-472F-9C09-83153B974C9D}" type="slidenum">
+              <a:rPr lang="zh-CN" altLang="en-US" smtClean="0"/>
+              <a:t>20</a:t>
+            </a:fld>
+            <a:endParaRPr lang="zh-CN" altLang="en-US" dirty="0"/>
+          </a:p>
+        </p:txBody>
+      </p:sp>
+      <p:pic>
+        <p:nvPicPr>
+          <p:cNvPr id="6" name="Picture 5" descr="Rabbit - Free animals icons">
+            <a:extLst>
+              <a:ext uri="{FF2B5EF4-FFF2-40B4-BE49-F238E27FC236}">
+                <a16:creationId xmlns:a16="http://schemas.microsoft.com/office/drawing/2014/main" id="{A6B2DA87-1A83-F9CE-E428-8B98C7C03F2B}"/>
+              </a:ext>
+            </a:extLst>
+          </p:cNvPr>
+          <p:cNvPicPr>
+            <a:picLocks noChangeAspect="1"/>
+          </p:cNvPicPr>
+          <p:nvPr/>
+        </p:nvPicPr>
+        <p:blipFill>
+          <a:blip r:embed="rId2"/>
+          <a:stretch>
+            <a:fillRect/>
+          </a:stretch>
+        </p:blipFill>
+        <p:spPr>
+          <a:xfrm>
+            <a:off x="7449681" y="365125"/>
+            <a:ext cx="1091610" cy="1091610"/>
+          </a:xfrm>
+          <a:prstGeom prst="rect">
+            <a:avLst/>
+          </a:prstGeom>
+        </p:spPr>
+      </p:pic>
+      <p:sp>
+        <p:nvSpPr>
+          <p:cNvPr id="7" name="TextBox 6">
+            <a:extLst>
+              <a:ext uri="{FF2B5EF4-FFF2-40B4-BE49-F238E27FC236}">
+                <a16:creationId xmlns:a16="http://schemas.microsoft.com/office/drawing/2014/main" id="{1FDC8089-B065-0603-C81B-089081BB13C7}"/>
+              </a:ext>
+            </a:extLst>
+          </p:cNvPr>
+          <p:cNvSpPr txBox="1"/>
+          <p:nvPr/>
+        </p:nvSpPr>
+        <p:spPr>
+          <a:xfrm>
+            <a:off x="1148317" y="2204991"/>
+            <a:ext cx="3145413" cy="646331"/>
+          </a:xfrm>
+          <a:prstGeom prst="rect">
+            <a:avLst/>
+          </a:prstGeom>
+          <a:noFill/>
+        </p:spPr>
+        <p:txBody>
+          <a:bodyPr wrap="none" rtlCol="0">
+            <a:spAutoFit/>
+          </a:bodyPr>
+          <a:lstStyle/>
+          <a:p>
+            <a:r>
+              <a:rPr lang="en-US" sz="3600" b="1" dirty="0">
+                <a:solidFill>
+                  <a:srgbClr val="00B050"/>
+                </a:solidFill>
+              </a:rPr>
+              <a:t>“It’s in box B.”</a:t>
+            </a:r>
+          </a:p>
+        </p:txBody>
+      </p:sp>
+      <p:sp>
+        <p:nvSpPr>
+          <p:cNvPr id="9" name="TextBox 8">
+            <a:extLst>
+              <a:ext uri="{FF2B5EF4-FFF2-40B4-BE49-F238E27FC236}">
+                <a16:creationId xmlns:a16="http://schemas.microsoft.com/office/drawing/2014/main" id="{4BF93F07-6B6E-8898-DF37-A1C694952DEF}"/>
+              </a:ext>
+            </a:extLst>
+          </p:cNvPr>
+          <p:cNvSpPr txBox="1"/>
+          <p:nvPr/>
+        </p:nvSpPr>
+        <p:spPr>
+          <a:xfrm>
+            <a:off x="4453380" y="2204991"/>
+            <a:ext cx="3584636" cy="646331"/>
+          </a:xfrm>
+          <a:prstGeom prst="rect">
+            <a:avLst/>
+          </a:prstGeom>
+          <a:noFill/>
+        </p:spPr>
+        <p:txBody>
+          <a:bodyPr wrap="none" rtlCol="0">
+            <a:spAutoFit/>
+          </a:bodyPr>
+          <a:lstStyle/>
+          <a:p>
+            <a:r>
+              <a:rPr lang="en-US" sz="3600" dirty="0"/>
+              <a:t>“It’s not in box B”</a:t>
+            </a:r>
+          </a:p>
+        </p:txBody>
+      </p:sp>
+      <p:sp>
+        <p:nvSpPr>
+          <p:cNvPr id="11" name="TextBox 10">
+            <a:extLst>
+              <a:ext uri="{FF2B5EF4-FFF2-40B4-BE49-F238E27FC236}">
+                <a16:creationId xmlns:a16="http://schemas.microsoft.com/office/drawing/2014/main" id="{25B6BE34-962B-0819-8C7E-A4F697A87770}"/>
+              </a:ext>
+            </a:extLst>
+          </p:cNvPr>
+          <p:cNvSpPr txBox="1"/>
+          <p:nvPr/>
+        </p:nvSpPr>
+        <p:spPr>
+          <a:xfrm>
+            <a:off x="8159546" y="2235768"/>
+            <a:ext cx="3903633" cy="646331"/>
+          </a:xfrm>
+          <a:prstGeom prst="rect">
+            <a:avLst/>
+          </a:prstGeom>
+          <a:noFill/>
+        </p:spPr>
+        <p:txBody>
+          <a:bodyPr wrap="none" rtlCol="0">
+            <a:spAutoFit/>
+          </a:bodyPr>
+          <a:lstStyle/>
+          <a:p>
+            <a:r>
+              <a:rPr lang="en-US" sz="3600" b="1" dirty="0">
+                <a:solidFill>
+                  <a:srgbClr val="00B050"/>
+                </a:solidFill>
+              </a:rPr>
+              <a:t>“It’s not in box A”</a:t>
+            </a:r>
+          </a:p>
+        </p:txBody>
+      </p:sp>
+      <p:sp>
+        <p:nvSpPr>
+          <p:cNvPr id="3" name="TextBox 2">
+            <a:extLst>
+              <a:ext uri="{FF2B5EF4-FFF2-40B4-BE49-F238E27FC236}">
+                <a16:creationId xmlns:a16="http://schemas.microsoft.com/office/drawing/2014/main" id="{70DABC2D-F6F2-9B2D-0951-0754621DB089}"/>
+              </a:ext>
+            </a:extLst>
+          </p:cNvPr>
+          <p:cNvSpPr txBox="1"/>
+          <p:nvPr/>
+        </p:nvSpPr>
+        <p:spPr>
+          <a:xfrm>
+            <a:off x="1363899" y="3427179"/>
+            <a:ext cx="7773538" cy="584775"/>
+          </a:xfrm>
+          <a:prstGeom prst="rect">
+            <a:avLst/>
+          </a:prstGeom>
+          <a:noFill/>
+        </p:spPr>
+        <p:txBody>
+          <a:bodyPr wrap="none" rtlCol="0">
+            <a:spAutoFit/>
+          </a:bodyPr>
+          <a:lstStyle/>
+          <a:p>
+            <a:pPr marL="457200" indent="-457200">
+              <a:buFont typeface="Arial" panose="020B0604020202020204" pitchFamily="34" charset="0"/>
+              <a:buChar char="•"/>
+            </a:pPr>
+            <a:r>
+              <a:rPr lang="en-US" sz="3200" i="1" dirty="0">
+                <a:latin typeface="Calibri" panose="020F0502020204030204" pitchFamily="34" charset="0"/>
+                <a:cs typeface="Calibri" panose="020F0502020204030204" pitchFamily="34" charset="0"/>
+              </a:rPr>
+              <a:t>Can’t be B, otherwise 1</a:t>
+            </a:r>
+            <a:r>
+              <a:rPr lang="en-US" sz="3200" i="1" baseline="30000" dirty="0">
+                <a:latin typeface="Calibri" panose="020F0502020204030204" pitchFamily="34" charset="0"/>
+                <a:cs typeface="Calibri" panose="020F0502020204030204" pitchFamily="34" charset="0"/>
+              </a:rPr>
+              <a:t>st</a:t>
+            </a:r>
+            <a:r>
+              <a:rPr lang="en-US" sz="3200" i="1" dirty="0">
+                <a:latin typeface="Calibri" panose="020F0502020204030204" pitchFamily="34" charset="0"/>
+                <a:cs typeface="Calibri" panose="020F0502020204030204" pitchFamily="34" charset="0"/>
+              </a:rPr>
+              <a:t> and 3rd  are right.</a:t>
+            </a:r>
+          </a:p>
+        </p:txBody>
+      </p:sp>
+    </p:spTree>
+    <p:extLst>
+      <p:ext uri="{BB962C8B-B14F-4D97-AF65-F5344CB8AC3E}">
+        <p14:creationId xmlns:p14="http://schemas.microsoft.com/office/powerpoint/2010/main" val="3740311365"/>
+      </p:ext>
+    </p:extLst>
+  </p:cSld>
+  <p:clrMapOvr>
+    <a:masterClrMapping/>
+  </p:clrMapOvr>
+</p:sld>
+</file>
+
+<file path=ppt/slides/slide21.xml><?xml version="1.0" encoding="utf-8"?>
+<p:sld xmlns:a="http://schemas.openxmlformats.org/drawingml/2006/main" xmlns:r="http://schemas.openxmlformats.org/officeDocument/2006/relationships" xmlns:p="http://schemas.openxmlformats.org/presentationml/2006/main">
+  <p:cSld>
+    <p:spTree>
+      <p:nvGrpSpPr>
+        <p:cNvPr id="1" name="">
+          <a:extLst>
+            <a:ext uri="{FF2B5EF4-FFF2-40B4-BE49-F238E27FC236}">
+              <a16:creationId xmlns:a16="http://schemas.microsoft.com/office/drawing/2014/main" id="{5CE75506-145E-6F8F-276B-77D713434F63}"/>
+            </a:ext>
+          </a:extLst>
+        </p:cNvPr>
+        <p:cNvGrpSpPr/>
+        <p:nvPr/>
+      </p:nvGrpSpPr>
+      <p:grpSpPr>
+        <a:xfrm>
+          <a:off x="0" y="0"/>
+          <a:ext cx="0" cy="0"/>
+          <a:chOff x="0" y="0"/>
+          <a:chExt cx="0" cy="0"/>
+        </a:xfrm>
+      </p:grpSpPr>
+      <p:sp>
+        <p:nvSpPr>
+          <p:cNvPr id="2" name="Title 1">
+            <a:extLst>
+              <a:ext uri="{FF2B5EF4-FFF2-40B4-BE49-F238E27FC236}">
+                <a16:creationId xmlns:a16="http://schemas.microsoft.com/office/drawing/2014/main" id="{59D49480-65DA-58C6-0EE2-40191792AB3E}"/>
+              </a:ext>
+            </a:extLst>
+          </p:cNvPr>
+          <p:cNvSpPr>
+            <a:spLocks noGrp="1"/>
+          </p:cNvSpPr>
+          <p:nvPr>
+            <p:ph type="title"/>
+          </p:nvPr>
+        </p:nvSpPr>
+        <p:spPr/>
+        <p:txBody>
+          <a:bodyPr/>
+          <a:lstStyle/>
+          <a:p>
+            <a:r>
+              <a:rPr lang="en-US" dirty="0">
+                <a:latin typeface="Calibri" panose="020F0502020204030204" pitchFamily="34" charset="0"/>
+                <a:cs typeface="Calibri" panose="020F0502020204030204" pitchFamily="34" charset="0"/>
+              </a:rPr>
+              <a:t>Three boxes and one rabbit</a:t>
+            </a:r>
+          </a:p>
+        </p:txBody>
+      </p:sp>
+      <p:sp>
+        <p:nvSpPr>
+          <p:cNvPr id="4" name="Slide Number Placeholder 3">
+            <a:extLst>
+              <a:ext uri="{FF2B5EF4-FFF2-40B4-BE49-F238E27FC236}">
+                <a16:creationId xmlns:a16="http://schemas.microsoft.com/office/drawing/2014/main" id="{D2F210A3-FC3B-B24F-3FA9-84D19041E22B}"/>
+              </a:ext>
+            </a:extLst>
+          </p:cNvPr>
+          <p:cNvSpPr>
+            <a:spLocks noGrp="1"/>
+          </p:cNvSpPr>
+          <p:nvPr>
+            <p:ph type="sldNum" sz="quarter" idx="12"/>
+          </p:nvPr>
+        </p:nvSpPr>
+        <p:spPr/>
+        <p:txBody>
+          <a:bodyPr/>
+          <a:lstStyle/>
+          <a:p>
+            <a:fld id="{8B4C9E33-6753-472F-9C09-83153B974C9D}" type="slidenum">
+              <a:rPr lang="zh-CN" altLang="en-US" smtClean="0"/>
+              <a:t>21</a:t>
+            </a:fld>
+            <a:endParaRPr lang="zh-CN" altLang="en-US" dirty="0"/>
+          </a:p>
+        </p:txBody>
+      </p:sp>
+      <p:pic>
+        <p:nvPicPr>
+          <p:cNvPr id="6" name="Picture 5" descr="Rabbit - Free animals icons">
+            <a:extLst>
+              <a:ext uri="{FF2B5EF4-FFF2-40B4-BE49-F238E27FC236}">
+                <a16:creationId xmlns:a16="http://schemas.microsoft.com/office/drawing/2014/main" id="{4DA53857-E581-BB25-BFBB-B8B8552F8A10}"/>
+              </a:ext>
+            </a:extLst>
+          </p:cNvPr>
+          <p:cNvPicPr>
+            <a:picLocks noChangeAspect="1"/>
+          </p:cNvPicPr>
+          <p:nvPr/>
+        </p:nvPicPr>
+        <p:blipFill>
+          <a:blip r:embed="rId2"/>
+          <a:stretch>
+            <a:fillRect/>
+          </a:stretch>
+        </p:blipFill>
+        <p:spPr>
+          <a:xfrm>
+            <a:off x="7449681" y="365125"/>
+            <a:ext cx="1091610" cy="1091610"/>
+          </a:xfrm>
+          <a:prstGeom prst="rect">
+            <a:avLst/>
+          </a:prstGeom>
+        </p:spPr>
+      </p:pic>
+      <p:sp>
+        <p:nvSpPr>
+          <p:cNvPr id="7" name="TextBox 6">
+            <a:extLst>
+              <a:ext uri="{FF2B5EF4-FFF2-40B4-BE49-F238E27FC236}">
+                <a16:creationId xmlns:a16="http://schemas.microsoft.com/office/drawing/2014/main" id="{5C82BE79-F94F-6F3D-F83D-9FCEBDE0D89B}"/>
+              </a:ext>
+            </a:extLst>
+          </p:cNvPr>
+          <p:cNvSpPr txBox="1"/>
+          <p:nvPr/>
+        </p:nvSpPr>
+        <p:spPr>
+          <a:xfrm>
+            <a:off x="1148317" y="2204991"/>
+            <a:ext cx="2893741" cy="646331"/>
+          </a:xfrm>
+          <a:prstGeom prst="rect">
+            <a:avLst/>
+          </a:prstGeom>
+          <a:noFill/>
+        </p:spPr>
+        <p:txBody>
+          <a:bodyPr wrap="none" rtlCol="0">
+            <a:spAutoFit/>
+          </a:bodyPr>
+          <a:lstStyle/>
+          <a:p>
+            <a:r>
+              <a:rPr lang="en-US" sz="3600" dirty="0"/>
+              <a:t>“It’s in box B.”</a:t>
+            </a:r>
+          </a:p>
+        </p:txBody>
+      </p:sp>
+      <p:sp>
+        <p:nvSpPr>
+          <p:cNvPr id="9" name="TextBox 8">
+            <a:extLst>
+              <a:ext uri="{FF2B5EF4-FFF2-40B4-BE49-F238E27FC236}">
+                <a16:creationId xmlns:a16="http://schemas.microsoft.com/office/drawing/2014/main" id="{CEE0583E-9124-96AE-CCD7-871CA2F47B2E}"/>
+              </a:ext>
+            </a:extLst>
+          </p:cNvPr>
+          <p:cNvSpPr txBox="1"/>
+          <p:nvPr/>
+        </p:nvSpPr>
+        <p:spPr>
+          <a:xfrm>
+            <a:off x="4453380" y="2204991"/>
+            <a:ext cx="3873176" cy="646331"/>
+          </a:xfrm>
+          <a:prstGeom prst="rect">
+            <a:avLst/>
+          </a:prstGeom>
+          <a:noFill/>
+        </p:spPr>
+        <p:txBody>
+          <a:bodyPr wrap="none" rtlCol="0">
+            <a:spAutoFit/>
+          </a:bodyPr>
+          <a:lstStyle/>
+          <a:p>
+            <a:r>
+              <a:rPr lang="en-US" sz="3600" b="1" dirty="0">
+                <a:solidFill>
+                  <a:srgbClr val="00B050"/>
+                </a:solidFill>
+              </a:rPr>
+              <a:t>“It’s not in box B”</a:t>
+            </a:r>
+          </a:p>
+        </p:txBody>
+      </p:sp>
+      <p:sp>
+        <p:nvSpPr>
+          <p:cNvPr id="11" name="TextBox 10">
+            <a:extLst>
+              <a:ext uri="{FF2B5EF4-FFF2-40B4-BE49-F238E27FC236}">
+                <a16:creationId xmlns:a16="http://schemas.microsoft.com/office/drawing/2014/main" id="{AED11EC9-D94D-E99A-3C33-F4140876DE4B}"/>
+              </a:ext>
+            </a:extLst>
+          </p:cNvPr>
+          <p:cNvSpPr txBox="1"/>
+          <p:nvPr/>
+        </p:nvSpPr>
+        <p:spPr>
+          <a:xfrm>
+            <a:off x="8326556" y="2216554"/>
+            <a:ext cx="3903633" cy="646331"/>
+          </a:xfrm>
+          <a:prstGeom prst="rect">
+            <a:avLst/>
+          </a:prstGeom>
+          <a:noFill/>
+        </p:spPr>
+        <p:txBody>
+          <a:bodyPr wrap="none" rtlCol="0">
+            <a:spAutoFit/>
+          </a:bodyPr>
+          <a:lstStyle/>
+          <a:p>
+            <a:r>
+              <a:rPr lang="en-US" sz="3600" b="1" dirty="0">
+                <a:solidFill>
+                  <a:srgbClr val="00B050"/>
+                </a:solidFill>
+              </a:rPr>
+              <a:t>“It’s not in box A”</a:t>
+            </a:r>
+          </a:p>
+        </p:txBody>
+      </p:sp>
+      <p:sp>
+        <p:nvSpPr>
+          <p:cNvPr id="8" name="TextBox 7">
+            <a:extLst>
+              <a:ext uri="{FF2B5EF4-FFF2-40B4-BE49-F238E27FC236}">
+                <a16:creationId xmlns:a16="http://schemas.microsoft.com/office/drawing/2014/main" id="{D7877E29-89A8-07ED-2187-E79CAAE18714}"/>
+              </a:ext>
+            </a:extLst>
+          </p:cNvPr>
+          <p:cNvSpPr txBox="1"/>
+          <p:nvPr/>
+        </p:nvSpPr>
+        <p:spPr>
+          <a:xfrm>
+            <a:off x="1363899" y="3427179"/>
+            <a:ext cx="8520538" cy="1077218"/>
+          </a:xfrm>
+          <a:prstGeom prst="rect">
+            <a:avLst/>
+          </a:prstGeom>
+          <a:noFill/>
+        </p:spPr>
+        <p:txBody>
+          <a:bodyPr wrap="none" rtlCol="0">
+            <a:spAutoFit/>
+          </a:bodyPr>
+          <a:lstStyle/>
+          <a:p>
+            <a:pPr marL="457200" indent="-457200">
+              <a:buFont typeface="Arial" panose="020B0604020202020204" pitchFamily="34" charset="0"/>
+              <a:buChar char="•"/>
+            </a:pPr>
+            <a:r>
+              <a:rPr lang="en-US" sz="3200" i="1" dirty="0">
+                <a:latin typeface="Calibri" panose="020F0502020204030204" pitchFamily="34" charset="0"/>
+                <a:cs typeface="Calibri" panose="020F0502020204030204" pitchFamily="34" charset="0"/>
+              </a:rPr>
+              <a:t>Can’t be B, otherwise 1</a:t>
+            </a:r>
+            <a:r>
+              <a:rPr lang="en-US" sz="3200" i="1" baseline="30000" dirty="0">
+                <a:latin typeface="Calibri" panose="020F0502020204030204" pitchFamily="34" charset="0"/>
+                <a:cs typeface="Calibri" panose="020F0502020204030204" pitchFamily="34" charset="0"/>
+              </a:rPr>
+              <a:t>st</a:t>
+            </a:r>
+            <a:r>
+              <a:rPr lang="en-US" sz="3200" i="1" dirty="0">
+                <a:latin typeface="Calibri" panose="020F0502020204030204" pitchFamily="34" charset="0"/>
+                <a:cs typeface="Calibri" panose="020F0502020204030204" pitchFamily="34" charset="0"/>
+              </a:rPr>
+              <a:t> and 3</a:t>
+            </a:r>
+            <a:r>
+              <a:rPr lang="en-US" sz="3200" i="1" baseline="30000" dirty="0">
+                <a:latin typeface="Calibri" panose="020F0502020204030204" pitchFamily="34" charset="0"/>
+                <a:cs typeface="Calibri" panose="020F0502020204030204" pitchFamily="34" charset="0"/>
+              </a:rPr>
+              <a:t>rd</a:t>
+            </a:r>
+            <a:r>
+              <a:rPr lang="en-US" sz="3200" i="1" dirty="0">
+                <a:latin typeface="Calibri" panose="020F0502020204030204" pitchFamily="34" charset="0"/>
+                <a:cs typeface="Calibri" panose="020F0502020204030204" pitchFamily="34" charset="0"/>
+              </a:rPr>
+              <a:t>  are both right.</a:t>
+            </a:r>
+          </a:p>
+          <a:p>
+            <a:pPr marL="457200" indent="-457200">
+              <a:buFont typeface="Arial" panose="020B0604020202020204" pitchFamily="34" charset="0"/>
+              <a:buChar char="•"/>
+            </a:pPr>
+            <a:r>
+              <a:rPr lang="en-US" sz="3200" i="1" dirty="0">
+                <a:latin typeface="Calibri" panose="020F0502020204030204" pitchFamily="34" charset="0"/>
+                <a:cs typeface="Calibri" panose="020F0502020204030204" pitchFamily="34" charset="0"/>
+              </a:rPr>
+              <a:t>Can’t be C, otherwise 2</a:t>
+            </a:r>
+            <a:r>
+              <a:rPr lang="en-US" sz="3200" i="1" baseline="30000" dirty="0">
+                <a:latin typeface="Calibri" panose="020F0502020204030204" pitchFamily="34" charset="0"/>
+                <a:cs typeface="Calibri" panose="020F0502020204030204" pitchFamily="34" charset="0"/>
+              </a:rPr>
+              <a:t>nd</a:t>
+            </a:r>
+            <a:r>
+              <a:rPr lang="en-US" sz="3200" i="1" dirty="0">
+                <a:latin typeface="Calibri" panose="020F0502020204030204" pitchFamily="34" charset="0"/>
+                <a:cs typeface="Calibri" panose="020F0502020204030204" pitchFamily="34" charset="0"/>
+              </a:rPr>
+              <a:t> and 3</a:t>
+            </a:r>
+            <a:r>
+              <a:rPr lang="en-US" sz="3200" i="1" baseline="30000" dirty="0">
+                <a:latin typeface="Calibri" panose="020F0502020204030204" pitchFamily="34" charset="0"/>
+                <a:cs typeface="Calibri" panose="020F0502020204030204" pitchFamily="34" charset="0"/>
+              </a:rPr>
+              <a:t>rd</a:t>
+            </a:r>
+            <a:r>
+              <a:rPr lang="en-US" sz="3200" i="1" dirty="0">
+                <a:latin typeface="Calibri" panose="020F0502020204030204" pitchFamily="34" charset="0"/>
+                <a:cs typeface="Calibri" panose="020F0502020204030204" pitchFamily="34" charset="0"/>
+              </a:rPr>
+              <a:t> are both right.</a:t>
+            </a:r>
+          </a:p>
+        </p:txBody>
+      </p:sp>
+    </p:spTree>
+    <p:extLst>
+      <p:ext uri="{BB962C8B-B14F-4D97-AF65-F5344CB8AC3E}">
+        <p14:creationId xmlns:p14="http://schemas.microsoft.com/office/powerpoint/2010/main" val="3714473025"/>
+      </p:ext>
+    </p:extLst>
+  </p:cSld>
+  <p:clrMapOvr>
+    <a:masterClrMapping/>
+  </p:clrMapOvr>
+</p:sld>
+</file>
+
+<file path=ppt/slides/slide22.xml><?xml version="1.0" encoding="utf-8"?>
+<p:sld xmlns:a="http://schemas.openxmlformats.org/drawingml/2006/main" xmlns:r="http://schemas.openxmlformats.org/officeDocument/2006/relationships" xmlns:p="http://schemas.openxmlformats.org/presentationml/2006/main">
+  <p:cSld>
+    <p:spTree>
+      <p:nvGrpSpPr>
+        <p:cNvPr id="1" name="">
+          <a:extLst>
+            <a:ext uri="{FF2B5EF4-FFF2-40B4-BE49-F238E27FC236}">
+              <a16:creationId xmlns:a16="http://schemas.microsoft.com/office/drawing/2014/main" id="{2A1536C9-2EBF-7A24-A235-DE1C54AC724D}"/>
+            </a:ext>
+          </a:extLst>
+        </p:cNvPr>
+        <p:cNvGrpSpPr/>
+        <p:nvPr/>
+      </p:nvGrpSpPr>
+      <p:grpSpPr>
+        <a:xfrm>
+          <a:off x="0" y="0"/>
+          <a:ext cx="0" cy="0"/>
+          <a:chOff x="0" y="0"/>
+          <a:chExt cx="0" cy="0"/>
+        </a:xfrm>
+      </p:grpSpPr>
+      <p:sp>
+        <p:nvSpPr>
+          <p:cNvPr id="2" name="Title 1">
+            <a:extLst>
+              <a:ext uri="{FF2B5EF4-FFF2-40B4-BE49-F238E27FC236}">
+                <a16:creationId xmlns:a16="http://schemas.microsoft.com/office/drawing/2014/main" id="{4CBFCFEE-530B-4121-48F6-CF33D4B131A0}"/>
+              </a:ext>
+            </a:extLst>
+          </p:cNvPr>
+          <p:cNvSpPr>
+            <a:spLocks noGrp="1"/>
+          </p:cNvSpPr>
+          <p:nvPr>
+            <p:ph type="title"/>
+          </p:nvPr>
+        </p:nvSpPr>
+        <p:spPr/>
+        <p:txBody>
+          <a:bodyPr/>
+          <a:lstStyle/>
+          <a:p>
+            <a:r>
+              <a:rPr lang="en-US" dirty="0">
+                <a:latin typeface="Calibri" panose="020F0502020204030204" pitchFamily="34" charset="0"/>
+                <a:cs typeface="Calibri" panose="020F0502020204030204" pitchFamily="34" charset="0"/>
+              </a:rPr>
+              <a:t>Three boxes and one rabbit</a:t>
+            </a:r>
+          </a:p>
+        </p:txBody>
+      </p:sp>
+      <p:sp>
+        <p:nvSpPr>
+          <p:cNvPr id="4" name="Slide Number Placeholder 3">
+            <a:extLst>
+              <a:ext uri="{FF2B5EF4-FFF2-40B4-BE49-F238E27FC236}">
+                <a16:creationId xmlns:a16="http://schemas.microsoft.com/office/drawing/2014/main" id="{06FDA831-F24A-C689-6ACA-46694C15F675}"/>
+              </a:ext>
+            </a:extLst>
+          </p:cNvPr>
+          <p:cNvSpPr>
+            <a:spLocks noGrp="1"/>
+          </p:cNvSpPr>
+          <p:nvPr>
+            <p:ph type="sldNum" sz="quarter" idx="12"/>
+          </p:nvPr>
+        </p:nvSpPr>
+        <p:spPr/>
+        <p:txBody>
+          <a:bodyPr/>
+          <a:lstStyle/>
+          <a:p>
+            <a:fld id="{8B4C9E33-6753-472F-9C09-83153B974C9D}" type="slidenum">
+              <a:rPr lang="zh-CN" altLang="en-US" smtClean="0"/>
+              <a:t>22</a:t>
+            </a:fld>
+            <a:endParaRPr lang="zh-CN" altLang="en-US" dirty="0"/>
+          </a:p>
+        </p:txBody>
+      </p:sp>
+      <p:pic>
+        <p:nvPicPr>
+          <p:cNvPr id="6" name="Picture 5" descr="Rabbit - Free animals icons">
+            <a:extLst>
+              <a:ext uri="{FF2B5EF4-FFF2-40B4-BE49-F238E27FC236}">
+                <a16:creationId xmlns:a16="http://schemas.microsoft.com/office/drawing/2014/main" id="{6323FE73-2EBD-6C52-3F59-3B4A6B1E89FA}"/>
+              </a:ext>
+            </a:extLst>
+          </p:cNvPr>
+          <p:cNvPicPr>
+            <a:picLocks noChangeAspect="1"/>
+          </p:cNvPicPr>
+          <p:nvPr/>
+        </p:nvPicPr>
+        <p:blipFill>
+          <a:blip r:embed="rId2"/>
+          <a:stretch>
+            <a:fillRect/>
+          </a:stretch>
+        </p:blipFill>
+        <p:spPr>
+          <a:xfrm>
+            <a:off x="7449681" y="365125"/>
+            <a:ext cx="1091610" cy="1091610"/>
+          </a:xfrm>
+          <a:prstGeom prst="rect">
+            <a:avLst/>
+          </a:prstGeom>
+        </p:spPr>
+      </p:pic>
+      <p:sp>
+        <p:nvSpPr>
+          <p:cNvPr id="7" name="TextBox 6">
+            <a:extLst>
+              <a:ext uri="{FF2B5EF4-FFF2-40B4-BE49-F238E27FC236}">
+                <a16:creationId xmlns:a16="http://schemas.microsoft.com/office/drawing/2014/main" id="{09109DD5-1942-203F-C427-D87D6AA38987}"/>
+              </a:ext>
+            </a:extLst>
+          </p:cNvPr>
+          <p:cNvSpPr txBox="1"/>
+          <p:nvPr/>
+        </p:nvSpPr>
+        <p:spPr>
+          <a:xfrm>
+            <a:off x="1148317" y="2204991"/>
+            <a:ext cx="2893741" cy="646331"/>
+          </a:xfrm>
+          <a:prstGeom prst="rect">
+            <a:avLst/>
+          </a:prstGeom>
+          <a:noFill/>
+        </p:spPr>
+        <p:txBody>
+          <a:bodyPr wrap="none" rtlCol="0">
+            <a:spAutoFit/>
+          </a:bodyPr>
+          <a:lstStyle/>
+          <a:p>
+            <a:r>
+              <a:rPr lang="en-US" sz="3600" dirty="0"/>
+              <a:t>“It’s in box B.”</a:t>
+            </a:r>
+          </a:p>
+        </p:txBody>
+      </p:sp>
+      <p:sp>
+        <p:nvSpPr>
+          <p:cNvPr id="9" name="TextBox 8">
+            <a:extLst>
+              <a:ext uri="{FF2B5EF4-FFF2-40B4-BE49-F238E27FC236}">
+                <a16:creationId xmlns:a16="http://schemas.microsoft.com/office/drawing/2014/main" id="{1A3C30E8-29A5-EEEA-3353-CA36F6D79096}"/>
+              </a:ext>
+            </a:extLst>
+          </p:cNvPr>
+          <p:cNvSpPr txBox="1"/>
+          <p:nvPr/>
+        </p:nvSpPr>
+        <p:spPr>
+          <a:xfrm>
+            <a:off x="4453380" y="2204991"/>
+            <a:ext cx="3873176" cy="646331"/>
+          </a:xfrm>
+          <a:prstGeom prst="rect">
+            <a:avLst/>
+          </a:prstGeom>
+          <a:noFill/>
+        </p:spPr>
+        <p:txBody>
+          <a:bodyPr wrap="none" rtlCol="0">
+            <a:spAutoFit/>
+          </a:bodyPr>
+          <a:lstStyle/>
+          <a:p>
+            <a:r>
+              <a:rPr lang="en-US" sz="3600" b="1" dirty="0">
+                <a:solidFill>
+                  <a:srgbClr val="00B050"/>
+                </a:solidFill>
+              </a:rPr>
+              <a:t>“It’s not in box B”</a:t>
+            </a:r>
+          </a:p>
+        </p:txBody>
+      </p:sp>
+      <p:sp>
+        <p:nvSpPr>
+          <p:cNvPr id="11" name="TextBox 10">
+            <a:extLst>
+              <a:ext uri="{FF2B5EF4-FFF2-40B4-BE49-F238E27FC236}">
+                <a16:creationId xmlns:a16="http://schemas.microsoft.com/office/drawing/2014/main" id="{A7861611-898B-14D8-AEBC-204F2EAD0687}"/>
+              </a:ext>
+            </a:extLst>
+          </p:cNvPr>
+          <p:cNvSpPr txBox="1"/>
+          <p:nvPr/>
+        </p:nvSpPr>
+        <p:spPr>
+          <a:xfrm>
+            <a:off x="8326556" y="2216554"/>
+            <a:ext cx="3619902" cy="646331"/>
+          </a:xfrm>
+          <a:prstGeom prst="rect">
+            <a:avLst/>
+          </a:prstGeom>
+          <a:noFill/>
+        </p:spPr>
+        <p:txBody>
+          <a:bodyPr wrap="none" rtlCol="0">
+            <a:spAutoFit/>
+          </a:bodyPr>
+          <a:lstStyle/>
+          <a:p>
+            <a:r>
+              <a:rPr lang="en-US" sz="3600" dirty="0"/>
+              <a:t>“It’s not in box A”</a:t>
+            </a:r>
+          </a:p>
+        </p:txBody>
+      </p:sp>
+      <p:sp>
+        <p:nvSpPr>
+          <p:cNvPr id="8" name="TextBox 7">
+            <a:extLst>
+              <a:ext uri="{FF2B5EF4-FFF2-40B4-BE49-F238E27FC236}">
+                <a16:creationId xmlns:a16="http://schemas.microsoft.com/office/drawing/2014/main" id="{02FC0447-9A99-1073-72DA-EE930A4D496C}"/>
+              </a:ext>
+            </a:extLst>
+          </p:cNvPr>
+          <p:cNvSpPr txBox="1"/>
+          <p:nvPr/>
+        </p:nvSpPr>
+        <p:spPr>
+          <a:xfrm>
+            <a:off x="1363899" y="3427179"/>
+            <a:ext cx="9183599" cy="3046988"/>
+          </a:xfrm>
+          <a:prstGeom prst="rect">
+            <a:avLst/>
+          </a:prstGeom>
+          <a:noFill/>
+        </p:spPr>
+        <p:txBody>
+          <a:bodyPr wrap="square" rtlCol="0">
+            <a:spAutoFit/>
+          </a:bodyPr>
+          <a:lstStyle/>
+          <a:p>
+            <a:pPr marL="457200" indent="-457200">
+              <a:buFont typeface="Arial" panose="020B0604020202020204" pitchFamily="34" charset="0"/>
+              <a:buChar char="•"/>
+            </a:pPr>
+            <a:r>
+              <a:rPr lang="en-US" sz="3200" i="1" dirty="0">
+                <a:latin typeface="Calibri" panose="020F0502020204030204" pitchFamily="34" charset="0"/>
+                <a:cs typeface="Calibri" panose="020F0502020204030204" pitchFamily="34" charset="0"/>
+              </a:rPr>
+              <a:t>Can’t be B, otherwise 1</a:t>
+            </a:r>
+            <a:r>
+              <a:rPr lang="en-US" sz="3200" i="1" baseline="30000" dirty="0">
+                <a:latin typeface="Calibri" panose="020F0502020204030204" pitchFamily="34" charset="0"/>
+                <a:cs typeface="Calibri" panose="020F0502020204030204" pitchFamily="34" charset="0"/>
+              </a:rPr>
+              <a:t>st</a:t>
+            </a:r>
+            <a:r>
+              <a:rPr lang="en-US" sz="3200" i="1" dirty="0">
+                <a:latin typeface="Calibri" panose="020F0502020204030204" pitchFamily="34" charset="0"/>
+                <a:cs typeface="Calibri" panose="020F0502020204030204" pitchFamily="34" charset="0"/>
+              </a:rPr>
+              <a:t> and 3</a:t>
+            </a:r>
+            <a:r>
+              <a:rPr lang="en-US" sz="3200" i="1" baseline="30000" dirty="0">
+                <a:latin typeface="Calibri" panose="020F0502020204030204" pitchFamily="34" charset="0"/>
+                <a:cs typeface="Calibri" panose="020F0502020204030204" pitchFamily="34" charset="0"/>
+              </a:rPr>
+              <a:t>rd</a:t>
+            </a:r>
+            <a:r>
+              <a:rPr lang="en-US" sz="3200" i="1" dirty="0">
+                <a:latin typeface="Calibri" panose="020F0502020204030204" pitchFamily="34" charset="0"/>
+                <a:cs typeface="Calibri" panose="020F0502020204030204" pitchFamily="34" charset="0"/>
+              </a:rPr>
+              <a:t>  are both right.</a:t>
+            </a:r>
+          </a:p>
+          <a:p>
+            <a:pPr marL="457200" indent="-457200">
+              <a:buFont typeface="Arial" panose="020B0604020202020204" pitchFamily="34" charset="0"/>
+              <a:buChar char="•"/>
+            </a:pPr>
+            <a:r>
+              <a:rPr lang="en-US" sz="3200" i="1" dirty="0">
+                <a:latin typeface="Calibri" panose="020F0502020204030204" pitchFamily="34" charset="0"/>
+                <a:cs typeface="Calibri" panose="020F0502020204030204" pitchFamily="34" charset="0"/>
+              </a:rPr>
+              <a:t>Can’t be C, otherwise 2</a:t>
+            </a:r>
+            <a:r>
+              <a:rPr lang="en-US" sz="3200" i="1" baseline="30000" dirty="0">
+                <a:latin typeface="Calibri" panose="020F0502020204030204" pitchFamily="34" charset="0"/>
+                <a:cs typeface="Calibri" panose="020F0502020204030204" pitchFamily="34" charset="0"/>
+              </a:rPr>
+              <a:t>nd</a:t>
+            </a:r>
+            <a:r>
+              <a:rPr lang="en-US" sz="3200" i="1" dirty="0">
+                <a:latin typeface="Calibri" panose="020F0502020204030204" pitchFamily="34" charset="0"/>
+                <a:cs typeface="Calibri" panose="020F0502020204030204" pitchFamily="34" charset="0"/>
+              </a:rPr>
+              <a:t> and 3</a:t>
+            </a:r>
+            <a:r>
+              <a:rPr lang="en-US" sz="3200" i="1" baseline="30000" dirty="0">
+                <a:latin typeface="Calibri" panose="020F0502020204030204" pitchFamily="34" charset="0"/>
+                <a:cs typeface="Calibri" panose="020F0502020204030204" pitchFamily="34" charset="0"/>
+              </a:rPr>
+              <a:t>rd</a:t>
+            </a:r>
+            <a:r>
+              <a:rPr lang="en-US" sz="3200" i="1" dirty="0">
+                <a:latin typeface="Calibri" panose="020F0502020204030204" pitchFamily="34" charset="0"/>
+                <a:cs typeface="Calibri" panose="020F0502020204030204" pitchFamily="34" charset="0"/>
+              </a:rPr>
+              <a:t> are both right.</a:t>
+            </a:r>
+          </a:p>
+          <a:p>
+            <a:pPr marL="457200" indent="-457200">
+              <a:buFont typeface="Arial" panose="020B0604020202020204" pitchFamily="34" charset="0"/>
+              <a:buChar char="•"/>
+            </a:pPr>
+            <a:r>
+              <a:rPr lang="en-US" sz="3200" i="1" dirty="0">
+                <a:latin typeface="Calibri" panose="020F0502020204030204" pitchFamily="34" charset="0"/>
+                <a:cs typeface="Calibri" panose="020F0502020204030204" pitchFamily="34" charset="0"/>
+              </a:rPr>
+              <a:t>In A – only 2</a:t>
+            </a:r>
+            <a:r>
+              <a:rPr lang="en-US" sz="3200" i="1" baseline="30000" dirty="0">
+                <a:latin typeface="Calibri" panose="020F0502020204030204" pitchFamily="34" charset="0"/>
+                <a:cs typeface="Calibri" panose="020F0502020204030204" pitchFamily="34" charset="0"/>
+              </a:rPr>
+              <a:t>nd</a:t>
+            </a:r>
+            <a:r>
+              <a:rPr lang="en-US" sz="3200" i="1" dirty="0">
+                <a:latin typeface="Calibri" panose="020F0502020204030204" pitchFamily="34" charset="0"/>
+                <a:cs typeface="Calibri" panose="020F0502020204030204" pitchFamily="34" charset="0"/>
+              </a:rPr>
+              <a:t> is right.</a:t>
+            </a:r>
+          </a:p>
+          <a:p>
+            <a:pPr marL="457200" indent="-457200">
+              <a:buFont typeface="Arial" panose="020B0604020202020204" pitchFamily="34" charset="0"/>
+              <a:buChar char="•"/>
+            </a:pPr>
+            <a:endParaRPr lang="en-US" sz="3200" i="1" dirty="0">
+              <a:latin typeface="Calibri" panose="020F0502020204030204" pitchFamily="34" charset="0"/>
+              <a:cs typeface="Calibri" panose="020F0502020204030204" pitchFamily="34" charset="0"/>
+            </a:endParaRPr>
+          </a:p>
+          <a:p>
+            <a:pPr marL="457200" indent="-457200">
+              <a:buFont typeface="Arial" panose="020B0604020202020204" pitchFamily="34" charset="0"/>
+              <a:buChar char="•"/>
+            </a:pPr>
+            <a:r>
+              <a:rPr lang="en-US" sz="3200" i="1" dirty="0">
+                <a:latin typeface="Calibri" panose="020F0502020204030204" pitchFamily="34" charset="0"/>
+                <a:cs typeface="Calibri" panose="020F0502020204030204" pitchFamily="34" charset="0"/>
+              </a:rPr>
+              <a:t>In the class, you will see how we can use formal logic to solve this</a:t>
+            </a:r>
+          </a:p>
+        </p:txBody>
+      </p:sp>
+    </p:spTree>
+    <p:extLst>
+      <p:ext uri="{BB962C8B-B14F-4D97-AF65-F5344CB8AC3E}">
+        <p14:creationId xmlns:p14="http://schemas.microsoft.com/office/powerpoint/2010/main" val="3593792548"/>
+      </p:ext>
+    </p:extLst>
+  </p:cSld>
+  <p:clrMapOvr>
+    <a:masterClrMapping/>
+  </p:clrMapOvr>
+  <p:timing>
+    <p:tnLst>
+      <p:par>
+        <p:cTn id="1" dur="indefinite" restart="never" nodeType="tmRoot">
+          <p:childTnLst>
+            <p:seq concurrent="1" nextAc="seek">
+              <p:cTn id="2" dur="indefinite" nodeType="mainSeq">
+                <p:childTnLst>
+                  <p:par>
+                    <p:cTn id="3" fill="hold">
+                      <p:stCondLst>
+                        <p:cond delay="indefinite"/>
+                      </p:stCondLst>
+                      <p:childTnLst>
+                        <p:par>
+                          <p:cTn id="4" fill="hold">
+                            <p:stCondLst>
+                              <p:cond delay="0"/>
+                            </p:stCondLst>
+                            <p:childTnLst>
+                              <p:par>
+                                <p:cTn id="5" presetID="9" presetClass="entr" presetSubtype="0" fill="hold" nodeType="clickEffect">
+                                  <p:stCondLst>
+                                    <p:cond delay="0"/>
+                                  </p:stCondLst>
+                                  <p:childTnLst>
+                                    <p:set>
+                                      <p:cBhvr>
+                                        <p:cTn id="6" dur="1" fill="hold">
+                                          <p:stCondLst>
+                                            <p:cond delay="0"/>
+                                          </p:stCondLst>
+                                        </p:cTn>
+                                        <p:tgtEl>
+                                          <p:spTgt spid="8">
+                                            <p:txEl>
+                                              <p:pRg st="4" end="4"/>
+                                            </p:txEl>
+                                          </p:spTgt>
+                                        </p:tgtEl>
+                                        <p:attrNameLst>
+                                          <p:attrName>style.visibility</p:attrName>
+                                        </p:attrNameLst>
+                                      </p:cBhvr>
+                                      <p:to>
+                                        <p:strVal val="visible"/>
+                                      </p:to>
+                                    </p:set>
+                                    <p:animEffect transition="in" filter="dissolve">
+                                      <p:cBhvr>
+                                        <p:cTn id="7" dur="500"/>
+                                        <p:tgtEl>
+                                          <p:spTgt spid="8">
+                                            <p:txEl>
+                                              <p:pRg st="4" end="4"/>
+                                            </p:txEl>
+                                          </p:spTgt>
+                                        </p:tgtEl>
+                                      </p:cBhvr>
+                                    </p:animEffect>
+                                  </p:childTnLst>
+                                </p:cTn>
+                              </p:par>
+                            </p:childTnLst>
+                          </p:cTn>
+                        </p:par>
+                      </p:childTnLst>
+                    </p:cTn>
+                  </p:par>
+                </p:childTnLst>
+              </p:cTn>
+              <p:prevCondLst>
+                <p:cond evt="onPrev" delay="0">
+                  <p:tgtEl>
+                    <p:sldTgt/>
+                  </p:tgtEl>
+                </p:cond>
+              </p:prevCondLst>
+              <p:nextCondLst>
+                <p:cond evt="onNext" delay="0">
+                  <p:tgtEl>
+                    <p:sldTgt/>
+                  </p:tgtEl>
+                </p:cond>
+              </p:nextCondLst>
+            </p:seq>
+          </p:childTnLst>
+        </p:cTn>
+      </p:par>
+    </p:tnLst>
+  </p:timing>
+</p:sld>
+</file>
+
+<file path=ppt/slides/slide23.xml><?xml version="1.0" encoding="utf-8"?>
+<p:sld xmlns:a="http://schemas.openxmlformats.org/drawingml/2006/main" xmlns:r="http://schemas.openxmlformats.org/officeDocument/2006/relationships" xmlns:p="http://schemas.openxmlformats.org/presentationml/2006/main">
+  <p:cSld>
+    <p:spTree>
+      <p:nvGrpSpPr>
+        <p:cNvPr id="1" name=""/>
+        <p:cNvGrpSpPr/>
+        <p:nvPr/>
+      </p:nvGrpSpPr>
+      <p:grpSpPr>
+        <a:xfrm>
+          <a:off x="0" y="0"/>
+          <a:ext cx="0" cy="0"/>
+          <a:chOff x="0" y="0"/>
+          <a:chExt cx="0" cy="0"/>
+        </a:xfrm>
+      </p:grpSpPr>
+      <p:sp>
+        <p:nvSpPr>
+          <p:cNvPr id="2" name="Title 1">
+            <a:extLst>
+              <a:ext uri="{FF2B5EF4-FFF2-40B4-BE49-F238E27FC236}">
+                <a16:creationId xmlns:a16="http://schemas.microsoft.com/office/drawing/2014/main" id="{B725D0AE-E0A2-14CF-30E3-B0D5522A54DC}"/>
+              </a:ext>
+            </a:extLst>
+          </p:cNvPr>
+          <p:cNvSpPr>
+            <a:spLocks noGrp="1"/>
+          </p:cNvSpPr>
+          <p:nvPr>
+            <p:ph type="title"/>
+          </p:nvPr>
+        </p:nvSpPr>
+        <p:spPr/>
+        <p:txBody>
+          <a:bodyPr/>
+          <a:lstStyle/>
+          <a:p>
+            <a:r>
+              <a:rPr lang="en-US" dirty="0">
+                <a:latin typeface="Calibri" panose="020F0502020204030204" pitchFamily="34" charset="0"/>
+                <a:cs typeface="Calibri" panose="020F0502020204030204" pitchFamily="34" charset="0"/>
+              </a:rPr>
+              <a:t>Chessboard problem</a:t>
+            </a:r>
+          </a:p>
+        </p:txBody>
+      </p:sp>
+      <p:sp>
+        <p:nvSpPr>
+          <p:cNvPr id="3" name="Content Placeholder 2">
+            <a:extLst>
+              <a:ext uri="{FF2B5EF4-FFF2-40B4-BE49-F238E27FC236}">
+                <a16:creationId xmlns:a16="http://schemas.microsoft.com/office/drawing/2014/main" id="{3B16024D-925C-AE71-1737-4A958340F1E4}"/>
+              </a:ext>
+            </a:extLst>
+          </p:cNvPr>
+          <p:cNvSpPr>
+            <a:spLocks noGrp="1"/>
+          </p:cNvSpPr>
+          <p:nvPr>
+            <p:ph idx="1"/>
+          </p:nvPr>
+        </p:nvSpPr>
+        <p:spPr>
+          <a:xfrm>
+            <a:off x="838200" y="1825625"/>
+            <a:ext cx="6926705" cy="4351338"/>
+          </a:xfrm>
+        </p:spPr>
+        <p:txBody>
+          <a:bodyPr/>
+          <a:lstStyle/>
+          <a:p>
+            <a:r>
+              <a:rPr lang="en-US" dirty="0"/>
+              <a:t>Suppose a 8x8 chessboard has two diagonally opposite corners removed, leaving 62 squares.</a:t>
+            </a:r>
+          </a:p>
+          <a:p>
+            <a:endParaRPr lang="en-US" dirty="0"/>
+          </a:p>
+          <a:p>
+            <a:r>
+              <a:rPr lang="en-US" dirty="0"/>
+              <a:t>Can you cover the remaining board with 1x2 (or 2x1) dominos? </a:t>
+            </a:r>
+          </a:p>
+          <a:p>
+            <a:endParaRPr lang="en-US" dirty="0"/>
+          </a:p>
+        </p:txBody>
+      </p:sp>
+      <p:sp>
+        <p:nvSpPr>
+          <p:cNvPr id="4" name="Slide Number Placeholder 3">
+            <a:extLst>
+              <a:ext uri="{FF2B5EF4-FFF2-40B4-BE49-F238E27FC236}">
+                <a16:creationId xmlns:a16="http://schemas.microsoft.com/office/drawing/2014/main" id="{4037CDA2-972E-6ADA-76B5-C4C1E938F4F1}"/>
+              </a:ext>
+            </a:extLst>
+          </p:cNvPr>
+          <p:cNvSpPr>
+            <a:spLocks noGrp="1"/>
+          </p:cNvSpPr>
+          <p:nvPr>
+            <p:ph type="sldNum" sz="quarter" idx="12"/>
+          </p:nvPr>
+        </p:nvSpPr>
+        <p:spPr/>
+        <p:txBody>
+          <a:bodyPr/>
+          <a:lstStyle/>
+          <a:p>
+            <a:fld id="{8B4C9E33-6753-472F-9C09-83153B974C9D}" type="slidenum">
+              <a:rPr lang="zh-CN" altLang="en-US" smtClean="0"/>
+              <a:t>23</a:t>
+            </a:fld>
+            <a:endParaRPr lang="zh-CN" altLang="en-US"/>
+          </a:p>
+        </p:txBody>
+      </p:sp>
+      <p:pic>
+        <p:nvPicPr>
+          <p:cNvPr id="5" name="Picture 4">
+            <a:extLst>
+              <a:ext uri="{FF2B5EF4-FFF2-40B4-BE49-F238E27FC236}">
+                <a16:creationId xmlns:a16="http://schemas.microsoft.com/office/drawing/2014/main" id="{7BD6AC29-EB8B-3FBA-CA80-6C2D94DC3E73}"/>
+              </a:ext>
+            </a:extLst>
+          </p:cNvPr>
+          <p:cNvPicPr>
+            <a:picLocks noChangeAspect="1"/>
+          </p:cNvPicPr>
+          <p:nvPr/>
+        </p:nvPicPr>
+        <p:blipFill>
+          <a:blip r:embed="rId2"/>
+          <a:stretch>
+            <a:fillRect/>
+          </a:stretch>
+        </p:blipFill>
+        <p:spPr>
+          <a:xfrm>
+            <a:off x="7625726" y="1885547"/>
+            <a:ext cx="4231494" cy="4231494"/>
+          </a:xfrm>
+          <a:prstGeom prst="rect">
+            <a:avLst/>
+          </a:prstGeom>
+        </p:spPr>
+      </p:pic>
+      <p:pic>
+        <p:nvPicPr>
+          <p:cNvPr id="7" name="Picture 6">
+            <a:extLst>
+              <a:ext uri="{FF2B5EF4-FFF2-40B4-BE49-F238E27FC236}">
+                <a16:creationId xmlns:a16="http://schemas.microsoft.com/office/drawing/2014/main" id="{E57AEF0C-DDA4-7E7C-B12C-2490C52E02F0}"/>
+              </a:ext>
+            </a:extLst>
+          </p:cNvPr>
+          <p:cNvPicPr>
+            <a:picLocks noChangeAspect="1"/>
+          </p:cNvPicPr>
+          <p:nvPr/>
+        </p:nvPicPr>
+        <p:blipFill>
+          <a:blip r:embed="rId3">
+            <a:extLst>
+              <a:ext uri="{28A0092B-C50C-407E-A947-70E740481C1C}">
+                <a14:useLocalDpi xmlns:a14="http://schemas.microsoft.com/office/drawing/2010/main" val="0"/>
+              </a:ext>
+            </a:extLst>
+          </a:blip>
+          <a:stretch>
+            <a:fillRect/>
+          </a:stretch>
+        </p:blipFill>
+        <p:spPr>
+          <a:xfrm>
+            <a:off x="5499690" y="5071556"/>
+            <a:ext cx="1986518" cy="1229158"/>
+          </a:xfrm>
+          <a:prstGeom prst="rect">
+            <a:avLst/>
+          </a:prstGeom>
+        </p:spPr>
+      </p:pic>
+    </p:spTree>
+    <p:extLst>
+      <p:ext uri="{BB962C8B-B14F-4D97-AF65-F5344CB8AC3E}">
+        <p14:creationId xmlns:p14="http://schemas.microsoft.com/office/powerpoint/2010/main" val="4291667523"/>
+      </p:ext>
+    </p:extLst>
+  </p:cSld>
+  <p:clrMapOvr>
+    <a:masterClrMapping/>
+  </p:clrMapOvr>
+</p:sld>
+</file>
+
+<file path=ppt/slides/slide24.xml><?xml version="1.0" encoding="utf-8"?>
+<p:sld xmlns:a="http://schemas.openxmlformats.org/drawingml/2006/main" xmlns:r="http://schemas.openxmlformats.org/officeDocument/2006/relationships" xmlns:p="http://schemas.openxmlformats.org/presentationml/2006/main">
+  <p:cSld>
+    <p:spTree>
+      <p:nvGrpSpPr>
+        <p:cNvPr id="1" name="">
+          <a:extLst>
+            <a:ext uri="{FF2B5EF4-FFF2-40B4-BE49-F238E27FC236}">
+              <a16:creationId xmlns:a16="http://schemas.microsoft.com/office/drawing/2014/main" id="{A6DFE8C4-EF1D-1066-F9DF-B2E1527657FC}"/>
+            </a:ext>
+          </a:extLst>
+        </p:cNvPr>
+        <p:cNvGrpSpPr/>
+        <p:nvPr/>
+      </p:nvGrpSpPr>
+      <p:grpSpPr>
+        <a:xfrm>
+          <a:off x="0" y="0"/>
+          <a:ext cx="0" cy="0"/>
+          <a:chOff x="0" y="0"/>
+          <a:chExt cx="0" cy="0"/>
+        </a:xfrm>
+      </p:grpSpPr>
+      <p:sp>
+        <p:nvSpPr>
+          <p:cNvPr id="2" name="Title 1">
+            <a:extLst>
+              <a:ext uri="{FF2B5EF4-FFF2-40B4-BE49-F238E27FC236}">
+                <a16:creationId xmlns:a16="http://schemas.microsoft.com/office/drawing/2014/main" id="{4BC7807F-D249-B61E-024A-A2B583D63DC7}"/>
+              </a:ext>
+            </a:extLst>
+          </p:cNvPr>
+          <p:cNvSpPr>
+            <a:spLocks noGrp="1"/>
+          </p:cNvSpPr>
+          <p:nvPr>
+            <p:ph type="title"/>
+          </p:nvPr>
+        </p:nvSpPr>
+        <p:spPr/>
+        <p:txBody>
+          <a:bodyPr/>
+          <a:lstStyle/>
+          <a:p>
+            <a:r>
+              <a:rPr lang="en-US" dirty="0">
+                <a:latin typeface="Calibri" panose="020F0502020204030204" pitchFamily="34" charset="0"/>
+                <a:cs typeface="Calibri" panose="020F0502020204030204" pitchFamily="34" charset="0"/>
+              </a:rPr>
+              <a:t>Chessboard problem</a:t>
+            </a:r>
+          </a:p>
+        </p:txBody>
+      </p:sp>
+      <p:sp>
+        <p:nvSpPr>
+          <p:cNvPr id="3" name="Content Placeholder 2">
+            <a:extLst>
+              <a:ext uri="{FF2B5EF4-FFF2-40B4-BE49-F238E27FC236}">
+                <a16:creationId xmlns:a16="http://schemas.microsoft.com/office/drawing/2014/main" id="{6B9F4EAA-A4FB-0FA1-82E0-0825D26CA2BB}"/>
+              </a:ext>
+            </a:extLst>
+          </p:cNvPr>
+          <p:cNvSpPr>
+            <a:spLocks noGrp="1"/>
+          </p:cNvSpPr>
+          <p:nvPr>
+            <p:ph idx="1"/>
+          </p:nvPr>
+        </p:nvSpPr>
+        <p:spPr>
+          <a:xfrm>
+            <a:off x="838200" y="1825625"/>
+            <a:ext cx="6926705" cy="4351338"/>
+          </a:xfrm>
+        </p:spPr>
+        <p:txBody>
+          <a:bodyPr/>
+          <a:lstStyle/>
+          <a:p>
+            <a:r>
+              <a:rPr lang="en-US" dirty="0"/>
+              <a:t>No – because each domino covers exactly two opposite-color grid. </a:t>
+            </a:r>
+          </a:p>
+          <a:p>
+            <a:endParaRPr lang="en-US" dirty="0"/>
+          </a:p>
+          <a:p>
+            <a:r>
+              <a:rPr lang="en-US" dirty="0"/>
+              <a:t>The remaining 62 squares has 30 light-color grids and 32 black grids.</a:t>
+            </a:r>
+          </a:p>
+          <a:p>
+            <a:endParaRPr lang="en-US" dirty="0"/>
+          </a:p>
+          <a:p>
+            <a:r>
+              <a:rPr lang="en-US" dirty="0"/>
+              <a:t>Never balance! </a:t>
+            </a:r>
+          </a:p>
+          <a:p>
+            <a:endParaRPr lang="en-US" dirty="0"/>
+          </a:p>
+        </p:txBody>
+      </p:sp>
+      <p:sp>
+        <p:nvSpPr>
+          <p:cNvPr id="4" name="Slide Number Placeholder 3">
+            <a:extLst>
+              <a:ext uri="{FF2B5EF4-FFF2-40B4-BE49-F238E27FC236}">
+                <a16:creationId xmlns:a16="http://schemas.microsoft.com/office/drawing/2014/main" id="{3765A17D-E831-F50E-A141-03C33E5BE1BE}"/>
+              </a:ext>
+            </a:extLst>
+          </p:cNvPr>
+          <p:cNvSpPr>
+            <a:spLocks noGrp="1"/>
+          </p:cNvSpPr>
+          <p:nvPr>
+            <p:ph type="sldNum" sz="quarter" idx="12"/>
+          </p:nvPr>
+        </p:nvSpPr>
+        <p:spPr/>
+        <p:txBody>
+          <a:bodyPr/>
+          <a:lstStyle/>
+          <a:p>
+            <a:fld id="{8B4C9E33-6753-472F-9C09-83153B974C9D}" type="slidenum">
+              <a:rPr lang="zh-CN" altLang="en-US" smtClean="0"/>
+              <a:t>24</a:t>
+            </a:fld>
+            <a:endParaRPr lang="zh-CN" altLang="en-US"/>
+          </a:p>
+        </p:txBody>
+      </p:sp>
+      <p:pic>
+        <p:nvPicPr>
+          <p:cNvPr id="5" name="Picture 4">
+            <a:extLst>
+              <a:ext uri="{FF2B5EF4-FFF2-40B4-BE49-F238E27FC236}">
+                <a16:creationId xmlns:a16="http://schemas.microsoft.com/office/drawing/2014/main" id="{5757DAE6-3ADA-61EC-C780-56EC0D75334D}"/>
+              </a:ext>
+            </a:extLst>
+          </p:cNvPr>
+          <p:cNvPicPr>
+            <a:picLocks noChangeAspect="1"/>
+          </p:cNvPicPr>
+          <p:nvPr/>
+        </p:nvPicPr>
+        <p:blipFill>
+          <a:blip r:embed="rId2"/>
+          <a:stretch>
+            <a:fillRect/>
+          </a:stretch>
+        </p:blipFill>
+        <p:spPr>
+          <a:xfrm>
+            <a:off x="7625726" y="1885547"/>
+            <a:ext cx="4231494" cy="4231494"/>
+          </a:xfrm>
+          <a:prstGeom prst="rect">
+            <a:avLst/>
+          </a:prstGeom>
+        </p:spPr>
+      </p:pic>
+      <p:pic>
+        <p:nvPicPr>
+          <p:cNvPr id="7" name="Picture 6">
+            <a:extLst>
+              <a:ext uri="{FF2B5EF4-FFF2-40B4-BE49-F238E27FC236}">
+                <a16:creationId xmlns:a16="http://schemas.microsoft.com/office/drawing/2014/main" id="{87CFE2B5-6E66-5D0C-EDBF-2B55D8708B9E}"/>
+              </a:ext>
+            </a:extLst>
+          </p:cNvPr>
+          <p:cNvPicPr>
+            <a:picLocks noChangeAspect="1"/>
+          </p:cNvPicPr>
+          <p:nvPr/>
+        </p:nvPicPr>
+        <p:blipFill>
+          <a:blip r:embed="rId3">
+            <a:extLst>
+              <a:ext uri="{28A0092B-C50C-407E-A947-70E740481C1C}">
+                <a14:useLocalDpi xmlns:a14="http://schemas.microsoft.com/office/drawing/2010/main" val="0"/>
+              </a:ext>
+            </a:extLst>
+          </a:blip>
+          <a:stretch>
+            <a:fillRect/>
+          </a:stretch>
+        </p:blipFill>
+        <p:spPr>
+          <a:xfrm>
+            <a:off x="5499690" y="5071556"/>
+            <a:ext cx="1986518" cy="1229158"/>
+          </a:xfrm>
+          <a:prstGeom prst="rect">
+            <a:avLst/>
+          </a:prstGeom>
+        </p:spPr>
+      </p:pic>
+    </p:spTree>
+    <p:extLst>
+      <p:ext uri="{BB962C8B-B14F-4D97-AF65-F5344CB8AC3E}">
+        <p14:creationId xmlns:p14="http://schemas.microsoft.com/office/powerpoint/2010/main" val="1510048797"/>
+      </p:ext>
+    </p:extLst>
+  </p:cSld>
+  <p:clrMapOvr>
+    <a:masterClrMapping/>
+  </p:clrMapOvr>
+</p:sld>
+</file>
+
+<file path=ppt/slides/slide25.xml><?xml version="1.0" encoding="utf-8"?>
+<p:sld xmlns:a="http://schemas.openxmlformats.org/drawingml/2006/main" xmlns:r="http://schemas.openxmlformats.org/officeDocument/2006/relationships" xmlns:p="http://schemas.openxmlformats.org/presentationml/2006/main">
+  <p:cSld>
+    <p:spTree>
+      <p:nvGrpSpPr>
+        <p:cNvPr id="1" name="">
+          <a:extLst>
+            <a:ext uri="{FF2B5EF4-FFF2-40B4-BE49-F238E27FC236}">
+              <a16:creationId xmlns:a16="http://schemas.microsoft.com/office/drawing/2014/main" id="{A1C7E835-22F1-0939-BAE4-C6D6789630D4}"/>
+            </a:ext>
+          </a:extLst>
+        </p:cNvPr>
+        <p:cNvGrpSpPr/>
+        <p:nvPr/>
+      </p:nvGrpSpPr>
+      <p:grpSpPr>
+        <a:xfrm>
+          <a:off x="0" y="0"/>
+          <a:ext cx="0" cy="0"/>
+          <a:chOff x="0" y="0"/>
+          <a:chExt cx="0" cy="0"/>
+        </a:xfrm>
+      </p:grpSpPr>
+      <p:sp>
+        <p:nvSpPr>
+          <p:cNvPr id="2" name="Title 1">
+            <a:extLst>
+              <a:ext uri="{FF2B5EF4-FFF2-40B4-BE49-F238E27FC236}">
+                <a16:creationId xmlns:a16="http://schemas.microsoft.com/office/drawing/2014/main" id="{B090F6CD-71A8-5D06-3174-3BB4E737D138}"/>
+              </a:ext>
+            </a:extLst>
+          </p:cNvPr>
+          <p:cNvSpPr>
+            <a:spLocks noGrp="1"/>
+          </p:cNvSpPr>
+          <p:nvPr>
+            <p:ph type="title"/>
+          </p:nvPr>
+        </p:nvSpPr>
+        <p:spPr/>
+        <p:txBody>
+          <a:bodyPr/>
+          <a:lstStyle/>
+          <a:p>
+            <a:r>
+              <a:rPr lang="en-US" dirty="0">
+                <a:latin typeface="Calibri" panose="020F0502020204030204" pitchFamily="34" charset="0"/>
+                <a:cs typeface="Calibri" panose="020F0502020204030204" pitchFamily="34" charset="0"/>
+              </a:rPr>
+              <a:t>Chessboard problem (continue)</a:t>
+            </a:r>
+          </a:p>
+        </p:txBody>
+      </p:sp>
+      <p:pic>
+        <p:nvPicPr>
+          <p:cNvPr id="6" name="Content Placeholder 5">
+            <a:extLst>
+              <a:ext uri="{FF2B5EF4-FFF2-40B4-BE49-F238E27FC236}">
+                <a16:creationId xmlns:a16="http://schemas.microsoft.com/office/drawing/2014/main" id="{5DBE74FB-BC13-84C0-CFCB-79A89A144317}"/>
+              </a:ext>
+            </a:extLst>
+          </p:cNvPr>
+          <p:cNvPicPr>
+            <a:picLocks noGrp="1" noChangeAspect="1"/>
+          </p:cNvPicPr>
+          <p:nvPr>
+            <p:ph idx="1"/>
+          </p:nvPr>
+        </p:nvPicPr>
+        <p:blipFill>
+          <a:blip r:embed="rId3"/>
+          <a:stretch>
+            <a:fillRect/>
+          </a:stretch>
+        </p:blipFill>
+        <p:spPr>
+          <a:xfrm>
+            <a:off x="7199701" y="2891562"/>
+            <a:ext cx="4677506" cy="2263913"/>
+          </a:xfrm>
+          <a:prstGeom prst="rect">
+            <a:avLst/>
+          </a:prstGeom>
+        </p:spPr>
+      </p:pic>
+      <p:sp>
+        <p:nvSpPr>
+          <p:cNvPr id="4" name="Slide Number Placeholder 3">
+            <a:extLst>
+              <a:ext uri="{FF2B5EF4-FFF2-40B4-BE49-F238E27FC236}">
+                <a16:creationId xmlns:a16="http://schemas.microsoft.com/office/drawing/2014/main" id="{E76C7001-0374-03FD-9457-DCE9055CBEE3}"/>
+              </a:ext>
+            </a:extLst>
+          </p:cNvPr>
+          <p:cNvSpPr>
+            <a:spLocks noGrp="1"/>
+          </p:cNvSpPr>
+          <p:nvPr>
+            <p:ph type="sldNum" sz="quarter" idx="12"/>
+          </p:nvPr>
+        </p:nvSpPr>
+        <p:spPr/>
+        <p:txBody>
+          <a:bodyPr/>
+          <a:lstStyle/>
+          <a:p>
+            <a:fld id="{8B4C9E33-6753-472F-9C09-83153B974C9D}" type="slidenum">
+              <a:rPr lang="zh-CN" altLang="en-US" smtClean="0"/>
+              <a:t>25</a:t>
+            </a:fld>
+            <a:endParaRPr lang="zh-CN" altLang="en-US" dirty="0"/>
+          </a:p>
+        </p:txBody>
+      </p:sp>
+      <p:sp>
+        <p:nvSpPr>
+          <p:cNvPr id="9" name="Content Placeholder 2">
+            <a:extLst>
+              <a:ext uri="{FF2B5EF4-FFF2-40B4-BE49-F238E27FC236}">
+                <a16:creationId xmlns:a16="http://schemas.microsoft.com/office/drawing/2014/main" id="{9F3C46A4-429B-9C3E-9DFE-B1CFCC41266D}"/>
+              </a:ext>
+            </a:extLst>
+          </p:cNvPr>
+          <p:cNvSpPr txBox="1">
+            <a:spLocks/>
+          </p:cNvSpPr>
+          <p:nvPr/>
+        </p:nvSpPr>
+        <p:spPr>
+          <a:xfrm>
+            <a:off x="838200" y="1825625"/>
+            <a:ext cx="5862403" cy="4351338"/>
+          </a:xfrm>
+          <a:prstGeom prst="rect">
+            <a:avLst/>
+          </a:prstGeom>
+        </p:spPr>
+        <p:txBody>
+          <a:bodyPr vert="horz" lIns="91440" tIns="45720" rIns="91440" bIns="45720" rtlCol="0">
+            <a:normAutofit fontScale="92500" lnSpcReduction="20000"/>
+          </a:bodyPr>
+          <a:lstStyle>
+            <a:lvl1pPr marL="228600" indent="-228600" algn="l" defTabSz="914400" rtl="0" eaLnBrk="1" latinLnBrk="0" hangingPunct="1">
+              <a:lnSpc>
+                <a:spcPct val="90000"/>
+              </a:lnSpc>
+              <a:spcBef>
+                <a:spcPts val="1000"/>
+              </a:spcBef>
+              <a:buFont typeface="Arial" panose="020B0604020202090204" pitchFamily="34" charset="0"/>
+              <a:buChar char="•"/>
+              <a:defRPr sz="2800" kern="1200">
+                <a:solidFill>
+                  <a:schemeClr val="tx1"/>
+                </a:solidFill>
+                <a:latin typeface="+mn-lt"/>
+                <a:ea typeface="+mn-ea"/>
+                <a:cs typeface="+mn-cs"/>
+              </a:defRPr>
+            </a:lvl1pPr>
+            <a:lvl2pPr marL="685800" indent="-228600" algn="l" defTabSz="914400" rtl="0" eaLnBrk="1" latinLnBrk="0" hangingPunct="1">
+              <a:lnSpc>
+                <a:spcPct val="90000"/>
+              </a:lnSpc>
+              <a:spcBef>
+                <a:spcPts val="500"/>
+              </a:spcBef>
+              <a:buFont typeface="Arial" panose="020B0604020202090204" pitchFamily="34" charset="0"/>
+              <a:buChar char="•"/>
+              <a:defRPr sz="2400" kern="1200">
+                <a:solidFill>
+                  <a:schemeClr val="tx1"/>
+                </a:solidFill>
+                <a:latin typeface="+mn-lt"/>
+                <a:ea typeface="+mn-ea"/>
+                <a:cs typeface="+mn-cs"/>
+              </a:defRPr>
+            </a:lvl2pPr>
+            <a:lvl3pPr marL="1143000" indent="-228600" algn="l" defTabSz="914400" rtl="0" eaLnBrk="1" latinLnBrk="0" hangingPunct="1">
+              <a:lnSpc>
+                <a:spcPct val="90000"/>
+              </a:lnSpc>
+              <a:spcBef>
+                <a:spcPts val="500"/>
+              </a:spcBef>
+              <a:buFont typeface="Arial" panose="020B0604020202090204" pitchFamily="34" charset="0"/>
+              <a:buChar char="•"/>
+              <a:defRPr sz="2000" kern="1200">
+                <a:solidFill>
+                  <a:schemeClr val="tx1"/>
+                </a:solidFill>
+                <a:latin typeface="+mn-lt"/>
+                <a:ea typeface="+mn-ea"/>
+                <a:cs typeface="+mn-cs"/>
+              </a:defRPr>
+            </a:lvl3pPr>
+            <a:lvl4pPr marL="1600200" indent="-228600" algn="l" defTabSz="914400" rtl="0" eaLnBrk="1" latinLnBrk="0" hangingPunct="1">
+              <a:lnSpc>
+                <a:spcPct val="90000"/>
+              </a:lnSpc>
+              <a:spcBef>
+                <a:spcPts val="500"/>
+              </a:spcBef>
+              <a:buFont typeface="Arial" panose="020B0604020202090204" pitchFamily="34" charset="0"/>
+              <a:buChar char="•"/>
+              <a:defRPr sz="1800" kern="1200">
+                <a:solidFill>
+                  <a:schemeClr val="tx1"/>
+                </a:solidFill>
+                <a:latin typeface="+mn-lt"/>
+                <a:ea typeface="+mn-ea"/>
+                <a:cs typeface="+mn-cs"/>
+              </a:defRPr>
+            </a:lvl4pPr>
+            <a:lvl5pPr marL="2057400" indent="-228600" algn="l" defTabSz="914400" rtl="0" eaLnBrk="1" latinLnBrk="0" hangingPunct="1">
+              <a:lnSpc>
+                <a:spcPct val="90000"/>
+              </a:lnSpc>
+              <a:spcBef>
+                <a:spcPts val="500"/>
+              </a:spcBef>
+              <a:buFont typeface="Arial" panose="020B0604020202090204" pitchFamily="34" charset="0"/>
+              <a:buChar char="•"/>
+              <a:defRPr sz="1800" kern="1200">
+                <a:solidFill>
+                  <a:schemeClr val="tx1"/>
+                </a:solidFill>
+                <a:latin typeface="+mn-lt"/>
+                <a:ea typeface="+mn-ea"/>
+                <a:cs typeface="+mn-cs"/>
+              </a:defRPr>
+            </a:lvl5pPr>
+            <a:lvl6pPr marL="2514600" indent="-228600" algn="l" defTabSz="914400" rtl="0" eaLnBrk="1" latinLnBrk="0" hangingPunct="1">
+              <a:lnSpc>
+                <a:spcPct val="90000"/>
+              </a:lnSpc>
+              <a:spcBef>
+                <a:spcPts val="500"/>
+              </a:spcBef>
+              <a:buFont typeface="Arial" panose="020B0604020202090204" pitchFamily="34" charset="0"/>
+              <a:buChar char="•"/>
+              <a:defRPr sz="1800" kern="1200">
+                <a:solidFill>
+                  <a:schemeClr val="tx1"/>
+                </a:solidFill>
+                <a:latin typeface="+mn-lt"/>
+                <a:ea typeface="+mn-ea"/>
+                <a:cs typeface="+mn-cs"/>
+              </a:defRPr>
+            </a:lvl6pPr>
+            <a:lvl7pPr marL="2971800" indent="-228600" algn="l" defTabSz="914400" rtl="0" eaLnBrk="1" latinLnBrk="0" hangingPunct="1">
+              <a:lnSpc>
+                <a:spcPct val="90000"/>
+              </a:lnSpc>
+              <a:spcBef>
+                <a:spcPts val="500"/>
+              </a:spcBef>
+              <a:buFont typeface="Arial" panose="020B0604020202090204" pitchFamily="34" charset="0"/>
+              <a:buChar char="•"/>
+              <a:defRPr sz="1800" kern="1200">
+                <a:solidFill>
+                  <a:schemeClr val="tx1"/>
+                </a:solidFill>
+                <a:latin typeface="+mn-lt"/>
+                <a:ea typeface="+mn-ea"/>
+                <a:cs typeface="+mn-cs"/>
+              </a:defRPr>
+            </a:lvl7pPr>
+            <a:lvl8pPr marL="3429000" indent="-228600" algn="l" defTabSz="914400" rtl="0" eaLnBrk="1" latinLnBrk="0" hangingPunct="1">
+              <a:lnSpc>
+                <a:spcPct val="90000"/>
+              </a:lnSpc>
+              <a:spcBef>
+                <a:spcPts val="500"/>
+              </a:spcBef>
+              <a:buFont typeface="Arial" panose="020B0604020202090204" pitchFamily="34" charset="0"/>
+              <a:buChar char="•"/>
+              <a:defRPr sz="1800" kern="1200">
+                <a:solidFill>
+                  <a:schemeClr val="tx1"/>
+                </a:solidFill>
+                <a:latin typeface="+mn-lt"/>
+                <a:ea typeface="+mn-ea"/>
+                <a:cs typeface="+mn-cs"/>
+              </a:defRPr>
+            </a:lvl8pPr>
+            <a:lvl9pPr marL="3886200" indent="-228600" algn="l" defTabSz="914400" rtl="0" eaLnBrk="1" latinLnBrk="0" hangingPunct="1">
+              <a:lnSpc>
+                <a:spcPct val="90000"/>
+              </a:lnSpc>
+              <a:spcBef>
+                <a:spcPts val="500"/>
+              </a:spcBef>
+              <a:buFont typeface="Arial" panose="020B0604020202090204" pitchFamily="34" charset="0"/>
+              <a:buChar char="•"/>
+              <a:defRPr sz="1800" kern="1200">
+                <a:solidFill>
+                  <a:schemeClr val="tx1"/>
+                </a:solidFill>
+                <a:latin typeface="+mn-lt"/>
+                <a:ea typeface="+mn-ea"/>
+                <a:cs typeface="+mn-cs"/>
+              </a:defRPr>
+            </a:lvl9pPr>
+          </a:lstStyle>
+          <a:p>
+            <a:r>
+              <a:rPr lang="en-US" dirty="0"/>
+              <a:t>What if we remove two opposite color grids? Can we</a:t>
+            </a:r>
+            <a:r>
+              <a:rPr lang="zh-CN" altLang="en-US" dirty="0"/>
+              <a:t> </a:t>
+            </a:r>
+            <a:r>
+              <a:rPr lang="en-US" altLang="zh-CN" dirty="0"/>
+              <a:t>always</a:t>
+            </a:r>
+            <a:r>
+              <a:rPr lang="en-US" dirty="0"/>
+              <a:t> cover the remaining part?</a:t>
+            </a:r>
+          </a:p>
+          <a:p>
+            <a:pPr lvl="1"/>
+            <a:r>
+              <a:rPr lang="en-US" dirty="0">
+                <a:solidFill>
+                  <a:srgbClr val="C00000"/>
+                </a:solidFill>
+              </a:rPr>
+              <a:t>Yes – It’s called </a:t>
+            </a:r>
+            <a:r>
+              <a:rPr lang="en-US" b="1" dirty="0">
+                <a:solidFill>
+                  <a:srgbClr val="C00000"/>
+                </a:solidFill>
+              </a:rPr>
+              <a:t>Gomory's theorem and can be proved by simple graph theory </a:t>
+            </a:r>
+            <a:r>
+              <a:rPr lang="en-US" b="1" dirty="0">
+                <a:solidFill>
+                  <a:srgbClr val="C00000"/>
+                </a:solidFill>
+                <a:sym typeface="Wingdings" pitchFamily="2" charset="2"/>
+              </a:rPr>
+              <a:t></a:t>
+            </a:r>
+          </a:p>
+          <a:p>
+            <a:endParaRPr lang="en-US" b="1" dirty="0">
+              <a:sym typeface="Wingdings" pitchFamily="2" charset="2"/>
+            </a:endParaRPr>
+          </a:p>
+          <a:p>
+            <a:r>
+              <a:rPr lang="en-US" b="1" dirty="0">
+                <a:sym typeface="Wingdings" pitchFamily="2" charset="2"/>
+              </a:rPr>
+              <a:t>Chessboard can be covered by a Hamilton cycle.</a:t>
+            </a:r>
+          </a:p>
+          <a:p>
+            <a:r>
+              <a:rPr lang="en-US" b="1" dirty="0">
+                <a:sym typeface="Wingdings" pitchFamily="2" charset="2"/>
+              </a:rPr>
+              <a:t>Removing any two opposite color grids partitions the cycle into one or two “paths”.</a:t>
+            </a:r>
+          </a:p>
+          <a:p>
+            <a:r>
+              <a:rPr lang="en-US" b="1" dirty="0">
+                <a:sym typeface="Wingdings" pitchFamily="2" charset="2"/>
+              </a:rPr>
+              <a:t>Each path can be perfectly cover.</a:t>
+            </a:r>
+          </a:p>
+          <a:p>
+            <a:pPr marL="0" indent="0">
+              <a:buNone/>
+            </a:pPr>
+            <a:endParaRPr lang="en-US" dirty="0"/>
+          </a:p>
+          <a:p>
+            <a:endParaRPr lang="en-US" dirty="0"/>
+          </a:p>
+        </p:txBody>
+      </p:sp>
+    </p:spTree>
+    <p:extLst>
+      <p:ext uri="{BB962C8B-B14F-4D97-AF65-F5344CB8AC3E}">
+        <p14:creationId xmlns:p14="http://schemas.microsoft.com/office/powerpoint/2010/main" val="2081983499"/>
+      </p:ext>
+    </p:extLst>
+  </p:cSld>
+  <p:clrMapOvr>
+    <a:masterClrMapping/>
+  </p:clrMapOvr>
+  <p:timing>
+    <p:tnLst>
+      <p:par>
+        <p:cTn id="1" dur="indefinite" restart="never" nodeType="tmRoot">
+          <p:childTnLst>
+            <p:seq concurrent="1" nextAc="seek">
+              <p:cTn id="2" dur="indefinite" nodeType="mainSeq">
+                <p:childTnLst>
+                  <p:par>
+                    <p:cTn id="3" fill="hold">
+                      <p:stCondLst>
+                        <p:cond delay="indefinite"/>
+                      </p:stCondLst>
+                      <p:childTnLst>
+                        <p:par>
+                          <p:cTn id="4" fill="hold">
+                            <p:stCondLst>
+                              <p:cond delay="0"/>
+                            </p:stCondLst>
+                            <p:childTnLst>
+                              <p:par>
+                                <p:cTn id="5" presetID="9" presetClass="entr" presetSubtype="0" fill="hold" nodeType="clickEffect">
+                                  <p:stCondLst>
+                                    <p:cond delay="0"/>
+                                  </p:stCondLst>
+                                  <p:childTnLst>
+                                    <p:set>
+                                      <p:cBhvr>
+                                        <p:cTn id="6" dur="1" fill="hold">
+                                          <p:stCondLst>
+                                            <p:cond delay="0"/>
+                                          </p:stCondLst>
+                                        </p:cTn>
+                                        <p:tgtEl>
+                                          <p:spTgt spid="9">
+                                            <p:txEl>
+                                              <p:pRg st="1" end="1"/>
+                                            </p:txEl>
+                                          </p:spTgt>
+                                        </p:tgtEl>
+                                        <p:attrNameLst>
+                                          <p:attrName>style.visibility</p:attrName>
+                                        </p:attrNameLst>
+                                      </p:cBhvr>
+                                      <p:to>
+                                        <p:strVal val="visible"/>
+                                      </p:to>
+                                    </p:set>
+                                    <p:animEffect transition="in" filter="dissolve">
+                                      <p:cBhvr>
+                                        <p:cTn id="7" dur="500"/>
+                                        <p:tgtEl>
+                                          <p:spTgt spid="9">
+                                            <p:txEl>
+                                              <p:pRg st="1" end="1"/>
+                                            </p:txEl>
+                                          </p:spTgt>
+                                        </p:tgtEl>
+                                      </p:cBhvr>
+                                    </p:animEffect>
+                                  </p:childTnLst>
+                                </p:cTn>
+                              </p:par>
+                            </p:childTnLst>
+                          </p:cTn>
+                        </p:par>
+                      </p:childTnLst>
+                    </p:cTn>
+                  </p:par>
+                  <p:par>
+                    <p:cTn id="8" fill="hold">
+                      <p:stCondLst>
+                        <p:cond delay="indefinite"/>
+                      </p:stCondLst>
+                      <p:childTnLst>
+                        <p:par>
+                          <p:cTn id="9" fill="hold">
+                            <p:stCondLst>
+                              <p:cond delay="0"/>
+                            </p:stCondLst>
+                            <p:childTnLst>
+                              <p:par>
+                                <p:cTn id="10" presetID="9" presetClass="entr" presetSubtype="0" fill="hold" nodeType="clickEffect">
+                                  <p:stCondLst>
+                                    <p:cond delay="0"/>
+                                  </p:stCondLst>
+                                  <p:childTnLst>
+                                    <p:set>
+                                      <p:cBhvr>
+                                        <p:cTn id="11" dur="1" fill="hold">
+                                          <p:stCondLst>
+                                            <p:cond delay="0"/>
+                                          </p:stCondLst>
+                                        </p:cTn>
+                                        <p:tgtEl>
+                                          <p:spTgt spid="9">
+                                            <p:txEl>
+                                              <p:pRg st="3" end="3"/>
+                                            </p:txEl>
+                                          </p:spTgt>
+                                        </p:tgtEl>
+                                        <p:attrNameLst>
+                                          <p:attrName>style.visibility</p:attrName>
+                                        </p:attrNameLst>
+                                      </p:cBhvr>
+                                      <p:to>
+                                        <p:strVal val="visible"/>
+                                      </p:to>
+                                    </p:set>
+                                    <p:animEffect transition="in" filter="dissolve">
+                                      <p:cBhvr>
+                                        <p:cTn id="12" dur="500"/>
+                                        <p:tgtEl>
+                                          <p:spTgt spid="9">
+                                            <p:txEl>
+                                              <p:pRg st="3" end="3"/>
+                                            </p:txEl>
+                                          </p:spTgt>
+                                        </p:tgtEl>
+                                      </p:cBhvr>
+                                    </p:animEffect>
+                                  </p:childTnLst>
+                                </p:cTn>
+                              </p:par>
+                              <p:par>
+                                <p:cTn id="13" presetID="9" presetClass="entr" presetSubtype="0" fill="hold" nodeType="withEffect">
+                                  <p:stCondLst>
+                                    <p:cond delay="0"/>
+                                  </p:stCondLst>
+                                  <p:childTnLst>
+                                    <p:set>
+                                      <p:cBhvr>
+                                        <p:cTn id="14" dur="1" fill="hold">
+                                          <p:stCondLst>
+                                            <p:cond delay="0"/>
+                                          </p:stCondLst>
+                                        </p:cTn>
+                                        <p:tgtEl>
+                                          <p:spTgt spid="9">
+                                            <p:txEl>
+                                              <p:pRg st="4" end="4"/>
+                                            </p:txEl>
+                                          </p:spTgt>
+                                        </p:tgtEl>
+                                        <p:attrNameLst>
+                                          <p:attrName>style.visibility</p:attrName>
+                                        </p:attrNameLst>
+                                      </p:cBhvr>
+                                      <p:to>
+                                        <p:strVal val="visible"/>
+                                      </p:to>
+                                    </p:set>
+                                    <p:animEffect transition="in" filter="dissolve">
+                                      <p:cBhvr>
+                                        <p:cTn id="15" dur="500"/>
+                                        <p:tgtEl>
+                                          <p:spTgt spid="9">
+                                            <p:txEl>
+                                              <p:pRg st="4" end="4"/>
+                                            </p:txEl>
+                                          </p:spTgt>
+                                        </p:tgtEl>
+                                      </p:cBhvr>
+                                    </p:animEffect>
+                                  </p:childTnLst>
+                                </p:cTn>
+                              </p:par>
+                              <p:par>
+                                <p:cTn id="16" presetID="9" presetClass="entr" presetSubtype="0" fill="hold" nodeType="withEffect">
+                                  <p:stCondLst>
+                                    <p:cond delay="0"/>
+                                  </p:stCondLst>
+                                  <p:childTnLst>
+                                    <p:set>
+                                      <p:cBhvr>
+                                        <p:cTn id="17" dur="1" fill="hold">
+                                          <p:stCondLst>
+                                            <p:cond delay="0"/>
+                                          </p:stCondLst>
+                                        </p:cTn>
+                                        <p:tgtEl>
+                                          <p:spTgt spid="9">
+                                            <p:txEl>
+                                              <p:pRg st="5" end="5"/>
+                                            </p:txEl>
+                                          </p:spTgt>
+                                        </p:tgtEl>
+                                        <p:attrNameLst>
+                                          <p:attrName>style.visibility</p:attrName>
+                                        </p:attrNameLst>
+                                      </p:cBhvr>
+                                      <p:to>
+                                        <p:strVal val="visible"/>
+                                      </p:to>
+                                    </p:set>
+                                    <p:animEffect transition="in" filter="dissolve">
+                                      <p:cBhvr>
+                                        <p:cTn id="18" dur="500"/>
+                                        <p:tgtEl>
+                                          <p:spTgt spid="9">
+                                            <p:txEl>
+                                              <p:pRg st="5" end="5"/>
+                                            </p:txEl>
+                                          </p:spTgt>
+                                        </p:tgtEl>
+                                      </p:cBhvr>
+                                    </p:animEffect>
+                                  </p:childTnLst>
+                                </p:cTn>
+                              </p:par>
+                            </p:childTnLst>
+                          </p:cTn>
+                        </p:par>
+                      </p:childTnLst>
+                    </p:cTn>
+                  </p:par>
+                </p:childTnLst>
+              </p:cTn>
+              <p:prevCondLst>
+                <p:cond evt="onPrev" delay="0">
+                  <p:tgtEl>
+                    <p:sldTgt/>
+                  </p:tgtEl>
+                </p:cond>
+              </p:prevCondLst>
+              <p:nextCondLst>
+                <p:cond evt="onNext" delay="0">
+                  <p:tgtEl>
+                    <p:sldTgt/>
+                  </p:tgtEl>
+                </p:cond>
+              </p:nextCondLst>
+            </p:seq>
+          </p:childTnLst>
+        </p:cTn>
+      </p:par>
+    </p:tnLst>
+  </p:timing>
+</p:sld>
+</file>
+
+<file path=ppt/slides/slide26.xml><?xml version="1.0" encoding="utf-8"?>
+<p:sld xmlns:a="http://schemas.openxmlformats.org/drawingml/2006/main" xmlns:r="http://schemas.openxmlformats.org/officeDocument/2006/relationships" xmlns:p="http://schemas.openxmlformats.org/presentationml/2006/main">
+  <p:cSld>
+    <p:spTree>
+      <p:nvGrpSpPr>
+        <p:cNvPr id="1" name=""/>
+        <p:cNvGrpSpPr/>
+        <p:nvPr/>
+      </p:nvGrpSpPr>
+      <p:grpSpPr>
+        <a:xfrm>
+          <a:off x="0" y="0"/>
+          <a:ext cx="0" cy="0"/>
+          <a:chOff x="0" y="0"/>
+          <a:chExt cx="0" cy="0"/>
+        </a:xfrm>
+      </p:grpSpPr>
+      <p:sp>
+        <p:nvSpPr>
+          <p:cNvPr id="2" name="Title 1">
+            <a:extLst>
+              <a:ext uri="{FF2B5EF4-FFF2-40B4-BE49-F238E27FC236}">
+                <a16:creationId xmlns:a16="http://schemas.microsoft.com/office/drawing/2014/main" id="{85E70190-D523-8B11-A546-4965371D0440}"/>
+              </a:ext>
+            </a:extLst>
+          </p:cNvPr>
+          <p:cNvSpPr>
+            <a:spLocks noGrp="1"/>
+          </p:cNvSpPr>
+          <p:nvPr>
+            <p:ph type="title"/>
+          </p:nvPr>
+        </p:nvSpPr>
+        <p:spPr/>
+        <p:txBody>
+          <a:bodyPr/>
+          <a:lstStyle/>
+          <a:p>
+            <a:r>
+              <a:rPr lang="en-US" dirty="0">
+                <a:latin typeface="Calibri" panose="020F0502020204030204" pitchFamily="34" charset="0"/>
+                <a:cs typeface="Calibri" panose="020F0502020204030204" pitchFamily="34" charset="0"/>
+              </a:rPr>
+              <a:t>Birthday Paradox</a:t>
+            </a:r>
+          </a:p>
+        </p:txBody>
+      </p:sp>
+      <p:sp>
+        <p:nvSpPr>
+          <p:cNvPr id="3" name="Content Placeholder 2">
+            <a:extLst>
+              <a:ext uri="{FF2B5EF4-FFF2-40B4-BE49-F238E27FC236}">
+                <a16:creationId xmlns:a16="http://schemas.microsoft.com/office/drawing/2014/main" id="{4B47386C-0300-B8D1-6649-C4071B1BEE2B}"/>
+              </a:ext>
+            </a:extLst>
+          </p:cNvPr>
+          <p:cNvSpPr>
+            <a:spLocks noGrp="1"/>
+          </p:cNvSpPr>
+          <p:nvPr>
+            <p:ph idx="1"/>
+          </p:nvPr>
+        </p:nvSpPr>
+        <p:spPr/>
+        <p:txBody>
+          <a:bodyPr>
+            <a:normAutofit/>
+          </a:bodyPr>
+          <a:lstStyle/>
+          <a:p>
+            <a:r>
+              <a:rPr lang="en-US" sz="3600" dirty="0"/>
+              <a:t>What’s the chance that </a:t>
+            </a:r>
+            <a:r>
+              <a:rPr lang="en-US" sz="3600" b="1" dirty="0"/>
+              <a:t>the tallest student in this </a:t>
+            </a:r>
+            <a:r>
+              <a:rPr lang="en-US" sz="3600" dirty="0"/>
+              <a:t>class share the same birthday as mine? </a:t>
+            </a:r>
+          </a:p>
+          <a:p>
+            <a:endParaRPr lang="en-US" sz="3600" dirty="0"/>
+          </a:p>
+          <a:p>
+            <a:r>
+              <a:rPr lang="en-US" sz="3600" dirty="0"/>
+              <a:t>~1/365</a:t>
+            </a:r>
+          </a:p>
+          <a:p>
+            <a:pPr lvl="1"/>
+            <a:endParaRPr lang="en-US" sz="3200" dirty="0"/>
+          </a:p>
+          <a:p>
+            <a:endParaRPr lang="en-US" sz="3600" dirty="0">
+              <a:latin typeface="Calibri" panose="020F0502020204030204" pitchFamily="34" charset="0"/>
+              <a:cs typeface="Calibri" panose="020F0502020204030204" pitchFamily="34" charset="0"/>
+            </a:endParaRPr>
+          </a:p>
+        </p:txBody>
+      </p:sp>
+      <p:sp>
+        <p:nvSpPr>
+          <p:cNvPr id="4" name="Slide Number Placeholder 3">
+            <a:extLst>
+              <a:ext uri="{FF2B5EF4-FFF2-40B4-BE49-F238E27FC236}">
+                <a16:creationId xmlns:a16="http://schemas.microsoft.com/office/drawing/2014/main" id="{A103357E-BE3C-4E9D-1CEC-AD8D3CB93705}"/>
+              </a:ext>
+            </a:extLst>
+          </p:cNvPr>
+          <p:cNvSpPr>
+            <a:spLocks noGrp="1"/>
+          </p:cNvSpPr>
+          <p:nvPr>
+            <p:ph type="sldNum" sz="quarter" idx="12"/>
+          </p:nvPr>
+        </p:nvSpPr>
+        <p:spPr/>
+        <p:txBody>
+          <a:bodyPr/>
+          <a:lstStyle/>
+          <a:p>
+            <a:fld id="{8B4C9E33-6753-472F-9C09-83153B974C9D}" type="slidenum">
+              <a:rPr lang="zh-CN" altLang="en-US" smtClean="0"/>
+              <a:t>26</a:t>
+            </a:fld>
+            <a:endParaRPr lang="zh-CN" altLang="en-US"/>
+          </a:p>
+        </p:txBody>
+      </p:sp>
+    </p:spTree>
+    <p:extLst>
+      <p:ext uri="{BB962C8B-B14F-4D97-AF65-F5344CB8AC3E}">
+        <p14:creationId xmlns:p14="http://schemas.microsoft.com/office/powerpoint/2010/main" val="3148858077"/>
+      </p:ext>
+    </p:extLst>
+  </p:cSld>
+  <p:clrMapOvr>
+    <a:masterClrMapping/>
+  </p:clrMapOvr>
+  <p:timing>
+    <p:tnLst>
+      <p:par>
+        <p:cTn id="1" dur="indefinite" restart="never" nodeType="tmRoot">
+          <p:childTnLst>
+            <p:seq concurrent="1" nextAc="seek">
+              <p:cTn id="2" dur="indefinite" nodeType="mainSeq">
+                <p:childTnLst>
+                  <p:par>
+                    <p:cTn id="3" fill="hold">
+                      <p:stCondLst>
+                        <p:cond delay="indefinite"/>
+                      </p:stCondLst>
+                      <p:childTnLst>
+                        <p:par>
+                          <p:cTn id="4" fill="hold">
+                            <p:stCondLst>
+                              <p:cond delay="0"/>
+                            </p:stCondLst>
+                            <p:childTnLst>
+                              <p:par>
+                                <p:cTn id="5" presetID="9" presetClass="entr" presetSubtype="0" fill="hold" nodeType="clickEffect">
+                                  <p:stCondLst>
+                                    <p:cond delay="0"/>
+                                  </p:stCondLst>
+                                  <p:childTnLst>
+                                    <p:set>
+                                      <p:cBhvr>
+                                        <p:cTn id="6" dur="1" fill="hold">
+                                          <p:stCondLst>
+                                            <p:cond delay="0"/>
+                                          </p:stCondLst>
+                                        </p:cTn>
+                                        <p:tgtEl>
+                                          <p:spTgt spid="3">
+                                            <p:txEl>
+                                              <p:pRg st="2" end="2"/>
+                                            </p:txEl>
+                                          </p:spTgt>
+                                        </p:tgtEl>
+                                        <p:attrNameLst>
+                                          <p:attrName>style.visibility</p:attrName>
+                                        </p:attrNameLst>
+                                      </p:cBhvr>
+                                      <p:to>
+                                        <p:strVal val="visible"/>
+                                      </p:to>
+                                    </p:set>
+                                    <p:animEffect transition="in" filter="dissolve">
+                                      <p:cBhvr>
+                                        <p:cTn id="7" dur="500"/>
+                                        <p:tgtEl>
+                                          <p:spTgt spid="3">
+                                            <p:txEl>
+                                              <p:pRg st="2" end="2"/>
+                                            </p:txEl>
+                                          </p:spTgt>
+                                        </p:tgtEl>
+                                      </p:cBhvr>
+                                    </p:animEffect>
+                                  </p:childTnLst>
+                                </p:cTn>
+                              </p:par>
+                            </p:childTnLst>
+                          </p:cTn>
+                        </p:par>
+                      </p:childTnLst>
+                    </p:cTn>
+                  </p:par>
+                </p:childTnLst>
+              </p:cTn>
+              <p:prevCondLst>
+                <p:cond evt="onPrev" delay="0">
+                  <p:tgtEl>
+                    <p:sldTgt/>
+                  </p:tgtEl>
+                </p:cond>
+              </p:prevCondLst>
+              <p:nextCondLst>
+                <p:cond evt="onNext" delay="0">
+                  <p:tgtEl>
+                    <p:sldTgt/>
+                  </p:tgtEl>
+                </p:cond>
+              </p:nextCondLst>
+            </p:seq>
+          </p:childTnLst>
+        </p:cTn>
+      </p:par>
+    </p:tnLst>
+  </p:timing>
+</p:sld>
+</file>
+
+<file path=ppt/slides/slide27.xml><?xml version="1.0" encoding="utf-8"?>
+<p:sld xmlns:a="http://schemas.openxmlformats.org/drawingml/2006/main" xmlns:r="http://schemas.openxmlformats.org/officeDocument/2006/relationships" xmlns:p="http://schemas.openxmlformats.org/presentationml/2006/main">
+  <p:cSld>
+    <p:spTree>
+      <p:nvGrpSpPr>
+        <p:cNvPr id="1" name="">
+          <a:extLst>
+            <a:ext uri="{FF2B5EF4-FFF2-40B4-BE49-F238E27FC236}">
+              <a16:creationId xmlns:a16="http://schemas.microsoft.com/office/drawing/2014/main" id="{C780624B-2677-7C61-38B4-8EFB3A9D993B}"/>
+            </a:ext>
+          </a:extLst>
+        </p:cNvPr>
+        <p:cNvGrpSpPr/>
+        <p:nvPr/>
+      </p:nvGrpSpPr>
+      <p:grpSpPr>
+        <a:xfrm>
+          <a:off x="0" y="0"/>
+          <a:ext cx="0" cy="0"/>
+          <a:chOff x="0" y="0"/>
+          <a:chExt cx="0" cy="0"/>
+        </a:xfrm>
+      </p:grpSpPr>
+      <p:sp>
+        <p:nvSpPr>
+          <p:cNvPr id="2" name="Title 1">
+            <a:extLst>
+              <a:ext uri="{FF2B5EF4-FFF2-40B4-BE49-F238E27FC236}">
+                <a16:creationId xmlns:a16="http://schemas.microsoft.com/office/drawing/2014/main" id="{03351A97-6D40-913D-3608-9F78582AB527}"/>
+              </a:ext>
+            </a:extLst>
+          </p:cNvPr>
+          <p:cNvSpPr>
+            <a:spLocks noGrp="1"/>
+          </p:cNvSpPr>
+          <p:nvPr>
+            <p:ph type="title"/>
+          </p:nvPr>
+        </p:nvSpPr>
+        <p:spPr/>
+        <p:txBody>
+          <a:bodyPr/>
+          <a:lstStyle/>
+          <a:p>
+            <a:r>
+              <a:rPr lang="en-US" dirty="0">
+                <a:latin typeface="Calibri" panose="020F0502020204030204" pitchFamily="34" charset="0"/>
+                <a:cs typeface="Calibri" panose="020F0502020204030204" pitchFamily="34" charset="0"/>
+              </a:rPr>
+              <a:t>Birthday Paradox</a:t>
+            </a:r>
+          </a:p>
+        </p:txBody>
+      </p:sp>
+      <p:sp>
+        <p:nvSpPr>
+          <p:cNvPr id="3" name="Content Placeholder 2">
+            <a:extLst>
+              <a:ext uri="{FF2B5EF4-FFF2-40B4-BE49-F238E27FC236}">
+                <a16:creationId xmlns:a16="http://schemas.microsoft.com/office/drawing/2014/main" id="{8B577397-DEC6-8E03-F337-4C45F09F0797}"/>
+              </a:ext>
+            </a:extLst>
+          </p:cNvPr>
+          <p:cNvSpPr>
+            <a:spLocks noGrp="1"/>
+          </p:cNvSpPr>
+          <p:nvPr>
+            <p:ph idx="1"/>
+          </p:nvPr>
+        </p:nvSpPr>
+        <p:spPr/>
+        <p:txBody>
+          <a:bodyPr>
+            <a:normAutofit/>
+          </a:bodyPr>
+          <a:lstStyle/>
+          <a:p>
+            <a:r>
+              <a:rPr lang="en-US" sz="3600" dirty="0"/>
+              <a:t>What’s the chance that the there is </a:t>
+            </a:r>
+            <a:r>
+              <a:rPr lang="en-US" sz="3600" b="1" dirty="0"/>
+              <a:t>at least one student here </a:t>
+            </a:r>
+            <a:r>
+              <a:rPr lang="en-US" sz="3600" dirty="0"/>
+              <a:t>that share the same birthday as mine?  (assuming 150 students)</a:t>
+            </a:r>
+          </a:p>
+          <a:p>
+            <a:endParaRPr lang="en-US" sz="3600" dirty="0"/>
+          </a:p>
+          <a:p>
+            <a:r>
+              <a:rPr lang="en-US" sz="3600" dirty="0"/>
+              <a:t>1-(1-1/365)^150 </a:t>
+            </a:r>
+          </a:p>
+          <a:p>
+            <a:endParaRPr lang="en-US" sz="3600" dirty="0"/>
+          </a:p>
+          <a:p>
+            <a:r>
+              <a:rPr lang="en-US" sz="3600" dirty="0"/>
+              <a:t>Around 0.33 </a:t>
+            </a:r>
+          </a:p>
+          <a:p>
+            <a:endParaRPr lang="en-US" sz="3600" dirty="0"/>
+          </a:p>
+          <a:p>
+            <a:endParaRPr lang="en-US" sz="3600" dirty="0"/>
+          </a:p>
+          <a:p>
+            <a:pPr lvl="1"/>
+            <a:endParaRPr lang="en-US" sz="3200" dirty="0"/>
+          </a:p>
+          <a:p>
+            <a:endParaRPr lang="en-US" sz="3600" dirty="0">
+              <a:latin typeface="Calibri" panose="020F0502020204030204" pitchFamily="34" charset="0"/>
+              <a:cs typeface="Calibri" panose="020F0502020204030204" pitchFamily="34" charset="0"/>
+            </a:endParaRPr>
+          </a:p>
+        </p:txBody>
+      </p:sp>
+      <p:sp>
+        <p:nvSpPr>
+          <p:cNvPr id="4" name="Slide Number Placeholder 3">
+            <a:extLst>
+              <a:ext uri="{FF2B5EF4-FFF2-40B4-BE49-F238E27FC236}">
+                <a16:creationId xmlns:a16="http://schemas.microsoft.com/office/drawing/2014/main" id="{25DAF18E-F60E-005F-A17C-78245121ECC5}"/>
+              </a:ext>
+            </a:extLst>
+          </p:cNvPr>
+          <p:cNvSpPr>
+            <a:spLocks noGrp="1"/>
+          </p:cNvSpPr>
+          <p:nvPr>
+            <p:ph type="sldNum" sz="quarter" idx="12"/>
+          </p:nvPr>
+        </p:nvSpPr>
+        <p:spPr/>
+        <p:txBody>
+          <a:bodyPr/>
+          <a:lstStyle/>
+          <a:p>
+            <a:fld id="{8B4C9E33-6753-472F-9C09-83153B974C9D}" type="slidenum">
+              <a:rPr lang="zh-CN" altLang="en-US" smtClean="0"/>
+              <a:t>27</a:t>
+            </a:fld>
+            <a:endParaRPr lang="zh-CN" altLang="en-US"/>
+          </a:p>
+        </p:txBody>
+      </p:sp>
+      <p:sp>
+        <p:nvSpPr>
+          <p:cNvPr id="6" name="TextBox 5">
+            <a:extLst>
+              <a:ext uri="{FF2B5EF4-FFF2-40B4-BE49-F238E27FC236}">
+                <a16:creationId xmlns:a16="http://schemas.microsoft.com/office/drawing/2014/main" id="{AE77D3DC-8D64-ED79-DF08-3E267ED62992}"/>
+              </a:ext>
+            </a:extLst>
+          </p:cNvPr>
+          <p:cNvSpPr txBox="1"/>
+          <p:nvPr/>
+        </p:nvSpPr>
+        <p:spPr>
+          <a:xfrm>
+            <a:off x="7696567" y="4784651"/>
+            <a:ext cx="3103735" cy="1200329"/>
+          </a:xfrm>
+          <a:prstGeom prst="rect">
+            <a:avLst/>
+          </a:prstGeom>
+          <a:noFill/>
+        </p:spPr>
+        <p:txBody>
+          <a:bodyPr wrap="none" rtlCol="0">
+            <a:spAutoFit/>
+          </a:bodyPr>
+          <a:lstStyle/>
+          <a:p>
+            <a:r>
+              <a:rPr lang="en-US" sz="7200" dirty="0">
+                <a:solidFill>
+                  <a:srgbClr val="00B050"/>
+                </a:solidFill>
+              </a:rPr>
+              <a:t>May 20</a:t>
+            </a:r>
+          </a:p>
+        </p:txBody>
+      </p:sp>
+      <p:sp>
+        <p:nvSpPr>
+          <p:cNvPr id="7" name="Rounded Rectangle 6">
+            <a:extLst>
+              <a:ext uri="{FF2B5EF4-FFF2-40B4-BE49-F238E27FC236}">
+                <a16:creationId xmlns:a16="http://schemas.microsoft.com/office/drawing/2014/main" id="{742B1CD8-C37E-0221-F0D6-A8688AEA2C9D}"/>
+              </a:ext>
+            </a:extLst>
+          </p:cNvPr>
+          <p:cNvSpPr/>
+          <p:nvPr/>
+        </p:nvSpPr>
+        <p:spPr>
+          <a:xfrm>
+            <a:off x="6868633" y="4231758"/>
+            <a:ext cx="4485167" cy="2124592"/>
+          </a:xfrm>
+          <a:prstGeom prst="roundRect">
+            <a:avLst/>
+          </a:prstGeom>
+          <a:solidFill>
+            <a:schemeClr val="bg1">
+              <a:lumMod val="75000"/>
+            </a:schemeClr>
+          </a:solidFill>
+        </p:spPr>
+        <p:style>
+          <a:lnRef idx="2">
+            <a:schemeClr val="accent1">
+              <a:shade val="15000"/>
+            </a:schemeClr>
+          </a:lnRef>
+          <a:fillRef idx="1">
+            <a:schemeClr val="accent1"/>
+          </a:fillRef>
+          <a:effectRef idx="0">
+            <a:schemeClr val="accent1"/>
+          </a:effectRef>
+          <a:fontRef idx="minor">
+            <a:schemeClr val="lt1"/>
+          </a:fontRef>
+        </p:style>
+        <p:txBody>
+          <a:bodyPr rtlCol="0" anchor="ctr"/>
+          <a:lstStyle/>
+          <a:p>
+            <a:pPr algn="ctr"/>
+            <a:r>
+              <a:rPr lang="en-US" sz="4800" dirty="0"/>
+              <a:t>My Birthday</a:t>
+            </a:r>
+          </a:p>
+        </p:txBody>
+      </p:sp>
+    </p:spTree>
+    <p:extLst>
+      <p:ext uri="{BB962C8B-B14F-4D97-AF65-F5344CB8AC3E}">
+        <p14:creationId xmlns:p14="http://schemas.microsoft.com/office/powerpoint/2010/main" val="1472933104"/>
+      </p:ext>
+    </p:extLst>
+  </p:cSld>
+  <p:clrMapOvr>
+    <a:masterClrMapping/>
+  </p:clrMapOvr>
+  <p:timing>
+    <p:tnLst>
+      <p:par>
+        <p:cTn id="1" dur="indefinite" restart="never" nodeType="tmRoot">
+          <p:childTnLst>
+            <p:seq concurrent="1" nextAc="seek">
+              <p:cTn id="2" dur="indefinite" nodeType="mainSeq">
+                <p:childTnLst>
+                  <p:par>
+                    <p:cTn id="3" fill="hold">
+                      <p:stCondLst>
+                        <p:cond delay="indefinite"/>
+                      </p:stCondLst>
+                      <p:childTnLst>
+                        <p:par>
+                          <p:cTn id="4" fill="hold">
+                            <p:stCondLst>
+                              <p:cond delay="0"/>
+                            </p:stCondLst>
+                            <p:childTnLst>
+                              <p:par>
+                                <p:cTn id="5" presetID="9" presetClass="entr" presetSubtype="0" fill="hold" nodeType="clickEffect">
+                                  <p:stCondLst>
+                                    <p:cond delay="0"/>
+                                  </p:stCondLst>
+                                  <p:childTnLst>
+                                    <p:set>
+                                      <p:cBhvr>
+                                        <p:cTn id="6" dur="1" fill="hold">
+                                          <p:stCondLst>
+                                            <p:cond delay="0"/>
+                                          </p:stCondLst>
+                                        </p:cTn>
+                                        <p:tgtEl>
+                                          <p:spTgt spid="3">
+                                            <p:txEl>
+                                              <p:pRg st="2" end="2"/>
+                                            </p:txEl>
+                                          </p:spTgt>
+                                        </p:tgtEl>
+                                        <p:attrNameLst>
+                                          <p:attrName>style.visibility</p:attrName>
+                                        </p:attrNameLst>
+                                      </p:cBhvr>
+                                      <p:to>
+                                        <p:strVal val="visible"/>
+                                      </p:to>
+                                    </p:set>
+                                    <p:animEffect transition="in" filter="dissolve">
+                                      <p:cBhvr>
+                                        <p:cTn id="7" dur="500"/>
+                                        <p:tgtEl>
+                                          <p:spTgt spid="3">
+                                            <p:txEl>
+                                              <p:pRg st="2" end="2"/>
+                                            </p:txEl>
+                                          </p:spTgt>
+                                        </p:tgtEl>
+                                      </p:cBhvr>
+                                    </p:animEffect>
+                                  </p:childTnLst>
+                                </p:cTn>
+                              </p:par>
+                            </p:childTnLst>
+                          </p:cTn>
+                        </p:par>
+                      </p:childTnLst>
+                    </p:cTn>
+                  </p:par>
+                  <p:par>
+                    <p:cTn id="8" fill="hold">
+                      <p:stCondLst>
+                        <p:cond delay="indefinite"/>
+                      </p:stCondLst>
+                      <p:childTnLst>
+                        <p:par>
+                          <p:cTn id="9" fill="hold">
+                            <p:stCondLst>
+                              <p:cond delay="0"/>
+                            </p:stCondLst>
+                            <p:childTnLst>
+                              <p:par>
+                                <p:cTn id="10" presetID="9" presetClass="entr" presetSubtype="0" fill="hold" nodeType="clickEffect">
+                                  <p:stCondLst>
+                                    <p:cond delay="0"/>
+                                  </p:stCondLst>
+                                  <p:childTnLst>
+                                    <p:set>
+                                      <p:cBhvr>
+                                        <p:cTn id="11" dur="1" fill="hold">
+                                          <p:stCondLst>
+                                            <p:cond delay="0"/>
+                                          </p:stCondLst>
+                                        </p:cTn>
+                                        <p:tgtEl>
+                                          <p:spTgt spid="3">
+                                            <p:txEl>
+                                              <p:pRg st="4" end="4"/>
+                                            </p:txEl>
+                                          </p:spTgt>
+                                        </p:tgtEl>
+                                        <p:attrNameLst>
+                                          <p:attrName>style.visibility</p:attrName>
+                                        </p:attrNameLst>
+                                      </p:cBhvr>
+                                      <p:to>
+                                        <p:strVal val="visible"/>
+                                      </p:to>
+                                    </p:set>
+                                    <p:animEffect transition="in" filter="dissolve">
+                                      <p:cBhvr>
+                                        <p:cTn id="12" dur="500"/>
+                                        <p:tgtEl>
+                                          <p:spTgt spid="3">
+                                            <p:txEl>
+                                              <p:pRg st="4" end="4"/>
+                                            </p:txEl>
+                                          </p:spTgt>
+                                        </p:tgtEl>
+                                      </p:cBhvr>
+                                    </p:animEffect>
+                                  </p:childTnLst>
+                                </p:cTn>
+                              </p:par>
+                            </p:childTnLst>
+                          </p:cTn>
+                        </p:par>
+                      </p:childTnLst>
+                    </p:cTn>
+                  </p:par>
+                  <p:par>
+                    <p:cTn id="13" fill="hold">
+                      <p:stCondLst>
+                        <p:cond delay="indefinite"/>
+                      </p:stCondLst>
+                      <p:childTnLst>
+                        <p:par>
+                          <p:cTn id="14" fill="hold">
+                            <p:stCondLst>
+                              <p:cond delay="0"/>
+                            </p:stCondLst>
+                            <p:childTnLst>
+                              <p:par>
+                                <p:cTn id="15" presetID="2" presetClass="exit" presetSubtype="4" fill="hold" grpId="0" nodeType="clickEffect">
+                                  <p:stCondLst>
+                                    <p:cond delay="0"/>
+                                  </p:stCondLst>
+                                  <p:childTnLst>
+                                    <p:anim calcmode="lin" valueType="num">
+                                      <p:cBhvr additive="base">
+                                        <p:cTn id="16" dur="500"/>
+                                        <p:tgtEl>
+                                          <p:spTgt spid="7"/>
+                                        </p:tgtEl>
+                                        <p:attrNameLst>
+                                          <p:attrName>ppt_x</p:attrName>
+                                        </p:attrNameLst>
+                                      </p:cBhvr>
+                                      <p:tavLst>
+                                        <p:tav tm="0">
+                                          <p:val>
+                                            <p:strVal val="ppt_x"/>
+                                          </p:val>
+                                        </p:tav>
+                                        <p:tav tm="100000">
+                                          <p:val>
+                                            <p:strVal val="ppt_x"/>
+                                          </p:val>
+                                        </p:tav>
+                                      </p:tavLst>
+                                    </p:anim>
+                                    <p:anim calcmode="lin" valueType="num">
+                                      <p:cBhvr additive="base">
+                                        <p:cTn id="17" dur="500"/>
+                                        <p:tgtEl>
+                                          <p:spTgt spid="7"/>
+                                        </p:tgtEl>
+                                        <p:attrNameLst>
+                                          <p:attrName>ppt_y</p:attrName>
+                                        </p:attrNameLst>
+                                      </p:cBhvr>
+                                      <p:tavLst>
+                                        <p:tav tm="0">
+                                          <p:val>
+                                            <p:strVal val="ppt_y"/>
+                                          </p:val>
+                                        </p:tav>
+                                        <p:tav tm="100000">
+                                          <p:val>
+                                            <p:strVal val="1+ppt_h/2"/>
+                                          </p:val>
+                                        </p:tav>
+                                      </p:tavLst>
+                                    </p:anim>
+                                    <p:set>
+                                      <p:cBhvr>
+                                        <p:cTn id="18" dur="1" fill="hold">
+                                          <p:stCondLst>
+                                            <p:cond delay="499"/>
+                                          </p:stCondLst>
+                                        </p:cTn>
+                                        <p:tgtEl>
+                                          <p:spTgt spid="7"/>
+                                        </p:tgtEl>
+                                        <p:attrNameLst>
+                                          <p:attrName>style.visibility</p:attrName>
+                                        </p:attrNameLst>
+                                      </p:cBhvr>
+                                      <p:to>
+                                        <p:strVal val="hidden"/>
+                                      </p:to>
+                                    </p:set>
+                                  </p:childTnLst>
+                                </p:cTn>
+                              </p:par>
+                            </p:childTnLst>
+                          </p:cTn>
+                        </p:par>
+                      </p:childTnLst>
+                    </p:cTn>
+                  </p:par>
+                </p:childTnLst>
+              </p:cTn>
+              <p:prevCondLst>
+                <p:cond evt="onPrev" delay="0">
+                  <p:tgtEl>
+                    <p:sldTgt/>
+                  </p:tgtEl>
+                </p:cond>
+              </p:prevCondLst>
+              <p:nextCondLst>
+                <p:cond evt="onNext" delay="0">
+                  <p:tgtEl>
+                    <p:sldTgt/>
+                  </p:tgtEl>
+                </p:cond>
+              </p:nextCondLst>
+            </p:seq>
+          </p:childTnLst>
+        </p:cTn>
+      </p:par>
+    </p:tnLst>
+    <p:bldLst>
+      <p:bldP spid="7" grpId="0" animBg="1"/>
+    </p:bldLst>
+  </p:timing>
+</p:sld>
+</file>
+
+<file path=ppt/slides/slide28.xml><?xml version="1.0" encoding="utf-8"?>
+<p:sld xmlns:a="http://schemas.openxmlformats.org/drawingml/2006/main" xmlns:r="http://schemas.openxmlformats.org/officeDocument/2006/relationships" xmlns:p="http://schemas.openxmlformats.org/presentationml/2006/main">
+  <p:cSld>
+    <p:spTree>
+      <p:nvGrpSpPr>
+        <p:cNvPr id="1" name="">
+          <a:extLst>
+            <a:ext uri="{FF2B5EF4-FFF2-40B4-BE49-F238E27FC236}">
+              <a16:creationId xmlns:a16="http://schemas.microsoft.com/office/drawing/2014/main" id="{6E92E9AE-F23D-F836-2A36-00141C330713}"/>
+            </a:ext>
+          </a:extLst>
+        </p:cNvPr>
+        <p:cNvGrpSpPr/>
+        <p:nvPr/>
+      </p:nvGrpSpPr>
+      <p:grpSpPr>
+        <a:xfrm>
+          <a:off x="0" y="0"/>
+          <a:ext cx="0" cy="0"/>
+          <a:chOff x="0" y="0"/>
+          <a:chExt cx="0" cy="0"/>
+        </a:xfrm>
+      </p:grpSpPr>
+      <p:sp>
+        <p:nvSpPr>
+          <p:cNvPr id="2" name="Title 1">
+            <a:extLst>
+              <a:ext uri="{FF2B5EF4-FFF2-40B4-BE49-F238E27FC236}">
+                <a16:creationId xmlns:a16="http://schemas.microsoft.com/office/drawing/2014/main" id="{61B6DD97-1F38-3353-F1B5-229A836318F0}"/>
+              </a:ext>
+            </a:extLst>
+          </p:cNvPr>
+          <p:cNvSpPr>
+            <a:spLocks noGrp="1"/>
+          </p:cNvSpPr>
+          <p:nvPr>
+            <p:ph type="title"/>
+          </p:nvPr>
+        </p:nvSpPr>
+        <p:spPr/>
+        <p:txBody>
+          <a:bodyPr/>
+          <a:lstStyle/>
+          <a:p>
+            <a:r>
+              <a:rPr lang="en-US" dirty="0">
+                <a:latin typeface="Calibri" panose="020F0502020204030204" pitchFamily="34" charset="0"/>
+                <a:cs typeface="Calibri" panose="020F0502020204030204" pitchFamily="34" charset="0"/>
+              </a:rPr>
+              <a:t>Birthday Paradox</a:t>
+            </a:r>
+          </a:p>
+        </p:txBody>
+      </p:sp>
+      <p:sp>
+        <p:nvSpPr>
+          <p:cNvPr id="3" name="Content Placeholder 2">
+            <a:extLst>
+              <a:ext uri="{FF2B5EF4-FFF2-40B4-BE49-F238E27FC236}">
+                <a16:creationId xmlns:a16="http://schemas.microsoft.com/office/drawing/2014/main" id="{1026C3D6-7B33-7ABE-ECF9-B87C360701C2}"/>
+              </a:ext>
+            </a:extLst>
+          </p:cNvPr>
+          <p:cNvSpPr>
+            <a:spLocks noGrp="1"/>
+          </p:cNvSpPr>
+          <p:nvPr>
+            <p:ph idx="1"/>
+          </p:nvPr>
+        </p:nvSpPr>
+        <p:spPr/>
+        <p:txBody>
+          <a:bodyPr>
+            <a:normAutofit lnSpcReduction="10000"/>
+          </a:bodyPr>
+          <a:lstStyle/>
+          <a:p>
+            <a:r>
+              <a:rPr lang="en-US" sz="3600" dirty="0"/>
+              <a:t>What’s the chance that the there is </a:t>
+            </a:r>
+            <a:r>
+              <a:rPr lang="en-US" sz="3600" b="1" dirty="0"/>
+              <a:t>any two students</a:t>
+            </a:r>
+            <a:r>
+              <a:rPr lang="en-US" sz="3600" dirty="0"/>
+              <a:t> here share the same birthday? (assuming 150 students)</a:t>
+            </a:r>
+          </a:p>
+          <a:p>
+            <a:endParaRPr lang="en-US" sz="3600" dirty="0"/>
+          </a:p>
+          <a:p>
+            <a:r>
+              <a:rPr lang="en-US" sz="3600"/>
+              <a:t>&gt;99% </a:t>
+            </a:r>
+            <a:r>
+              <a:rPr lang="en-US" sz="3600" dirty="0">
+                <a:sym typeface="Wingdings" pitchFamily="2" charset="2"/>
+              </a:rPr>
+              <a:t>  </a:t>
+            </a:r>
+            <a:r>
+              <a:rPr lang="en-US" sz="3600" dirty="0"/>
+              <a:t>Why? </a:t>
+            </a:r>
+          </a:p>
+          <a:p>
+            <a:endParaRPr lang="en-US" sz="3600" dirty="0"/>
+          </a:p>
+          <a:p>
+            <a:r>
+              <a:rPr lang="en-US" sz="3200" dirty="0"/>
+              <a:t>Because we have around </a:t>
+            </a:r>
+            <a:r>
+              <a:rPr lang="en-US" sz="3200" b="1" dirty="0"/>
+              <a:t>150*149 / 2 = 11175</a:t>
+            </a:r>
+            <a:r>
+              <a:rPr lang="en-US" sz="3200" dirty="0"/>
+              <a:t> different pairs, which is &gt;&gt; 365 </a:t>
+            </a:r>
+            <a:r>
+              <a:rPr lang="en-US" sz="3200" dirty="0">
+                <a:sym typeface="Wingdings" pitchFamily="2" charset="2"/>
+              </a:rPr>
+              <a:t>. </a:t>
+            </a:r>
+          </a:p>
+        </p:txBody>
+      </p:sp>
+    </p:spTree>
+    <p:extLst>
+      <p:ext uri="{BB962C8B-B14F-4D97-AF65-F5344CB8AC3E}">
+        <p14:creationId xmlns:p14="http://schemas.microsoft.com/office/powerpoint/2010/main" val="792842277"/>
+      </p:ext>
+    </p:extLst>
+  </p:cSld>
+  <p:clrMapOvr>
+    <a:masterClrMapping/>
+  </p:clrMapOvr>
+  <p:timing>
+    <p:tnLst>
+      <p:par>
+        <p:cTn id="1" dur="indefinite" restart="never" nodeType="tmRoot">
+          <p:childTnLst>
+            <p:seq concurrent="1" nextAc="seek">
+              <p:cTn id="2" dur="indefinite" nodeType="mainSeq">
+                <p:childTnLst>
+                  <p:par>
+                    <p:cTn id="3" fill="hold">
+                      <p:stCondLst>
+                        <p:cond delay="indefinite"/>
+                      </p:stCondLst>
+                      <p:childTnLst>
+                        <p:par>
+                          <p:cTn id="4" fill="hold">
+                            <p:stCondLst>
+                              <p:cond delay="0"/>
+                            </p:stCondLst>
+                            <p:childTnLst>
+                              <p:par>
+                                <p:cTn id="5" presetID="9" presetClass="entr" presetSubtype="0" fill="hold" nodeType="clickEffect">
+                                  <p:stCondLst>
+                                    <p:cond delay="0"/>
+                                  </p:stCondLst>
+                                  <p:childTnLst>
+                                    <p:set>
+                                      <p:cBhvr>
+                                        <p:cTn id="6" dur="1" fill="hold">
+                                          <p:stCondLst>
+                                            <p:cond delay="0"/>
+                                          </p:stCondLst>
+                                        </p:cTn>
+                                        <p:tgtEl>
+                                          <p:spTgt spid="3">
+                                            <p:txEl>
+                                              <p:pRg st="2" end="2"/>
+                                            </p:txEl>
+                                          </p:spTgt>
+                                        </p:tgtEl>
+                                        <p:attrNameLst>
+                                          <p:attrName>style.visibility</p:attrName>
+                                        </p:attrNameLst>
+                                      </p:cBhvr>
+                                      <p:to>
+                                        <p:strVal val="visible"/>
+                                      </p:to>
+                                    </p:set>
+                                    <p:animEffect transition="in" filter="dissolve">
+                                      <p:cBhvr>
+                                        <p:cTn id="7" dur="500"/>
+                                        <p:tgtEl>
+                                          <p:spTgt spid="3">
+                                            <p:txEl>
+                                              <p:pRg st="2" end="2"/>
+                                            </p:txEl>
+                                          </p:spTgt>
+                                        </p:tgtEl>
+                                      </p:cBhvr>
+                                    </p:animEffect>
+                                  </p:childTnLst>
+                                </p:cTn>
+                              </p:par>
+                            </p:childTnLst>
+                          </p:cTn>
+                        </p:par>
+                      </p:childTnLst>
+                    </p:cTn>
+                  </p:par>
+                  <p:par>
+                    <p:cTn id="8" fill="hold">
+                      <p:stCondLst>
+                        <p:cond delay="indefinite"/>
+                      </p:stCondLst>
+                      <p:childTnLst>
+                        <p:par>
+                          <p:cTn id="9" fill="hold">
+                            <p:stCondLst>
+                              <p:cond delay="0"/>
+                            </p:stCondLst>
+                            <p:childTnLst>
+                              <p:par>
+                                <p:cTn id="10" presetID="9" presetClass="entr" presetSubtype="0" fill="hold" nodeType="clickEffect">
+                                  <p:stCondLst>
+                                    <p:cond delay="0"/>
+                                  </p:stCondLst>
+                                  <p:childTnLst>
+                                    <p:set>
+                                      <p:cBhvr>
+                                        <p:cTn id="11" dur="1" fill="hold">
+                                          <p:stCondLst>
+                                            <p:cond delay="0"/>
+                                          </p:stCondLst>
+                                        </p:cTn>
+                                        <p:tgtEl>
+                                          <p:spTgt spid="3">
+                                            <p:txEl>
+                                              <p:pRg st="4" end="4"/>
+                                            </p:txEl>
+                                          </p:spTgt>
+                                        </p:tgtEl>
+                                        <p:attrNameLst>
+                                          <p:attrName>style.visibility</p:attrName>
+                                        </p:attrNameLst>
+                                      </p:cBhvr>
+                                      <p:to>
+                                        <p:strVal val="visible"/>
+                                      </p:to>
+                                    </p:set>
+                                    <p:animEffect transition="in" filter="dissolve">
+                                      <p:cBhvr>
+                                        <p:cTn id="12" dur="500"/>
+                                        <p:tgtEl>
+                                          <p:spTgt spid="3">
+                                            <p:txEl>
+                                              <p:pRg st="4" end="4"/>
+                                            </p:txEl>
+                                          </p:spTgt>
+                                        </p:tgtEl>
+                                      </p:cBhvr>
+                                    </p:animEffect>
+                                  </p:childTnLst>
+                                </p:cTn>
+                              </p:par>
+                            </p:childTnLst>
+                          </p:cTn>
+                        </p:par>
+                      </p:childTnLst>
+                    </p:cTn>
+                  </p:par>
+                </p:childTnLst>
+              </p:cTn>
+              <p:prevCondLst>
+                <p:cond evt="onPrev" delay="0">
+                  <p:tgtEl>
+                    <p:sldTgt/>
+                  </p:tgtEl>
+                </p:cond>
+              </p:prevCondLst>
+              <p:nextCondLst>
+                <p:cond evt="onNext" delay="0">
+                  <p:tgtEl>
+                    <p:sldTgt/>
+                  </p:tgtEl>
+                </p:cond>
+              </p:nextCondLst>
+            </p:seq>
+          </p:childTnLst>
+        </p:cTn>
+      </p:par>
+    </p:tnLst>
+  </p:timing>
 </p:sld>
 </file>
 

--- a/COMP2711/Materials/L00-Intro.pptx
+++ b/COMP2711/Materials/L00-Intro.pptx
@@ -5,37 +5,42 @@
     <p:sldMasterId id="2147483648" r:id="rId1"/>
   </p:sldMasterIdLst>
   <p:notesMasterIdLst>
-    <p:notesMasterId r:id="rId30"/>
+    <p:notesMasterId r:id="rId35"/>
   </p:notesMasterIdLst>
   <p:sldIdLst>
     <p:sldId id="811" r:id="rId2"/>
     <p:sldId id="1236" r:id="rId3"/>
-    <p:sldId id="1237" r:id="rId4"/>
-    <p:sldId id="1246" r:id="rId5"/>
-    <p:sldId id="1251" r:id="rId6"/>
-    <p:sldId id="1250" r:id="rId7"/>
-    <p:sldId id="1253" r:id="rId8"/>
-    <p:sldId id="1254" r:id="rId9"/>
-    <p:sldId id="1247" r:id="rId10"/>
-    <p:sldId id="1243" r:id="rId11"/>
-    <p:sldId id="1238" r:id="rId12"/>
-    <p:sldId id="1240" r:id="rId13"/>
-    <p:sldId id="1244" r:id="rId14"/>
-    <p:sldId id="1239" r:id="rId15"/>
-    <p:sldId id="1256" r:id="rId16"/>
-    <p:sldId id="1241" r:id="rId17"/>
-    <p:sldId id="1158" r:id="rId18"/>
-    <p:sldId id="1258" r:id="rId19"/>
-    <p:sldId id="1261" r:id="rId20"/>
-    <p:sldId id="1263" r:id="rId21"/>
-    <p:sldId id="1264" r:id="rId22"/>
-    <p:sldId id="1265" r:id="rId23"/>
-    <p:sldId id="1257" r:id="rId24"/>
-    <p:sldId id="1259" r:id="rId25"/>
-    <p:sldId id="1260" r:id="rId26"/>
-    <p:sldId id="1266" r:id="rId27"/>
-    <p:sldId id="1267" r:id="rId28"/>
-    <p:sldId id="1269" r:id="rId29"/>
+    <p:sldId id="1271" r:id="rId4"/>
+    <p:sldId id="1272" r:id="rId5"/>
+    <p:sldId id="1275" r:id="rId6"/>
+    <p:sldId id="1274" r:id="rId7"/>
+    <p:sldId id="1237" r:id="rId8"/>
+    <p:sldId id="1246" r:id="rId9"/>
+    <p:sldId id="1251" r:id="rId10"/>
+    <p:sldId id="1250" r:id="rId11"/>
+    <p:sldId id="1253" r:id="rId12"/>
+    <p:sldId id="1254" r:id="rId13"/>
+    <p:sldId id="1247" r:id="rId14"/>
+    <p:sldId id="1243" r:id="rId15"/>
+    <p:sldId id="1238" r:id="rId16"/>
+    <p:sldId id="1240" r:id="rId17"/>
+    <p:sldId id="1244" r:id="rId18"/>
+    <p:sldId id="1239" r:id="rId19"/>
+    <p:sldId id="1270" r:id="rId20"/>
+    <p:sldId id="1256" r:id="rId21"/>
+    <p:sldId id="1241" r:id="rId22"/>
+    <p:sldId id="1158" r:id="rId23"/>
+    <p:sldId id="1258" r:id="rId24"/>
+    <p:sldId id="1261" r:id="rId25"/>
+    <p:sldId id="1263" r:id="rId26"/>
+    <p:sldId id="1264" r:id="rId27"/>
+    <p:sldId id="1265" r:id="rId28"/>
+    <p:sldId id="1257" r:id="rId29"/>
+    <p:sldId id="1259" r:id="rId30"/>
+    <p:sldId id="1260" r:id="rId31"/>
+    <p:sldId id="1266" r:id="rId32"/>
+    <p:sldId id="1267" r:id="rId33"/>
+    <p:sldId id="1269" r:id="rId34"/>
   </p:sldIdLst>
   <p:sldSz cx="12192000" cy="6858000"/>
   <p:notesSz cx="6858000" cy="9144000"/>
@@ -224,7 +229,7 @@
           <a:p>
             <a:fld id="{25C994D2-5E16-4D9C-AEFB-2A261088A902}" type="datetimeFigureOut">
               <a:rPr lang="zh-CN" altLang="en-US" smtClean="0"/>
-              <a:t>2026/8/30</a:t>
+              <a:t>2026/9/1</a:t>
             </a:fld>
             <a:endParaRPr lang="zh-CN" altLang="en-US"/>
           </a:p>
@@ -570,6 +575,114 @@
   <p:cSld>
     <p:spTree>
       <p:nvGrpSpPr>
+        <p:cNvPr id="1" name="">
+          <a:extLst>
+            <a:ext uri="{FF2B5EF4-FFF2-40B4-BE49-F238E27FC236}">
+              <a16:creationId xmlns:a16="http://schemas.microsoft.com/office/drawing/2014/main" id="{B8DC6F35-625C-E118-8AB0-8BC6FB3DC2CA}"/>
+            </a:ext>
+          </a:extLst>
+        </p:cNvPr>
+        <p:cNvGrpSpPr/>
+        <p:nvPr/>
+      </p:nvGrpSpPr>
+      <p:grpSpPr>
+        <a:xfrm>
+          <a:off x="0" y="0"/>
+          <a:ext cx="0" cy="0"/>
+          <a:chOff x="0" y="0"/>
+          <a:chExt cx="0" cy="0"/>
+        </a:xfrm>
+      </p:grpSpPr>
+      <p:sp>
+        <p:nvSpPr>
+          <p:cNvPr id="2" name="Slide Image Placeholder 1">
+            <a:extLst>
+              <a:ext uri="{FF2B5EF4-FFF2-40B4-BE49-F238E27FC236}">
+                <a16:creationId xmlns:a16="http://schemas.microsoft.com/office/drawing/2014/main" id="{50733227-1903-CDC0-DD21-ED8863EDE448}"/>
+              </a:ext>
+            </a:extLst>
+          </p:cNvPr>
+          <p:cNvSpPr>
+            <a:spLocks noGrp="1" noRot="1" noChangeAspect="1"/>
+          </p:cNvSpPr>
+          <p:nvPr>
+            <p:ph type="sldImg"/>
+          </p:nvPr>
+        </p:nvSpPr>
+        <p:spPr/>
+      </p:sp>
+      <p:sp>
+        <p:nvSpPr>
+          <p:cNvPr id="3" name="Notes Placeholder 2">
+            <a:extLst>
+              <a:ext uri="{FF2B5EF4-FFF2-40B4-BE49-F238E27FC236}">
+                <a16:creationId xmlns:a16="http://schemas.microsoft.com/office/drawing/2014/main" id="{C0D3C724-6ED7-CCB2-7DCA-7281B78B6A50}"/>
+              </a:ext>
+            </a:extLst>
+          </p:cNvPr>
+          <p:cNvSpPr>
+            <a:spLocks noGrp="1"/>
+          </p:cNvSpPr>
+          <p:nvPr>
+            <p:ph type="body" idx="1"/>
+          </p:nvPr>
+        </p:nvSpPr>
+        <p:spPr/>
+        <p:txBody>
+          <a:bodyPr/>
+          <a:lstStyle/>
+          <a:p>
+            <a:endParaRPr lang="en-US" dirty="0"/>
+          </a:p>
+        </p:txBody>
+      </p:sp>
+      <p:sp>
+        <p:nvSpPr>
+          <p:cNvPr id="4" name="Slide Number Placeholder 3">
+            <a:extLst>
+              <a:ext uri="{FF2B5EF4-FFF2-40B4-BE49-F238E27FC236}">
+                <a16:creationId xmlns:a16="http://schemas.microsoft.com/office/drawing/2014/main" id="{F9BD8C26-4225-AB0A-4397-8B05354666D7}"/>
+              </a:ext>
+            </a:extLst>
+          </p:cNvPr>
+          <p:cNvSpPr>
+            <a:spLocks noGrp="1"/>
+          </p:cNvSpPr>
+          <p:nvPr>
+            <p:ph type="sldNum" sz="quarter" idx="5"/>
+          </p:nvPr>
+        </p:nvSpPr>
+        <p:spPr/>
+        <p:txBody>
+          <a:bodyPr/>
+          <a:lstStyle/>
+          <a:p>
+            <a:fld id="{124B687B-81D5-4F44-AE6B-34CD1245FD04}" type="slidenum">
+              <a:rPr lang="zh-CN" altLang="en-US" smtClean="0"/>
+              <a:t>16</a:t>
+            </a:fld>
+            <a:endParaRPr lang="zh-CN" altLang="en-US"/>
+          </a:p>
+        </p:txBody>
+      </p:sp>
+    </p:spTree>
+    <p:extLst>
+      <p:ext uri="{BB962C8B-B14F-4D97-AF65-F5344CB8AC3E}">
+        <p14:creationId xmlns:p14="http://schemas.microsoft.com/office/powerpoint/2010/main" val="1892692179"/>
+      </p:ext>
+    </p:extLst>
+  </p:cSld>
+  <p:clrMapOvr>
+    <a:masterClrMapping/>
+  </p:clrMapOvr>
+</p:notes>
+</file>
+
+<file path=ppt/notesSlides/notesSlide11.xml><?xml version="1.0" encoding="utf-8"?>
+<p:notes xmlns:a="http://schemas.openxmlformats.org/drawingml/2006/main" xmlns:r="http://schemas.openxmlformats.org/officeDocument/2006/relationships" xmlns:p="http://schemas.openxmlformats.org/presentationml/2006/main">
+  <p:cSld>
+    <p:spTree>
+      <p:nvGrpSpPr>
         <p:cNvPr id="1" name=""/>
         <p:cNvGrpSpPr/>
         <p:nvPr/>
@@ -630,7 +743,278 @@
           <a:p>
             <a:fld id="{124B687B-81D5-4F44-AE6B-34CD1245FD04}" type="slidenum">
               <a:rPr lang="zh-CN" altLang="en-US" smtClean="0"/>
-              <a:t>25</a:t>
+              <a:t>17</a:t>
+            </a:fld>
+            <a:endParaRPr lang="zh-CN" altLang="en-US"/>
+          </a:p>
+        </p:txBody>
+      </p:sp>
+    </p:spTree>
+    <p:extLst>
+      <p:ext uri="{BB962C8B-B14F-4D97-AF65-F5344CB8AC3E}">
+        <p14:creationId xmlns:p14="http://schemas.microsoft.com/office/powerpoint/2010/main" val="3536382774"/>
+      </p:ext>
+    </p:extLst>
+  </p:cSld>
+  <p:clrMapOvr>
+    <a:masterClrMapping/>
+  </p:clrMapOvr>
+</p:notes>
+</file>
+
+<file path=ppt/notesSlides/notesSlide12.xml><?xml version="1.0" encoding="utf-8"?>
+<p:notes xmlns:a="http://schemas.openxmlformats.org/drawingml/2006/main" xmlns:r="http://schemas.openxmlformats.org/officeDocument/2006/relationships" xmlns:p="http://schemas.openxmlformats.org/presentationml/2006/main">
+  <p:cSld>
+    <p:spTree>
+      <p:nvGrpSpPr>
+        <p:cNvPr id="1" name="">
+          <a:extLst>
+            <a:ext uri="{FF2B5EF4-FFF2-40B4-BE49-F238E27FC236}">
+              <a16:creationId xmlns:a16="http://schemas.microsoft.com/office/drawing/2014/main" id="{2B7AF4C5-BF8C-F408-AE16-812D66BC29EA}"/>
+            </a:ext>
+          </a:extLst>
+        </p:cNvPr>
+        <p:cNvGrpSpPr/>
+        <p:nvPr/>
+      </p:nvGrpSpPr>
+      <p:grpSpPr>
+        <a:xfrm>
+          <a:off x="0" y="0"/>
+          <a:ext cx="0" cy="0"/>
+          <a:chOff x="0" y="0"/>
+          <a:chExt cx="0" cy="0"/>
+        </a:xfrm>
+      </p:grpSpPr>
+      <p:sp>
+        <p:nvSpPr>
+          <p:cNvPr id="2" name="Slide Image Placeholder 1">
+            <a:extLst>
+              <a:ext uri="{FF2B5EF4-FFF2-40B4-BE49-F238E27FC236}">
+                <a16:creationId xmlns:a16="http://schemas.microsoft.com/office/drawing/2014/main" id="{B630C16E-051E-05DC-1505-BAA2F32A78CC}"/>
+              </a:ext>
+            </a:extLst>
+          </p:cNvPr>
+          <p:cNvSpPr>
+            <a:spLocks noGrp="1" noRot="1" noChangeAspect="1"/>
+          </p:cNvSpPr>
+          <p:nvPr>
+            <p:ph type="sldImg"/>
+          </p:nvPr>
+        </p:nvSpPr>
+        <p:spPr/>
+      </p:sp>
+      <p:sp>
+        <p:nvSpPr>
+          <p:cNvPr id="3" name="Notes Placeholder 2">
+            <a:extLst>
+              <a:ext uri="{FF2B5EF4-FFF2-40B4-BE49-F238E27FC236}">
+                <a16:creationId xmlns:a16="http://schemas.microsoft.com/office/drawing/2014/main" id="{BDE6A8E9-6B7E-10B1-B698-150552231840}"/>
+              </a:ext>
+            </a:extLst>
+          </p:cNvPr>
+          <p:cNvSpPr>
+            <a:spLocks noGrp="1"/>
+          </p:cNvSpPr>
+          <p:nvPr>
+            <p:ph type="body" idx="1"/>
+          </p:nvPr>
+        </p:nvSpPr>
+        <p:spPr/>
+        <p:txBody>
+          <a:bodyPr/>
+          <a:lstStyle/>
+          <a:p>
+            <a:endParaRPr lang="en-US" dirty="0"/>
+          </a:p>
+        </p:txBody>
+      </p:sp>
+      <p:sp>
+        <p:nvSpPr>
+          <p:cNvPr id="4" name="Slide Number Placeholder 3">
+            <a:extLst>
+              <a:ext uri="{FF2B5EF4-FFF2-40B4-BE49-F238E27FC236}">
+                <a16:creationId xmlns:a16="http://schemas.microsoft.com/office/drawing/2014/main" id="{4940CB8A-7B78-F068-5913-A2203E88DA8D}"/>
+              </a:ext>
+            </a:extLst>
+          </p:cNvPr>
+          <p:cNvSpPr>
+            <a:spLocks noGrp="1"/>
+          </p:cNvSpPr>
+          <p:nvPr>
+            <p:ph type="sldNum" sz="quarter" idx="5"/>
+          </p:nvPr>
+        </p:nvSpPr>
+        <p:spPr/>
+        <p:txBody>
+          <a:bodyPr/>
+          <a:lstStyle/>
+          <a:p>
+            <a:fld id="{124B687B-81D5-4F44-AE6B-34CD1245FD04}" type="slidenum">
+              <a:rPr lang="zh-CN" altLang="en-US" smtClean="0"/>
+              <a:t>21</a:t>
+            </a:fld>
+            <a:endParaRPr lang="zh-CN" altLang="en-US"/>
+          </a:p>
+        </p:txBody>
+      </p:sp>
+    </p:spTree>
+    <p:extLst>
+      <p:ext uri="{BB962C8B-B14F-4D97-AF65-F5344CB8AC3E}">
+        <p14:creationId xmlns:p14="http://schemas.microsoft.com/office/powerpoint/2010/main" val="2243116380"/>
+      </p:ext>
+    </p:extLst>
+  </p:cSld>
+  <p:clrMapOvr>
+    <a:masterClrMapping/>
+  </p:clrMapOvr>
+</p:notes>
+</file>
+
+<file path=ppt/notesSlides/notesSlide13.xml><?xml version="1.0" encoding="utf-8"?>
+<p:notes xmlns:a="http://schemas.openxmlformats.org/drawingml/2006/main" xmlns:r="http://schemas.openxmlformats.org/officeDocument/2006/relationships" xmlns:p="http://schemas.openxmlformats.org/presentationml/2006/main">
+  <p:cSld>
+    <p:spTree>
+      <p:nvGrpSpPr>
+        <p:cNvPr id="1" name=""/>
+        <p:cNvGrpSpPr/>
+        <p:nvPr/>
+      </p:nvGrpSpPr>
+      <p:grpSpPr>
+        <a:xfrm>
+          <a:off x="0" y="0"/>
+          <a:ext cx="0" cy="0"/>
+          <a:chOff x="0" y="0"/>
+          <a:chExt cx="0" cy="0"/>
+        </a:xfrm>
+      </p:grpSpPr>
+      <p:sp>
+        <p:nvSpPr>
+          <p:cNvPr id="2" name="Slide Image Placeholder 1"/>
+          <p:cNvSpPr>
+            <a:spLocks noGrp="1" noRot="1" noChangeAspect="1"/>
+          </p:cNvSpPr>
+          <p:nvPr>
+            <p:ph type="sldImg"/>
+          </p:nvPr>
+        </p:nvSpPr>
+        <p:spPr/>
+      </p:sp>
+      <p:sp>
+        <p:nvSpPr>
+          <p:cNvPr id="3" name="Notes Placeholder 2"/>
+          <p:cNvSpPr>
+            <a:spLocks noGrp="1"/>
+          </p:cNvSpPr>
+          <p:nvPr>
+            <p:ph type="body" idx="1"/>
+          </p:nvPr>
+        </p:nvSpPr>
+        <p:spPr/>
+        <p:txBody>
+          <a:bodyPr/>
+          <a:lstStyle/>
+          <a:p>
+            <a:endParaRPr lang="en-US" dirty="0"/>
+          </a:p>
+        </p:txBody>
+      </p:sp>
+      <p:sp>
+        <p:nvSpPr>
+          <p:cNvPr id="4" name="Slide Number Placeholder 3"/>
+          <p:cNvSpPr>
+            <a:spLocks noGrp="1"/>
+          </p:cNvSpPr>
+          <p:nvPr>
+            <p:ph type="sldNum" sz="quarter" idx="5"/>
+          </p:nvPr>
+        </p:nvSpPr>
+        <p:spPr/>
+        <p:txBody>
+          <a:bodyPr/>
+          <a:lstStyle/>
+          <a:p>
+            <a:fld id="{124B687B-81D5-4F44-AE6B-34CD1245FD04}" type="slidenum">
+              <a:rPr lang="zh-CN" altLang="en-US" smtClean="0"/>
+              <a:t>22</a:t>
+            </a:fld>
+            <a:endParaRPr lang="zh-CN" altLang="en-US"/>
+          </a:p>
+        </p:txBody>
+      </p:sp>
+    </p:spTree>
+  </p:cSld>
+  <p:clrMapOvr>
+    <a:masterClrMapping/>
+  </p:clrMapOvr>
+</p:notes>
+</file>
+
+<file path=ppt/notesSlides/notesSlide14.xml><?xml version="1.0" encoding="utf-8"?>
+<p:notes xmlns:a="http://schemas.openxmlformats.org/drawingml/2006/main" xmlns:r="http://schemas.openxmlformats.org/officeDocument/2006/relationships" xmlns:p="http://schemas.openxmlformats.org/presentationml/2006/main">
+  <p:cSld>
+    <p:spTree>
+      <p:nvGrpSpPr>
+        <p:cNvPr id="1" name=""/>
+        <p:cNvGrpSpPr/>
+        <p:nvPr/>
+      </p:nvGrpSpPr>
+      <p:grpSpPr>
+        <a:xfrm>
+          <a:off x="0" y="0"/>
+          <a:ext cx="0" cy="0"/>
+          <a:chOff x="0" y="0"/>
+          <a:chExt cx="0" cy="0"/>
+        </a:xfrm>
+      </p:grpSpPr>
+      <p:sp>
+        <p:nvSpPr>
+          <p:cNvPr id="2" name="Slide Image Placeholder 1"/>
+          <p:cNvSpPr>
+            <a:spLocks noGrp="1" noRot="1" noChangeAspect="1"/>
+          </p:cNvSpPr>
+          <p:nvPr>
+            <p:ph type="sldImg"/>
+          </p:nvPr>
+        </p:nvSpPr>
+        <p:spPr/>
+      </p:sp>
+      <p:sp>
+        <p:nvSpPr>
+          <p:cNvPr id="3" name="Notes Placeholder 2"/>
+          <p:cNvSpPr>
+            <a:spLocks noGrp="1"/>
+          </p:cNvSpPr>
+          <p:nvPr>
+            <p:ph type="body" idx="1"/>
+          </p:nvPr>
+        </p:nvSpPr>
+        <p:spPr/>
+        <p:txBody>
+          <a:bodyPr/>
+          <a:lstStyle/>
+          <a:p>
+            <a:endParaRPr lang="en-US" dirty="0"/>
+          </a:p>
+        </p:txBody>
+      </p:sp>
+      <p:sp>
+        <p:nvSpPr>
+          <p:cNvPr id="4" name="Slide Number Placeholder 3"/>
+          <p:cNvSpPr>
+            <a:spLocks noGrp="1"/>
+          </p:cNvSpPr>
+          <p:nvPr>
+            <p:ph type="sldNum" sz="quarter" idx="5"/>
+          </p:nvPr>
+        </p:nvSpPr>
+        <p:spPr/>
+        <p:txBody>
+          <a:bodyPr/>
+          <a:lstStyle/>
+          <a:p>
+            <a:fld id="{124B687B-81D5-4F44-AE6B-34CD1245FD04}" type="slidenum">
+              <a:rPr lang="zh-CN" altLang="en-US" smtClean="0"/>
+              <a:t>30</a:t>
             </a:fld>
             <a:endParaRPr lang="zh-CN" altLang="en-US"/>
           </a:p>
@@ -738,6 +1122,414 @@
   <p:cSld>
     <p:spTree>
       <p:nvGrpSpPr>
+        <p:cNvPr id="1" name=""/>
+        <p:cNvGrpSpPr/>
+        <p:nvPr/>
+      </p:nvGrpSpPr>
+      <p:grpSpPr>
+        <a:xfrm>
+          <a:off x="0" y="0"/>
+          <a:ext cx="0" cy="0"/>
+          <a:chOff x="0" y="0"/>
+          <a:chExt cx="0" cy="0"/>
+        </a:xfrm>
+      </p:grpSpPr>
+      <p:sp>
+        <p:nvSpPr>
+          <p:cNvPr id="2" name="Slide Image Placeholder 1"/>
+          <p:cNvSpPr>
+            <a:spLocks noGrp="1" noRot="1" noChangeAspect="1"/>
+          </p:cNvSpPr>
+          <p:nvPr>
+            <p:ph type="sldImg"/>
+          </p:nvPr>
+        </p:nvSpPr>
+        <p:spPr/>
+      </p:sp>
+      <p:sp>
+        <p:nvSpPr>
+          <p:cNvPr id="3" name="Notes Placeholder 2"/>
+          <p:cNvSpPr>
+            <a:spLocks noGrp="1"/>
+          </p:cNvSpPr>
+          <p:nvPr>
+            <p:ph type="body" idx="1"/>
+          </p:nvPr>
+        </p:nvSpPr>
+        <p:spPr/>
+        <p:txBody>
+          <a:bodyPr/>
+          <a:lstStyle/>
+          <a:p>
+            <a:endParaRPr lang="en-US" dirty="0"/>
+          </a:p>
+        </p:txBody>
+      </p:sp>
+      <p:sp>
+        <p:nvSpPr>
+          <p:cNvPr id="4" name="Slide Number Placeholder 3"/>
+          <p:cNvSpPr>
+            <a:spLocks noGrp="1"/>
+          </p:cNvSpPr>
+          <p:nvPr>
+            <p:ph type="sldNum" sz="quarter" idx="5"/>
+          </p:nvPr>
+        </p:nvSpPr>
+        <p:spPr/>
+        <p:txBody>
+          <a:bodyPr/>
+          <a:lstStyle/>
+          <a:p>
+            <a:fld id="{124B687B-81D5-4F44-AE6B-34CD1245FD04}" type="slidenum">
+              <a:rPr lang="zh-CN" altLang="en-US" smtClean="0"/>
+              <a:t>3</a:t>
+            </a:fld>
+            <a:endParaRPr lang="zh-CN" altLang="en-US"/>
+          </a:p>
+        </p:txBody>
+      </p:sp>
+    </p:spTree>
+    <p:extLst>
+      <p:ext uri="{BB962C8B-B14F-4D97-AF65-F5344CB8AC3E}">
+        <p14:creationId xmlns:p14="http://schemas.microsoft.com/office/powerpoint/2010/main" val="240895457"/>
+      </p:ext>
+    </p:extLst>
+  </p:cSld>
+  <p:clrMapOvr>
+    <a:masterClrMapping/>
+  </p:clrMapOvr>
+</p:notes>
+</file>
+
+<file path=ppt/notesSlides/notesSlide4.xml><?xml version="1.0" encoding="utf-8"?>
+<p:notes xmlns:a="http://schemas.openxmlformats.org/drawingml/2006/main" xmlns:r="http://schemas.openxmlformats.org/officeDocument/2006/relationships" xmlns:p="http://schemas.openxmlformats.org/presentationml/2006/main">
+  <p:cSld>
+    <p:spTree>
+      <p:nvGrpSpPr>
+        <p:cNvPr id="1" name="">
+          <a:extLst>
+            <a:ext uri="{FF2B5EF4-FFF2-40B4-BE49-F238E27FC236}">
+              <a16:creationId xmlns:a16="http://schemas.microsoft.com/office/drawing/2014/main" id="{8596B7CB-F317-C44E-54BB-A2DB1B8DB315}"/>
+            </a:ext>
+          </a:extLst>
+        </p:cNvPr>
+        <p:cNvGrpSpPr/>
+        <p:nvPr/>
+      </p:nvGrpSpPr>
+      <p:grpSpPr>
+        <a:xfrm>
+          <a:off x="0" y="0"/>
+          <a:ext cx="0" cy="0"/>
+          <a:chOff x="0" y="0"/>
+          <a:chExt cx="0" cy="0"/>
+        </a:xfrm>
+      </p:grpSpPr>
+      <p:sp>
+        <p:nvSpPr>
+          <p:cNvPr id="2" name="Slide Image Placeholder 1">
+            <a:extLst>
+              <a:ext uri="{FF2B5EF4-FFF2-40B4-BE49-F238E27FC236}">
+                <a16:creationId xmlns:a16="http://schemas.microsoft.com/office/drawing/2014/main" id="{F9268316-72DE-CC0E-97C4-94B446480135}"/>
+              </a:ext>
+            </a:extLst>
+          </p:cNvPr>
+          <p:cNvSpPr>
+            <a:spLocks noGrp="1" noRot="1" noChangeAspect="1"/>
+          </p:cNvSpPr>
+          <p:nvPr>
+            <p:ph type="sldImg"/>
+          </p:nvPr>
+        </p:nvSpPr>
+        <p:spPr/>
+      </p:sp>
+      <p:sp>
+        <p:nvSpPr>
+          <p:cNvPr id="3" name="Notes Placeholder 2">
+            <a:extLst>
+              <a:ext uri="{FF2B5EF4-FFF2-40B4-BE49-F238E27FC236}">
+                <a16:creationId xmlns:a16="http://schemas.microsoft.com/office/drawing/2014/main" id="{B082C79C-7EA9-0AAF-D17D-8CA9DCBD8730}"/>
+              </a:ext>
+            </a:extLst>
+          </p:cNvPr>
+          <p:cNvSpPr>
+            <a:spLocks noGrp="1"/>
+          </p:cNvSpPr>
+          <p:nvPr>
+            <p:ph type="body" idx="1"/>
+          </p:nvPr>
+        </p:nvSpPr>
+        <p:spPr/>
+        <p:txBody>
+          <a:bodyPr/>
+          <a:lstStyle/>
+          <a:p>
+            <a:endParaRPr lang="en-US" dirty="0"/>
+          </a:p>
+        </p:txBody>
+      </p:sp>
+      <p:sp>
+        <p:nvSpPr>
+          <p:cNvPr id="4" name="Slide Number Placeholder 3">
+            <a:extLst>
+              <a:ext uri="{FF2B5EF4-FFF2-40B4-BE49-F238E27FC236}">
+                <a16:creationId xmlns:a16="http://schemas.microsoft.com/office/drawing/2014/main" id="{1EBDC551-0248-4609-6548-C0EB9B54D258}"/>
+              </a:ext>
+            </a:extLst>
+          </p:cNvPr>
+          <p:cNvSpPr>
+            <a:spLocks noGrp="1"/>
+          </p:cNvSpPr>
+          <p:nvPr>
+            <p:ph type="sldNum" sz="quarter" idx="5"/>
+          </p:nvPr>
+        </p:nvSpPr>
+        <p:spPr/>
+        <p:txBody>
+          <a:bodyPr/>
+          <a:lstStyle/>
+          <a:p>
+            <a:fld id="{124B687B-81D5-4F44-AE6B-34CD1245FD04}" type="slidenum">
+              <a:rPr lang="zh-CN" altLang="en-US" smtClean="0"/>
+              <a:t>4</a:t>
+            </a:fld>
+            <a:endParaRPr lang="zh-CN" altLang="en-US"/>
+          </a:p>
+        </p:txBody>
+      </p:sp>
+    </p:spTree>
+    <p:extLst>
+      <p:ext uri="{BB962C8B-B14F-4D97-AF65-F5344CB8AC3E}">
+        <p14:creationId xmlns:p14="http://schemas.microsoft.com/office/powerpoint/2010/main" val="3595221948"/>
+      </p:ext>
+    </p:extLst>
+  </p:cSld>
+  <p:clrMapOvr>
+    <a:masterClrMapping/>
+  </p:clrMapOvr>
+</p:notes>
+</file>
+
+<file path=ppt/notesSlides/notesSlide5.xml><?xml version="1.0" encoding="utf-8"?>
+<p:notes xmlns:a="http://schemas.openxmlformats.org/drawingml/2006/main" xmlns:r="http://schemas.openxmlformats.org/officeDocument/2006/relationships" xmlns:p="http://schemas.openxmlformats.org/presentationml/2006/main">
+  <p:cSld>
+    <p:spTree>
+      <p:nvGrpSpPr>
+        <p:cNvPr id="1" name="">
+          <a:extLst>
+            <a:ext uri="{FF2B5EF4-FFF2-40B4-BE49-F238E27FC236}">
+              <a16:creationId xmlns:a16="http://schemas.microsoft.com/office/drawing/2014/main" id="{B4772486-1056-CC48-1069-707C55434685}"/>
+            </a:ext>
+          </a:extLst>
+        </p:cNvPr>
+        <p:cNvGrpSpPr/>
+        <p:nvPr/>
+      </p:nvGrpSpPr>
+      <p:grpSpPr>
+        <a:xfrm>
+          <a:off x="0" y="0"/>
+          <a:ext cx="0" cy="0"/>
+          <a:chOff x="0" y="0"/>
+          <a:chExt cx="0" cy="0"/>
+        </a:xfrm>
+      </p:grpSpPr>
+      <p:sp>
+        <p:nvSpPr>
+          <p:cNvPr id="2" name="Slide Image Placeholder 1">
+            <a:extLst>
+              <a:ext uri="{FF2B5EF4-FFF2-40B4-BE49-F238E27FC236}">
+                <a16:creationId xmlns:a16="http://schemas.microsoft.com/office/drawing/2014/main" id="{379590FD-162F-7D53-7E33-CC52793D8A5E}"/>
+              </a:ext>
+            </a:extLst>
+          </p:cNvPr>
+          <p:cNvSpPr>
+            <a:spLocks noGrp="1" noRot="1" noChangeAspect="1"/>
+          </p:cNvSpPr>
+          <p:nvPr>
+            <p:ph type="sldImg"/>
+          </p:nvPr>
+        </p:nvSpPr>
+        <p:spPr/>
+      </p:sp>
+      <p:sp>
+        <p:nvSpPr>
+          <p:cNvPr id="3" name="Notes Placeholder 2">
+            <a:extLst>
+              <a:ext uri="{FF2B5EF4-FFF2-40B4-BE49-F238E27FC236}">
+                <a16:creationId xmlns:a16="http://schemas.microsoft.com/office/drawing/2014/main" id="{201D0B38-1702-A1C9-6EB9-FC274DF99A1F}"/>
+              </a:ext>
+            </a:extLst>
+          </p:cNvPr>
+          <p:cNvSpPr>
+            <a:spLocks noGrp="1"/>
+          </p:cNvSpPr>
+          <p:nvPr>
+            <p:ph type="body" idx="1"/>
+          </p:nvPr>
+        </p:nvSpPr>
+        <p:spPr/>
+        <p:txBody>
+          <a:bodyPr/>
+          <a:lstStyle/>
+          <a:p>
+            <a:endParaRPr lang="en-US" dirty="0"/>
+          </a:p>
+        </p:txBody>
+      </p:sp>
+      <p:sp>
+        <p:nvSpPr>
+          <p:cNvPr id="4" name="Slide Number Placeholder 3">
+            <a:extLst>
+              <a:ext uri="{FF2B5EF4-FFF2-40B4-BE49-F238E27FC236}">
+                <a16:creationId xmlns:a16="http://schemas.microsoft.com/office/drawing/2014/main" id="{04FC1E47-2EC7-72FB-5B74-7BAB1C393381}"/>
+              </a:ext>
+            </a:extLst>
+          </p:cNvPr>
+          <p:cNvSpPr>
+            <a:spLocks noGrp="1"/>
+          </p:cNvSpPr>
+          <p:nvPr>
+            <p:ph type="sldNum" sz="quarter" idx="5"/>
+          </p:nvPr>
+        </p:nvSpPr>
+        <p:spPr/>
+        <p:txBody>
+          <a:bodyPr/>
+          <a:lstStyle/>
+          <a:p>
+            <a:fld id="{124B687B-81D5-4F44-AE6B-34CD1245FD04}" type="slidenum">
+              <a:rPr lang="zh-CN" altLang="en-US" smtClean="0"/>
+              <a:t>5</a:t>
+            </a:fld>
+            <a:endParaRPr lang="zh-CN" altLang="en-US"/>
+          </a:p>
+        </p:txBody>
+      </p:sp>
+    </p:spTree>
+    <p:extLst>
+      <p:ext uri="{BB962C8B-B14F-4D97-AF65-F5344CB8AC3E}">
+        <p14:creationId xmlns:p14="http://schemas.microsoft.com/office/powerpoint/2010/main" val="1672525331"/>
+      </p:ext>
+    </p:extLst>
+  </p:cSld>
+  <p:clrMapOvr>
+    <a:masterClrMapping/>
+  </p:clrMapOvr>
+</p:notes>
+</file>
+
+<file path=ppt/notesSlides/notesSlide6.xml><?xml version="1.0" encoding="utf-8"?>
+<p:notes xmlns:a="http://schemas.openxmlformats.org/drawingml/2006/main" xmlns:r="http://schemas.openxmlformats.org/officeDocument/2006/relationships" xmlns:p="http://schemas.openxmlformats.org/presentationml/2006/main">
+  <p:cSld>
+    <p:spTree>
+      <p:nvGrpSpPr>
+        <p:cNvPr id="1" name="">
+          <a:extLst>
+            <a:ext uri="{FF2B5EF4-FFF2-40B4-BE49-F238E27FC236}">
+              <a16:creationId xmlns:a16="http://schemas.microsoft.com/office/drawing/2014/main" id="{5296FD89-77C1-1062-6E57-7954F7884E28}"/>
+            </a:ext>
+          </a:extLst>
+        </p:cNvPr>
+        <p:cNvGrpSpPr/>
+        <p:nvPr/>
+      </p:nvGrpSpPr>
+      <p:grpSpPr>
+        <a:xfrm>
+          <a:off x="0" y="0"/>
+          <a:ext cx="0" cy="0"/>
+          <a:chOff x="0" y="0"/>
+          <a:chExt cx="0" cy="0"/>
+        </a:xfrm>
+      </p:grpSpPr>
+      <p:sp>
+        <p:nvSpPr>
+          <p:cNvPr id="2" name="Slide Image Placeholder 1">
+            <a:extLst>
+              <a:ext uri="{FF2B5EF4-FFF2-40B4-BE49-F238E27FC236}">
+                <a16:creationId xmlns:a16="http://schemas.microsoft.com/office/drawing/2014/main" id="{B859578A-D961-213C-C96F-80DCBB1AF970}"/>
+              </a:ext>
+            </a:extLst>
+          </p:cNvPr>
+          <p:cNvSpPr>
+            <a:spLocks noGrp="1" noRot="1" noChangeAspect="1"/>
+          </p:cNvSpPr>
+          <p:nvPr>
+            <p:ph type="sldImg"/>
+          </p:nvPr>
+        </p:nvSpPr>
+        <p:spPr/>
+      </p:sp>
+      <p:sp>
+        <p:nvSpPr>
+          <p:cNvPr id="3" name="Notes Placeholder 2">
+            <a:extLst>
+              <a:ext uri="{FF2B5EF4-FFF2-40B4-BE49-F238E27FC236}">
+                <a16:creationId xmlns:a16="http://schemas.microsoft.com/office/drawing/2014/main" id="{64BD7F4F-7529-2191-E3F3-AF031E938D57}"/>
+              </a:ext>
+            </a:extLst>
+          </p:cNvPr>
+          <p:cNvSpPr>
+            <a:spLocks noGrp="1"/>
+          </p:cNvSpPr>
+          <p:nvPr>
+            <p:ph type="body" idx="1"/>
+          </p:nvPr>
+        </p:nvSpPr>
+        <p:spPr/>
+        <p:txBody>
+          <a:bodyPr/>
+          <a:lstStyle/>
+          <a:p>
+            <a:endParaRPr lang="en-US" dirty="0"/>
+          </a:p>
+        </p:txBody>
+      </p:sp>
+      <p:sp>
+        <p:nvSpPr>
+          <p:cNvPr id="4" name="Slide Number Placeholder 3">
+            <a:extLst>
+              <a:ext uri="{FF2B5EF4-FFF2-40B4-BE49-F238E27FC236}">
+                <a16:creationId xmlns:a16="http://schemas.microsoft.com/office/drawing/2014/main" id="{582C05F6-E615-2FE8-765F-EFB52CF61CA2}"/>
+              </a:ext>
+            </a:extLst>
+          </p:cNvPr>
+          <p:cNvSpPr>
+            <a:spLocks noGrp="1"/>
+          </p:cNvSpPr>
+          <p:nvPr>
+            <p:ph type="sldNum" sz="quarter" idx="5"/>
+          </p:nvPr>
+        </p:nvSpPr>
+        <p:spPr/>
+        <p:txBody>
+          <a:bodyPr/>
+          <a:lstStyle/>
+          <a:p>
+            <a:fld id="{124B687B-81D5-4F44-AE6B-34CD1245FD04}" type="slidenum">
+              <a:rPr lang="zh-CN" altLang="en-US" smtClean="0"/>
+              <a:t>6</a:t>
+            </a:fld>
+            <a:endParaRPr lang="zh-CN" altLang="en-US"/>
+          </a:p>
+        </p:txBody>
+      </p:sp>
+    </p:spTree>
+    <p:extLst>
+      <p:ext uri="{BB962C8B-B14F-4D97-AF65-F5344CB8AC3E}">
+        <p14:creationId xmlns:p14="http://schemas.microsoft.com/office/powerpoint/2010/main" val="1347841385"/>
+      </p:ext>
+    </p:extLst>
+  </p:cSld>
+  <p:clrMapOvr>
+    <a:masterClrMapping/>
+  </p:clrMapOvr>
+</p:notes>
+</file>
+
+<file path=ppt/notesSlides/notesSlide7.xml><?xml version="1.0" encoding="utf-8"?>
+<p:notes xmlns:a="http://schemas.openxmlformats.org/drawingml/2006/main" xmlns:r="http://schemas.openxmlformats.org/officeDocument/2006/relationships" xmlns:p="http://schemas.openxmlformats.org/presentationml/2006/main">
+  <p:cSld>
+    <p:spTree>
+      <p:nvGrpSpPr>
         <p:cNvPr id="1" name="">
           <a:extLst>
             <a:ext uri="{FF2B5EF4-FFF2-40B4-BE49-F238E27FC236}">
@@ -822,7 +1614,7 @@
           <a:p>
             <a:fld id="{124B687B-81D5-4F44-AE6B-34CD1245FD04}" type="slidenum">
               <a:rPr lang="zh-CN" altLang="en-US" smtClean="0"/>
-              <a:t>3</a:t>
+              <a:t>7</a:t>
             </a:fld>
             <a:endParaRPr lang="zh-CN" altLang="en-US"/>
           </a:p>
@@ -841,7 +1633,7 @@
 </p:notes>
 </file>
 
-<file path=ppt/notesSlides/notesSlide4.xml><?xml version="1.0" encoding="utf-8"?>
+<file path=ppt/notesSlides/notesSlide8.xml><?xml version="1.0" encoding="utf-8"?>
 <p:notes xmlns:a="http://schemas.openxmlformats.org/drawingml/2006/main" xmlns:r="http://schemas.openxmlformats.org/officeDocument/2006/relationships" xmlns:p="http://schemas.openxmlformats.org/presentationml/2006/main">
   <p:cSld>
     <p:spTree>
@@ -906,7 +1698,7 @@
           <a:p>
             <a:fld id="{124B687B-81D5-4F44-AE6B-34CD1245FD04}" type="slidenum">
               <a:rPr lang="zh-CN" altLang="en-US" smtClean="0"/>
-              <a:t>10</a:t>
+              <a:t>14</a:t>
             </a:fld>
             <a:endParaRPr lang="zh-CN" altLang="en-US"/>
           </a:p>
@@ -925,7 +1717,7 @@
 </p:notes>
 </file>
 
-<file path=ppt/notesSlides/notesSlide5.xml><?xml version="1.0" encoding="utf-8"?>
+<file path=ppt/notesSlides/notesSlide9.xml><?xml version="1.0" encoding="utf-8"?>
 <p:notes xmlns:a="http://schemas.openxmlformats.org/drawingml/2006/main" xmlns:r="http://schemas.openxmlformats.org/officeDocument/2006/relationships" xmlns:p="http://schemas.openxmlformats.org/presentationml/2006/main">
   <p:cSld>
     <p:spTree>
@@ -1014,7 +1806,7 @@
           <a:p>
             <a:fld id="{124B687B-81D5-4F44-AE6B-34CD1245FD04}" type="slidenum">
               <a:rPr lang="zh-CN" altLang="en-US" smtClean="0"/>
-              <a:t>11</a:t>
+              <a:t>15</a:t>
             </a:fld>
             <a:endParaRPr lang="zh-CN" altLang="en-US"/>
           </a:p>
@@ -1026,385 +1818,6 @@
         <p14:creationId xmlns:p14="http://schemas.microsoft.com/office/powerpoint/2010/main" val="3043570065"/>
       </p:ext>
     </p:extLst>
-  </p:cSld>
-  <p:clrMapOvr>
-    <a:masterClrMapping/>
-  </p:clrMapOvr>
-</p:notes>
-</file>
-
-<file path=ppt/notesSlides/notesSlide6.xml><?xml version="1.0" encoding="utf-8"?>
-<p:notes xmlns:a="http://schemas.openxmlformats.org/drawingml/2006/main" xmlns:r="http://schemas.openxmlformats.org/officeDocument/2006/relationships" xmlns:p="http://schemas.openxmlformats.org/presentationml/2006/main">
-  <p:cSld>
-    <p:spTree>
-      <p:nvGrpSpPr>
-        <p:cNvPr id="1" name="">
-          <a:extLst>
-            <a:ext uri="{FF2B5EF4-FFF2-40B4-BE49-F238E27FC236}">
-              <a16:creationId xmlns:a16="http://schemas.microsoft.com/office/drawing/2014/main" id="{B8DC6F35-625C-E118-8AB0-8BC6FB3DC2CA}"/>
-            </a:ext>
-          </a:extLst>
-        </p:cNvPr>
-        <p:cNvGrpSpPr/>
-        <p:nvPr/>
-      </p:nvGrpSpPr>
-      <p:grpSpPr>
-        <a:xfrm>
-          <a:off x="0" y="0"/>
-          <a:ext cx="0" cy="0"/>
-          <a:chOff x="0" y="0"/>
-          <a:chExt cx="0" cy="0"/>
-        </a:xfrm>
-      </p:grpSpPr>
-      <p:sp>
-        <p:nvSpPr>
-          <p:cNvPr id="2" name="Slide Image Placeholder 1">
-            <a:extLst>
-              <a:ext uri="{FF2B5EF4-FFF2-40B4-BE49-F238E27FC236}">
-                <a16:creationId xmlns:a16="http://schemas.microsoft.com/office/drawing/2014/main" id="{50733227-1903-CDC0-DD21-ED8863EDE448}"/>
-              </a:ext>
-            </a:extLst>
-          </p:cNvPr>
-          <p:cNvSpPr>
-            <a:spLocks noGrp="1" noRot="1" noChangeAspect="1"/>
-          </p:cNvSpPr>
-          <p:nvPr>
-            <p:ph type="sldImg"/>
-          </p:nvPr>
-        </p:nvSpPr>
-        <p:spPr/>
-      </p:sp>
-      <p:sp>
-        <p:nvSpPr>
-          <p:cNvPr id="3" name="Notes Placeholder 2">
-            <a:extLst>
-              <a:ext uri="{FF2B5EF4-FFF2-40B4-BE49-F238E27FC236}">
-                <a16:creationId xmlns:a16="http://schemas.microsoft.com/office/drawing/2014/main" id="{C0D3C724-6ED7-CCB2-7DCA-7281B78B6A50}"/>
-              </a:ext>
-            </a:extLst>
-          </p:cNvPr>
-          <p:cNvSpPr>
-            <a:spLocks noGrp="1"/>
-          </p:cNvSpPr>
-          <p:nvPr>
-            <p:ph type="body" idx="1"/>
-          </p:nvPr>
-        </p:nvSpPr>
-        <p:spPr/>
-        <p:txBody>
-          <a:bodyPr/>
-          <a:lstStyle/>
-          <a:p>
-            <a:endParaRPr lang="en-US" dirty="0"/>
-          </a:p>
-        </p:txBody>
-      </p:sp>
-      <p:sp>
-        <p:nvSpPr>
-          <p:cNvPr id="4" name="Slide Number Placeholder 3">
-            <a:extLst>
-              <a:ext uri="{FF2B5EF4-FFF2-40B4-BE49-F238E27FC236}">
-                <a16:creationId xmlns:a16="http://schemas.microsoft.com/office/drawing/2014/main" id="{F9BD8C26-4225-AB0A-4397-8B05354666D7}"/>
-              </a:ext>
-            </a:extLst>
-          </p:cNvPr>
-          <p:cNvSpPr>
-            <a:spLocks noGrp="1"/>
-          </p:cNvSpPr>
-          <p:nvPr>
-            <p:ph type="sldNum" sz="quarter" idx="5"/>
-          </p:nvPr>
-        </p:nvSpPr>
-        <p:spPr/>
-        <p:txBody>
-          <a:bodyPr/>
-          <a:lstStyle/>
-          <a:p>
-            <a:fld id="{124B687B-81D5-4F44-AE6B-34CD1245FD04}" type="slidenum">
-              <a:rPr lang="zh-CN" altLang="en-US" smtClean="0"/>
-              <a:t>12</a:t>
-            </a:fld>
-            <a:endParaRPr lang="zh-CN" altLang="en-US"/>
-          </a:p>
-        </p:txBody>
-      </p:sp>
-    </p:spTree>
-    <p:extLst>
-      <p:ext uri="{BB962C8B-B14F-4D97-AF65-F5344CB8AC3E}">
-        <p14:creationId xmlns:p14="http://schemas.microsoft.com/office/powerpoint/2010/main" val="1892692179"/>
-      </p:ext>
-    </p:extLst>
-  </p:cSld>
-  <p:clrMapOvr>
-    <a:masterClrMapping/>
-  </p:clrMapOvr>
-</p:notes>
-</file>
-
-<file path=ppt/notesSlides/notesSlide7.xml><?xml version="1.0" encoding="utf-8"?>
-<p:notes xmlns:a="http://schemas.openxmlformats.org/drawingml/2006/main" xmlns:r="http://schemas.openxmlformats.org/officeDocument/2006/relationships" xmlns:p="http://schemas.openxmlformats.org/presentationml/2006/main">
-  <p:cSld>
-    <p:spTree>
-      <p:nvGrpSpPr>
-        <p:cNvPr id="1" name=""/>
-        <p:cNvGrpSpPr/>
-        <p:nvPr/>
-      </p:nvGrpSpPr>
-      <p:grpSpPr>
-        <a:xfrm>
-          <a:off x="0" y="0"/>
-          <a:ext cx="0" cy="0"/>
-          <a:chOff x="0" y="0"/>
-          <a:chExt cx="0" cy="0"/>
-        </a:xfrm>
-      </p:grpSpPr>
-      <p:sp>
-        <p:nvSpPr>
-          <p:cNvPr id="2" name="Slide Image Placeholder 1"/>
-          <p:cNvSpPr>
-            <a:spLocks noGrp="1" noRot="1" noChangeAspect="1"/>
-          </p:cNvSpPr>
-          <p:nvPr>
-            <p:ph type="sldImg"/>
-          </p:nvPr>
-        </p:nvSpPr>
-        <p:spPr/>
-      </p:sp>
-      <p:sp>
-        <p:nvSpPr>
-          <p:cNvPr id="3" name="Notes Placeholder 2"/>
-          <p:cNvSpPr>
-            <a:spLocks noGrp="1"/>
-          </p:cNvSpPr>
-          <p:nvPr>
-            <p:ph type="body" idx="1"/>
-          </p:nvPr>
-        </p:nvSpPr>
-        <p:spPr/>
-        <p:txBody>
-          <a:bodyPr/>
-          <a:lstStyle/>
-          <a:p>
-            <a:endParaRPr lang="en-US" dirty="0"/>
-          </a:p>
-        </p:txBody>
-      </p:sp>
-      <p:sp>
-        <p:nvSpPr>
-          <p:cNvPr id="4" name="Slide Number Placeholder 3"/>
-          <p:cNvSpPr>
-            <a:spLocks noGrp="1"/>
-          </p:cNvSpPr>
-          <p:nvPr>
-            <p:ph type="sldNum" sz="quarter" idx="5"/>
-          </p:nvPr>
-        </p:nvSpPr>
-        <p:spPr/>
-        <p:txBody>
-          <a:bodyPr/>
-          <a:lstStyle/>
-          <a:p>
-            <a:fld id="{124B687B-81D5-4F44-AE6B-34CD1245FD04}" type="slidenum">
-              <a:rPr lang="zh-CN" altLang="en-US" smtClean="0"/>
-              <a:t>13</a:t>
-            </a:fld>
-            <a:endParaRPr lang="zh-CN" altLang="en-US"/>
-          </a:p>
-        </p:txBody>
-      </p:sp>
-    </p:spTree>
-    <p:extLst>
-      <p:ext uri="{BB962C8B-B14F-4D97-AF65-F5344CB8AC3E}">
-        <p14:creationId xmlns:p14="http://schemas.microsoft.com/office/powerpoint/2010/main" val="3536382774"/>
-      </p:ext>
-    </p:extLst>
-  </p:cSld>
-  <p:clrMapOvr>
-    <a:masterClrMapping/>
-  </p:clrMapOvr>
-</p:notes>
-</file>
-
-<file path=ppt/notesSlides/notesSlide8.xml><?xml version="1.0" encoding="utf-8"?>
-<p:notes xmlns:a="http://schemas.openxmlformats.org/drawingml/2006/main" xmlns:r="http://schemas.openxmlformats.org/officeDocument/2006/relationships" xmlns:p="http://schemas.openxmlformats.org/presentationml/2006/main">
-  <p:cSld>
-    <p:spTree>
-      <p:nvGrpSpPr>
-        <p:cNvPr id="1" name="">
-          <a:extLst>
-            <a:ext uri="{FF2B5EF4-FFF2-40B4-BE49-F238E27FC236}">
-              <a16:creationId xmlns:a16="http://schemas.microsoft.com/office/drawing/2014/main" id="{2B7AF4C5-BF8C-F408-AE16-812D66BC29EA}"/>
-            </a:ext>
-          </a:extLst>
-        </p:cNvPr>
-        <p:cNvGrpSpPr/>
-        <p:nvPr/>
-      </p:nvGrpSpPr>
-      <p:grpSpPr>
-        <a:xfrm>
-          <a:off x="0" y="0"/>
-          <a:ext cx="0" cy="0"/>
-          <a:chOff x="0" y="0"/>
-          <a:chExt cx="0" cy="0"/>
-        </a:xfrm>
-      </p:grpSpPr>
-      <p:sp>
-        <p:nvSpPr>
-          <p:cNvPr id="2" name="Slide Image Placeholder 1">
-            <a:extLst>
-              <a:ext uri="{FF2B5EF4-FFF2-40B4-BE49-F238E27FC236}">
-                <a16:creationId xmlns:a16="http://schemas.microsoft.com/office/drawing/2014/main" id="{B630C16E-051E-05DC-1505-BAA2F32A78CC}"/>
-              </a:ext>
-            </a:extLst>
-          </p:cNvPr>
-          <p:cNvSpPr>
-            <a:spLocks noGrp="1" noRot="1" noChangeAspect="1"/>
-          </p:cNvSpPr>
-          <p:nvPr>
-            <p:ph type="sldImg"/>
-          </p:nvPr>
-        </p:nvSpPr>
-        <p:spPr/>
-      </p:sp>
-      <p:sp>
-        <p:nvSpPr>
-          <p:cNvPr id="3" name="Notes Placeholder 2">
-            <a:extLst>
-              <a:ext uri="{FF2B5EF4-FFF2-40B4-BE49-F238E27FC236}">
-                <a16:creationId xmlns:a16="http://schemas.microsoft.com/office/drawing/2014/main" id="{BDE6A8E9-6B7E-10B1-B698-150552231840}"/>
-              </a:ext>
-            </a:extLst>
-          </p:cNvPr>
-          <p:cNvSpPr>
-            <a:spLocks noGrp="1"/>
-          </p:cNvSpPr>
-          <p:nvPr>
-            <p:ph type="body" idx="1"/>
-          </p:nvPr>
-        </p:nvSpPr>
-        <p:spPr/>
-        <p:txBody>
-          <a:bodyPr/>
-          <a:lstStyle/>
-          <a:p>
-            <a:endParaRPr lang="en-US" dirty="0"/>
-          </a:p>
-        </p:txBody>
-      </p:sp>
-      <p:sp>
-        <p:nvSpPr>
-          <p:cNvPr id="4" name="Slide Number Placeholder 3">
-            <a:extLst>
-              <a:ext uri="{FF2B5EF4-FFF2-40B4-BE49-F238E27FC236}">
-                <a16:creationId xmlns:a16="http://schemas.microsoft.com/office/drawing/2014/main" id="{4940CB8A-7B78-F068-5913-A2203E88DA8D}"/>
-              </a:ext>
-            </a:extLst>
-          </p:cNvPr>
-          <p:cNvSpPr>
-            <a:spLocks noGrp="1"/>
-          </p:cNvSpPr>
-          <p:nvPr>
-            <p:ph type="sldNum" sz="quarter" idx="5"/>
-          </p:nvPr>
-        </p:nvSpPr>
-        <p:spPr/>
-        <p:txBody>
-          <a:bodyPr/>
-          <a:lstStyle/>
-          <a:p>
-            <a:fld id="{124B687B-81D5-4F44-AE6B-34CD1245FD04}" type="slidenum">
-              <a:rPr lang="zh-CN" altLang="en-US" smtClean="0"/>
-              <a:t>16</a:t>
-            </a:fld>
-            <a:endParaRPr lang="zh-CN" altLang="en-US"/>
-          </a:p>
-        </p:txBody>
-      </p:sp>
-    </p:spTree>
-    <p:extLst>
-      <p:ext uri="{BB962C8B-B14F-4D97-AF65-F5344CB8AC3E}">
-        <p14:creationId xmlns:p14="http://schemas.microsoft.com/office/powerpoint/2010/main" val="2243116380"/>
-      </p:ext>
-    </p:extLst>
-  </p:cSld>
-  <p:clrMapOvr>
-    <a:masterClrMapping/>
-  </p:clrMapOvr>
-</p:notes>
-</file>
-
-<file path=ppt/notesSlides/notesSlide9.xml><?xml version="1.0" encoding="utf-8"?>
-<p:notes xmlns:a="http://schemas.openxmlformats.org/drawingml/2006/main" xmlns:r="http://schemas.openxmlformats.org/officeDocument/2006/relationships" xmlns:p="http://schemas.openxmlformats.org/presentationml/2006/main">
-  <p:cSld>
-    <p:spTree>
-      <p:nvGrpSpPr>
-        <p:cNvPr id="1" name=""/>
-        <p:cNvGrpSpPr/>
-        <p:nvPr/>
-      </p:nvGrpSpPr>
-      <p:grpSpPr>
-        <a:xfrm>
-          <a:off x="0" y="0"/>
-          <a:ext cx="0" cy="0"/>
-          <a:chOff x="0" y="0"/>
-          <a:chExt cx="0" cy="0"/>
-        </a:xfrm>
-      </p:grpSpPr>
-      <p:sp>
-        <p:nvSpPr>
-          <p:cNvPr id="2" name="Slide Image Placeholder 1"/>
-          <p:cNvSpPr>
-            <a:spLocks noGrp="1" noRot="1" noChangeAspect="1"/>
-          </p:cNvSpPr>
-          <p:nvPr>
-            <p:ph type="sldImg"/>
-          </p:nvPr>
-        </p:nvSpPr>
-        <p:spPr/>
-      </p:sp>
-      <p:sp>
-        <p:nvSpPr>
-          <p:cNvPr id="3" name="Notes Placeholder 2"/>
-          <p:cNvSpPr>
-            <a:spLocks noGrp="1"/>
-          </p:cNvSpPr>
-          <p:nvPr>
-            <p:ph type="body" idx="1"/>
-          </p:nvPr>
-        </p:nvSpPr>
-        <p:spPr/>
-        <p:txBody>
-          <a:bodyPr/>
-          <a:lstStyle/>
-          <a:p>
-            <a:endParaRPr lang="en-US" dirty="0"/>
-          </a:p>
-        </p:txBody>
-      </p:sp>
-      <p:sp>
-        <p:nvSpPr>
-          <p:cNvPr id="4" name="Slide Number Placeholder 3"/>
-          <p:cNvSpPr>
-            <a:spLocks noGrp="1"/>
-          </p:cNvSpPr>
-          <p:nvPr>
-            <p:ph type="sldNum" sz="quarter" idx="5"/>
-          </p:nvPr>
-        </p:nvSpPr>
-        <p:spPr/>
-        <p:txBody>
-          <a:bodyPr/>
-          <a:lstStyle/>
-          <a:p>
-            <a:fld id="{124B687B-81D5-4F44-AE6B-34CD1245FD04}" type="slidenum">
-              <a:rPr lang="zh-CN" altLang="en-US" smtClean="0"/>
-              <a:t>17</a:t>
-            </a:fld>
-            <a:endParaRPr lang="zh-CN" altLang="en-US"/>
-          </a:p>
-        </p:txBody>
-      </p:sp>
-    </p:spTree>
   </p:cSld>
   <p:clrMapOvr>
     <a:masterClrMapping/>
@@ -1541,7 +1954,7 @@
           <a:p>
             <a:fld id="{B55539BE-7814-4F40-9B13-ED058F5296F6}" type="datetime1">
               <a:rPr lang="en-US" altLang="zh-CN" smtClean="0"/>
-              <a:t>8/30/26</a:t>
+              <a:t>9/1/26</a:t>
             </a:fld>
             <a:endParaRPr lang="zh-CN" altLang="en-US"/>
           </a:p>
@@ -1704,7 +2117,7 @@
           <a:p>
             <a:fld id="{EEAFED07-9D19-3E4F-BFBB-DBA043D25E28}" type="datetime1">
               <a:rPr lang="en-US" altLang="zh-CN" smtClean="0"/>
-              <a:t>8/30/26</a:t>
+              <a:t>9/1/26</a:t>
             </a:fld>
             <a:endParaRPr lang="zh-CN" altLang="en-US"/>
           </a:p>
@@ -1877,7 +2290,7 @@
           <a:p>
             <a:fld id="{67330EEB-C08B-094A-93F5-FA783B6F7AB4}" type="datetime1">
               <a:rPr lang="en-US" altLang="zh-CN" smtClean="0"/>
-              <a:t>8/30/26</a:t>
+              <a:t>9/1/26</a:t>
             </a:fld>
             <a:endParaRPr lang="zh-CN" altLang="en-US"/>
           </a:p>
@@ -2040,7 +2453,7 @@
           <a:p>
             <a:fld id="{AEB879E7-7309-B744-8508-55BA062823BA}" type="datetime1">
               <a:rPr lang="en-US" altLang="zh-CN" smtClean="0"/>
-              <a:t>8/30/26</a:t>
+              <a:t>9/1/26</a:t>
             </a:fld>
             <a:endParaRPr lang="zh-CN" altLang="en-US"/>
           </a:p>
@@ -2280,7 +2693,7 @@
           <a:p>
             <a:fld id="{18A38E8C-83BF-0343-BA9D-CD8934766BEE}" type="datetime1">
               <a:rPr lang="en-US" altLang="zh-CN" smtClean="0"/>
-              <a:t>8/30/26</a:t>
+              <a:t>9/1/26</a:t>
             </a:fld>
             <a:endParaRPr lang="zh-CN" altLang="en-US"/>
           </a:p>
@@ -2504,7 +2917,7 @@
           <a:p>
             <a:fld id="{0D39572B-CB40-274D-8E20-0E4CAD31D592}" type="datetime1">
               <a:rPr lang="en-US" altLang="zh-CN" smtClean="0"/>
-              <a:t>8/30/26</a:t>
+              <a:t>9/1/26</a:t>
             </a:fld>
             <a:endParaRPr lang="zh-CN" altLang="en-US"/>
           </a:p>
@@ -2863,7 +3276,7 @@
           <a:p>
             <a:fld id="{24D5FE47-B48D-7047-923A-F9E5E9AACF6E}" type="datetime1">
               <a:rPr lang="en-US" altLang="zh-CN" smtClean="0"/>
-              <a:t>8/30/26</a:t>
+              <a:t>9/1/26</a:t>
             </a:fld>
             <a:endParaRPr lang="zh-CN" altLang="en-US"/>
           </a:p>
@@ -2975,7 +3388,7 @@
           <a:p>
             <a:fld id="{4A3127E9-7423-514E-8A91-6221CF408F22}" type="datetime1">
               <a:rPr lang="en-US" altLang="zh-CN" smtClean="0"/>
-              <a:t>8/30/26</a:t>
+              <a:t>9/1/26</a:t>
             </a:fld>
             <a:endParaRPr lang="zh-CN" altLang="en-US"/>
           </a:p>
@@ -3065,7 +3478,7 @@
           <a:p>
             <a:fld id="{D472ECE4-6FD7-4C49-ACA7-0491F2AA5E06}" type="datetime1">
               <a:rPr lang="en-US" altLang="zh-CN" smtClean="0"/>
-              <a:t>8/30/26</a:t>
+              <a:t>9/1/26</a:t>
             </a:fld>
             <a:endParaRPr lang="zh-CN" altLang="en-US"/>
           </a:p>
@@ -3335,7 +3748,7 @@
           <a:p>
             <a:fld id="{38B8077B-E76B-4B41-B17F-19AC0FC832B3}" type="datetime1">
               <a:rPr lang="en-US" altLang="zh-CN" smtClean="0"/>
-              <a:t>8/30/26</a:t>
+              <a:t>9/1/26</a:t>
             </a:fld>
             <a:endParaRPr lang="zh-CN" altLang="en-US"/>
           </a:p>
@@ -3582,7 +3995,7 @@
           <a:p>
             <a:fld id="{9EB24C7A-7D1C-8740-9D15-AD14720A28F9}" type="datetime1">
               <a:rPr lang="en-US" altLang="zh-CN" smtClean="0"/>
-              <a:t>8/30/26</a:t>
+              <a:t>9/1/26</a:t>
             </a:fld>
             <a:endParaRPr lang="zh-CN" altLang="en-US"/>
           </a:p>
@@ -3791,7 +4204,7 @@
           <a:p>
             <a:fld id="{9F63DA8F-0F2F-984A-A18D-D21C38A7121B}" type="datetime1">
               <a:rPr lang="en-US" altLang="zh-CN" smtClean="0"/>
-              <a:t>8/30/26</a:t>
+              <a:t>9/1/26</a:t>
             </a:fld>
             <a:endParaRPr lang="zh-CN" altLang="en-US"/>
           </a:p>
@@ -4630,6 +5043,1259 @@
   <p:cSld>
     <p:spTree>
       <p:nvGrpSpPr>
+        <p:cNvPr id="1" name=""/>
+        <p:cNvGrpSpPr/>
+        <p:nvPr/>
+      </p:nvGrpSpPr>
+      <p:grpSpPr>
+        <a:xfrm>
+          <a:off x="0" y="0"/>
+          <a:ext cx="0" cy="0"/>
+          <a:chOff x="0" y="0"/>
+          <a:chExt cx="0" cy="0"/>
+        </a:xfrm>
+      </p:grpSpPr>
+      <p:sp>
+        <p:nvSpPr>
+          <p:cNvPr id="2" name="Title 1">
+            <a:extLst>
+              <a:ext uri="{FF2B5EF4-FFF2-40B4-BE49-F238E27FC236}">
+                <a16:creationId xmlns:a16="http://schemas.microsoft.com/office/drawing/2014/main" id="{15AAB95B-7062-2EBE-2367-5281DAD2E79F}"/>
+              </a:ext>
+            </a:extLst>
+          </p:cNvPr>
+          <p:cNvSpPr>
+            <a:spLocks noGrp="1"/>
+          </p:cNvSpPr>
+          <p:nvPr>
+            <p:ph type="title"/>
+          </p:nvPr>
+        </p:nvSpPr>
+        <p:spPr/>
+        <p:txBody>
+          <a:bodyPr/>
+          <a:lstStyle/>
+          <a:p>
+            <a:r>
+              <a:rPr lang="en-US" b="1" dirty="0">
+                <a:latin typeface="Calibri" panose="020F0502020204030204" pitchFamily="34" charset="0"/>
+                <a:cs typeface="Calibri" panose="020F0502020204030204" pitchFamily="34" charset="0"/>
+              </a:rPr>
+              <a:t>What you are going to learn (2)</a:t>
+            </a:r>
+            <a:endParaRPr lang="en-US" dirty="0"/>
+          </a:p>
+        </p:txBody>
+      </p:sp>
+      <p:sp>
+        <p:nvSpPr>
+          <p:cNvPr id="3" name="Content Placeholder 2">
+            <a:extLst>
+              <a:ext uri="{FF2B5EF4-FFF2-40B4-BE49-F238E27FC236}">
+                <a16:creationId xmlns:a16="http://schemas.microsoft.com/office/drawing/2014/main" id="{3554BD20-64B7-FB96-D04A-B44C85BC1F15}"/>
+              </a:ext>
+            </a:extLst>
+          </p:cNvPr>
+          <p:cNvSpPr>
+            <a:spLocks noGrp="1"/>
+          </p:cNvSpPr>
+          <p:nvPr>
+            <p:ph idx="1"/>
+          </p:nvPr>
+        </p:nvSpPr>
+        <p:spPr>
+          <a:xfrm>
+            <a:off x="838200" y="1825625"/>
+            <a:ext cx="6664842" cy="4351338"/>
+          </a:xfrm>
+        </p:spPr>
+        <p:txBody>
+          <a:bodyPr>
+            <a:normAutofit/>
+          </a:bodyPr>
+          <a:lstStyle/>
+          <a:p>
+            <a:r>
+              <a:rPr lang="en-US" sz="4000" dirty="0">
+                <a:latin typeface="Calibri" panose="020F0502020204030204" pitchFamily="34" charset="0"/>
+                <a:cs typeface="Calibri" panose="020F0502020204030204" pitchFamily="34" charset="0"/>
+              </a:rPr>
+              <a:t>Counting </a:t>
+            </a:r>
+          </a:p>
+          <a:p>
+            <a:pPr lvl="1"/>
+            <a:r>
+              <a:rPr lang="en-US" sz="3600" dirty="0">
+                <a:solidFill>
+                  <a:srgbClr val="C00000"/>
+                </a:solidFill>
+                <a:latin typeface="Calibri" panose="020F0502020204030204" pitchFamily="34" charset="0"/>
+                <a:cs typeface="Calibri" panose="020F0502020204030204" pitchFamily="34" charset="0"/>
+              </a:rPr>
+              <a:t>Human’s first instincts of math</a:t>
+            </a:r>
+          </a:p>
+          <a:p>
+            <a:pPr lvl="1"/>
+            <a:endParaRPr lang="en-US" sz="3600" dirty="0">
+              <a:solidFill>
+                <a:srgbClr val="C00000"/>
+              </a:solidFill>
+              <a:latin typeface="Calibri" panose="020F0502020204030204" pitchFamily="34" charset="0"/>
+              <a:cs typeface="Calibri" panose="020F0502020204030204" pitchFamily="34" charset="0"/>
+            </a:endParaRPr>
+          </a:p>
+          <a:p>
+            <a:r>
+              <a:rPr lang="en-US" sz="4000" dirty="0">
+                <a:latin typeface="Calibri" panose="020F0502020204030204" pitchFamily="34" charset="0"/>
+                <a:cs typeface="Calibri" panose="020F0502020204030204" pitchFamily="34" charset="0"/>
+              </a:rPr>
+              <a:t>Basic Probability</a:t>
+            </a:r>
+          </a:p>
+          <a:p>
+            <a:pPr lvl="1"/>
+            <a:r>
+              <a:rPr lang="en-US" sz="3600" dirty="0">
+                <a:solidFill>
+                  <a:srgbClr val="C00000"/>
+                </a:solidFill>
+                <a:latin typeface="Calibri" panose="020F0502020204030204" pitchFamily="34" charset="0"/>
+                <a:cs typeface="Calibri" panose="020F0502020204030204" pitchFamily="34" charset="0"/>
+              </a:rPr>
+              <a:t>Your first step to understand “randomness”</a:t>
+            </a:r>
+          </a:p>
+          <a:p>
+            <a:pPr lvl="1"/>
+            <a:endParaRPr lang="en-US" sz="3600" dirty="0">
+              <a:latin typeface="Calibri" panose="020F0502020204030204" pitchFamily="34" charset="0"/>
+              <a:cs typeface="Calibri" panose="020F0502020204030204" pitchFamily="34" charset="0"/>
+            </a:endParaRPr>
+          </a:p>
+          <a:p>
+            <a:pPr lvl="1"/>
+            <a:endParaRPr lang="en-US" sz="3600" dirty="0">
+              <a:latin typeface="Calibri" panose="020F0502020204030204" pitchFamily="34" charset="0"/>
+              <a:cs typeface="Calibri" panose="020F0502020204030204" pitchFamily="34" charset="0"/>
+            </a:endParaRPr>
+          </a:p>
+          <a:p>
+            <a:pPr lvl="1"/>
+            <a:endParaRPr lang="en-US" sz="3600" dirty="0">
+              <a:latin typeface="Calibri" panose="020F0502020204030204" pitchFamily="34" charset="0"/>
+              <a:cs typeface="Calibri" panose="020F0502020204030204" pitchFamily="34" charset="0"/>
+            </a:endParaRPr>
+          </a:p>
+        </p:txBody>
+      </p:sp>
+      <p:sp>
+        <p:nvSpPr>
+          <p:cNvPr id="4" name="Slide Number Placeholder 3">
+            <a:extLst>
+              <a:ext uri="{FF2B5EF4-FFF2-40B4-BE49-F238E27FC236}">
+                <a16:creationId xmlns:a16="http://schemas.microsoft.com/office/drawing/2014/main" id="{D0A2FA63-07CE-AFED-749D-3BF8A28687B6}"/>
+              </a:ext>
+            </a:extLst>
+          </p:cNvPr>
+          <p:cNvSpPr>
+            <a:spLocks noGrp="1"/>
+          </p:cNvSpPr>
+          <p:nvPr>
+            <p:ph type="sldNum" sz="quarter" idx="12"/>
+          </p:nvPr>
+        </p:nvSpPr>
+        <p:spPr/>
+        <p:txBody>
+          <a:bodyPr/>
+          <a:lstStyle/>
+          <a:p>
+            <a:fld id="{8B4C9E33-6753-472F-9C09-83153B974C9D}" type="slidenum">
+              <a:rPr lang="zh-CN" altLang="en-US" smtClean="0"/>
+              <a:t>10</a:t>
+            </a:fld>
+            <a:endParaRPr lang="zh-CN" altLang="en-US"/>
+          </a:p>
+        </p:txBody>
+      </p:sp>
+      <p:pic>
+        <p:nvPicPr>
+          <p:cNvPr id="5" name="Picture 4" descr="Counting | numeracy - BBC Bitesize">
+            <a:extLst>
+              <a:ext uri="{FF2B5EF4-FFF2-40B4-BE49-F238E27FC236}">
+                <a16:creationId xmlns:a16="http://schemas.microsoft.com/office/drawing/2014/main" id="{92692EA8-0652-BB8F-76C5-99639E95DE5F}"/>
+              </a:ext>
+            </a:extLst>
+          </p:cNvPr>
+          <p:cNvPicPr>
+            <a:picLocks noChangeAspect="1"/>
+          </p:cNvPicPr>
+          <p:nvPr/>
+        </p:nvPicPr>
+        <p:blipFill>
+          <a:blip r:embed="rId2"/>
+          <a:stretch>
+            <a:fillRect/>
+          </a:stretch>
+        </p:blipFill>
+        <p:spPr>
+          <a:xfrm>
+            <a:off x="7886700" y="1646238"/>
+            <a:ext cx="3083442" cy="1734436"/>
+          </a:xfrm>
+          <a:prstGeom prst="rect">
+            <a:avLst/>
+          </a:prstGeom>
+        </p:spPr>
+      </p:pic>
+      <p:pic>
+        <p:nvPicPr>
+          <p:cNvPr id="6" name="Picture 5" descr="Dice - Wikipedia">
+            <a:extLst>
+              <a:ext uri="{FF2B5EF4-FFF2-40B4-BE49-F238E27FC236}">
+                <a16:creationId xmlns:a16="http://schemas.microsoft.com/office/drawing/2014/main" id="{4C8F0A02-2B10-8C34-AA74-B7F47C5A9E2A}"/>
+              </a:ext>
+            </a:extLst>
+          </p:cNvPr>
+          <p:cNvPicPr>
+            <a:picLocks noChangeAspect="1"/>
+          </p:cNvPicPr>
+          <p:nvPr/>
+        </p:nvPicPr>
+        <p:blipFill>
+          <a:blip r:embed="rId3"/>
+          <a:stretch>
+            <a:fillRect/>
+          </a:stretch>
+        </p:blipFill>
+        <p:spPr>
+          <a:xfrm>
+            <a:off x="8610600" y="4001294"/>
+            <a:ext cx="2095500" cy="1816100"/>
+          </a:xfrm>
+          <a:prstGeom prst="rect">
+            <a:avLst/>
+          </a:prstGeom>
+        </p:spPr>
+      </p:pic>
+    </p:spTree>
+    <p:extLst>
+      <p:ext uri="{BB962C8B-B14F-4D97-AF65-F5344CB8AC3E}">
+        <p14:creationId xmlns:p14="http://schemas.microsoft.com/office/powerpoint/2010/main" val="3433418147"/>
+      </p:ext>
+    </p:extLst>
+  </p:cSld>
+  <p:clrMapOvr>
+    <a:masterClrMapping/>
+  </p:clrMapOvr>
+  <p:timing>
+    <p:tnLst>
+      <p:par>
+        <p:cTn id="1" dur="indefinite" restart="never" nodeType="tmRoot">
+          <p:childTnLst>
+            <p:seq concurrent="1" nextAc="seek">
+              <p:cTn id="2" dur="indefinite" nodeType="mainSeq">
+                <p:childTnLst>
+                  <p:par>
+                    <p:cTn id="3" fill="hold">
+                      <p:stCondLst>
+                        <p:cond delay="indefinite"/>
+                      </p:stCondLst>
+                      <p:childTnLst>
+                        <p:par>
+                          <p:cTn id="4" fill="hold">
+                            <p:stCondLst>
+                              <p:cond delay="0"/>
+                            </p:stCondLst>
+                            <p:childTnLst>
+                              <p:par>
+                                <p:cTn id="5" presetID="9" presetClass="entr" presetSubtype="0" fill="hold" nodeType="clickEffect">
+                                  <p:stCondLst>
+                                    <p:cond delay="0"/>
+                                  </p:stCondLst>
+                                  <p:childTnLst>
+                                    <p:set>
+                                      <p:cBhvr>
+                                        <p:cTn id="6" dur="1" fill="hold">
+                                          <p:stCondLst>
+                                            <p:cond delay="0"/>
+                                          </p:stCondLst>
+                                        </p:cTn>
+                                        <p:tgtEl>
+                                          <p:spTgt spid="3">
+                                            <p:txEl>
+                                              <p:pRg st="3" end="3"/>
+                                            </p:txEl>
+                                          </p:spTgt>
+                                        </p:tgtEl>
+                                        <p:attrNameLst>
+                                          <p:attrName>style.visibility</p:attrName>
+                                        </p:attrNameLst>
+                                      </p:cBhvr>
+                                      <p:to>
+                                        <p:strVal val="visible"/>
+                                      </p:to>
+                                    </p:set>
+                                    <p:animEffect transition="in" filter="dissolve">
+                                      <p:cBhvr>
+                                        <p:cTn id="7" dur="500"/>
+                                        <p:tgtEl>
+                                          <p:spTgt spid="3">
+                                            <p:txEl>
+                                              <p:pRg st="3" end="3"/>
+                                            </p:txEl>
+                                          </p:spTgt>
+                                        </p:tgtEl>
+                                      </p:cBhvr>
+                                    </p:animEffect>
+                                  </p:childTnLst>
+                                </p:cTn>
+                              </p:par>
+                              <p:par>
+                                <p:cTn id="8" presetID="9" presetClass="entr" presetSubtype="0" fill="hold" nodeType="withEffect">
+                                  <p:stCondLst>
+                                    <p:cond delay="0"/>
+                                  </p:stCondLst>
+                                  <p:childTnLst>
+                                    <p:set>
+                                      <p:cBhvr>
+                                        <p:cTn id="9" dur="1" fill="hold">
+                                          <p:stCondLst>
+                                            <p:cond delay="0"/>
+                                          </p:stCondLst>
+                                        </p:cTn>
+                                        <p:tgtEl>
+                                          <p:spTgt spid="3">
+                                            <p:txEl>
+                                              <p:pRg st="4" end="4"/>
+                                            </p:txEl>
+                                          </p:spTgt>
+                                        </p:tgtEl>
+                                        <p:attrNameLst>
+                                          <p:attrName>style.visibility</p:attrName>
+                                        </p:attrNameLst>
+                                      </p:cBhvr>
+                                      <p:to>
+                                        <p:strVal val="visible"/>
+                                      </p:to>
+                                    </p:set>
+                                    <p:animEffect transition="in" filter="dissolve">
+                                      <p:cBhvr>
+                                        <p:cTn id="10" dur="500"/>
+                                        <p:tgtEl>
+                                          <p:spTgt spid="3">
+                                            <p:txEl>
+                                              <p:pRg st="4" end="4"/>
+                                            </p:txEl>
+                                          </p:spTgt>
+                                        </p:tgtEl>
+                                      </p:cBhvr>
+                                    </p:animEffect>
+                                  </p:childTnLst>
+                                </p:cTn>
+                              </p:par>
+                            </p:childTnLst>
+                          </p:cTn>
+                        </p:par>
+                      </p:childTnLst>
+                    </p:cTn>
+                  </p:par>
+                  <p:par>
+                    <p:cTn id="11" fill="hold">
+                      <p:stCondLst>
+                        <p:cond delay="indefinite"/>
+                      </p:stCondLst>
+                      <p:childTnLst>
+                        <p:par>
+                          <p:cTn id="12" fill="hold">
+                            <p:stCondLst>
+                              <p:cond delay="0"/>
+                            </p:stCondLst>
+                            <p:childTnLst>
+                              <p:par>
+                                <p:cTn id="13" presetID="9" presetClass="entr" presetSubtype="0" fill="hold" nodeType="clickEffect">
+                                  <p:stCondLst>
+                                    <p:cond delay="0"/>
+                                  </p:stCondLst>
+                                  <p:childTnLst>
+                                    <p:set>
+                                      <p:cBhvr>
+                                        <p:cTn id="14" dur="1" fill="hold">
+                                          <p:stCondLst>
+                                            <p:cond delay="0"/>
+                                          </p:stCondLst>
+                                        </p:cTn>
+                                        <p:tgtEl>
+                                          <p:spTgt spid="6"/>
+                                        </p:tgtEl>
+                                        <p:attrNameLst>
+                                          <p:attrName>style.visibility</p:attrName>
+                                        </p:attrNameLst>
+                                      </p:cBhvr>
+                                      <p:to>
+                                        <p:strVal val="visible"/>
+                                      </p:to>
+                                    </p:set>
+                                    <p:animEffect transition="in" filter="dissolve">
+                                      <p:cBhvr>
+                                        <p:cTn id="15" dur="500"/>
+                                        <p:tgtEl>
+                                          <p:spTgt spid="6"/>
+                                        </p:tgtEl>
+                                      </p:cBhvr>
+                                    </p:animEffect>
+                                  </p:childTnLst>
+                                </p:cTn>
+                              </p:par>
+                            </p:childTnLst>
+                          </p:cTn>
+                        </p:par>
+                      </p:childTnLst>
+                    </p:cTn>
+                  </p:par>
+                </p:childTnLst>
+              </p:cTn>
+              <p:prevCondLst>
+                <p:cond evt="onPrev" delay="0">
+                  <p:tgtEl>
+                    <p:sldTgt/>
+                  </p:tgtEl>
+                </p:cond>
+              </p:prevCondLst>
+              <p:nextCondLst>
+                <p:cond evt="onNext" delay="0">
+                  <p:tgtEl>
+                    <p:sldTgt/>
+                  </p:tgtEl>
+                </p:cond>
+              </p:nextCondLst>
+            </p:seq>
+          </p:childTnLst>
+        </p:cTn>
+      </p:par>
+    </p:tnLst>
+  </p:timing>
+</p:sld>
+</file>
+
+<file path=ppt/slides/slide11.xml><?xml version="1.0" encoding="utf-8"?>
+<p:sld xmlns:a="http://schemas.openxmlformats.org/drawingml/2006/main" xmlns:r="http://schemas.openxmlformats.org/officeDocument/2006/relationships" xmlns:p="http://schemas.openxmlformats.org/presentationml/2006/main">
+  <p:cSld>
+    <p:spTree>
+      <p:nvGrpSpPr>
+        <p:cNvPr id="1" name="">
+          <a:extLst>
+            <a:ext uri="{FF2B5EF4-FFF2-40B4-BE49-F238E27FC236}">
+              <a16:creationId xmlns:a16="http://schemas.microsoft.com/office/drawing/2014/main" id="{B221BE30-FC6B-4129-2AAD-1E1D2BFC5C45}"/>
+            </a:ext>
+          </a:extLst>
+        </p:cNvPr>
+        <p:cNvGrpSpPr/>
+        <p:nvPr/>
+      </p:nvGrpSpPr>
+      <p:grpSpPr>
+        <a:xfrm>
+          <a:off x="0" y="0"/>
+          <a:ext cx="0" cy="0"/>
+          <a:chOff x="0" y="0"/>
+          <a:chExt cx="0" cy="0"/>
+        </a:xfrm>
+      </p:grpSpPr>
+      <p:sp>
+        <p:nvSpPr>
+          <p:cNvPr id="2" name="Title 1">
+            <a:extLst>
+              <a:ext uri="{FF2B5EF4-FFF2-40B4-BE49-F238E27FC236}">
+                <a16:creationId xmlns:a16="http://schemas.microsoft.com/office/drawing/2014/main" id="{12064E3E-6DD6-C871-82D7-C3BD8576A904}"/>
+              </a:ext>
+            </a:extLst>
+          </p:cNvPr>
+          <p:cNvSpPr>
+            <a:spLocks noGrp="1"/>
+          </p:cNvSpPr>
+          <p:nvPr>
+            <p:ph type="title"/>
+          </p:nvPr>
+        </p:nvSpPr>
+        <p:spPr/>
+        <p:txBody>
+          <a:bodyPr/>
+          <a:lstStyle/>
+          <a:p>
+            <a:r>
+              <a:rPr lang="en-US" b="1" dirty="0">
+                <a:latin typeface="Calibri" panose="020F0502020204030204" pitchFamily="34" charset="0"/>
+                <a:cs typeface="Calibri" panose="020F0502020204030204" pitchFamily="34" charset="0"/>
+              </a:rPr>
+              <a:t>What you are going to learn (3)</a:t>
+            </a:r>
+            <a:endParaRPr lang="en-US" dirty="0"/>
+          </a:p>
+        </p:txBody>
+      </p:sp>
+      <mc:AlternateContent xmlns:mc="http://schemas.openxmlformats.org/markup-compatibility/2006" xmlns:a14="http://schemas.microsoft.com/office/drawing/2010/main">
+        <mc:Choice Requires="a14">
+          <p:sp>
+            <p:nvSpPr>
+              <p:cNvPr id="3" name="Content Placeholder 2">
+                <a:extLst>
+                  <a:ext uri="{FF2B5EF4-FFF2-40B4-BE49-F238E27FC236}">
+                    <a16:creationId xmlns:a16="http://schemas.microsoft.com/office/drawing/2014/main" id="{F7916E85-A319-0B86-3710-2B6D3A46AC9C}"/>
+                  </a:ext>
+                </a:extLst>
+              </p:cNvPr>
+              <p:cNvSpPr>
+                <a:spLocks noGrp="1"/>
+              </p:cNvSpPr>
+              <p:nvPr>
+                <p:ph idx="1"/>
+              </p:nvPr>
+            </p:nvSpPr>
+            <p:spPr>
+              <a:xfrm>
+                <a:off x="838200" y="1825625"/>
+                <a:ext cx="6664842" cy="4351338"/>
+              </a:xfrm>
+            </p:spPr>
+            <p:txBody>
+              <a:bodyPr>
+                <a:normAutofit/>
+              </a:bodyPr>
+              <a:lstStyle/>
+              <a:p>
+                <a:r>
+                  <a:rPr lang="en-US" sz="4000" dirty="0">
+                    <a:latin typeface="Calibri" panose="020F0502020204030204" pitchFamily="34" charset="0"/>
+                    <a:cs typeface="Calibri" panose="020F0502020204030204" pitchFamily="34" charset="0"/>
+                  </a:rPr>
+                  <a:t>Basic Number Theory </a:t>
+                </a:r>
+              </a:p>
+              <a:p>
+                <a:pPr lvl="1"/>
+                <a:r>
+                  <a:rPr lang="en-US" sz="3600" dirty="0">
+                    <a:solidFill>
+                      <a:srgbClr val="C00000"/>
+                    </a:solidFill>
+                    <a:latin typeface="Calibri" panose="020F0502020204030204" pitchFamily="34" charset="0"/>
+                    <a:cs typeface="Calibri" panose="020F0502020204030204" pitchFamily="34" charset="0"/>
+                  </a:rPr>
+                  <a:t>E.g. 17 </a:t>
+                </a:r>
+                <a14:m>
+                  <m:oMath xmlns:m="http://schemas.openxmlformats.org/officeDocument/2006/math">
+                    <m:r>
+                      <a:rPr lang="en-US" sz="3600" i="1" smtClean="0">
+                        <a:solidFill>
+                          <a:srgbClr val="C00000"/>
+                        </a:solidFill>
+                        <a:latin typeface="Cambria Math" panose="02040503050406030204" pitchFamily="18" charset="0"/>
+                        <a:ea typeface="Cambria Math" panose="02040503050406030204" pitchFamily="18" charset="0"/>
+                        <a:cs typeface="Calibri" panose="020F0502020204030204" pitchFamily="34" charset="0"/>
+                      </a:rPr>
+                      <m:t>≡</m:t>
+                    </m:r>
+                  </m:oMath>
+                </a14:m>
+                <a:r>
+                  <a:rPr lang="en-US" sz="3600" dirty="0">
+                    <a:solidFill>
+                      <a:srgbClr val="C00000"/>
+                    </a:solidFill>
+                    <a:latin typeface="Calibri" panose="020F0502020204030204" pitchFamily="34" charset="0"/>
+                    <a:cs typeface="Calibri" panose="020F0502020204030204" pitchFamily="34" charset="0"/>
+                  </a:rPr>
+                  <a:t> 2 (mod 5)</a:t>
+                </a:r>
+              </a:p>
+              <a:p>
+                <a:pPr lvl="1"/>
+                <a:endParaRPr lang="en-US" sz="3600" dirty="0">
+                  <a:solidFill>
+                    <a:srgbClr val="C00000"/>
+                  </a:solidFill>
+                  <a:latin typeface="Calibri" panose="020F0502020204030204" pitchFamily="34" charset="0"/>
+                  <a:cs typeface="Calibri" panose="020F0502020204030204" pitchFamily="34" charset="0"/>
+                </a:endParaRPr>
+              </a:p>
+              <a:p>
+                <a:pPr lvl="1"/>
+                <a:endParaRPr lang="en-US" sz="3600" dirty="0">
+                  <a:solidFill>
+                    <a:srgbClr val="C00000"/>
+                  </a:solidFill>
+                  <a:latin typeface="Calibri" panose="020F0502020204030204" pitchFamily="34" charset="0"/>
+                  <a:cs typeface="Calibri" panose="020F0502020204030204" pitchFamily="34" charset="0"/>
+                </a:endParaRPr>
+              </a:p>
+              <a:p>
+                <a:pPr marL="457200" lvl="1" indent="0">
+                  <a:buNone/>
+                </a:pPr>
+                <a:endParaRPr lang="en-US" sz="3600" dirty="0">
+                  <a:latin typeface="Calibri" panose="020F0502020204030204" pitchFamily="34" charset="0"/>
+                  <a:cs typeface="Calibri" panose="020F0502020204030204" pitchFamily="34" charset="0"/>
+                </a:endParaRPr>
+              </a:p>
+              <a:p>
+                <a:pPr lvl="1"/>
+                <a:r>
+                  <a:rPr lang="en-US" sz="3600" dirty="0">
+                    <a:latin typeface="Calibri" panose="020F0502020204030204" pitchFamily="34" charset="0"/>
+                    <a:cs typeface="Calibri" panose="020F0502020204030204" pitchFamily="34" charset="0"/>
+                  </a:rPr>
+                  <a:t>and some cryptography </a:t>
+                </a:r>
+                <a:r>
+                  <a:rPr lang="en-US" sz="3600" dirty="0">
+                    <a:latin typeface="Calibri" panose="020F0502020204030204" pitchFamily="34" charset="0"/>
+                    <a:cs typeface="Calibri" panose="020F0502020204030204" pitchFamily="34" charset="0"/>
+                    <a:sym typeface="Wingdings" pitchFamily="2" charset="2"/>
+                  </a:rPr>
+                  <a:t></a:t>
+                </a:r>
+                <a:endParaRPr lang="en-US" sz="3600" dirty="0">
+                  <a:latin typeface="Calibri" panose="020F0502020204030204" pitchFamily="34" charset="0"/>
+                  <a:cs typeface="Calibri" panose="020F0502020204030204" pitchFamily="34" charset="0"/>
+                </a:endParaRPr>
+              </a:p>
+              <a:p>
+                <a:pPr lvl="1"/>
+                <a:endParaRPr lang="en-US" sz="3600" dirty="0">
+                  <a:latin typeface="Calibri" panose="020F0502020204030204" pitchFamily="34" charset="0"/>
+                  <a:cs typeface="Calibri" panose="020F0502020204030204" pitchFamily="34" charset="0"/>
+                </a:endParaRPr>
+              </a:p>
+              <a:p>
+                <a:pPr lvl="1"/>
+                <a:endParaRPr lang="en-US" sz="3600" dirty="0">
+                  <a:latin typeface="Calibri" panose="020F0502020204030204" pitchFamily="34" charset="0"/>
+                  <a:cs typeface="Calibri" panose="020F0502020204030204" pitchFamily="34" charset="0"/>
+                </a:endParaRPr>
+              </a:p>
+            </p:txBody>
+          </p:sp>
+        </mc:Choice>
+        <mc:Fallback xmlns="">
+          <p:sp>
+            <p:nvSpPr>
+              <p:cNvPr id="3" name="Content Placeholder 2">
+                <a:extLst>
+                  <a:ext uri="{FF2B5EF4-FFF2-40B4-BE49-F238E27FC236}">
+                    <a16:creationId xmlns:a16="http://schemas.microsoft.com/office/drawing/2014/main" id="{F7916E85-A319-0B86-3710-2B6D3A46AC9C}"/>
+                  </a:ext>
+                </a:extLst>
+              </p:cNvPr>
+              <p:cNvSpPr>
+                <a:spLocks noGrp="1" noRot="1" noChangeAspect="1" noMove="1" noResize="1" noEditPoints="1" noAdjustHandles="1" noChangeArrowheads="1" noChangeShapeType="1" noTextEdit="1"/>
+              </p:cNvSpPr>
+              <p:nvPr>
+                <p:ph idx="1"/>
+              </p:nvPr>
+            </p:nvSpPr>
+            <p:spPr>
+              <a:xfrm>
+                <a:off x="838200" y="1825625"/>
+                <a:ext cx="6664842" cy="4351338"/>
+              </a:xfrm>
+              <a:blipFill>
+                <a:blip r:embed="rId2"/>
+                <a:stretch>
+                  <a:fillRect l="-3048" t="-3488"/>
+                </a:stretch>
+              </a:blipFill>
+            </p:spPr>
+            <p:txBody>
+              <a:bodyPr/>
+              <a:lstStyle/>
+              <a:p>
+                <a:r>
+                  <a:rPr lang="en-US">
+                    <a:noFill/>
+                  </a:rPr>
+                  <a:t> </a:t>
+                </a:r>
+              </a:p>
+            </p:txBody>
+          </p:sp>
+        </mc:Fallback>
+      </mc:AlternateContent>
+      <p:sp>
+        <p:nvSpPr>
+          <p:cNvPr id="4" name="Slide Number Placeholder 3">
+            <a:extLst>
+              <a:ext uri="{FF2B5EF4-FFF2-40B4-BE49-F238E27FC236}">
+                <a16:creationId xmlns:a16="http://schemas.microsoft.com/office/drawing/2014/main" id="{70C6553A-973E-003A-AC44-428CC3F5C831}"/>
+              </a:ext>
+            </a:extLst>
+          </p:cNvPr>
+          <p:cNvSpPr>
+            <a:spLocks noGrp="1"/>
+          </p:cNvSpPr>
+          <p:nvPr>
+            <p:ph type="sldNum" sz="quarter" idx="12"/>
+          </p:nvPr>
+        </p:nvSpPr>
+        <p:spPr/>
+        <p:txBody>
+          <a:bodyPr/>
+          <a:lstStyle/>
+          <a:p>
+            <a:fld id="{8B4C9E33-6753-472F-9C09-83153B974C9D}" type="slidenum">
+              <a:rPr lang="zh-CN" altLang="en-US" smtClean="0"/>
+              <a:t>11</a:t>
+            </a:fld>
+            <a:endParaRPr lang="zh-CN" altLang="en-US"/>
+          </a:p>
+        </p:txBody>
+      </p:sp>
+      <p:pic>
+        <p:nvPicPr>
+          <p:cNvPr id="8" name="Picture 7">
+            <a:extLst>
+              <a:ext uri="{FF2B5EF4-FFF2-40B4-BE49-F238E27FC236}">
+                <a16:creationId xmlns:a16="http://schemas.microsoft.com/office/drawing/2014/main" id="{FB9216CD-542D-FA70-0F9E-4B35E05D0B7D}"/>
+              </a:ext>
+            </a:extLst>
+          </p:cNvPr>
+          <p:cNvPicPr>
+            <a:picLocks noChangeAspect="1"/>
+          </p:cNvPicPr>
+          <p:nvPr/>
+        </p:nvPicPr>
+        <p:blipFill>
+          <a:blip r:embed="rId3">
+            <a:extLst>
+              <a:ext uri="{28A0092B-C50C-407E-A947-70E740481C1C}">
+                <a14:useLocalDpi xmlns:a14="http://schemas.microsoft.com/office/drawing/2010/main" val="0"/>
+              </a:ext>
+            </a:extLst>
+          </a:blip>
+          <a:stretch>
+            <a:fillRect/>
+          </a:stretch>
+        </p:blipFill>
+        <p:spPr>
+          <a:xfrm>
+            <a:off x="6310885" y="2255522"/>
+            <a:ext cx="2111085" cy="1516321"/>
+          </a:xfrm>
+          <a:prstGeom prst="rect">
+            <a:avLst/>
+          </a:prstGeom>
+        </p:spPr>
+      </p:pic>
+      <p:sp>
+        <p:nvSpPr>
+          <p:cNvPr id="9" name="TextBox 8">
+            <a:extLst>
+              <a:ext uri="{FF2B5EF4-FFF2-40B4-BE49-F238E27FC236}">
+                <a16:creationId xmlns:a16="http://schemas.microsoft.com/office/drawing/2014/main" id="{04286309-7FE7-0899-347C-0536CA671DBF}"/>
+              </a:ext>
+            </a:extLst>
+          </p:cNvPr>
+          <p:cNvSpPr txBox="1"/>
+          <p:nvPr/>
+        </p:nvSpPr>
+        <p:spPr>
+          <a:xfrm>
+            <a:off x="6018224" y="3905862"/>
+            <a:ext cx="3270895" cy="461665"/>
+          </a:xfrm>
+          <a:prstGeom prst="rect">
+            <a:avLst/>
+          </a:prstGeom>
+          <a:noFill/>
+        </p:spPr>
+        <p:txBody>
+          <a:bodyPr wrap="none" rtlCol="0">
+            <a:spAutoFit/>
+          </a:bodyPr>
+          <a:lstStyle/>
+          <a:p>
+            <a:r>
+              <a:rPr lang="en-US" sz="2400" dirty="0">
+                <a:latin typeface="Calibri" panose="020F0502020204030204" pitchFamily="34" charset="0"/>
+                <a:cs typeface="Calibri" panose="020F0502020204030204" pitchFamily="34" charset="0"/>
+              </a:rPr>
+              <a:t>”Number theory is hard”</a:t>
+            </a:r>
+          </a:p>
+        </p:txBody>
+      </p:sp>
+      <p:pic>
+        <p:nvPicPr>
+          <p:cNvPr id="11" name="Picture 10">
+            <a:extLst>
+              <a:ext uri="{FF2B5EF4-FFF2-40B4-BE49-F238E27FC236}">
+                <a16:creationId xmlns:a16="http://schemas.microsoft.com/office/drawing/2014/main" id="{24F8AC40-4368-8D2F-2967-2E0CC063632D}"/>
+              </a:ext>
+            </a:extLst>
+          </p:cNvPr>
+          <p:cNvPicPr>
+            <a:picLocks noChangeAspect="1"/>
+          </p:cNvPicPr>
+          <p:nvPr/>
+        </p:nvPicPr>
+        <p:blipFill>
+          <a:blip r:embed="rId4">
+            <a:extLst>
+              <a:ext uri="{28A0092B-C50C-407E-A947-70E740481C1C}">
+                <a14:useLocalDpi xmlns:a14="http://schemas.microsoft.com/office/drawing/2010/main" val="0"/>
+              </a:ext>
+            </a:extLst>
+          </a:blip>
+          <a:stretch>
+            <a:fillRect/>
+          </a:stretch>
+        </p:blipFill>
+        <p:spPr>
+          <a:xfrm>
+            <a:off x="9617519" y="1320800"/>
+            <a:ext cx="2195745" cy="2585062"/>
+          </a:xfrm>
+          <a:prstGeom prst="rect">
+            <a:avLst/>
+          </a:prstGeom>
+        </p:spPr>
+      </p:pic>
+      <p:sp>
+        <p:nvSpPr>
+          <p:cNvPr id="12" name="TextBox 11">
+            <a:extLst>
+              <a:ext uri="{FF2B5EF4-FFF2-40B4-BE49-F238E27FC236}">
+                <a16:creationId xmlns:a16="http://schemas.microsoft.com/office/drawing/2014/main" id="{FEBCCE3A-8C47-28B0-8A3C-CB74B7C7AE61}"/>
+              </a:ext>
+            </a:extLst>
+          </p:cNvPr>
+          <p:cNvSpPr txBox="1"/>
+          <p:nvPr/>
+        </p:nvSpPr>
+        <p:spPr>
+          <a:xfrm>
+            <a:off x="9982200" y="4001294"/>
+            <a:ext cx="1896332" cy="830997"/>
+          </a:xfrm>
+          <a:prstGeom prst="rect">
+            <a:avLst/>
+          </a:prstGeom>
+          <a:noFill/>
+        </p:spPr>
+        <p:txBody>
+          <a:bodyPr wrap="square" rtlCol="0">
+            <a:spAutoFit/>
+          </a:bodyPr>
+          <a:lstStyle/>
+          <a:p>
+            <a:r>
+              <a:rPr lang="en-US" sz="2400" dirty="0">
+                <a:latin typeface="Calibri" panose="020F0502020204030204" pitchFamily="34" charset="0"/>
+                <a:cs typeface="Calibri" panose="020F0502020204030204" pitchFamily="34" charset="0"/>
+              </a:rPr>
+              <a:t>”Yes, it’s really hard”</a:t>
+            </a:r>
+          </a:p>
+        </p:txBody>
+      </p:sp>
+    </p:spTree>
+    <p:extLst>
+      <p:ext uri="{BB962C8B-B14F-4D97-AF65-F5344CB8AC3E}">
+        <p14:creationId xmlns:p14="http://schemas.microsoft.com/office/powerpoint/2010/main" val="3945571883"/>
+      </p:ext>
+    </p:extLst>
+  </p:cSld>
+  <p:clrMapOvr>
+    <a:masterClrMapping/>
+  </p:clrMapOvr>
+  <p:timing>
+    <p:tnLst>
+      <p:par>
+        <p:cTn id="1" dur="indefinite" restart="never" nodeType="tmRoot">
+          <p:childTnLst>
+            <p:seq concurrent="1" nextAc="seek">
+              <p:cTn id="2" dur="indefinite" nodeType="mainSeq">
+                <p:childTnLst>
+                  <p:par>
+                    <p:cTn id="3" fill="hold">
+                      <p:stCondLst>
+                        <p:cond delay="indefinite"/>
+                      </p:stCondLst>
+                      <p:childTnLst>
+                        <p:par>
+                          <p:cTn id="4" fill="hold">
+                            <p:stCondLst>
+                              <p:cond delay="0"/>
+                            </p:stCondLst>
+                            <p:childTnLst>
+                              <p:par>
+                                <p:cTn id="5" presetID="9" presetClass="entr" presetSubtype="0" fill="hold" nodeType="clickEffect">
+                                  <p:stCondLst>
+                                    <p:cond delay="0"/>
+                                  </p:stCondLst>
+                                  <p:childTnLst>
+                                    <p:set>
+                                      <p:cBhvr>
+                                        <p:cTn id="6" dur="1" fill="hold">
+                                          <p:stCondLst>
+                                            <p:cond delay="0"/>
+                                          </p:stCondLst>
+                                        </p:cTn>
+                                        <p:tgtEl>
+                                          <p:spTgt spid="3">
+                                            <p:txEl>
+                                              <p:pRg st="5" end="5"/>
+                                            </p:txEl>
+                                          </p:spTgt>
+                                        </p:tgtEl>
+                                        <p:attrNameLst>
+                                          <p:attrName>style.visibility</p:attrName>
+                                        </p:attrNameLst>
+                                      </p:cBhvr>
+                                      <p:to>
+                                        <p:strVal val="visible"/>
+                                      </p:to>
+                                    </p:set>
+                                    <p:animEffect transition="in" filter="dissolve">
+                                      <p:cBhvr>
+                                        <p:cTn id="7" dur="500"/>
+                                        <p:tgtEl>
+                                          <p:spTgt spid="3">
+                                            <p:txEl>
+                                              <p:pRg st="5" end="5"/>
+                                            </p:txEl>
+                                          </p:spTgt>
+                                        </p:tgtEl>
+                                      </p:cBhvr>
+                                    </p:animEffect>
+                                  </p:childTnLst>
+                                </p:cTn>
+                              </p:par>
+                            </p:childTnLst>
+                          </p:cTn>
+                        </p:par>
+                      </p:childTnLst>
+                    </p:cTn>
+                  </p:par>
+                </p:childTnLst>
+              </p:cTn>
+              <p:prevCondLst>
+                <p:cond evt="onPrev" delay="0">
+                  <p:tgtEl>
+                    <p:sldTgt/>
+                  </p:tgtEl>
+                </p:cond>
+              </p:prevCondLst>
+              <p:nextCondLst>
+                <p:cond evt="onNext" delay="0">
+                  <p:tgtEl>
+                    <p:sldTgt/>
+                  </p:tgtEl>
+                </p:cond>
+              </p:nextCondLst>
+            </p:seq>
+          </p:childTnLst>
+        </p:cTn>
+      </p:par>
+    </p:tnLst>
+  </p:timing>
+</p:sld>
+</file>
+
+<file path=ppt/slides/slide12.xml><?xml version="1.0" encoding="utf-8"?>
+<p:sld xmlns:a="http://schemas.openxmlformats.org/drawingml/2006/main" xmlns:r="http://schemas.openxmlformats.org/officeDocument/2006/relationships" xmlns:p="http://schemas.openxmlformats.org/presentationml/2006/main">
+  <p:cSld>
+    <p:spTree>
+      <p:nvGrpSpPr>
+        <p:cNvPr id="1" name="">
+          <a:extLst>
+            <a:ext uri="{FF2B5EF4-FFF2-40B4-BE49-F238E27FC236}">
+              <a16:creationId xmlns:a16="http://schemas.microsoft.com/office/drawing/2014/main" id="{594A36CD-9E96-60E0-A453-23E9AF78B1DB}"/>
+            </a:ext>
+          </a:extLst>
+        </p:cNvPr>
+        <p:cNvGrpSpPr/>
+        <p:nvPr/>
+      </p:nvGrpSpPr>
+      <p:grpSpPr>
+        <a:xfrm>
+          <a:off x="0" y="0"/>
+          <a:ext cx="0" cy="0"/>
+          <a:chOff x="0" y="0"/>
+          <a:chExt cx="0" cy="0"/>
+        </a:xfrm>
+      </p:grpSpPr>
+      <p:sp>
+        <p:nvSpPr>
+          <p:cNvPr id="2" name="Title 1">
+            <a:extLst>
+              <a:ext uri="{FF2B5EF4-FFF2-40B4-BE49-F238E27FC236}">
+                <a16:creationId xmlns:a16="http://schemas.microsoft.com/office/drawing/2014/main" id="{732BE3B2-EED4-DDBB-6CA1-62A5216F3EA4}"/>
+              </a:ext>
+            </a:extLst>
+          </p:cNvPr>
+          <p:cNvSpPr>
+            <a:spLocks noGrp="1"/>
+          </p:cNvSpPr>
+          <p:nvPr>
+            <p:ph type="title"/>
+          </p:nvPr>
+        </p:nvSpPr>
+        <p:spPr/>
+        <p:txBody>
+          <a:bodyPr/>
+          <a:lstStyle/>
+          <a:p>
+            <a:r>
+              <a:rPr lang="en-US" b="1" dirty="0">
+                <a:latin typeface="Calibri" panose="020F0502020204030204" pitchFamily="34" charset="0"/>
+                <a:cs typeface="Calibri" panose="020F0502020204030204" pitchFamily="34" charset="0"/>
+              </a:rPr>
+              <a:t>What you are going to learn (4)</a:t>
+            </a:r>
+            <a:endParaRPr lang="en-US" dirty="0"/>
+          </a:p>
+        </p:txBody>
+      </p:sp>
+      <p:sp>
+        <p:nvSpPr>
+          <p:cNvPr id="3" name="Content Placeholder 2">
+            <a:extLst>
+              <a:ext uri="{FF2B5EF4-FFF2-40B4-BE49-F238E27FC236}">
+                <a16:creationId xmlns:a16="http://schemas.microsoft.com/office/drawing/2014/main" id="{17C29F7B-AF39-4C1C-5BCD-8AE2275BCC40}"/>
+              </a:ext>
+            </a:extLst>
+          </p:cNvPr>
+          <p:cNvSpPr>
+            <a:spLocks noGrp="1"/>
+          </p:cNvSpPr>
+          <p:nvPr>
+            <p:ph idx="1"/>
+          </p:nvPr>
+        </p:nvSpPr>
+        <p:spPr>
+          <a:xfrm>
+            <a:off x="838200" y="1825625"/>
+            <a:ext cx="6664842" cy="4351338"/>
+          </a:xfrm>
+        </p:spPr>
+        <p:txBody>
+          <a:bodyPr>
+            <a:normAutofit/>
+          </a:bodyPr>
+          <a:lstStyle/>
+          <a:p>
+            <a:r>
+              <a:rPr lang="en-US" sz="4000" dirty="0">
+                <a:latin typeface="Calibri" panose="020F0502020204030204" pitchFamily="34" charset="0"/>
+                <a:cs typeface="Calibri" panose="020F0502020204030204" pitchFamily="34" charset="0"/>
+              </a:rPr>
+              <a:t>Basic Algorithms</a:t>
+            </a:r>
+          </a:p>
+          <a:p>
+            <a:pPr lvl="1"/>
+            <a:r>
+              <a:rPr lang="en-US" sz="3200" dirty="0">
+                <a:solidFill>
+                  <a:srgbClr val="C00000"/>
+                </a:solidFill>
+                <a:latin typeface="Calibri" panose="020F0502020204030204" pitchFamily="34" charset="0"/>
+                <a:cs typeface="Calibri" panose="020F0502020204030204" pitchFamily="34" charset="0"/>
+              </a:rPr>
+              <a:t>“What can a computer do?”</a:t>
+            </a:r>
+          </a:p>
+          <a:p>
+            <a:pPr lvl="1"/>
+            <a:r>
+              <a:rPr lang="en-US" sz="3200" dirty="0">
+                <a:solidFill>
+                  <a:srgbClr val="C00000"/>
+                </a:solidFill>
+                <a:latin typeface="Calibri" panose="020F0502020204030204" pitchFamily="34" charset="0"/>
+                <a:cs typeface="Calibri" panose="020F0502020204030204" pitchFamily="34" charset="0"/>
+              </a:rPr>
+              <a:t>“At what cost?”</a:t>
+            </a:r>
+          </a:p>
+          <a:p>
+            <a:pPr lvl="1"/>
+            <a:endParaRPr lang="en-US" sz="3600" dirty="0">
+              <a:latin typeface="Calibri" panose="020F0502020204030204" pitchFamily="34" charset="0"/>
+              <a:cs typeface="Calibri" panose="020F0502020204030204" pitchFamily="34" charset="0"/>
+            </a:endParaRPr>
+          </a:p>
+          <a:p>
+            <a:pPr lvl="1"/>
+            <a:endParaRPr lang="en-US" sz="3600" dirty="0">
+              <a:latin typeface="Calibri" panose="020F0502020204030204" pitchFamily="34" charset="0"/>
+              <a:cs typeface="Calibri" panose="020F0502020204030204" pitchFamily="34" charset="0"/>
+            </a:endParaRPr>
+          </a:p>
+        </p:txBody>
+      </p:sp>
+      <p:sp>
+        <p:nvSpPr>
+          <p:cNvPr id="4" name="Slide Number Placeholder 3">
+            <a:extLst>
+              <a:ext uri="{FF2B5EF4-FFF2-40B4-BE49-F238E27FC236}">
+                <a16:creationId xmlns:a16="http://schemas.microsoft.com/office/drawing/2014/main" id="{3DCEFCA0-EC58-C919-8B7A-C2ADFBDAF28B}"/>
+              </a:ext>
+            </a:extLst>
+          </p:cNvPr>
+          <p:cNvSpPr>
+            <a:spLocks noGrp="1"/>
+          </p:cNvSpPr>
+          <p:nvPr>
+            <p:ph type="sldNum" sz="quarter" idx="12"/>
+          </p:nvPr>
+        </p:nvSpPr>
+        <p:spPr/>
+        <p:txBody>
+          <a:bodyPr/>
+          <a:lstStyle/>
+          <a:p>
+            <a:fld id="{8B4C9E33-6753-472F-9C09-83153B974C9D}" type="slidenum">
+              <a:rPr lang="zh-CN" altLang="en-US" smtClean="0"/>
+              <a:t>12</a:t>
+            </a:fld>
+            <a:endParaRPr lang="zh-CN" altLang="en-US"/>
+          </a:p>
+        </p:txBody>
+      </p:sp>
+      <p:pic>
+        <p:nvPicPr>
+          <p:cNvPr id="5" name="Picture 4" descr="Alan Turing - Wikipedia">
+            <a:extLst>
+              <a:ext uri="{FF2B5EF4-FFF2-40B4-BE49-F238E27FC236}">
+                <a16:creationId xmlns:a16="http://schemas.microsoft.com/office/drawing/2014/main" id="{A3F17E6E-F81A-0F22-14CF-99FE34D12BDD}"/>
+              </a:ext>
+            </a:extLst>
+          </p:cNvPr>
+          <p:cNvPicPr>
+            <a:picLocks noChangeAspect="1"/>
+          </p:cNvPicPr>
+          <p:nvPr/>
+        </p:nvPicPr>
+        <p:blipFill>
+          <a:blip r:embed="rId2"/>
+          <a:stretch>
+            <a:fillRect/>
+          </a:stretch>
+        </p:blipFill>
+        <p:spPr>
+          <a:xfrm>
+            <a:off x="8394700" y="2766604"/>
+            <a:ext cx="2280388" cy="3028355"/>
+          </a:xfrm>
+          <a:prstGeom prst="rect">
+            <a:avLst/>
+          </a:prstGeom>
+        </p:spPr>
+      </p:pic>
+    </p:spTree>
+    <p:extLst>
+      <p:ext uri="{BB962C8B-B14F-4D97-AF65-F5344CB8AC3E}">
+        <p14:creationId xmlns:p14="http://schemas.microsoft.com/office/powerpoint/2010/main" val="363905930"/>
+      </p:ext>
+    </p:extLst>
+  </p:cSld>
+  <p:clrMapOvr>
+    <a:masterClrMapping/>
+  </p:clrMapOvr>
+</p:sld>
+</file>
+
+<file path=ppt/slides/slide13.xml><?xml version="1.0" encoding="utf-8"?>
+<p:sld xmlns:a="http://schemas.openxmlformats.org/drawingml/2006/main" xmlns:r="http://schemas.openxmlformats.org/officeDocument/2006/relationships" xmlns:p="http://schemas.openxmlformats.org/presentationml/2006/main">
+  <p:cSld>
+    <p:bg>
+      <p:bgPr>
+        <a:solidFill>
+          <a:schemeClr val="accent6">
+            <a:lumMod val="20000"/>
+            <a:lumOff val="80000"/>
+          </a:schemeClr>
+        </a:solidFill>
+        <a:effectLst/>
+      </p:bgPr>
+    </p:bg>
+    <p:spTree>
+      <p:nvGrpSpPr>
+        <p:cNvPr id="1" name=""/>
+        <p:cNvGrpSpPr/>
+        <p:nvPr/>
+      </p:nvGrpSpPr>
+      <p:grpSpPr>
+        <a:xfrm>
+          <a:off x="0" y="0"/>
+          <a:ext cx="0" cy="0"/>
+          <a:chOff x="0" y="0"/>
+          <a:chExt cx="0" cy="0"/>
+        </a:xfrm>
+      </p:grpSpPr>
+      <p:sp>
+        <p:nvSpPr>
+          <p:cNvPr id="5" name="Title 1">
+            <a:extLst>
+              <a:ext uri="{FF2B5EF4-FFF2-40B4-BE49-F238E27FC236}">
+                <a16:creationId xmlns:a16="http://schemas.microsoft.com/office/drawing/2014/main" id="{5A45EFE3-9954-88B1-BC23-1AA2B73C5FA9}"/>
+              </a:ext>
+            </a:extLst>
+          </p:cNvPr>
+          <p:cNvSpPr>
+            <a:spLocks noGrp="1"/>
+          </p:cNvSpPr>
+          <p:nvPr>
+            <p:ph type="title"/>
+          </p:nvPr>
+        </p:nvSpPr>
+        <p:spPr>
+          <a:xfrm>
+            <a:off x="2807140" y="2766218"/>
+            <a:ext cx="10515600" cy="1325563"/>
+          </a:xfrm>
+        </p:spPr>
+        <p:txBody>
+          <a:bodyPr>
+            <a:normAutofit/>
+          </a:bodyPr>
+          <a:lstStyle/>
+          <a:p>
+            <a:pPr algn="l">
+              <a:buNone/>
+            </a:pPr>
+            <a:r>
+              <a:rPr lang="en-US" sz="7200" b="1" dirty="0">
+                <a:latin typeface="Calibri" panose="020F0502020204030204" pitchFamily="34" charset="0"/>
+                <a:cs typeface="Calibri" panose="020F0502020204030204" pitchFamily="34" charset="0"/>
+              </a:rPr>
+              <a:t>About the Class</a:t>
+            </a:r>
+          </a:p>
+        </p:txBody>
+      </p:sp>
+    </p:spTree>
+    <p:extLst>
+      <p:ext uri="{BB962C8B-B14F-4D97-AF65-F5344CB8AC3E}">
+        <p14:creationId xmlns:p14="http://schemas.microsoft.com/office/powerpoint/2010/main" val="185735343"/>
+      </p:ext>
+    </p:extLst>
+  </p:cSld>
+  <p:clrMapOvr>
+    <a:masterClrMapping/>
+  </p:clrMapOvr>
+</p:sld>
+</file>
+
+<file path=ppt/slides/slide14.xml><?xml version="1.0" encoding="utf-8"?>
+<p:sld xmlns:a="http://schemas.openxmlformats.org/drawingml/2006/main" xmlns:r="http://schemas.openxmlformats.org/officeDocument/2006/relationships" xmlns:p="http://schemas.openxmlformats.org/presentationml/2006/main">
+  <p:cSld>
+    <p:spTree>
+      <p:nvGrpSpPr>
         <p:cNvPr id="1" name="">
           <a:extLst>
             <a:ext uri="{FF2B5EF4-FFF2-40B4-BE49-F238E27FC236}">
@@ -4802,7 +6468,7 @@
           <a:p>
             <a:fld id="{8B4C9E33-6753-472F-9C09-83153B974C9D}" type="slidenum">
               <a:rPr lang="zh-CN" altLang="en-US" smtClean="0"/>
-              <a:t>10</a:t>
+              <a:t>14</a:t>
             </a:fld>
             <a:endParaRPr lang="zh-CN" altLang="en-US"/>
           </a:p>
@@ -4821,7 +6487,7 @@
 </p:sld>
 </file>
 
-<file path=ppt/slides/slide11.xml><?xml version="1.0" encoding="utf-8"?>
+<file path=ppt/slides/slide15.xml><?xml version="1.0" encoding="utf-8"?>
 <p:sld xmlns:a="http://schemas.openxmlformats.org/drawingml/2006/main" xmlns:r="http://schemas.openxmlformats.org/officeDocument/2006/relationships" xmlns:p="http://schemas.openxmlformats.org/presentationml/2006/main">
   <p:cSld>
     <p:spTree>
@@ -5097,7 +6763,7 @@
                 <a:latin typeface="Calibri" panose="020F0502020204030204" pitchFamily="34" charset="0"/>
                 <a:cs typeface="Calibri" panose="020F0502020204030204" pitchFamily="34" charset="0"/>
               </a:rPr>
-              <a:t>11</a:t>
+              <a:t>15</a:t>
             </a:fld>
             <a:endParaRPr lang="zh-CN" altLang="en-US">
               <a:latin typeface="Calibri" panose="020F0502020204030204" pitchFamily="34" charset="0"/>
@@ -5119,7 +6785,7 @@
 </p:sld>
 </file>
 
-<file path=ppt/slides/slide12.xml><?xml version="1.0" encoding="utf-8"?>
+<file path=ppt/slides/slide16.xml><?xml version="1.0" encoding="utf-8"?>
 <p:sld xmlns:a="http://schemas.openxmlformats.org/drawingml/2006/main" xmlns:r="http://schemas.openxmlformats.org/officeDocument/2006/relationships" xmlns:p="http://schemas.openxmlformats.org/presentationml/2006/main">
   <p:cSld>
     <p:spTree>
@@ -5335,14 +7001,14 @@
                 <a:latin typeface="Calibri" panose="020F0502020204030204" pitchFamily="34" charset="0"/>
                 <a:cs typeface="Calibri" panose="020F0502020204030204" pitchFamily="34" charset="0"/>
               </a:rPr>
-              <a:t>Recitation / Q&amp;A sessions (starting week 2)</a:t>
+              <a:t>Tutorial / Q&amp;A sessions (starting week 2)</a:t>
             </a:r>
           </a:p>
           <a:p>
             <a:pPr lvl="1"/>
             <a:r>
               <a:rPr lang="en-US" sz="2800" dirty="0"/>
-              <a:t>03:00PM - 03:50PM                 Lecture Theater C</a:t>
+              <a:t>Go to whatever session that suits you</a:t>
             </a:r>
             <a:endParaRPr lang="en-US" sz="2800" i="1" dirty="0">
               <a:latin typeface="Calibri" panose="020F0502020204030204" pitchFamily="34" charset="0"/>
@@ -5384,7 +7050,7 @@
                 <a:latin typeface="Calibri" panose="020F0502020204030204" pitchFamily="34" charset="0"/>
                 <a:cs typeface="Calibri" panose="020F0502020204030204" pitchFamily="34" charset="0"/>
               </a:rPr>
-              <a:t>12</a:t>
+              <a:t>16</a:t>
             </a:fld>
             <a:endParaRPr lang="zh-CN" altLang="en-US">
               <a:latin typeface="Calibri" panose="020F0502020204030204" pitchFamily="34" charset="0"/>
@@ -5406,7 +7072,7 @@
 </p:sld>
 </file>
 
-<file path=ppt/slides/slide13.xml><?xml version="1.0" encoding="utf-8"?>
+<file path=ppt/slides/slide17.xml><?xml version="1.0" encoding="utf-8"?>
 <p:sld xmlns:a="http://schemas.openxmlformats.org/drawingml/2006/main" xmlns:r="http://schemas.openxmlformats.org/officeDocument/2006/relationships" xmlns:p="http://schemas.openxmlformats.org/presentationml/2006/main">
   <p:cSld>
     <p:spTree>
@@ -5474,7 +7140,7 @@
         <p:spPr/>
         <p:txBody>
           <a:bodyPr>
-            <a:normAutofit/>
+            <a:normAutofit fontScale="92500" lnSpcReduction="20000"/>
           </a:bodyPr>
           <a:lstStyle/>
           <a:p>
@@ -5493,6 +7159,16 @@
                 <a:latin typeface="Calibri" panose="020F0502020204030204" pitchFamily="34" charset="0"/>
                 <a:cs typeface="Calibri" panose="020F0502020204030204" pitchFamily="34" charset="0"/>
               </a:rPr>
+              <a:t>Q&amp;A sessions</a:t>
+            </a:r>
+          </a:p>
+          <a:p>
+            <a:pPr lvl="1"/>
+            <a:r>
+              <a:rPr lang="en-US" sz="3200" dirty="0">
+                <a:latin typeface="Calibri" panose="020F0502020204030204" pitchFamily="34" charset="0"/>
+                <a:cs typeface="Calibri" panose="020F0502020204030204" pitchFamily="34" charset="0"/>
+              </a:rPr>
               <a:t>Canvas - Announcement</a:t>
             </a:r>
           </a:p>
@@ -5503,7 +7179,17 @@
                 <a:latin typeface="Calibri" panose="020F0502020204030204" pitchFamily="34" charset="0"/>
                 <a:cs typeface="Calibri" panose="020F0502020204030204" pitchFamily="34" charset="0"/>
               </a:rPr>
-              <a:t>Canvas - Discussion</a:t>
+              <a:t>Canvas – Discussion</a:t>
+            </a:r>
+          </a:p>
+          <a:p>
+            <a:pPr lvl="1"/>
+            <a:r>
+              <a:rPr lang="en-US" sz="3200" dirty="0">
+                <a:latin typeface="Calibri" panose="020F0502020204030204" pitchFamily="34" charset="0"/>
+                <a:cs typeface="Calibri" panose="020F0502020204030204" pitchFamily="34" charset="0"/>
+              </a:rPr>
+              <a:t>Telegram group (links on canvas)</a:t>
             </a:r>
           </a:p>
           <a:p>
@@ -5567,7 +7253,7 @@
           <a:p>
             <a:fld id="{8B4C9E33-6753-472F-9C09-83153B974C9D}" type="slidenum">
               <a:rPr lang="zh-CN" altLang="en-US" smtClean="0"/>
-              <a:t>13</a:t>
+              <a:t>17</a:t>
             </a:fld>
             <a:endParaRPr lang="zh-CN" altLang="en-US"/>
           </a:p>
@@ -5586,7 +7272,7 @@
 </p:sld>
 </file>
 
-<file path=ppt/slides/slide14.xml><?xml version="1.0" encoding="utf-8"?>
+<file path=ppt/slides/slide18.xml><?xml version="1.0" encoding="utf-8"?>
 <p:sld xmlns:a="http://schemas.openxmlformats.org/drawingml/2006/main" xmlns:r="http://schemas.openxmlformats.org/officeDocument/2006/relationships" xmlns:p="http://schemas.openxmlformats.org/presentationml/2006/main">
   <p:cSld>
     <p:spTree>
@@ -5654,7 +7340,7 @@
         <p:spPr/>
         <p:txBody>
           <a:bodyPr>
-            <a:normAutofit fontScale="92500" lnSpcReduction="20000"/>
+            <a:normAutofit/>
           </a:bodyPr>
           <a:lstStyle/>
           <a:p>
@@ -5751,7 +7437,7 @@
                 <a:latin typeface="Calibri" panose="020F0502020204030204" pitchFamily="34" charset="0"/>
                 <a:cs typeface="Calibri" panose="020F0502020204030204" pitchFamily="34" charset="0"/>
               </a:rPr>
-              <a:t>View / Submit: Canvas</a:t>
+              <a:t>View / Submit: Canvas, 1 page of pdf submission (handwritten or typeset)</a:t>
             </a:r>
           </a:p>
           <a:p>
@@ -5761,7 +7447,7 @@
                 <a:latin typeface="Calibri" panose="020F0502020204030204" pitchFamily="34" charset="0"/>
                 <a:cs typeface="Calibri" panose="020F0502020204030204" pitchFamily="34" charset="0"/>
               </a:rPr>
-              <a:t>AI Policy: declarative usage </a:t>
+              <a:t>AI / Collaboration Policy: declarative usage </a:t>
             </a:r>
             <a:r>
               <a:rPr lang="en-US" i="1" dirty="0">
@@ -5783,7 +7469,7 @@
                 <a:latin typeface="Calibri" panose="020F0502020204030204" pitchFamily="34" charset="0"/>
                 <a:cs typeface="Calibri" panose="020F0502020204030204" pitchFamily="34" charset="0"/>
               </a:rPr>
-              <a:t>Late Date: Currently no</a:t>
+              <a:t>Late Submission: 1 hour late = 1 point deduction</a:t>
             </a:r>
           </a:p>
           <a:p>
@@ -5796,58 +7482,9 @@
             </a:endParaRPr>
           </a:p>
           <a:p>
-            <a:r>
-              <a:rPr lang="en-US" b="1" i="1" dirty="0">
-                <a:latin typeface="Calibri" panose="020F0502020204030204" pitchFamily="34" charset="0"/>
-                <a:cs typeface="Calibri" panose="020F0502020204030204" pitchFamily="34" charset="0"/>
-              </a:rPr>
-              <a:t>Mid-term </a:t>
-            </a:r>
-            <a:r>
-              <a:rPr lang="en-US" b="1" i="1" dirty="0">
-                <a:solidFill>
-                  <a:srgbClr val="C00000"/>
-                </a:solidFill>
-                <a:latin typeface="Calibri" panose="020F0502020204030204" pitchFamily="34" charset="0"/>
-                <a:cs typeface="Calibri" panose="020F0502020204030204" pitchFamily="34" charset="0"/>
-              </a:rPr>
-              <a:t>(35%) </a:t>
-            </a:r>
-            <a:r>
-              <a:rPr lang="en-US" b="1" i="1" dirty="0">
-                <a:latin typeface="Calibri" panose="020F0502020204030204" pitchFamily="34" charset="0"/>
-                <a:cs typeface="Calibri" panose="020F0502020204030204" pitchFamily="34" charset="0"/>
-              </a:rPr>
-              <a:t>Final Exam </a:t>
-            </a:r>
-            <a:r>
-              <a:rPr lang="en-US" b="1" i="1" dirty="0">
-                <a:solidFill>
-                  <a:srgbClr val="C00000"/>
-                </a:solidFill>
-                <a:latin typeface="Calibri" panose="020F0502020204030204" pitchFamily="34" charset="0"/>
-                <a:cs typeface="Calibri" panose="020F0502020204030204" pitchFamily="34" charset="0"/>
-              </a:rPr>
-              <a:t>(45%)</a:t>
-            </a:r>
-          </a:p>
-          <a:p>
-            <a:pPr lvl="1"/>
-            <a:r>
-              <a:rPr lang="en-US" i="1" dirty="0">
-                <a:latin typeface="Calibri" panose="020F0502020204030204" pitchFamily="34" charset="0"/>
-                <a:cs typeface="Calibri" panose="020F0502020204030204" pitchFamily="34" charset="0"/>
-              </a:rPr>
-              <a:t>In-person, so no AI </a:t>
-            </a:r>
-            <a:r>
-              <a:rPr lang="en-US" i="1" dirty="0">
-                <a:latin typeface="Calibri" panose="020F0502020204030204" pitchFamily="34" charset="0"/>
-                <a:cs typeface="Calibri" panose="020F0502020204030204" pitchFamily="34" charset="0"/>
-                <a:sym typeface="Wingdings" pitchFamily="2" charset="2"/>
-              </a:rPr>
-              <a:t></a:t>
-            </a:r>
+            <a:pPr marL="457200" lvl="1" indent="0">
+              <a:buNone/>
+            </a:pPr>
             <a:endParaRPr lang="en-US" i="1" dirty="0">
               <a:latin typeface="Calibri" panose="020F0502020204030204" pitchFamily="34" charset="0"/>
               <a:cs typeface="Calibri" panose="020F0502020204030204" pitchFamily="34" charset="0"/>
@@ -5884,7 +7521,7 @@
           <a:p>
             <a:fld id="{8B4C9E33-6753-472F-9C09-83153B974C9D}" type="slidenum">
               <a:rPr lang="zh-CN" altLang="en-US" smtClean="0"/>
-              <a:t>14</a:t>
+              <a:t>18</a:t>
             </a:fld>
             <a:endParaRPr lang="zh-CN" altLang="en-US"/>
           </a:p>
@@ -6081,27 +7718,265 @@
                       </p:childTnLst>
                     </p:cTn>
                   </p:par>
+                </p:childTnLst>
+              </p:cTn>
+              <p:prevCondLst>
+                <p:cond evt="onPrev" delay="0">
+                  <p:tgtEl>
+                    <p:sldTgt/>
+                  </p:tgtEl>
+                </p:cond>
+              </p:prevCondLst>
+              <p:nextCondLst>
+                <p:cond evt="onNext" delay="0">
+                  <p:tgtEl>
+                    <p:sldTgt/>
+                  </p:tgtEl>
+                </p:cond>
+              </p:nextCondLst>
+            </p:seq>
+          </p:childTnLst>
+        </p:cTn>
+      </p:par>
+    </p:tnLst>
+  </p:timing>
+</p:sld>
+</file>
+
+<file path=ppt/slides/slide19.xml><?xml version="1.0" encoding="utf-8"?>
+<p:sld xmlns:a="http://schemas.openxmlformats.org/drawingml/2006/main" xmlns:r="http://schemas.openxmlformats.org/officeDocument/2006/relationships" xmlns:p="http://schemas.openxmlformats.org/presentationml/2006/main">
+  <p:cSld>
+    <p:spTree>
+      <p:nvGrpSpPr>
+        <p:cNvPr id="1" name="">
+          <a:extLst>
+            <a:ext uri="{FF2B5EF4-FFF2-40B4-BE49-F238E27FC236}">
+              <a16:creationId xmlns:a16="http://schemas.microsoft.com/office/drawing/2014/main" id="{F4390590-2C54-4A5F-334C-6DBC5ED42E1F}"/>
+            </a:ext>
+          </a:extLst>
+        </p:cNvPr>
+        <p:cNvGrpSpPr/>
+        <p:nvPr/>
+      </p:nvGrpSpPr>
+      <p:grpSpPr>
+        <a:xfrm>
+          <a:off x="0" y="0"/>
+          <a:ext cx="0" cy="0"/>
+          <a:chOff x="0" y="0"/>
+          <a:chExt cx="0" cy="0"/>
+        </a:xfrm>
+      </p:grpSpPr>
+      <p:sp>
+        <p:nvSpPr>
+          <p:cNvPr id="2" name="Title 1">
+            <a:extLst>
+              <a:ext uri="{FF2B5EF4-FFF2-40B4-BE49-F238E27FC236}">
+                <a16:creationId xmlns:a16="http://schemas.microsoft.com/office/drawing/2014/main" id="{68174D84-B14B-DEB8-8C26-D938A3305A4B}"/>
+              </a:ext>
+            </a:extLst>
+          </p:cNvPr>
+          <p:cNvSpPr>
+            <a:spLocks noGrp="1"/>
+          </p:cNvSpPr>
+          <p:nvPr>
+            <p:ph type="title"/>
+          </p:nvPr>
+        </p:nvSpPr>
+        <p:spPr/>
+        <p:txBody>
+          <a:bodyPr/>
+          <a:lstStyle/>
+          <a:p>
+            <a:r>
+              <a:rPr lang="en-US" b="1" dirty="0">
+                <a:latin typeface="Calibri" panose="020F0502020204030204" pitchFamily="34" charset="0"/>
+                <a:cs typeface="Calibri" panose="020F0502020204030204" pitchFamily="34" charset="0"/>
+              </a:rPr>
+              <a:t>Grading</a:t>
+            </a:r>
+            <a:endParaRPr lang="en-US" dirty="0"/>
+          </a:p>
+        </p:txBody>
+      </p:sp>
+      <p:sp>
+        <p:nvSpPr>
+          <p:cNvPr id="3" name="Content Placeholder 2">
+            <a:extLst>
+              <a:ext uri="{FF2B5EF4-FFF2-40B4-BE49-F238E27FC236}">
+                <a16:creationId xmlns:a16="http://schemas.microsoft.com/office/drawing/2014/main" id="{E0DE0E61-F356-3DA5-5A5D-8FB92DFD215A}"/>
+              </a:ext>
+            </a:extLst>
+          </p:cNvPr>
+          <p:cNvSpPr>
+            <a:spLocks noGrp="1"/>
+          </p:cNvSpPr>
+          <p:nvPr>
+            <p:ph idx="1"/>
+          </p:nvPr>
+        </p:nvSpPr>
+        <p:spPr/>
+        <p:txBody>
+          <a:bodyPr>
+            <a:normAutofit/>
+          </a:bodyPr>
+          <a:lstStyle/>
+          <a:p>
+            <a:pPr marL="0" indent="0">
+              <a:buNone/>
+            </a:pPr>
+            <a:endParaRPr lang="en-US" i="1" dirty="0">
+              <a:latin typeface="Calibri" panose="020F0502020204030204" pitchFamily="34" charset="0"/>
+              <a:cs typeface="Calibri" panose="020F0502020204030204" pitchFamily="34" charset="0"/>
+            </a:endParaRPr>
+          </a:p>
+          <a:p>
+            <a:r>
+              <a:rPr lang="en-US" b="1" i="1" dirty="0">
+                <a:latin typeface="Calibri" panose="020F0502020204030204" pitchFamily="34" charset="0"/>
+                <a:cs typeface="Calibri" panose="020F0502020204030204" pitchFamily="34" charset="0"/>
+              </a:rPr>
+              <a:t>Mid-term </a:t>
+            </a:r>
+            <a:r>
+              <a:rPr lang="en-US" b="1" i="1" dirty="0">
+                <a:solidFill>
+                  <a:srgbClr val="C00000"/>
+                </a:solidFill>
+                <a:latin typeface="Calibri" panose="020F0502020204030204" pitchFamily="34" charset="0"/>
+                <a:cs typeface="Calibri" panose="020F0502020204030204" pitchFamily="34" charset="0"/>
+              </a:rPr>
+              <a:t>(35%) </a:t>
+            </a:r>
+            <a:r>
+              <a:rPr lang="en-US" b="1" i="1" dirty="0">
+                <a:latin typeface="Calibri" panose="020F0502020204030204" pitchFamily="34" charset="0"/>
+                <a:cs typeface="Calibri" panose="020F0502020204030204" pitchFamily="34" charset="0"/>
+              </a:rPr>
+              <a:t>Final Exam </a:t>
+            </a:r>
+            <a:r>
+              <a:rPr lang="en-US" b="1" i="1" dirty="0">
+                <a:solidFill>
+                  <a:srgbClr val="C00000"/>
+                </a:solidFill>
+                <a:latin typeface="Calibri" panose="020F0502020204030204" pitchFamily="34" charset="0"/>
+                <a:cs typeface="Calibri" panose="020F0502020204030204" pitchFamily="34" charset="0"/>
+              </a:rPr>
+              <a:t>(45%)</a:t>
+            </a:r>
+          </a:p>
+          <a:p>
+            <a:pPr lvl="1"/>
+            <a:r>
+              <a:rPr lang="en-US" i="1" dirty="0">
+                <a:latin typeface="Calibri" panose="020F0502020204030204" pitchFamily="34" charset="0"/>
+                <a:cs typeface="Calibri" panose="020F0502020204030204" pitchFamily="34" charset="0"/>
+              </a:rPr>
+              <a:t>In-person, so no AI </a:t>
+            </a:r>
+            <a:r>
+              <a:rPr lang="en-US" i="1" dirty="0">
+                <a:latin typeface="Calibri" panose="020F0502020204030204" pitchFamily="34" charset="0"/>
+                <a:cs typeface="Calibri" panose="020F0502020204030204" pitchFamily="34" charset="0"/>
+                <a:sym typeface="Wingdings" pitchFamily="2" charset="2"/>
+              </a:rPr>
+              <a:t></a:t>
+            </a:r>
+          </a:p>
+          <a:p>
+            <a:pPr lvl="1"/>
+            <a:r>
+              <a:rPr lang="en-US" i="1" dirty="0">
+                <a:latin typeface="Calibri" panose="020F0502020204030204" pitchFamily="34" charset="0"/>
+                <a:cs typeface="Calibri" panose="020F0502020204030204" pitchFamily="34" charset="0"/>
+                <a:sym typeface="Wingdings" pitchFamily="2" charset="2"/>
+              </a:rPr>
+              <a:t>One page of handwritten cheat sheet is allowed</a:t>
+            </a:r>
+          </a:p>
+          <a:p>
+            <a:pPr lvl="1"/>
+            <a:endParaRPr lang="en-US" i="1" dirty="0">
+              <a:latin typeface="Calibri" panose="020F0502020204030204" pitchFamily="34" charset="0"/>
+              <a:cs typeface="Calibri" panose="020F0502020204030204" pitchFamily="34" charset="0"/>
+            </a:endParaRPr>
+          </a:p>
+          <a:p>
+            <a:endParaRPr lang="en-US" dirty="0"/>
+          </a:p>
+          <a:p>
+            <a:endParaRPr lang="en-US" dirty="0"/>
+          </a:p>
+        </p:txBody>
+      </p:sp>
+      <p:sp>
+        <p:nvSpPr>
+          <p:cNvPr id="4" name="Slide Number Placeholder 3">
+            <a:extLst>
+              <a:ext uri="{FF2B5EF4-FFF2-40B4-BE49-F238E27FC236}">
+                <a16:creationId xmlns:a16="http://schemas.microsoft.com/office/drawing/2014/main" id="{4B47ECCC-018B-9F0B-4D00-E82BEA2966E6}"/>
+              </a:ext>
+            </a:extLst>
+          </p:cNvPr>
+          <p:cNvSpPr>
+            <a:spLocks noGrp="1"/>
+          </p:cNvSpPr>
+          <p:nvPr>
+            <p:ph type="sldNum" sz="quarter" idx="12"/>
+          </p:nvPr>
+        </p:nvSpPr>
+        <p:spPr/>
+        <p:txBody>
+          <a:bodyPr/>
+          <a:lstStyle/>
+          <a:p>
+            <a:fld id="{8B4C9E33-6753-472F-9C09-83153B974C9D}" type="slidenum">
+              <a:rPr lang="zh-CN" altLang="en-US" smtClean="0"/>
+              <a:t>19</a:t>
+            </a:fld>
+            <a:endParaRPr lang="zh-CN" altLang="en-US"/>
+          </a:p>
+        </p:txBody>
+      </p:sp>
+    </p:spTree>
+    <p:extLst>
+      <p:ext uri="{BB962C8B-B14F-4D97-AF65-F5344CB8AC3E}">
+        <p14:creationId xmlns:p14="http://schemas.microsoft.com/office/powerpoint/2010/main" val="888882727"/>
+      </p:ext>
+    </p:extLst>
+  </p:cSld>
+  <p:clrMapOvr>
+    <a:masterClrMapping/>
+  </p:clrMapOvr>
+  <p:timing>
+    <p:tnLst>
+      <p:par>
+        <p:cTn id="1" dur="indefinite" restart="never" nodeType="tmRoot">
+          <p:childTnLst>
+            <p:seq concurrent="1" nextAc="seek">
+              <p:cTn id="2" dur="indefinite" nodeType="mainSeq">
+                <p:childTnLst>
                   <p:par>
-                    <p:cTn id="15" fill="hold">
+                    <p:cTn id="3" fill="hold">
                       <p:stCondLst>
                         <p:cond delay="indefinite"/>
                       </p:stCondLst>
                       <p:childTnLst>
                         <p:par>
-                          <p:cTn id="16" fill="hold">
+                          <p:cTn id="4" fill="hold">
                             <p:stCondLst>
                               <p:cond delay="0"/>
                             </p:stCondLst>
                             <p:childTnLst>
                               <p:par>
-                                <p:cTn id="17" presetID="1" presetClass="entr" presetSubtype="0" fill="hold" nodeType="clickEffect">
+                                <p:cTn id="5" presetID="1" presetClass="entr" presetSubtype="0" fill="hold" nodeType="clickEffect">
                                   <p:stCondLst>
                                     <p:cond delay="0"/>
                                   </p:stCondLst>
                                   <p:childTnLst>
                                     <p:set>
                                       <p:cBhvr>
-                                        <p:cTn id="18" dur="1" fill="hold">
+                                        <p:cTn id="6" dur="1" fill="hold">
                                           <p:stCondLst>
                                             <p:cond delay="0"/>
                                           </p:stCondLst>
@@ -6109,7 +7984,7 @@
                                         <p:tgtEl>
                                           <p:spTgt spid="3">
                                             <p:txEl>
-                                              <p:pRg st="10" end="10"/>
+                                              <p:pRg st="1" end="1"/>
                                             </p:txEl>
                                           </p:spTgt>
                                         </p:tgtEl>
@@ -6125,14 +8000,14 @@
                                 </p:cTn>
                               </p:par>
                               <p:par>
-                                <p:cTn id="19" presetID="1" presetClass="entr" presetSubtype="0" fill="hold" nodeType="withEffect">
+                                <p:cTn id="7" presetID="1" presetClass="entr" presetSubtype="0" fill="hold" nodeType="withEffect">
                                   <p:stCondLst>
                                     <p:cond delay="0"/>
                                   </p:stCondLst>
                                   <p:childTnLst>
                                     <p:set>
                                       <p:cBhvr>
-                                        <p:cTn id="20" dur="1" fill="hold">
+                                        <p:cTn id="8" dur="1" fill="hold">
                                           <p:stCondLst>
                                             <p:cond delay="0"/>
                                           </p:stCondLst>
@@ -6140,7 +8015,38 @@
                                         <p:tgtEl>
                                           <p:spTgt spid="3">
                                             <p:txEl>
-                                              <p:pRg st="11" end="11"/>
+                                              <p:pRg st="2" end="2"/>
+                                            </p:txEl>
+                                          </p:spTgt>
+                                        </p:tgtEl>
+                                        <p:attrNameLst>
+                                          <p:attrName>style.visibility</p:attrName>
+                                        </p:attrNameLst>
+                                      </p:cBhvr>
+                                      <p:to>
+                                        <p:strVal val="visible"/>
+                                      </p:to>
+                                    </p:set>
+                                  </p:childTnLst>
+                                </p:cTn>
+                              </p:par>
+                              <p:par>
+                                <p:cTn id="9" presetID="1" presetClass="entr" presetSubtype="0" fill="hold" nodeType="withEffect">
+                                  <p:stCondLst>
+                                    <p:cond delay="0"/>
+                                  </p:stCondLst>
+                                  <p:childTnLst>
+                                    <p:set>
+                                      <p:cBhvr>
+                                        <p:cTn id="10" dur="1" fill="hold">
+                                          <p:stCondLst>
+                                            <p:cond delay="0"/>
+                                          </p:stCondLst>
+                                        </p:cTn>
+                                        <p:tgtEl>
+                                          <p:spTgt spid="3">
+                                            <p:txEl>
+                                              <p:pRg st="3" end="3"/>
                                             </p:txEl>
                                           </p:spTgt>
                                         </p:tgtEl>
@@ -6186,7 +8092,241 @@
 </p:sld>
 </file>
 
-<file path=ppt/slides/slide15.xml><?xml version="1.0" encoding="utf-8"?>
+<file path=ppt/slides/slide2.xml><?xml version="1.0" encoding="utf-8"?>
+<p:sld xmlns:a="http://schemas.openxmlformats.org/drawingml/2006/main" xmlns:r="http://schemas.openxmlformats.org/officeDocument/2006/relationships" xmlns:p="http://schemas.openxmlformats.org/presentationml/2006/main">
+  <p:cSld>
+    <p:spTree>
+      <p:nvGrpSpPr>
+        <p:cNvPr id="1" name=""/>
+        <p:cNvGrpSpPr/>
+        <p:nvPr/>
+      </p:nvGrpSpPr>
+      <p:grpSpPr>
+        <a:xfrm>
+          <a:off x="0" y="0"/>
+          <a:ext cx="0" cy="0"/>
+          <a:chOff x="0" y="0"/>
+          <a:chExt cx="0" cy="0"/>
+        </a:xfrm>
+      </p:grpSpPr>
+      <p:sp>
+        <p:nvSpPr>
+          <p:cNvPr id="2" name="Title 1">
+            <a:extLst>
+              <a:ext uri="{FF2B5EF4-FFF2-40B4-BE49-F238E27FC236}">
+                <a16:creationId xmlns:a16="http://schemas.microsoft.com/office/drawing/2014/main" id="{AF142300-D7F7-8F3B-87C2-2633E1048258}"/>
+              </a:ext>
+            </a:extLst>
+          </p:cNvPr>
+          <p:cNvSpPr>
+            <a:spLocks noGrp="1"/>
+          </p:cNvSpPr>
+          <p:nvPr>
+            <p:ph type="title"/>
+          </p:nvPr>
+        </p:nvSpPr>
+        <p:spPr/>
+        <p:txBody>
+          <a:bodyPr/>
+          <a:lstStyle/>
+          <a:p>
+            <a:r>
+              <a:rPr lang="en-US" b="1" dirty="0">
+                <a:latin typeface="Calibri" panose="020F0502020204030204" pitchFamily="34" charset="0"/>
+                <a:cs typeface="Calibri" panose="020F0502020204030204" pitchFamily="34" charset="0"/>
+              </a:rPr>
+              <a:t>About me</a:t>
+            </a:r>
+          </a:p>
+        </p:txBody>
+      </p:sp>
+      <p:sp>
+        <p:nvSpPr>
+          <p:cNvPr id="3" name="Content Placeholder 2">
+            <a:extLst>
+              <a:ext uri="{FF2B5EF4-FFF2-40B4-BE49-F238E27FC236}">
+                <a16:creationId xmlns:a16="http://schemas.microsoft.com/office/drawing/2014/main" id="{DFFA6C19-D556-8F8A-7DAF-B1A8F4D5E7F0}"/>
+              </a:ext>
+            </a:extLst>
+          </p:cNvPr>
+          <p:cNvSpPr>
+            <a:spLocks noGrp="1"/>
+          </p:cNvSpPr>
+          <p:nvPr>
+            <p:ph idx="1"/>
+          </p:nvPr>
+        </p:nvSpPr>
+        <p:spPr/>
+        <p:txBody>
+          <a:bodyPr>
+            <a:normAutofit/>
+          </a:bodyPr>
+          <a:lstStyle/>
+          <a:p>
+            <a:r>
+              <a:rPr lang="en-US" dirty="0">
+                <a:latin typeface="Calibri" panose="020F0502020204030204" pitchFamily="34" charset="0"/>
+                <a:cs typeface="Calibri" panose="020F0502020204030204" pitchFamily="34" charset="0"/>
+              </a:rPr>
+              <a:t>Assistant Professor in HKUST CSE (since 2026)</a:t>
+            </a:r>
+          </a:p>
+          <a:p>
+            <a:r>
+              <a:rPr lang="en-US" dirty="0">
+                <a:latin typeface="Calibri" panose="020F0502020204030204" pitchFamily="34" charset="0"/>
+                <a:cs typeface="Calibri" panose="020F0502020204030204" pitchFamily="34" charset="0"/>
+              </a:rPr>
+              <a:t>PhD at Carnegie Mellon University (2025) </a:t>
+            </a:r>
+          </a:p>
+          <a:p>
+            <a:r>
+              <a:rPr lang="en-US" dirty="0">
+                <a:latin typeface="Calibri" panose="020F0502020204030204" pitchFamily="34" charset="0"/>
+                <a:cs typeface="Calibri" panose="020F0502020204030204" pitchFamily="34" charset="0"/>
+              </a:rPr>
+              <a:t>Undergrad at Peking University (2020) </a:t>
+            </a:r>
+            <a:endParaRPr lang="en-US" i="1" dirty="0">
+              <a:latin typeface="Calibri" panose="020F0502020204030204" pitchFamily="34" charset="0"/>
+              <a:cs typeface="Calibri" panose="020F0502020204030204" pitchFamily="34" charset="0"/>
+            </a:endParaRPr>
+          </a:p>
+          <a:p>
+            <a:pPr marL="0" indent="0">
+              <a:buNone/>
+            </a:pPr>
+            <a:endParaRPr lang="en-US" dirty="0">
+              <a:latin typeface="Calibri" panose="020F0502020204030204" pitchFamily="34" charset="0"/>
+              <a:cs typeface="Calibri" panose="020F0502020204030204" pitchFamily="34" charset="0"/>
+            </a:endParaRPr>
+          </a:p>
+          <a:p>
+            <a:pPr marL="0" indent="0">
+              <a:buNone/>
+            </a:pPr>
+            <a:endParaRPr lang="en-US" dirty="0">
+              <a:latin typeface="Calibri" panose="020F0502020204030204" pitchFamily="34" charset="0"/>
+              <a:cs typeface="Calibri" panose="020F0502020204030204" pitchFamily="34" charset="0"/>
+            </a:endParaRPr>
+          </a:p>
+          <a:p>
+            <a:r>
+              <a:rPr lang="en-US" dirty="0">
+                <a:latin typeface="Calibri" panose="020F0502020204030204" pitchFamily="34" charset="0"/>
+                <a:cs typeface="Calibri" panose="020F0502020204030204" pitchFamily="34" charset="0"/>
+              </a:rPr>
+              <a:t>ICPC / NOI Gold Medalist (</a:t>
+            </a:r>
+            <a:r>
+              <a:rPr lang="en-US" b="1" dirty="0">
+                <a:latin typeface="Calibri" panose="020F0502020204030204" pitchFamily="34" charset="0"/>
+                <a:cs typeface="Calibri" panose="020F0502020204030204" pitchFamily="34" charset="0"/>
+              </a:rPr>
+              <a:t>Currently: Coach of HKUST ICPC team</a:t>
+            </a:r>
+            <a:r>
+              <a:rPr lang="en-US" dirty="0">
+                <a:latin typeface="Calibri" panose="020F0502020204030204" pitchFamily="34" charset="0"/>
+                <a:cs typeface="Calibri" panose="020F0502020204030204" pitchFamily="34" charset="0"/>
+              </a:rPr>
+              <a:t>)</a:t>
+            </a:r>
+          </a:p>
+          <a:p>
+            <a:endParaRPr lang="en-US" dirty="0">
+              <a:latin typeface="Calibri" panose="020F0502020204030204" pitchFamily="34" charset="0"/>
+              <a:cs typeface="Calibri" panose="020F0502020204030204" pitchFamily="34" charset="0"/>
+            </a:endParaRPr>
+          </a:p>
+        </p:txBody>
+      </p:sp>
+      <p:sp>
+        <p:nvSpPr>
+          <p:cNvPr id="4" name="Slide Number Placeholder 3">
+            <a:extLst>
+              <a:ext uri="{FF2B5EF4-FFF2-40B4-BE49-F238E27FC236}">
+                <a16:creationId xmlns:a16="http://schemas.microsoft.com/office/drawing/2014/main" id="{FEDB2CC2-D64A-6C98-F03A-F215A208087D}"/>
+              </a:ext>
+            </a:extLst>
+          </p:cNvPr>
+          <p:cNvSpPr>
+            <a:spLocks noGrp="1"/>
+          </p:cNvSpPr>
+          <p:nvPr>
+            <p:ph type="sldNum" sz="quarter" idx="12"/>
+          </p:nvPr>
+        </p:nvSpPr>
+        <p:spPr/>
+        <p:txBody>
+          <a:bodyPr/>
+          <a:lstStyle/>
+          <a:p>
+            <a:fld id="{8B4C9E33-6753-472F-9C09-83153B974C9D}" type="slidenum">
+              <a:rPr lang="zh-CN" altLang="en-US" smtClean="0">
+                <a:latin typeface="Calibri" panose="020F0502020204030204" pitchFamily="34" charset="0"/>
+                <a:cs typeface="Calibri" panose="020F0502020204030204" pitchFamily="34" charset="0"/>
+              </a:rPr>
+              <a:t>2</a:t>
+            </a:fld>
+            <a:endParaRPr lang="zh-CN" altLang="en-US">
+              <a:latin typeface="Calibri" panose="020F0502020204030204" pitchFamily="34" charset="0"/>
+              <a:cs typeface="Calibri" panose="020F0502020204030204" pitchFamily="34" charset="0"/>
+            </a:endParaRPr>
+          </a:p>
+        </p:txBody>
+      </p:sp>
+      <p:pic>
+        <p:nvPicPr>
+          <p:cNvPr id="6" name="Picture 5">
+            <a:extLst>
+              <a:ext uri="{FF2B5EF4-FFF2-40B4-BE49-F238E27FC236}">
+                <a16:creationId xmlns:a16="http://schemas.microsoft.com/office/drawing/2014/main" id="{CF47AA7F-C925-6993-F523-0995078ECF34}"/>
+              </a:ext>
+            </a:extLst>
+          </p:cNvPr>
+          <p:cNvPicPr>
+            <a:picLocks noChangeAspect="1"/>
+          </p:cNvPicPr>
+          <p:nvPr/>
+        </p:nvPicPr>
+        <p:blipFill>
+          <a:blip r:embed="rId3">
+            <a:extLst>
+              <a:ext uri="{28A0092B-C50C-407E-A947-70E740481C1C}">
+                <a14:useLocalDpi xmlns:a14="http://schemas.microsoft.com/office/drawing/2010/main" val="0"/>
+              </a:ext>
+            </a:extLst>
+          </a:blip>
+          <a:stretch>
+            <a:fillRect/>
+          </a:stretch>
+        </p:blipFill>
+        <p:spPr>
+          <a:xfrm>
+            <a:off x="8136294" y="591878"/>
+            <a:ext cx="2833489" cy="3025077"/>
+          </a:xfrm>
+          <a:prstGeom prst="rect">
+            <a:avLst/>
+          </a:prstGeom>
+        </p:spPr>
+      </p:pic>
+    </p:spTree>
+    <p:extLst>
+      <p:ext uri="{BB962C8B-B14F-4D97-AF65-F5344CB8AC3E}">
+        <p14:creationId xmlns:p14="http://schemas.microsoft.com/office/powerpoint/2010/main" val="3308631290"/>
+      </p:ext>
+    </p:extLst>
+  </p:cSld>
+  <p:clrMapOvr>
+    <a:masterClrMapping/>
+  </p:clrMapOvr>
+</p:sld>
+</file>
+
+<file path=ppt/slides/slide20.xml><?xml version="1.0" encoding="utf-8"?>
 <p:sld xmlns:a="http://schemas.openxmlformats.org/drawingml/2006/main" xmlns:r="http://schemas.openxmlformats.org/officeDocument/2006/relationships" xmlns:p="http://schemas.openxmlformats.org/presentationml/2006/main">
   <p:cSld>
     <p:spTree>
@@ -6360,7 +8500,7 @@
           <a:p>
             <a:fld id="{8B4C9E33-6753-472F-9C09-83153B974C9D}" type="slidenum">
               <a:rPr lang="zh-CN" altLang="en-US" smtClean="0"/>
-              <a:t>15</a:t>
+              <a:t>20</a:t>
             </a:fld>
             <a:endParaRPr lang="zh-CN" altLang="en-US"/>
           </a:p>
@@ -6554,7 +8694,7 @@
 </p:sld>
 </file>
 
-<file path=ppt/slides/slide16.xml><?xml version="1.0" encoding="utf-8"?>
+<file path=ppt/slides/slide21.xml><?xml version="1.0" encoding="utf-8"?>
 <p:sld xmlns:a="http://schemas.openxmlformats.org/drawingml/2006/main" xmlns:r="http://schemas.openxmlformats.org/officeDocument/2006/relationships" xmlns:p="http://schemas.openxmlformats.org/presentationml/2006/main">
   <p:cSld>
     <p:spTree>
@@ -6810,7 +8950,7 @@
                 <a:latin typeface="Calibri" panose="020F0502020204030204" pitchFamily="34" charset="0"/>
                 <a:cs typeface="Calibri" panose="020F0502020204030204" pitchFamily="34" charset="0"/>
               </a:rPr>
-              <a:t>16</a:t>
+              <a:t>21</a:t>
             </a:fld>
             <a:endParaRPr lang="zh-CN" altLang="en-US">
               <a:latin typeface="Calibri" panose="020F0502020204030204" pitchFamily="34" charset="0"/>
@@ -6832,7 +8972,7 @@
 </p:sld>
 </file>
 
-<file path=ppt/slides/slide17.xml><?xml version="1.0" encoding="utf-8"?>
+<file path=ppt/slides/slide22.xml><?xml version="1.0" encoding="utf-8"?>
 <p:sld xmlns:a="http://schemas.openxmlformats.org/drawingml/2006/main" xmlns:r="http://schemas.openxmlformats.org/officeDocument/2006/relationships" xmlns:p="http://schemas.openxmlformats.org/presentationml/2006/main">
   <p:cSld>
     <p:spTree>
@@ -6904,7 +9044,7 @@
                 <a:latin typeface="Calibri" panose="020F0502020204030204" pitchFamily="34" charset="0"/>
                 <a:cs typeface="Calibri" panose="020F0502020204030204" pitchFamily="34" charset="0"/>
               </a:rPr>
-              <a:t>17</a:t>
+              <a:t>22</a:t>
             </a:fld>
             <a:endParaRPr lang="zh-CN" altLang="en-US">
               <a:latin typeface="Calibri" panose="020F0502020204030204" pitchFamily="34" charset="0"/>
@@ -6921,7 +9061,7 @@
 </p:sld>
 </file>
 
-<file path=ppt/slides/slide18.xml><?xml version="1.0" encoding="utf-8"?>
+<file path=ppt/slides/slide23.xml><?xml version="1.0" encoding="utf-8"?>
 <p:sld xmlns:a="http://schemas.openxmlformats.org/drawingml/2006/main" xmlns:r="http://schemas.openxmlformats.org/officeDocument/2006/relationships" xmlns:p="http://schemas.openxmlformats.org/presentationml/2006/main">
   <p:cSld>
     <p:bg>
@@ -7009,7 +9149,7 @@
 </p:sld>
 </file>
 
-<file path=ppt/slides/slide19.xml><?xml version="1.0" encoding="utf-8"?>
+<file path=ppt/slides/slide24.xml><?xml version="1.0" encoding="utf-8"?>
 <p:sld xmlns:a="http://schemas.openxmlformats.org/drawingml/2006/main" xmlns:r="http://schemas.openxmlformats.org/officeDocument/2006/relationships" xmlns:p="http://schemas.openxmlformats.org/presentationml/2006/main">
   <p:cSld>
     <p:spTree>
@@ -7080,7 +9220,7 @@
           <a:p>
             <a:fld id="{8B4C9E33-6753-472F-9C09-83153B974C9D}" type="slidenum">
               <a:rPr lang="zh-CN" altLang="en-US" smtClean="0"/>
-              <a:t>19</a:t>
+              <a:t>24</a:t>
             </a:fld>
             <a:endParaRPr lang="zh-CN" altLang="en-US" dirty="0"/>
           </a:p>
@@ -7419,241 +9559,7 @@
 </p:sld>
 </file>
 
-<file path=ppt/slides/slide2.xml><?xml version="1.0" encoding="utf-8"?>
-<p:sld xmlns:a="http://schemas.openxmlformats.org/drawingml/2006/main" xmlns:r="http://schemas.openxmlformats.org/officeDocument/2006/relationships" xmlns:p="http://schemas.openxmlformats.org/presentationml/2006/main">
-  <p:cSld>
-    <p:spTree>
-      <p:nvGrpSpPr>
-        <p:cNvPr id="1" name=""/>
-        <p:cNvGrpSpPr/>
-        <p:nvPr/>
-      </p:nvGrpSpPr>
-      <p:grpSpPr>
-        <a:xfrm>
-          <a:off x="0" y="0"/>
-          <a:ext cx="0" cy="0"/>
-          <a:chOff x="0" y="0"/>
-          <a:chExt cx="0" cy="0"/>
-        </a:xfrm>
-      </p:grpSpPr>
-      <p:sp>
-        <p:nvSpPr>
-          <p:cNvPr id="2" name="Title 1">
-            <a:extLst>
-              <a:ext uri="{FF2B5EF4-FFF2-40B4-BE49-F238E27FC236}">
-                <a16:creationId xmlns:a16="http://schemas.microsoft.com/office/drawing/2014/main" id="{AF142300-D7F7-8F3B-87C2-2633E1048258}"/>
-              </a:ext>
-            </a:extLst>
-          </p:cNvPr>
-          <p:cNvSpPr>
-            <a:spLocks noGrp="1"/>
-          </p:cNvSpPr>
-          <p:nvPr>
-            <p:ph type="title"/>
-          </p:nvPr>
-        </p:nvSpPr>
-        <p:spPr/>
-        <p:txBody>
-          <a:bodyPr/>
-          <a:lstStyle/>
-          <a:p>
-            <a:r>
-              <a:rPr lang="en-US" b="1" dirty="0">
-                <a:latin typeface="Calibri" panose="020F0502020204030204" pitchFamily="34" charset="0"/>
-                <a:cs typeface="Calibri" panose="020F0502020204030204" pitchFamily="34" charset="0"/>
-              </a:rPr>
-              <a:t>About me</a:t>
-            </a:r>
-          </a:p>
-        </p:txBody>
-      </p:sp>
-      <p:sp>
-        <p:nvSpPr>
-          <p:cNvPr id="3" name="Content Placeholder 2">
-            <a:extLst>
-              <a:ext uri="{FF2B5EF4-FFF2-40B4-BE49-F238E27FC236}">
-                <a16:creationId xmlns:a16="http://schemas.microsoft.com/office/drawing/2014/main" id="{DFFA6C19-D556-8F8A-7DAF-B1A8F4D5E7F0}"/>
-              </a:ext>
-            </a:extLst>
-          </p:cNvPr>
-          <p:cNvSpPr>
-            <a:spLocks noGrp="1"/>
-          </p:cNvSpPr>
-          <p:nvPr>
-            <p:ph idx="1"/>
-          </p:nvPr>
-        </p:nvSpPr>
-        <p:spPr/>
-        <p:txBody>
-          <a:bodyPr>
-            <a:normAutofit/>
-          </a:bodyPr>
-          <a:lstStyle/>
-          <a:p>
-            <a:r>
-              <a:rPr lang="en-US" dirty="0">
-                <a:latin typeface="Calibri" panose="020F0502020204030204" pitchFamily="34" charset="0"/>
-                <a:cs typeface="Calibri" panose="020F0502020204030204" pitchFamily="34" charset="0"/>
-              </a:rPr>
-              <a:t>Assistant Professor in HKUST CSE (since 2026)</a:t>
-            </a:r>
-          </a:p>
-          <a:p>
-            <a:r>
-              <a:rPr lang="en-US" dirty="0">
-                <a:latin typeface="Calibri" panose="020F0502020204030204" pitchFamily="34" charset="0"/>
-                <a:cs typeface="Calibri" panose="020F0502020204030204" pitchFamily="34" charset="0"/>
-              </a:rPr>
-              <a:t>PhD at Carnegie Mellon University (2025) </a:t>
-            </a:r>
-          </a:p>
-          <a:p>
-            <a:r>
-              <a:rPr lang="en-US" dirty="0">
-                <a:latin typeface="Calibri" panose="020F0502020204030204" pitchFamily="34" charset="0"/>
-                <a:cs typeface="Calibri" panose="020F0502020204030204" pitchFamily="34" charset="0"/>
-              </a:rPr>
-              <a:t>Undergrad at Peking University (2020) </a:t>
-            </a:r>
-            <a:endParaRPr lang="en-US" i="1" dirty="0">
-              <a:latin typeface="Calibri" panose="020F0502020204030204" pitchFamily="34" charset="0"/>
-              <a:cs typeface="Calibri" panose="020F0502020204030204" pitchFamily="34" charset="0"/>
-            </a:endParaRPr>
-          </a:p>
-          <a:p>
-            <a:pPr marL="0" indent="0">
-              <a:buNone/>
-            </a:pPr>
-            <a:endParaRPr lang="en-US" dirty="0">
-              <a:latin typeface="Calibri" panose="020F0502020204030204" pitchFamily="34" charset="0"/>
-              <a:cs typeface="Calibri" panose="020F0502020204030204" pitchFamily="34" charset="0"/>
-            </a:endParaRPr>
-          </a:p>
-          <a:p>
-            <a:pPr marL="0" indent="0">
-              <a:buNone/>
-            </a:pPr>
-            <a:endParaRPr lang="en-US" dirty="0">
-              <a:latin typeface="Calibri" panose="020F0502020204030204" pitchFamily="34" charset="0"/>
-              <a:cs typeface="Calibri" panose="020F0502020204030204" pitchFamily="34" charset="0"/>
-            </a:endParaRPr>
-          </a:p>
-          <a:p>
-            <a:r>
-              <a:rPr lang="en-US" dirty="0">
-                <a:latin typeface="Calibri" panose="020F0502020204030204" pitchFamily="34" charset="0"/>
-                <a:cs typeface="Calibri" panose="020F0502020204030204" pitchFamily="34" charset="0"/>
-              </a:rPr>
-              <a:t>ICPC / NOI Gold Medalist (</a:t>
-            </a:r>
-            <a:r>
-              <a:rPr lang="en-US" b="1" dirty="0">
-                <a:latin typeface="Calibri" panose="020F0502020204030204" pitchFamily="34" charset="0"/>
-                <a:cs typeface="Calibri" panose="020F0502020204030204" pitchFamily="34" charset="0"/>
-              </a:rPr>
-              <a:t>Currently: Coach of HKUST ICPC team</a:t>
-            </a:r>
-            <a:r>
-              <a:rPr lang="en-US" dirty="0">
-                <a:latin typeface="Calibri" panose="020F0502020204030204" pitchFamily="34" charset="0"/>
-                <a:cs typeface="Calibri" panose="020F0502020204030204" pitchFamily="34" charset="0"/>
-              </a:rPr>
-              <a:t>)</a:t>
-            </a:r>
-          </a:p>
-          <a:p>
-            <a:endParaRPr lang="en-US" dirty="0">
-              <a:latin typeface="Calibri" panose="020F0502020204030204" pitchFamily="34" charset="0"/>
-              <a:cs typeface="Calibri" panose="020F0502020204030204" pitchFamily="34" charset="0"/>
-            </a:endParaRPr>
-          </a:p>
-        </p:txBody>
-      </p:sp>
-      <p:sp>
-        <p:nvSpPr>
-          <p:cNvPr id="4" name="Slide Number Placeholder 3">
-            <a:extLst>
-              <a:ext uri="{FF2B5EF4-FFF2-40B4-BE49-F238E27FC236}">
-                <a16:creationId xmlns:a16="http://schemas.microsoft.com/office/drawing/2014/main" id="{FEDB2CC2-D64A-6C98-F03A-F215A208087D}"/>
-              </a:ext>
-            </a:extLst>
-          </p:cNvPr>
-          <p:cNvSpPr>
-            <a:spLocks noGrp="1"/>
-          </p:cNvSpPr>
-          <p:nvPr>
-            <p:ph type="sldNum" sz="quarter" idx="12"/>
-          </p:nvPr>
-        </p:nvSpPr>
-        <p:spPr/>
-        <p:txBody>
-          <a:bodyPr/>
-          <a:lstStyle/>
-          <a:p>
-            <a:fld id="{8B4C9E33-6753-472F-9C09-83153B974C9D}" type="slidenum">
-              <a:rPr lang="zh-CN" altLang="en-US" smtClean="0">
-                <a:latin typeface="Calibri" panose="020F0502020204030204" pitchFamily="34" charset="0"/>
-                <a:cs typeface="Calibri" panose="020F0502020204030204" pitchFamily="34" charset="0"/>
-              </a:rPr>
-              <a:t>2</a:t>
-            </a:fld>
-            <a:endParaRPr lang="zh-CN" altLang="en-US">
-              <a:latin typeface="Calibri" panose="020F0502020204030204" pitchFamily="34" charset="0"/>
-              <a:cs typeface="Calibri" panose="020F0502020204030204" pitchFamily="34" charset="0"/>
-            </a:endParaRPr>
-          </a:p>
-        </p:txBody>
-      </p:sp>
-      <p:pic>
-        <p:nvPicPr>
-          <p:cNvPr id="6" name="Picture 5">
-            <a:extLst>
-              <a:ext uri="{FF2B5EF4-FFF2-40B4-BE49-F238E27FC236}">
-                <a16:creationId xmlns:a16="http://schemas.microsoft.com/office/drawing/2014/main" id="{CF47AA7F-C925-6993-F523-0995078ECF34}"/>
-              </a:ext>
-            </a:extLst>
-          </p:cNvPr>
-          <p:cNvPicPr>
-            <a:picLocks noChangeAspect="1"/>
-          </p:cNvPicPr>
-          <p:nvPr/>
-        </p:nvPicPr>
-        <p:blipFill>
-          <a:blip r:embed="rId3">
-            <a:extLst>
-              <a:ext uri="{28A0092B-C50C-407E-A947-70E740481C1C}">
-                <a14:useLocalDpi xmlns:a14="http://schemas.microsoft.com/office/drawing/2010/main" val="0"/>
-              </a:ext>
-            </a:extLst>
-          </a:blip>
-          <a:stretch>
-            <a:fillRect/>
-          </a:stretch>
-        </p:blipFill>
-        <p:spPr>
-          <a:xfrm>
-            <a:off x="8136294" y="591878"/>
-            <a:ext cx="2833489" cy="3025077"/>
-          </a:xfrm>
-          <a:prstGeom prst="rect">
-            <a:avLst/>
-          </a:prstGeom>
-        </p:spPr>
-      </p:pic>
-    </p:spTree>
-    <p:extLst>
-      <p:ext uri="{BB962C8B-B14F-4D97-AF65-F5344CB8AC3E}">
-        <p14:creationId xmlns:p14="http://schemas.microsoft.com/office/powerpoint/2010/main" val="3308631290"/>
-      </p:ext>
-    </p:extLst>
-  </p:cSld>
-  <p:clrMapOvr>
-    <a:masterClrMapping/>
-  </p:clrMapOvr>
-</p:sld>
-</file>
-
-<file path=ppt/slides/slide20.xml><?xml version="1.0" encoding="utf-8"?>
+<file path=ppt/slides/slide25.xml><?xml version="1.0" encoding="utf-8"?>
 <p:sld xmlns:a="http://schemas.openxmlformats.org/drawingml/2006/main" xmlns:r="http://schemas.openxmlformats.org/officeDocument/2006/relationships" xmlns:p="http://schemas.openxmlformats.org/presentationml/2006/main">
   <p:cSld>
     <p:spTree>
@@ -7730,7 +9636,7 @@
           <a:p>
             <a:fld id="{8B4C9E33-6753-472F-9C09-83153B974C9D}" type="slidenum">
               <a:rPr lang="zh-CN" altLang="en-US" smtClean="0"/>
-              <a:t>20</a:t>
+              <a:t>25</a:t>
             </a:fld>
             <a:endParaRPr lang="zh-CN" altLang="en-US" dirty="0"/>
           </a:p>
@@ -7948,7 +9854,7 @@
 </p:sld>
 </file>
 
-<file path=ppt/slides/slide21.xml><?xml version="1.0" encoding="utf-8"?>
+<file path=ppt/slides/slide26.xml><?xml version="1.0" encoding="utf-8"?>
 <p:sld xmlns:a="http://schemas.openxmlformats.org/drawingml/2006/main" xmlns:r="http://schemas.openxmlformats.org/officeDocument/2006/relationships" xmlns:p="http://schemas.openxmlformats.org/presentationml/2006/main">
   <p:cSld>
     <p:spTree>
@@ -8025,7 +9931,7 @@
           <a:p>
             <a:fld id="{8B4C9E33-6753-472F-9C09-83153B974C9D}" type="slidenum">
               <a:rPr lang="zh-CN" altLang="en-US" smtClean="0"/>
-              <a:t>21</a:t>
+              <a:t>26</a:t>
             </a:fld>
             <a:endParaRPr lang="zh-CN" altLang="en-US" dirty="0"/>
           </a:p>
@@ -8298,7 +10204,7 @@
 </p:sld>
 </file>
 
-<file path=ppt/slides/slide22.xml><?xml version="1.0" encoding="utf-8"?>
+<file path=ppt/slides/slide27.xml><?xml version="1.0" encoding="utf-8"?>
 <p:sld xmlns:a="http://schemas.openxmlformats.org/drawingml/2006/main" xmlns:r="http://schemas.openxmlformats.org/officeDocument/2006/relationships" xmlns:p="http://schemas.openxmlformats.org/presentationml/2006/main">
   <p:cSld>
     <p:spTree>
@@ -8375,7 +10281,7 @@
           <a:p>
             <a:fld id="{8B4C9E33-6753-472F-9C09-83153B974C9D}" type="slidenum">
               <a:rPr lang="zh-CN" altLang="en-US" smtClean="0"/>
-              <a:t>22</a:t>
+              <a:t>27</a:t>
             </a:fld>
             <a:endParaRPr lang="zh-CN" altLang="en-US" dirty="0"/>
           </a:p>
@@ -8785,7 +10691,7 @@
 </p:sld>
 </file>
 
-<file path=ppt/slides/slide23.xml><?xml version="1.0" encoding="utf-8"?>
+<file path=ppt/slides/slide28.xml><?xml version="1.0" encoding="utf-8"?>
 <p:sld xmlns:a="http://schemas.openxmlformats.org/drawingml/2006/main" xmlns:r="http://schemas.openxmlformats.org/officeDocument/2006/relationships" xmlns:p="http://schemas.openxmlformats.org/presentationml/2006/main">
   <p:cSld>
     <p:spTree>
@@ -8901,7 +10807,7 @@
           <a:p>
             <a:fld id="{8B4C9E33-6753-472F-9C09-83153B974C9D}" type="slidenum">
               <a:rPr lang="zh-CN" altLang="en-US" smtClean="0"/>
-              <a:t>23</a:t>
+              <a:t>28</a:t>
             </a:fld>
             <a:endParaRPr lang="zh-CN" altLang="en-US"/>
           </a:p>
@@ -8986,7 +10892,7 @@
 </p:sld>
 </file>
 
-<file path=ppt/slides/slide24.xml><?xml version="1.0" encoding="utf-8"?>
+<file path=ppt/slides/slide29.xml><?xml version="1.0" encoding="utf-8"?>
 <p:sld xmlns:a="http://schemas.openxmlformats.org/drawingml/2006/main" xmlns:r="http://schemas.openxmlformats.org/officeDocument/2006/relationships" xmlns:p="http://schemas.openxmlformats.org/presentationml/2006/main">
   <p:cSld>
     <p:spTree>
@@ -9117,7 +11023,7 @@
           <a:p>
             <a:fld id="{8B4C9E33-6753-472F-9C09-83153B974C9D}" type="slidenum">
               <a:rPr lang="zh-CN" altLang="en-US" smtClean="0"/>
-              <a:t>24</a:t>
+              <a:t>29</a:t>
             </a:fld>
             <a:endParaRPr lang="zh-CN" altLang="en-US"/>
           </a:p>
@@ -9202,7 +11108,434 @@
 </p:sld>
 </file>
 
-<file path=ppt/slides/slide25.xml><?xml version="1.0" encoding="utf-8"?>
+<file path=ppt/slides/slide3.xml><?xml version="1.0" encoding="utf-8"?>
+<p:sld xmlns:a="http://schemas.openxmlformats.org/drawingml/2006/main" xmlns:r="http://schemas.openxmlformats.org/officeDocument/2006/relationships" xmlns:p="http://schemas.openxmlformats.org/presentationml/2006/main">
+  <p:cSld>
+    <p:spTree>
+      <p:nvGrpSpPr>
+        <p:cNvPr id="1" name=""/>
+        <p:cNvGrpSpPr/>
+        <p:nvPr/>
+      </p:nvGrpSpPr>
+      <p:grpSpPr>
+        <a:xfrm>
+          <a:off x="0" y="0"/>
+          <a:ext cx="0" cy="0"/>
+          <a:chOff x="0" y="0"/>
+          <a:chExt cx="0" cy="0"/>
+        </a:xfrm>
+      </p:grpSpPr>
+      <p:sp>
+        <p:nvSpPr>
+          <p:cNvPr id="2" name="Title 1">
+            <a:extLst>
+              <a:ext uri="{FF2B5EF4-FFF2-40B4-BE49-F238E27FC236}">
+                <a16:creationId xmlns:a16="http://schemas.microsoft.com/office/drawing/2014/main" id="{C43E0727-0B50-D3FE-E5A4-01ADCCBCB861}"/>
+              </a:ext>
+            </a:extLst>
+          </p:cNvPr>
+          <p:cNvSpPr>
+            <a:spLocks noGrp="1"/>
+          </p:cNvSpPr>
+          <p:nvPr>
+            <p:ph type="title"/>
+          </p:nvPr>
+        </p:nvSpPr>
+        <p:spPr/>
+        <p:txBody>
+          <a:bodyPr/>
+          <a:lstStyle/>
+          <a:p>
+            <a:r>
+              <a:rPr lang="en-US" dirty="0">
+                <a:latin typeface="Calibri" panose="020F0502020204030204" pitchFamily="34" charset="0"/>
+                <a:cs typeface="Calibri" panose="020F0502020204030204" pitchFamily="34" charset="0"/>
+              </a:rPr>
+              <a:t>My research (1)</a:t>
+            </a:r>
+          </a:p>
+        </p:txBody>
+      </p:sp>
+      <p:sp>
+        <p:nvSpPr>
+          <p:cNvPr id="3" name="Content Placeholder 2">
+            <a:extLst>
+              <a:ext uri="{FF2B5EF4-FFF2-40B4-BE49-F238E27FC236}">
+                <a16:creationId xmlns:a16="http://schemas.microsoft.com/office/drawing/2014/main" id="{A8EBAF40-72CC-3F87-A9F1-5EABB06C015E}"/>
+              </a:ext>
+            </a:extLst>
+          </p:cNvPr>
+          <p:cNvSpPr>
+            <a:spLocks noGrp="1"/>
+          </p:cNvSpPr>
+          <p:nvPr>
+            <p:ph idx="1"/>
+          </p:nvPr>
+        </p:nvSpPr>
+        <p:spPr/>
+        <p:txBody>
+          <a:bodyPr/>
+          <a:lstStyle/>
+          <a:p>
+            <a:r>
+              <a:rPr lang="en-US" dirty="0"/>
+              <a:t>Information Retrieval</a:t>
+            </a:r>
+          </a:p>
+        </p:txBody>
+      </p:sp>
+      <p:sp>
+        <p:nvSpPr>
+          <p:cNvPr id="4" name="Slide Number Placeholder 3">
+            <a:extLst>
+              <a:ext uri="{FF2B5EF4-FFF2-40B4-BE49-F238E27FC236}">
+                <a16:creationId xmlns:a16="http://schemas.microsoft.com/office/drawing/2014/main" id="{5D2DFD3D-BB81-1CAD-69E8-793212C8E890}"/>
+              </a:ext>
+            </a:extLst>
+          </p:cNvPr>
+          <p:cNvSpPr>
+            <a:spLocks noGrp="1"/>
+          </p:cNvSpPr>
+          <p:nvPr>
+            <p:ph type="sldNum" sz="quarter" idx="12"/>
+          </p:nvPr>
+        </p:nvSpPr>
+        <p:spPr/>
+        <p:txBody>
+          <a:bodyPr/>
+          <a:lstStyle/>
+          <a:p>
+            <a:fld id="{8B4C9E33-6753-472F-9C09-83153B974C9D}" type="slidenum">
+              <a:rPr lang="zh-CN" altLang="en-US" smtClean="0"/>
+              <a:t>3</a:t>
+            </a:fld>
+            <a:endParaRPr lang="zh-CN" altLang="en-US"/>
+          </a:p>
+        </p:txBody>
+      </p:sp>
+      <p:pic>
+        <p:nvPicPr>
+          <p:cNvPr id="6" name="Picture 2" descr="Chat bot icon vector. Isolated contour symbol illustration 9971218 Vector  Art at Vecteezy">
+            <a:extLst>
+              <a:ext uri="{FF2B5EF4-FFF2-40B4-BE49-F238E27FC236}">
+                <a16:creationId xmlns:a16="http://schemas.microsoft.com/office/drawing/2014/main" id="{46BBA300-0D79-F9FD-65A5-9A8CDF58D499}"/>
+              </a:ext>
+            </a:extLst>
+          </p:cNvPr>
+          <p:cNvPicPr>
+            <a:picLocks noChangeAspect="1" noChangeArrowheads="1"/>
+          </p:cNvPicPr>
+          <p:nvPr/>
+        </p:nvPicPr>
+        <p:blipFill>
+          <a:blip r:embed="rId3">
+            <a:extLst>
+              <a:ext uri="{BEBA8EAE-BF5A-486C-A8C5-ECC9F3942E4B}">
+                <a14:imgProps xmlns:a14="http://schemas.microsoft.com/office/drawing/2010/main">
+                  <a14:imgLayer r:embed="rId4">
+                    <a14:imgEffect>
+                      <a14:backgroundRemoval t="10000" b="90000" l="10000" r="90000">
+                        <a14:foregroundMark x1="24796" y1="47857" x2="24796" y2="55204"/>
+                        <a14:foregroundMark x1="26122" y1="62041" x2="26122" y2="62041"/>
+                        <a14:foregroundMark x1="42755" y1="53571" x2="42755" y2="56531"/>
+                        <a14:foregroundMark x1="61939" y1="52143" x2="64082" y2="55000"/>
+                        <a14:foregroundMark x1="44388" y1="67755" x2="50612" y2="67959"/>
+                      </a14:backgroundRemoval>
+                    </a14:imgEffect>
+                  </a14:imgLayer>
+                </a14:imgProps>
+              </a:ext>
+              <a:ext uri="{28A0092B-C50C-407E-A947-70E740481C1C}">
+                <a14:useLocalDpi xmlns:a14="http://schemas.microsoft.com/office/drawing/2010/main" val="0"/>
+              </a:ext>
+            </a:extLst>
+          </a:blip>
+          <a:srcRect/>
+          <a:stretch>
+            <a:fillRect/>
+          </a:stretch>
+        </p:blipFill>
+        <p:spPr bwMode="auto">
+          <a:xfrm>
+            <a:off x="1160051" y="3839242"/>
+            <a:ext cx="1641345" cy="1641345"/>
+          </a:xfrm>
+          <a:prstGeom prst="rect">
+            <a:avLst/>
+          </a:prstGeom>
+          <a:noFill/>
+          <a:extLst>
+            <a:ext uri="{909E8E84-426E-40DD-AFC4-6F175D3DCCD1}">
+              <a14:hiddenFill xmlns:a14="http://schemas.microsoft.com/office/drawing/2010/main">
+                <a:solidFill>
+                  <a:srgbClr val="FFFFFF"/>
+                </a:solidFill>
+              </a14:hiddenFill>
+            </a:ext>
+          </a:extLst>
+        </p:spPr>
+      </p:pic>
+      <p:grpSp>
+        <p:nvGrpSpPr>
+          <p:cNvPr id="9" name="Group 8">
+            <a:extLst>
+              <a:ext uri="{FF2B5EF4-FFF2-40B4-BE49-F238E27FC236}">
+                <a16:creationId xmlns:a16="http://schemas.microsoft.com/office/drawing/2014/main" id="{19C49837-3DD2-6647-8304-6F2207086806}"/>
+              </a:ext>
+            </a:extLst>
+          </p:cNvPr>
+          <p:cNvGrpSpPr/>
+          <p:nvPr/>
+        </p:nvGrpSpPr>
+        <p:grpSpPr>
+          <a:xfrm>
+            <a:off x="4741551" y="4714958"/>
+            <a:ext cx="1701801" cy="244969"/>
+            <a:chOff x="4114800" y="3429000"/>
+            <a:chExt cx="4253230" cy="186343"/>
+          </a:xfrm>
+        </p:grpSpPr>
+        <p:cxnSp>
+          <p:nvCxnSpPr>
+            <p:cNvPr id="10" name="Straight Arrow Connector 9">
+              <a:extLst>
+                <a:ext uri="{FF2B5EF4-FFF2-40B4-BE49-F238E27FC236}">
+                  <a16:creationId xmlns:a16="http://schemas.microsoft.com/office/drawing/2014/main" id="{9F4F2AC8-8629-8ACF-4578-FFE8E85ABC64}"/>
+                </a:ext>
+              </a:extLst>
+            </p:cNvPr>
+            <p:cNvCxnSpPr/>
+            <p:nvPr/>
+          </p:nvCxnSpPr>
+          <p:spPr>
+            <a:xfrm>
+              <a:off x="4114800" y="3429000"/>
+              <a:ext cx="4253230" cy="0"/>
+            </a:xfrm>
+            <a:prstGeom prst="straightConnector1">
+              <a:avLst/>
+            </a:prstGeom>
+            <a:ln w="76200">
+              <a:solidFill>
+                <a:schemeClr val="tx1"/>
+              </a:solidFill>
+              <a:tailEnd type="triangle"/>
+            </a:ln>
+          </p:spPr>
+          <p:style>
+            <a:lnRef idx="1">
+              <a:schemeClr val="accent1"/>
+            </a:lnRef>
+            <a:fillRef idx="0">
+              <a:schemeClr val="accent1"/>
+            </a:fillRef>
+            <a:effectRef idx="0">
+              <a:schemeClr val="accent1"/>
+            </a:effectRef>
+            <a:fontRef idx="minor">
+              <a:schemeClr val="tx1"/>
+            </a:fontRef>
+          </p:style>
+        </p:cxnSp>
+        <p:cxnSp>
+          <p:nvCxnSpPr>
+            <p:cNvPr id="11" name="Straight Arrow Connector 10">
+              <a:extLst>
+                <a:ext uri="{FF2B5EF4-FFF2-40B4-BE49-F238E27FC236}">
+                  <a16:creationId xmlns:a16="http://schemas.microsoft.com/office/drawing/2014/main" id="{FD55FEB9-9B46-23CD-738F-E8279AF17837}"/>
+                </a:ext>
+              </a:extLst>
+            </p:cNvPr>
+            <p:cNvCxnSpPr/>
+            <p:nvPr/>
+          </p:nvCxnSpPr>
+          <p:spPr>
+            <a:xfrm>
+              <a:off x="4114800" y="3615343"/>
+              <a:ext cx="4253230" cy="0"/>
+            </a:xfrm>
+            <a:prstGeom prst="straightConnector1">
+              <a:avLst/>
+            </a:prstGeom>
+            <a:ln w="76200">
+              <a:solidFill>
+                <a:schemeClr val="tx1"/>
+              </a:solidFill>
+              <a:headEnd type="triangle" w="med" len="med"/>
+              <a:tailEnd type="none" w="med" len="med"/>
+            </a:ln>
+          </p:spPr>
+          <p:style>
+            <a:lnRef idx="1">
+              <a:schemeClr val="accent1"/>
+            </a:lnRef>
+            <a:fillRef idx="0">
+              <a:schemeClr val="accent1"/>
+            </a:fillRef>
+            <a:effectRef idx="0">
+              <a:schemeClr val="accent1"/>
+            </a:effectRef>
+            <a:fontRef idx="minor">
+              <a:schemeClr val="tx1"/>
+            </a:fontRef>
+          </p:style>
+        </p:cxnSp>
+      </p:grpSp>
+      <p:sp>
+        <p:nvSpPr>
+          <p:cNvPr id="12" name="Rounded Rectangle 11">
+            <a:extLst>
+              <a:ext uri="{FF2B5EF4-FFF2-40B4-BE49-F238E27FC236}">
+                <a16:creationId xmlns:a16="http://schemas.microsoft.com/office/drawing/2014/main" id="{40DD27FA-0C99-D3A5-6016-3D89AADA4426}"/>
+              </a:ext>
+            </a:extLst>
+          </p:cNvPr>
+          <p:cNvSpPr/>
+          <p:nvPr/>
+        </p:nvSpPr>
+        <p:spPr>
+          <a:xfrm>
+            <a:off x="3482478" y="5252483"/>
+            <a:ext cx="4768041" cy="682198"/>
+          </a:xfrm>
+          <a:prstGeom prst="roundRect">
+            <a:avLst/>
+          </a:prstGeom>
+        </p:spPr>
+        <p:style>
+          <a:lnRef idx="2">
+            <a:schemeClr val="dk1"/>
+          </a:lnRef>
+          <a:fillRef idx="1">
+            <a:schemeClr val="lt1"/>
+          </a:fillRef>
+          <a:effectRef idx="0">
+            <a:schemeClr val="dk1"/>
+          </a:effectRef>
+          <a:fontRef idx="minor">
+            <a:schemeClr val="dk1"/>
+          </a:fontRef>
+        </p:style>
+        <p:txBody>
+          <a:bodyPr rtlCol="0" anchor="ctr"/>
+          <a:lstStyle/>
+          <a:p>
+            <a:pPr algn="ctr"/>
+            <a:r>
+              <a:rPr lang="en-US" i="1" dirty="0"/>
+              <a:t>Mingxun</a:t>
+            </a:r>
+          </a:p>
+        </p:txBody>
+      </p:sp>
+      <p:sp>
+        <p:nvSpPr>
+          <p:cNvPr id="13" name="Rounded Rectangle 12">
+            <a:extLst>
+              <a:ext uri="{FF2B5EF4-FFF2-40B4-BE49-F238E27FC236}">
+                <a16:creationId xmlns:a16="http://schemas.microsoft.com/office/drawing/2014/main" id="{8BCC9A0F-2C80-CE97-C747-DB9CB7011DF2}"/>
+              </a:ext>
+            </a:extLst>
+          </p:cNvPr>
+          <p:cNvSpPr/>
+          <p:nvPr/>
+        </p:nvSpPr>
+        <p:spPr>
+          <a:xfrm>
+            <a:off x="3482478" y="3897823"/>
+            <a:ext cx="4950887" cy="682198"/>
+          </a:xfrm>
+          <a:prstGeom prst="roundRect">
+            <a:avLst/>
+          </a:prstGeom>
+        </p:spPr>
+        <p:style>
+          <a:lnRef idx="2">
+            <a:schemeClr val="dk1"/>
+          </a:lnRef>
+          <a:fillRef idx="1">
+            <a:schemeClr val="lt1"/>
+          </a:fillRef>
+          <a:effectRef idx="0">
+            <a:schemeClr val="dk1"/>
+          </a:effectRef>
+          <a:fontRef idx="minor">
+            <a:schemeClr val="dk1"/>
+          </a:fontRef>
+        </p:style>
+        <p:txBody>
+          <a:bodyPr rtlCol="0" anchor="ctr"/>
+          <a:lstStyle/>
+          <a:p>
+            <a:pPr algn="ctr"/>
+            <a:r>
+              <a:rPr lang="en-US" i="1" dirty="0"/>
+              <a:t>Annoying Professor in HKUST</a:t>
+            </a:r>
+          </a:p>
+        </p:txBody>
+      </p:sp>
+      <p:pic>
+        <p:nvPicPr>
+          <p:cNvPr id="14" name="Picture 4" descr="Internet - Free signs icons">
+            <a:extLst>
+              <a:ext uri="{FF2B5EF4-FFF2-40B4-BE49-F238E27FC236}">
+                <a16:creationId xmlns:a16="http://schemas.microsoft.com/office/drawing/2014/main" id="{1FE97750-4506-94BD-5445-B33488673FB7}"/>
+              </a:ext>
+            </a:extLst>
+          </p:cNvPr>
+          <p:cNvPicPr>
+            <a:picLocks noChangeAspect="1" noChangeArrowheads="1"/>
+          </p:cNvPicPr>
+          <p:nvPr/>
+        </p:nvPicPr>
+        <p:blipFill>
+          <a:blip r:embed="rId5">
+            <a:extLst>
+              <a:ext uri="{28A0092B-C50C-407E-A947-70E740481C1C}">
+                <a14:useLocalDpi xmlns:a14="http://schemas.microsoft.com/office/drawing/2010/main" val="0"/>
+              </a:ext>
+            </a:extLst>
+          </a:blip>
+          <a:srcRect/>
+          <a:stretch>
+            <a:fillRect/>
+          </a:stretch>
+        </p:blipFill>
+        <p:spPr bwMode="auto">
+          <a:xfrm>
+            <a:off x="9092713" y="4157326"/>
+            <a:ext cx="1236047" cy="1236047"/>
+          </a:xfrm>
+          <a:prstGeom prst="rect">
+            <a:avLst/>
+          </a:prstGeom>
+          <a:noFill/>
+          <a:extLst>
+            <a:ext uri="{909E8E84-426E-40DD-AFC4-6F175D3DCCD1}">
+              <a14:hiddenFill xmlns:a14="http://schemas.microsoft.com/office/drawing/2010/main">
+                <a:solidFill>
+                  <a:srgbClr val="FFFFFF"/>
+                </a:solidFill>
+              </a14:hiddenFill>
+            </a:ext>
+          </a:extLst>
+        </p:spPr>
+      </p:pic>
+    </p:spTree>
+    <p:extLst>
+      <p:ext uri="{BB962C8B-B14F-4D97-AF65-F5344CB8AC3E}">
+        <p14:creationId xmlns:p14="http://schemas.microsoft.com/office/powerpoint/2010/main" val="1470609187"/>
+      </p:ext>
+    </p:extLst>
+  </p:cSld>
+  <p:clrMapOvr>
+    <a:masterClrMapping/>
+  </p:clrMapOvr>
+</p:sld>
+</file>
+
+<file path=ppt/slides/slide30.xml><?xml version="1.0" encoding="utf-8"?>
 <p:sld xmlns:a="http://schemas.openxmlformats.org/drawingml/2006/main" xmlns:r="http://schemas.openxmlformats.org/officeDocument/2006/relationships" xmlns:p="http://schemas.openxmlformats.org/presentationml/2006/main">
   <p:cSld>
     <p:spTree>
@@ -9311,7 +11644,7 @@
           <a:p>
             <a:fld id="{8B4C9E33-6753-472F-9C09-83153B974C9D}" type="slidenum">
               <a:rPr lang="zh-CN" altLang="en-US" smtClean="0"/>
-              <a:t>25</a:t>
+              <a:t>30</a:t>
             </a:fld>
             <a:endParaRPr lang="zh-CN" altLang="en-US" dirty="0"/>
           </a:p>
@@ -9845,7 +12178,7 @@
 </p:sld>
 </file>
 
-<file path=ppt/slides/slide26.xml><?xml version="1.0" encoding="utf-8"?>
+<file path=ppt/slides/slide31.xml><?xml version="1.0" encoding="utf-8"?>
 <p:sld xmlns:a="http://schemas.openxmlformats.org/drawingml/2006/main" xmlns:r="http://schemas.openxmlformats.org/officeDocument/2006/relationships" xmlns:p="http://schemas.openxmlformats.org/presentationml/2006/main">
   <p:cSld>
     <p:spTree>
@@ -9973,7 +12306,7 @@
           <a:p>
             <a:fld id="{8B4C9E33-6753-472F-9C09-83153B974C9D}" type="slidenum">
               <a:rPr lang="zh-CN" altLang="en-US" smtClean="0"/>
-              <a:t>26</a:t>
+              <a:t>31</a:t>
             </a:fld>
             <a:endParaRPr lang="zh-CN" altLang="en-US"/>
           </a:p>
@@ -10083,7 +12416,7 @@
 </p:sld>
 </file>
 
-<file path=ppt/slides/slide27.xml><?xml version="1.0" encoding="utf-8"?>
+<file path=ppt/slides/slide32.xml><?xml version="1.0" encoding="utf-8"?>
 <p:sld xmlns:a="http://schemas.openxmlformats.org/drawingml/2006/main" xmlns:r="http://schemas.openxmlformats.org/officeDocument/2006/relationships" xmlns:p="http://schemas.openxmlformats.org/presentationml/2006/main">
   <p:cSld>
     <p:spTree>
@@ -10232,7 +12565,7 @@
           <a:p>
             <a:fld id="{8B4C9E33-6753-472F-9C09-83153B974C9D}" type="slidenum">
               <a:rPr lang="zh-CN" altLang="en-US" smtClean="0"/>
-              <a:t>27</a:t>
+              <a:t>32</a:t>
             </a:fld>
             <a:endParaRPr lang="zh-CN" altLang="en-US"/>
           </a:p>
@@ -10590,7 +12923,7 @@
 </p:sld>
 </file>
 
-<file path=ppt/slides/slide28.xml><?xml version="1.0" encoding="utf-8"?>
+<file path=ppt/slides/slide33.xml><?xml version="1.0" encoding="utf-8"?>
 <p:sld xmlns:a="http://schemas.openxmlformats.org/drawingml/2006/main" xmlns:r="http://schemas.openxmlformats.org/officeDocument/2006/relationships" xmlns:p="http://schemas.openxmlformats.org/presentationml/2006/main">
   <p:cSld>
     <p:spTree>
@@ -10889,7 +13222,1756 @@
 </p:sld>
 </file>
 
-<file path=ppt/slides/slide3.xml><?xml version="1.0" encoding="utf-8"?>
+<file path=ppt/slides/slide4.xml><?xml version="1.0" encoding="utf-8"?>
+<p:sld xmlns:a="http://schemas.openxmlformats.org/drawingml/2006/main" xmlns:r="http://schemas.openxmlformats.org/officeDocument/2006/relationships" xmlns:p="http://schemas.openxmlformats.org/presentationml/2006/main">
+  <p:cSld>
+    <p:spTree>
+      <p:nvGrpSpPr>
+        <p:cNvPr id="1" name="">
+          <a:extLst>
+            <a:ext uri="{FF2B5EF4-FFF2-40B4-BE49-F238E27FC236}">
+              <a16:creationId xmlns:a16="http://schemas.microsoft.com/office/drawing/2014/main" id="{6BFFEB84-B34B-B512-1E75-634B0D5BD363}"/>
+            </a:ext>
+          </a:extLst>
+        </p:cNvPr>
+        <p:cNvGrpSpPr/>
+        <p:nvPr/>
+      </p:nvGrpSpPr>
+      <p:grpSpPr>
+        <a:xfrm>
+          <a:off x="0" y="0"/>
+          <a:ext cx="0" cy="0"/>
+          <a:chOff x="0" y="0"/>
+          <a:chExt cx="0" cy="0"/>
+        </a:xfrm>
+      </p:grpSpPr>
+      <p:sp>
+        <p:nvSpPr>
+          <p:cNvPr id="2" name="Title 1">
+            <a:extLst>
+              <a:ext uri="{FF2B5EF4-FFF2-40B4-BE49-F238E27FC236}">
+                <a16:creationId xmlns:a16="http://schemas.microsoft.com/office/drawing/2014/main" id="{36C985CE-A175-6D64-5ABA-0472FF2E2524}"/>
+              </a:ext>
+            </a:extLst>
+          </p:cNvPr>
+          <p:cNvSpPr>
+            <a:spLocks noGrp="1"/>
+          </p:cNvSpPr>
+          <p:nvPr>
+            <p:ph type="title"/>
+          </p:nvPr>
+        </p:nvSpPr>
+        <p:spPr/>
+        <p:txBody>
+          <a:bodyPr/>
+          <a:lstStyle/>
+          <a:p>
+            <a:r>
+              <a:rPr lang="en-US" dirty="0">
+                <a:latin typeface="Calibri" panose="020F0502020204030204" pitchFamily="34" charset="0"/>
+                <a:cs typeface="Calibri" panose="020F0502020204030204" pitchFamily="34" charset="0"/>
+              </a:rPr>
+              <a:t>My research (1)</a:t>
+            </a:r>
+          </a:p>
+        </p:txBody>
+      </p:sp>
+      <p:sp>
+        <p:nvSpPr>
+          <p:cNvPr id="3" name="Content Placeholder 2">
+            <a:extLst>
+              <a:ext uri="{FF2B5EF4-FFF2-40B4-BE49-F238E27FC236}">
+                <a16:creationId xmlns:a16="http://schemas.microsoft.com/office/drawing/2014/main" id="{3B3F367F-1E23-C7F2-C664-E45D5537B3AB}"/>
+              </a:ext>
+            </a:extLst>
+          </p:cNvPr>
+          <p:cNvSpPr>
+            <a:spLocks noGrp="1"/>
+          </p:cNvSpPr>
+          <p:nvPr>
+            <p:ph idx="1"/>
+          </p:nvPr>
+        </p:nvSpPr>
+        <p:spPr/>
+        <p:txBody>
+          <a:bodyPr/>
+          <a:lstStyle/>
+          <a:p>
+            <a:r>
+              <a:rPr lang="en-US" b="1" dirty="0">
+                <a:solidFill>
+                  <a:srgbClr val="C00000"/>
+                </a:solidFill>
+              </a:rPr>
+              <a:t>Private</a:t>
+            </a:r>
+            <a:r>
+              <a:rPr lang="en-US" dirty="0">
+                <a:solidFill>
+                  <a:srgbClr val="C00000"/>
+                </a:solidFill>
+              </a:rPr>
+              <a:t> Information Retrieval</a:t>
+            </a:r>
+          </a:p>
+          <a:p>
+            <a:pPr lvl="1"/>
+            <a:r>
+              <a:rPr lang="en-US" dirty="0"/>
+              <a:t>Through careful algorithm designs</a:t>
+            </a:r>
+          </a:p>
+          <a:p>
+            <a:pPr lvl="1"/>
+            <a:r>
+              <a:rPr lang="en-US" i="1" dirty="0"/>
+              <a:t>Preprocessing, Algebraic Encodings, Recursion…</a:t>
+            </a:r>
+          </a:p>
+          <a:p>
+            <a:endParaRPr lang="en-US" dirty="0"/>
+          </a:p>
+        </p:txBody>
+      </p:sp>
+      <p:sp>
+        <p:nvSpPr>
+          <p:cNvPr id="4" name="Slide Number Placeholder 3">
+            <a:extLst>
+              <a:ext uri="{FF2B5EF4-FFF2-40B4-BE49-F238E27FC236}">
+                <a16:creationId xmlns:a16="http://schemas.microsoft.com/office/drawing/2014/main" id="{6DD60096-5216-4FEB-1B58-FF369B6D6736}"/>
+              </a:ext>
+            </a:extLst>
+          </p:cNvPr>
+          <p:cNvSpPr>
+            <a:spLocks noGrp="1"/>
+          </p:cNvSpPr>
+          <p:nvPr>
+            <p:ph type="sldNum" sz="quarter" idx="12"/>
+          </p:nvPr>
+        </p:nvSpPr>
+        <p:spPr/>
+        <p:txBody>
+          <a:bodyPr/>
+          <a:lstStyle/>
+          <a:p>
+            <a:fld id="{8B4C9E33-6753-472F-9C09-83153B974C9D}" type="slidenum">
+              <a:rPr lang="zh-CN" altLang="en-US" smtClean="0"/>
+              <a:t>4</a:t>
+            </a:fld>
+            <a:endParaRPr lang="zh-CN" altLang="en-US"/>
+          </a:p>
+        </p:txBody>
+      </p:sp>
+      <p:pic>
+        <p:nvPicPr>
+          <p:cNvPr id="6" name="Picture 2" descr="Chat bot icon vector. Isolated contour symbol illustration 9971218 Vector  Art at Vecteezy">
+            <a:extLst>
+              <a:ext uri="{FF2B5EF4-FFF2-40B4-BE49-F238E27FC236}">
+                <a16:creationId xmlns:a16="http://schemas.microsoft.com/office/drawing/2014/main" id="{FBADF338-5912-E492-ABA8-2A7E83FFC716}"/>
+              </a:ext>
+            </a:extLst>
+          </p:cNvPr>
+          <p:cNvPicPr>
+            <a:picLocks noChangeAspect="1" noChangeArrowheads="1"/>
+          </p:cNvPicPr>
+          <p:nvPr/>
+        </p:nvPicPr>
+        <p:blipFill>
+          <a:blip r:embed="rId3">
+            <a:extLst>
+              <a:ext uri="{BEBA8EAE-BF5A-486C-A8C5-ECC9F3942E4B}">
+                <a14:imgProps xmlns:a14="http://schemas.microsoft.com/office/drawing/2010/main">
+                  <a14:imgLayer r:embed="rId4">
+                    <a14:imgEffect>
+                      <a14:backgroundRemoval t="10000" b="90000" l="10000" r="90000">
+                        <a14:foregroundMark x1="24796" y1="47857" x2="24796" y2="55204"/>
+                        <a14:foregroundMark x1="26122" y1="62041" x2="26122" y2="62041"/>
+                        <a14:foregroundMark x1="42755" y1="53571" x2="42755" y2="56531"/>
+                        <a14:foregroundMark x1="61939" y1="52143" x2="64082" y2="55000"/>
+                        <a14:foregroundMark x1="44388" y1="67755" x2="50612" y2="67959"/>
+                      </a14:backgroundRemoval>
+                    </a14:imgEffect>
+                  </a14:imgLayer>
+                </a14:imgProps>
+              </a:ext>
+              <a:ext uri="{28A0092B-C50C-407E-A947-70E740481C1C}">
+                <a14:useLocalDpi xmlns:a14="http://schemas.microsoft.com/office/drawing/2010/main" val="0"/>
+              </a:ext>
+            </a:extLst>
+          </a:blip>
+          <a:srcRect/>
+          <a:stretch>
+            <a:fillRect/>
+          </a:stretch>
+        </p:blipFill>
+        <p:spPr bwMode="auto">
+          <a:xfrm>
+            <a:off x="1160051" y="3860507"/>
+            <a:ext cx="1641345" cy="1641345"/>
+          </a:xfrm>
+          <a:prstGeom prst="rect">
+            <a:avLst/>
+          </a:prstGeom>
+          <a:noFill/>
+          <a:extLst>
+            <a:ext uri="{909E8E84-426E-40DD-AFC4-6F175D3DCCD1}">
+              <a14:hiddenFill xmlns:a14="http://schemas.microsoft.com/office/drawing/2010/main">
+                <a:solidFill>
+                  <a:srgbClr val="FFFFFF"/>
+                </a:solidFill>
+              </a14:hiddenFill>
+            </a:ext>
+          </a:extLst>
+        </p:spPr>
+      </p:pic>
+      <p:grpSp>
+        <p:nvGrpSpPr>
+          <p:cNvPr id="9" name="Group 8">
+            <a:extLst>
+              <a:ext uri="{FF2B5EF4-FFF2-40B4-BE49-F238E27FC236}">
+                <a16:creationId xmlns:a16="http://schemas.microsoft.com/office/drawing/2014/main" id="{2DF5DD04-2C67-C7BA-364B-1694B438074D}"/>
+              </a:ext>
+            </a:extLst>
+          </p:cNvPr>
+          <p:cNvGrpSpPr/>
+          <p:nvPr/>
+        </p:nvGrpSpPr>
+        <p:grpSpPr>
+          <a:xfrm>
+            <a:off x="4741551" y="4736223"/>
+            <a:ext cx="1701801" cy="244969"/>
+            <a:chOff x="4114800" y="3429000"/>
+            <a:chExt cx="4253230" cy="186343"/>
+          </a:xfrm>
+        </p:grpSpPr>
+        <p:cxnSp>
+          <p:nvCxnSpPr>
+            <p:cNvPr id="10" name="Straight Arrow Connector 9">
+              <a:extLst>
+                <a:ext uri="{FF2B5EF4-FFF2-40B4-BE49-F238E27FC236}">
+                  <a16:creationId xmlns:a16="http://schemas.microsoft.com/office/drawing/2014/main" id="{A362CE7D-F477-10F6-3725-D1ABA4D346FF}"/>
+                </a:ext>
+              </a:extLst>
+            </p:cNvPr>
+            <p:cNvCxnSpPr/>
+            <p:nvPr/>
+          </p:nvCxnSpPr>
+          <p:spPr>
+            <a:xfrm>
+              <a:off x="4114800" y="3429000"/>
+              <a:ext cx="4253230" cy="0"/>
+            </a:xfrm>
+            <a:prstGeom prst="straightConnector1">
+              <a:avLst/>
+            </a:prstGeom>
+            <a:ln w="76200">
+              <a:solidFill>
+                <a:schemeClr val="tx1"/>
+              </a:solidFill>
+              <a:tailEnd type="triangle"/>
+            </a:ln>
+          </p:spPr>
+          <p:style>
+            <a:lnRef idx="1">
+              <a:schemeClr val="accent1"/>
+            </a:lnRef>
+            <a:fillRef idx="0">
+              <a:schemeClr val="accent1"/>
+            </a:fillRef>
+            <a:effectRef idx="0">
+              <a:schemeClr val="accent1"/>
+            </a:effectRef>
+            <a:fontRef idx="minor">
+              <a:schemeClr val="tx1"/>
+            </a:fontRef>
+          </p:style>
+        </p:cxnSp>
+        <p:cxnSp>
+          <p:nvCxnSpPr>
+            <p:cNvPr id="11" name="Straight Arrow Connector 10">
+              <a:extLst>
+                <a:ext uri="{FF2B5EF4-FFF2-40B4-BE49-F238E27FC236}">
+                  <a16:creationId xmlns:a16="http://schemas.microsoft.com/office/drawing/2014/main" id="{E1BAE9BD-58EB-EAAC-1110-DEDF326095D4}"/>
+                </a:ext>
+              </a:extLst>
+            </p:cNvPr>
+            <p:cNvCxnSpPr/>
+            <p:nvPr/>
+          </p:nvCxnSpPr>
+          <p:spPr>
+            <a:xfrm>
+              <a:off x="4114800" y="3615343"/>
+              <a:ext cx="4253230" cy="0"/>
+            </a:xfrm>
+            <a:prstGeom prst="straightConnector1">
+              <a:avLst/>
+            </a:prstGeom>
+            <a:ln w="76200">
+              <a:solidFill>
+                <a:schemeClr val="tx1"/>
+              </a:solidFill>
+              <a:headEnd type="triangle" w="med" len="med"/>
+              <a:tailEnd type="none" w="med" len="med"/>
+            </a:ln>
+          </p:spPr>
+          <p:style>
+            <a:lnRef idx="1">
+              <a:schemeClr val="accent1"/>
+            </a:lnRef>
+            <a:fillRef idx="0">
+              <a:schemeClr val="accent1"/>
+            </a:fillRef>
+            <a:effectRef idx="0">
+              <a:schemeClr val="accent1"/>
+            </a:effectRef>
+            <a:fontRef idx="minor">
+              <a:schemeClr val="tx1"/>
+            </a:fontRef>
+          </p:style>
+        </p:cxnSp>
+      </p:grpSp>
+      <p:sp>
+        <p:nvSpPr>
+          <p:cNvPr id="12" name="Rounded Rectangle 11">
+            <a:extLst>
+              <a:ext uri="{FF2B5EF4-FFF2-40B4-BE49-F238E27FC236}">
+                <a16:creationId xmlns:a16="http://schemas.microsoft.com/office/drawing/2014/main" id="{F8EBDD91-6200-A9FC-5AD4-50EDB419F948}"/>
+              </a:ext>
+            </a:extLst>
+          </p:cNvPr>
+          <p:cNvSpPr/>
+          <p:nvPr/>
+        </p:nvSpPr>
+        <p:spPr>
+          <a:xfrm>
+            <a:off x="3482478" y="5273748"/>
+            <a:ext cx="4768041" cy="682198"/>
+          </a:xfrm>
+          <a:prstGeom prst="roundRect">
+            <a:avLst/>
+          </a:prstGeom>
+          <a:pattFill prst="wdUpDiag">
+            <a:fgClr>
+              <a:schemeClr val="bg2">
+                <a:lumMod val="90000"/>
+              </a:schemeClr>
+            </a:fgClr>
+            <a:bgClr>
+              <a:schemeClr val="bg1"/>
+            </a:bgClr>
+          </a:pattFill>
+        </p:spPr>
+        <p:style>
+          <a:lnRef idx="2">
+            <a:schemeClr val="dk1"/>
+          </a:lnRef>
+          <a:fillRef idx="1">
+            <a:schemeClr val="lt1"/>
+          </a:fillRef>
+          <a:effectRef idx="0">
+            <a:schemeClr val="dk1"/>
+          </a:effectRef>
+          <a:fontRef idx="minor">
+            <a:schemeClr val="dk1"/>
+          </a:fontRef>
+        </p:style>
+        <p:txBody>
+          <a:bodyPr rtlCol="0" anchor="ctr"/>
+          <a:lstStyle/>
+          <a:p>
+            <a:pPr algn="ctr"/>
+            <a:r>
+              <a:rPr lang="en-US" i="1" dirty="0"/>
+              <a:t>Mingxun</a:t>
+            </a:r>
+          </a:p>
+        </p:txBody>
+      </p:sp>
+      <p:sp>
+        <p:nvSpPr>
+          <p:cNvPr id="13" name="Rounded Rectangle 12">
+            <a:extLst>
+              <a:ext uri="{FF2B5EF4-FFF2-40B4-BE49-F238E27FC236}">
+                <a16:creationId xmlns:a16="http://schemas.microsoft.com/office/drawing/2014/main" id="{C62B3395-19CA-8ABB-C960-28F48714026E}"/>
+              </a:ext>
+            </a:extLst>
+          </p:cNvPr>
+          <p:cNvSpPr/>
+          <p:nvPr/>
+        </p:nvSpPr>
+        <p:spPr>
+          <a:xfrm>
+            <a:off x="3482478" y="3919088"/>
+            <a:ext cx="4950887" cy="682198"/>
+          </a:xfrm>
+          <a:prstGeom prst="roundRect">
+            <a:avLst/>
+          </a:prstGeom>
+          <a:pattFill prst="wdUpDiag">
+            <a:fgClr>
+              <a:schemeClr val="bg2">
+                <a:lumMod val="90000"/>
+              </a:schemeClr>
+            </a:fgClr>
+            <a:bgClr>
+              <a:schemeClr val="bg1"/>
+            </a:bgClr>
+          </a:pattFill>
+        </p:spPr>
+        <p:style>
+          <a:lnRef idx="2">
+            <a:schemeClr val="dk1"/>
+          </a:lnRef>
+          <a:fillRef idx="1">
+            <a:schemeClr val="lt1"/>
+          </a:fillRef>
+          <a:effectRef idx="0">
+            <a:schemeClr val="dk1"/>
+          </a:effectRef>
+          <a:fontRef idx="minor">
+            <a:schemeClr val="dk1"/>
+          </a:fontRef>
+        </p:style>
+        <p:txBody>
+          <a:bodyPr rtlCol="0" anchor="ctr"/>
+          <a:lstStyle/>
+          <a:p>
+            <a:pPr algn="ctr"/>
+            <a:r>
+              <a:rPr lang="en-US" i="1" dirty="0"/>
+              <a:t>Annoying Professor in HKUST</a:t>
+            </a:r>
+          </a:p>
+        </p:txBody>
+      </p:sp>
+      <p:sp>
+        <p:nvSpPr>
+          <p:cNvPr id="5" name="Cloud Callout 4">
+            <a:extLst>
+              <a:ext uri="{FF2B5EF4-FFF2-40B4-BE49-F238E27FC236}">
+                <a16:creationId xmlns:a16="http://schemas.microsoft.com/office/drawing/2014/main" id="{03BAA8D0-710C-E384-B9E5-1B1020397A69}"/>
+              </a:ext>
+            </a:extLst>
+          </p:cNvPr>
+          <p:cNvSpPr/>
+          <p:nvPr/>
+        </p:nvSpPr>
+        <p:spPr>
+          <a:xfrm>
+            <a:off x="8867554" y="2369248"/>
+            <a:ext cx="3040911" cy="1222633"/>
+          </a:xfrm>
+          <a:prstGeom prst="cloudCallout">
+            <a:avLst>
+              <a:gd name="adj1" fmla="val -24329"/>
+              <a:gd name="adj2" fmla="val 76414"/>
+            </a:avLst>
+          </a:prstGeom>
+          <a:solidFill>
+            <a:schemeClr val="accent4">
+              <a:lumMod val="20000"/>
+              <a:lumOff val="80000"/>
+            </a:schemeClr>
+          </a:solidFill>
+        </p:spPr>
+        <p:style>
+          <a:lnRef idx="2">
+            <a:schemeClr val="accent1">
+              <a:shade val="15000"/>
+            </a:schemeClr>
+          </a:lnRef>
+          <a:fillRef idx="1">
+            <a:schemeClr val="accent1"/>
+          </a:fillRef>
+          <a:effectRef idx="0">
+            <a:schemeClr val="accent1"/>
+          </a:effectRef>
+          <a:fontRef idx="minor">
+            <a:schemeClr val="lt1"/>
+          </a:fontRef>
+        </p:style>
+        <p:txBody>
+          <a:bodyPr rtlCol="0" anchor="ctr"/>
+          <a:lstStyle/>
+          <a:p>
+            <a:pPr algn="ctr"/>
+            <a:r>
+              <a:rPr lang="en-US" sz="4000" dirty="0">
+                <a:solidFill>
+                  <a:schemeClr val="tx1"/>
+                </a:solidFill>
+              </a:rPr>
+              <a:t>???</a:t>
+            </a:r>
+          </a:p>
+        </p:txBody>
+      </p:sp>
+      <p:pic>
+        <p:nvPicPr>
+          <p:cNvPr id="7" name="Picture 4" descr="Internet - Free signs icons">
+            <a:extLst>
+              <a:ext uri="{FF2B5EF4-FFF2-40B4-BE49-F238E27FC236}">
+                <a16:creationId xmlns:a16="http://schemas.microsoft.com/office/drawing/2014/main" id="{10E9AA8B-9527-E80A-CEE9-CA6ED6F16E4A}"/>
+              </a:ext>
+            </a:extLst>
+          </p:cNvPr>
+          <p:cNvPicPr>
+            <a:picLocks noChangeAspect="1" noChangeArrowheads="1"/>
+          </p:cNvPicPr>
+          <p:nvPr/>
+        </p:nvPicPr>
+        <p:blipFill>
+          <a:blip r:embed="rId5">
+            <a:extLst>
+              <a:ext uri="{28A0092B-C50C-407E-A947-70E740481C1C}">
+                <a14:useLocalDpi xmlns:a14="http://schemas.microsoft.com/office/drawing/2010/main" val="0"/>
+              </a:ext>
+            </a:extLst>
+          </a:blip>
+          <a:srcRect/>
+          <a:stretch>
+            <a:fillRect/>
+          </a:stretch>
+        </p:blipFill>
+        <p:spPr bwMode="auto">
+          <a:xfrm>
+            <a:off x="9092713" y="4178591"/>
+            <a:ext cx="1236047" cy="1236047"/>
+          </a:xfrm>
+          <a:prstGeom prst="rect">
+            <a:avLst/>
+          </a:prstGeom>
+          <a:noFill/>
+          <a:extLst>
+            <a:ext uri="{909E8E84-426E-40DD-AFC4-6F175D3DCCD1}">
+              <a14:hiddenFill xmlns:a14="http://schemas.microsoft.com/office/drawing/2010/main">
+                <a:solidFill>
+                  <a:srgbClr val="FFFFFF"/>
+                </a:solidFill>
+              </a14:hiddenFill>
+            </a:ext>
+          </a:extLst>
+        </p:spPr>
+      </p:pic>
+    </p:spTree>
+    <p:extLst>
+      <p:ext uri="{BB962C8B-B14F-4D97-AF65-F5344CB8AC3E}">
+        <p14:creationId xmlns:p14="http://schemas.microsoft.com/office/powerpoint/2010/main" val="163850458"/>
+      </p:ext>
+    </p:extLst>
+  </p:cSld>
+  <p:clrMapOvr>
+    <a:masterClrMapping/>
+  </p:clrMapOvr>
+  <mc:AlternateContent xmlns:mc="http://schemas.openxmlformats.org/markup-compatibility/2006">
+    <mc:Choice xmlns:p159="http://schemas.microsoft.com/office/powerpoint/2015/09/main" Requires="p159">
+      <p:transition xmlns:p14="http://schemas.microsoft.com/office/powerpoint/2010/main" spd="slow" p14:dur="2000">
+        <p159:morph option="byObject"/>
+      </p:transition>
+    </mc:Choice>
+    <mc:Fallback>
+      <p:transition spd="slow">
+        <p:fade/>
+      </p:transition>
+    </mc:Fallback>
+  </mc:AlternateContent>
+  <p:timing>
+    <p:tnLst>
+      <p:par>
+        <p:cTn id="1" dur="indefinite" restart="never" nodeType="tmRoot">
+          <p:childTnLst>
+            <p:seq concurrent="1" nextAc="seek">
+              <p:cTn id="2" dur="indefinite" nodeType="mainSeq">
+                <p:childTnLst>
+                  <p:par>
+                    <p:cTn id="3" fill="hold">
+                      <p:stCondLst>
+                        <p:cond delay="indefinite"/>
+                      </p:stCondLst>
+                      <p:childTnLst>
+                        <p:par>
+                          <p:cTn id="4" fill="hold">
+                            <p:stCondLst>
+                              <p:cond delay="0"/>
+                            </p:stCondLst>
+                            <p:childTnLst>
+                              <p:par>
+                                <p:cTn id="5" presetID="9" presetClass="entr" presetSubtype="0" fill="hold" nodeType="clickEffect">
+                                  <p:stCondLst>
+                                    <p:cond delay="0"/>
+                                  </p:stCondLst>
+                                  <p:childTnLst>
+                                    <p:set>
+                                      <p:cBhvr>
+                                        <p:cTn id="6" dur="1" fill="hold">
+                                          <p:stCondLst>
+                                            <p:cond delay="0"/>
+                                          </p:stCondLst>
+                                        </p:cTn>
+                                        <p:tgtEl>
+                                          <p:spTgt spid="3">
+                                            <p:txEl>
+                                              <p:pRg st="1" end="1"/>
+                                            </p:txEl>
+                                          </p:spTgt>
+                                        </p:tgtEl>
+                                        <p:attrNameLst>
+                                          <p:attrName>style.visibility</p:attrName>
+                                        </p:attrNameLst>
+                                      </p:cBhvr>
+                                      <p:to>
+                                        <p:strVal val="visible"/>
+                                      </p:to>
+                                    </p:set>
+                                    <p:animEffect transition="in" filter="dissolve">
+                                      <p:cBhvr>
+                                        <p:cTn id="7" dur="500"/>
+                                        <p:tgtEl>
+                                          <p:spTgt spid="3">
+                                            <p:txEl>
+                                              <p:pRg st="1" end="1"/>
+                                            </p:txEl>
+                                          </p:spTgt>
+                                        </p:tgtEl>
+                                      </p:cBhvr>
+                                    </p:animEffect>
+                                  </p:childTnLst>
+                                </p:cTn>
+                              </p:par>
+                              <p:par>
+                                <p:cTn id="8" presetID="9" presetClass="entr" presetSubtype="0" fill="hold" nodeType="withEffect">
+                                  <p:stCondLst>
+                                    <p:cond delay="0"/>
+                                  </p:stCondLst>
+                                  <p:childTnLst>
+                                    <p:set>
+                                      <p:cBhvr>
+                                        <p:cTn id="9" dur="1" fill="hold">
+                                          <p:stCondLst>
+                                            <p:cond delay="0"/>
+                                          </p:stCondLst>
+                                        </p:cTn>
+                                        <p:tgtEl>
+                                          <p:spTgt spid="3">
+                                            <p:txEl>
+                                              <p:pRg st="2" end="2"/>
+                                            </p:txEl>
+                                          </p:spTgt>
+                                        </p:tgtEl>
+                                        <p:attrNameLst>
+                                          <p:attrName>style.visibility</p:attrName>
+                                        </p:attrNameLst>
+                                      </p:cBhvr>
+                                      <p:to>
+                                        <p:strVal val="visible"/>
+                                      </p:to>
+                                    </p:set>
+                                    <p:animEffect transition="in" filter="dissolve">
+                                      <p:cBhvr>
+                                        <p:cTn id="10" dur="500"/>
+                                        <p:tgtEl>
+                                          <p:spTgt spid="3">
+                                            <p:txEl>
+                                              <p:pRg st="2" end="2"/>
+                                            </p:txEl>
+                                          </p:spTgt>
+                                        </p:tgtEl>
+                                      </p:cBhvr>
+                                    </p:animEffect>
+                                  </p:childTnLst>
+                                </p:cTn>
+                              </p:par>
+                            </p:childTnLst>
+                          </p:cTn>
+                        </p:par>
+                      </p:childTnLst>
+                    </p:cTn>
+                  </p:par>
+                </p:childTnLst>
+              </p:cTn>
+              <p:prevCondLst>
+                <p:cond evt="onPrev" delay="0">
+                  <p:tgtEl>
+                    <p:sldTgt/>
+                  </p:tgtEl>
+                </p:cond>
+              </p:prevCondLst>
+              <p:nextCondLst>
+                <p:cond evt="onNext" delay="0">
+                  <p:tgtEl>
+                    <p:sldTgt/>
+                  </p:tgtEl>
+                </p:cond>
+              </p:nextCondLst>
+            </p:seq>
+          </p:childTnLst>
+        </p:cTn>
+      </p:par>
+    </p:tnLst>
+  </p:timing>
+</p:sld>
+</file>
+
+<file path=ppt/slides/slide5.xml><?xml version="1.0" encoding="utf-8"?>
+<p:sld xmlns:a="http://schemas.openxmlformats.org/drawingml/2006/main" xmlns:r="http://schemas.openxmlformats.org/officeDocument/2006/relationships" xmlns:p="http://schemas.openxmlformats.org/presentationml/2006/main">
+  <p:cSld>
+    <p:spTree>
+      <p:nvGrpSpPr>
+        <p:cNvPr id="1" name="">
+          <a:extLst>
+            <a:ext uri="{FF2B5EF4-FFF2-40B4-BE49-F238E27FC236}">
+              <a16:creationId xmlns:a16="http://schemas.microsoft.com/office/drawing/2014/main" id="{881AAF5F-BD74-AF69-BEFC-2CE605ACFA6E}"/>
+            </a:ext>
+          </a:extLst>
+        </p:cNvPr>
+        <p:cNvGrpSpPr/>
+        <p:nvPr/>
+      </p:nvGrpSpPr>
+      <p:grpSpPr>
+        <a:xfrm>
+          <a:off x="0" y="0"/>
+          <a:ext cx="0" cy="0"/>
+          <a:chOff x="0" y="0"/>
+          <a:chExt cx="0" cy="0"/>
+        </a:xfrm>
+      </p:grpSpPr>
+      <p:sp>
+        <p:nvSpPr>
+          <p:cNvPr id="2" name="Title 1">
+            <a:extLst>
+              <a:ext uri="{FF2B5EF4-FFF2-40B4-BE49-F238E27FC236}">
+                <a16:creationId xmlns:a16="http://schemas.microsoft.com/office/drawing/2014/main" id="{4019D7FF-FABC-7625-3F18-724E04EA8AA0}"/>
+              </a:ext>
+            </a:extLst>
+          </p:cNvPr>
+          <p:cNvSpPr>
+            <a:spLocks noGrp="1"/>
+          </p:cNvSpPr>
+          <p:nvPr>
+            <p:ph type="title"/>
+          </p:nvPr>
+        </p:nvSpPr>
+        <p:spPr/>
+        <p:txBody>
+          <a:bodyPr/>
+          <a:lstStyle/>
+          <a:p>
+            <a:r>
+              <a:rPr lang="en-US" dirty="0">
+                <a:latin typeface="Calibri" panose="020F0502020204030204" pitchFamily="34" charset="0"/>
+                <a:cs typeface="Calibri" panose="020F0502020204030204" pitchFamily="34" charset="0"/>
+              </a:rPr>
+              <a:t>My research (2)</a:t>
+            </a:r>
+          </a:p>
+        </p:txBody>
+      </p:sp>
+      <p:sp>
+        <p:nvSpPr>
+          <p:cNvPr id="3" name="Content Placeholder 2">
+            <a:extLst>
+              <a:ext uri="{FF2B5EF4-FFF2-40B4-BE49-F238E27FC236}">
+                <a16:creationId xmlns:a16="http://schemas.microsoft.com/office/drawing/2014/main" id="{E4DB8794-17C5-164B-6249-0EF6C1ED9BED}"/>
+              </a:ext>
+            </a:extLst>
+          </p:cNvPr>
+          <p:cNvSpPr>
+            <a:spLocks noGrp="1"/>
+          </p:cNvSpPr>
+          <p:nvPr>
+            <p:ph idx="1"/>
+          </p:nvPr>
+        </p:nvSpPr>
+        <p:spPr>
+          <a:xfrm>
+            <a:off x="838200" y="1825625"/>
+            <a:ext cx="5101857" cy="4351338"/>
+          </a:xfrm>
+        </p:spPr>
+        <p:txBody>
+          <a:bodyPr/>
+          <a:lstStyle/>
+          <a:p>
+            <a:r>
+              <a:rPr lang="en-US" b="1" dirty="0">
+                <a:solidFill>
+                  <a:srgbClr val="C00000"/>
+                </a:solidFill>
+              </a:rPr>
+              <a:t>AI Model Watermarking</a:t>
+            </a:r>
+          </a:p>
+          <a:p>
+            <a:pPr lvl="1"/>
+            <a:r>
+              <a:rPr lang="en-US" b="1" dirty="0">
+                <a:solidFill>
+                  <a:srgbClr val="C00000"/>
+                </a:solidFill>
+              </a:rPr>
+              <a:t>Add “invisible signal” in AI output</a:t>
+            </a:r>
+          </a:p>
+          <a:p>
+            <a:pPr lvl="1"/>
+            <a:r>
+              <a:rPr lang="en-US" b="1" dirty="0">
+                <a:solidFill>
+                  <a:srgbClr val="C00000"/>
+                </a:solidFill>
+              </a:rPr>
+              <a:t>Usage: detect AI-gen content</a:t>
+            </a:r>
+          </a:p>
+          <a:p>
+            <a:endParaRPr lang="en-US" b="1" i="1" dirty="0">
+              <a:solidFill>
+                <a:srgbClr val="C00000"/>
+              </a:solidFill>
+            </a:endParaRPr>
+          </a:p>
+          <a:p>
+            <a:r>
+              <a:rPr lang="en-US" i="1" dirty="0">
+                <a:latin typeface="Calibri" panose="020F0502020204030204" pitchFamily="34" charset="0"/>
+                <a:cs typeface="Calibri" panose="020F0502020204030204" pitchFamily="34" charset="0"/>
+              </a:rPr>
+              <a:t>In fact: GPT, Gemini and Claude all have this </a:t>
+            </a:r>
+            <a:r>
+              <a:rPr lang="en-US" i="1" dirty="0">
+                <a:latin typeface="Calibri" panose="020F0502020204030204" pitchFamily="34" charset="0"/>
+                <a:cs typeface="Calibri" panose="020F0502020204030204" pitchFamily="34" charset="0"/>
+                <a:sym typeface="Wingdings" pitchFamily="2" charset="2"/>
+              </a:rPr>
+              <a:t> </a:t>
+            </a:r>
+            <a:endParaRPr lang="en-US" i="1" dirty="0">
+              <a:latin typeface="Calibri" panose="020F0502020204030204" pitchFamily="34" charset="0"/>
+              <a:cs typeface="Calibri" panose="020F0502020204030204" pitchFamily="34" charset="0"/>
+            </a:endParaRPr>
+          </a:p>
+          <a:p>
+            <a:endParaRPr lang="en-US" dirty="0"/>
+          </a:p>
+        </p:txBody>
+      </p:sp>
+      <p:pic>
+        <p:nvPicPr>
+          <p:cNvPr id="5" name="Picture 4">
+            <a:extLst>
+              <a:ext uri="{FF2B5EF4-FFF2-40B4-BE49-F238E27FC236}">
+                <a16:creationId xmlns:a16="http://schemas.microsoft.com/office/drawing/2014/main" id="{F70CF472-C98D-933C-E172-3BAFBB6F849A}"/>
+              </a:ext>
+            </a:extLst>
+          </p:cNvPr>
+          <p:cNvPicPr>
+            <a:picLocks noChangeAspect="1"/>
+          </p:cNvPicPr>
+          <p:nvPr/>
+        </p:nvPicPr>
+        <p:blipFill>
+          <a:blip r:embed="rId3">
+            <a:extLst>
+              <a:ext uri="{28A0092B-C50C-407E-A947-70E740481C1C}">
+                <a14:useLocalDpi xmlns:a14="http://schemas.microsoft.com/office/drawing/2010/main" val="0"/>
+              </a:ext>
+            </a:extLst>
+          </a:blip>
+          <a:stretch>
+            <a:fillRect/>
+          </a:stretch>
+        </p:blipFill>
+        <p:spPr>
+          <a:xfrm>
+            <a:off x="6251944" y="2680460"/>
+            <a:ext cx="4568898" cy="3269835"/>
+          </a:xfrm>
+          <a:prstGeom prst="rect">
+            <a:avLst/>
+          </a:prstGeom>
+          <a:solidFill>
+            <a:srgbClr val="FFFFFF">
+              <a:shade val="85000"/>
+            </a:srgbClr>
+          </a:solidFill>
+          <a:ln w="88900" cap="sq">
+            <a:solidFill>
+              <a:srgbClr val="FFFFFF"/>
+            </a:solidFill>
+            <a:miter lim="800000"/>
+          </a:ln>
+          <a:effectLst>
+            <a:outerShdw blurRad="55000" dist="18000" dir="5400000" algn="tl" rotWithShape="0">
+              <a:srgbClr val="000000">
+                <a:alpha val="40000"/>
+              </a:srgbClr>
+            </a:outerShdw>
+          </a:effectLst>
+          <a:scene3d>
+            <a:camera prst="orthographicFront"/>
+            <a:lightRig rig="twoPt" dir="t">
+              <a:rot lat="0" lon="0" rev="7200000"/>
+            </a:lightRig>
+          </a:scene3d>
+          <a:sp3d>
+            <a:bevelT w="25400" h="19050"/>
+            <a:contourClr>
+              <a:srgbClr val="FFFFFF"/>
+            </a:contourClr>
+          </a:sp3d>
+        </p:spPr>
+      </p:pic>
+    </p:spTree>
+    <p:extLst>
+      <p:ext uri="{BB962C8B-B14F-4D97-AF65-F5344CB8AC3E}">
+        <p14:creationId xmlns:p14="http://schemas.microsoft.com/office/powerpoint/2010/main" val="2530152135"/>
+      </p:ext>
+    </p:extLst>
+  </p:cSld>
+  <p:clrMapOvr>
+    <a:masterClrMapping/>
+  </p:clrMapOvr>
+  <mc:AlternateContent xmlns:mc="http://schemas.openxmlformats.org/markup-compatibility/2006">
+    <mc:Choice xmlns:p159="http://schemas.microsoft.com/office/powerpoint/2015/09/main" Requires="p159">
+      <p:transition xmlns:p14="http://schemas.microsoft.com/office/powerpoint/2010/main" spd="slow" p14:dur="2000">
+        <p159:morph option="byObject"/>
+      </p:transition>
+    </mc:Choice>
+    <mc:Fallback>
+      <p:transition spd="slow">
+        <p:fade/>
+      </p:transition>
+    </mc:Fallback>
+  </mc:AlternateContent>
+  <p:timing>
+    <p:tnLst>
+      <p:par>
+        <p:cTn id="1" dur="indefinite" restart="never" nodeType="tmRoot">
+          <p:childTnLst>
+            <p:seq concurrent="1" nextAc="seek">
+              <p:cTn id="2" dur="indefinite" nodeType="mainSeq">
+                <p:childTnLst>
+                  <p:par>
+                    <p:cTn id="3" fill="hold">
+                      <p:stCondLst>
+                        <p:cond delay="indefinite"/>
+                        <p:cond evt="onBegin" delay="0">
+                          <p:tn val="2"/>
+                        </p:cond>
+                      </p:stCondLst>
+                      <p:childTnLst>
+                        <p:par>
+                          <p:cTn id="4" fill="hold">
+                            <p:stCondLst>
+                              <p:cond delay="0"/>
+                            </p:stCondLst>
+                            <p:childTnLst>
+                              <p:par>
+                                <p:cTn id="5" presetID="9" presetClass="entr" presetSubtype="0" fill="hold" nodeType="withEffect">
+                                  <p:stCondLst>
+                                    <p:cond delay="0"/>
+                                  </p:stCondLst>
+                                  <p:childTnLst>
+                                    <p:set>
+                                      <p:cBhvr>
+                                        <p:cTn id="6" dur="1" fill="hold">
+                                          <p:stCondLst>
+                                            <p:cond delay="0"/>
+                                          </p:stCondLst>
+                                        </p:cTn>
+                                        <p:tgtEl>
+                                          <p:spTgt spid="3">
+                                            <p:txEl>
+                                              <p:pRg st="0" end="0"/>
+                                            </p:txEl>
+                                          </p:spTgt>
+                                        </p:tgtEl>
+                                        <p:attrNameLst>
+                                          <p:attrName>style.visibility</p:attrName>
+                                        </p:attrNameLst>
+                                      </p:cBhvr>
+                                      <p:to>
+                                        <p:strVal val="visible"/>
+                                      </p:to>
+                                    </p:set>
+                                    <p:animEffect transition="in" filter="dissolve">
+                                      <p:cBhvr>
+                                        <p:cTn id="7" dur="500"/>
+                                        <p:tgtEl>
+                                          <p:spTgt spid="3">
+                                            <p:txEl>
+                                              <p:pRg st="0" end="0"/>
+                                            </p:txEl>
+                                          </p:spTgt>
+                                        </p:tgtEl>
+                                      </p:cBhvr>
+                                    </p:animEffect>
+                                  </p:childTnLst>
+                                </p:cTn>
+                              </p:par>
+                              <p:par>
+                                <p:cTn id="8" presetID="9" presetClass="entr" presetSubtype="0" fill="hold" nodeType="withEffect">
+                                  <p:stCondLst>
+                                    <p:cond delay="0"/>
+                                  </p:stCondLst>
+                                  <p:childTnLst>
+                                    <p:set>
+                                      <p:cBhvr>
+                                        <p:cTn id="9" dur="1" fill="hold">
+                                          <p:stCondLst>
+                                            <p:cond delay="0"/>
+                                          </p:stCondLst>
+                                        </p:cTn>
+                                        <p:tgtEl>
+                                          <p:spTgt spid="3">
+                                            <p:txEl>
+                                              <p:pRg st="1" end="1"/>
+                                            </p:txEl>
+                                          </p:spTgt>
+                                        </p:tgtEl>
+                                        <p:attrNameLst>
+                                          <p:attrName>style.visibility</p:attrName>
+                                        </p:attrNameLst>
+                                      </p:cBhvr>
+                                      <p:to>
+                                        <p:strVal val="visible"/>
+                                      </p:to>
+                                    </p:set>
+                                    <p:animEffect transition="in" filter="dissolve">
+                                      <p:cBhvr>
+                                        <p:cTn id="10" dur="500"/>
+                                        <p:tgtEl>
+                                          <p:spTgt spid="3">
+                                            <p:txEl>
+                                              <p:pRg st="1" end="1"/>
+                                            </p:txEl>
+                                          </p:spTgt>
+                                        </p:tgtEl>
+                                      </p:cBhvr>
+                                    </p:animEffect>
+                                  </p:childTnLst>
+                                </p:cTn>
+                              </p:par>
+                              <p:par>
+                                <p:cTn id="11" presetID="9" presetClass="entr" presetSubtype="0" fill="hold" nodeType="withEffect">
+                                  <p:stCondLst>
+                                    <p:cond delay="0"/>
+                                  </p:stCondLst>
+                                  <p:childTnLst>
+                                    <p:set>
+                                      <p:cBhvr>
+                                        <p:cTn id="12" dur="1" fill="hold">
+                                          <p:stCondLst>
+                                            <p:cond delay="0"/>
+                                          </p:stCondLst>
+                                        </p:cTn>
+                                        <p:tgtEl>
+                                          <p:spTgt spid="3">
+                                            <p:txEl>
+                                              <p:pRg st="2" end="2"/>
+                                            </p:txEl>
+                                          </p:spTgt>
+                                        </p:tgtEl>
+                                        <p:attrNameLst>
+                                          <p:attrName>style.visibility</p:attrName>
+                                        </p:attrNameLst>
+                                      </p:cBhvr>
+                                      <p:to>
+                                        <p:strVal val="visible"/>
+                                      </p:to>
+                                    </p:set>
+                                    <p:animEffect transition="in" filter="dissolve">
+                                      <p:cBhvr>
+                                        <p:cTn id="13" dur="500"/>
+                                        <p:tgtEl>
+                                          <p:spTgt spid="3">
+                                            <p:txEl>
+                                              <p:pRg st="2" end="2"/>
+                                            </p:txEl>
+                                          </p:spTgt>
+                                        </p:tgtEl>
+                                      </p:cBhvr>
+                                    </p:animEffect>
+                                  </p:childTnLst>
+                                </p:cTn>
+                              </p:par>
+                              <p:par>
+                                <p:cTn id="14" presetID="9" presetClass="entr" presetSubtype="0" fill="hold" nodeType="withEffect">
+                                  <p:stCondLst>
+                                    <p:cond delay="0"/>
+                                  </p:stCondLst>
+                                  <p:childTnLst>
+                                    <p:set>
+                                      <p:cBhvr>
+                                        <p:cTn id="15" dur="1" fill="hold">
+                                          <p:stCondLst>
+                                            <p:cond delay="0"/>
+                                          </p:stCondLst>
+                                        </p:cTn>
+                                        <p:tgtEl>
+                                          <p:spTgt spid="3">
+                                            <p:txEl>
+                                              <p:pRg st="4" end="4"/>
+                                            </p:txEl>
+                                          </p:spTgt>
+                                        </p:tgtEl>
+                                        <p:attrNameLst>
+                                          <p:attrName>style.visibility</p:attrName>
+                                        </p:attrNameLst>
+                                      </p:cBhvr>
+                                      <p:to>
+                                        <p:strVal val="visible"/>
+                                      </p:to>
+                                    </p:set>
+                                    <p:animEffect transition="in" filter="dissolve">
+                                      <p:cBhvr>
+                                        <p:cTn id="16" dur="500"/>
+                                        <p:tgtEl>
+                                          <p:spTgt spid="3">
+                                            <p:txEl>
+                                              <p:pRg st="4" end="4"/>
+                                            </p:txEl>
+                                          </p:spTgt>
+                                        </p:tgtEl>
+                                      </p:cBhvr>
+                                    </p:animEffect>
+                                  </p:childTnLst>
+                                </p:cTn>
+                              </p:par>
+                            </p:childTnLst>
+                          </p:cTn>
+                        </p:par>
+                      </p:childTnLst>
+                    </p:cTn>
+                  </p:par>
+                </p:childTnLst>
+              </p:cTn>
+              <p:prevCondLst>
+                <p:cond evt="onPrev" delay="0">
+                  <p:tgtEl>
+                    <p:sldTgt/>
+                  </p:tgtEl>
+                </p:cond>
+              </p:prevCondLst>
+              <p:nextCondLst>
+                <p:cond evt="onNext" delay="0">
+                  <p:tgtEl>
+                    <p:sldTgt/>
+                  </p:tgtEl>
+                </p:cond>
+              </p:nextCondLst>
+            </p:seq>
+          </p:childTnLst>
+        </p:cTn>
+      </p:par>
+    </p:tnLst>
+  </p:timing>
+</p:sld>
+</file>
+
+<file path=ppt/slides/slide6.xml><?xml version="1.0" encoding="utf-8"?>
+<p:sld xmlns:a="http://schemas.openxmlformats.org/drawingml/2006/main" xmlns:r="http://schemas.openxmlformats.org/officeDocument/2006/relationships" xmlns:p="http://schemas.openxmlformats.org/presentationml/2006/main">
+  <p:cSld>
+    <p:spTree>
+      <p:nvGrpSpPr>
+        <p:cNvPr id="1" name="">
+          <a:extLst>
+            <a:ext uri="{FF2B5EF4-FFF2-40B4-BE49-F238E27FC236}">
+              <a16:creationId xmlns:a16="http://schemas.microsoft.com/office/drawing/2014/main" id="{685473E5-0CA7-0EC6-419C-56ABD3AFFA9A}"/>
+            </a:ext>
+          </a:extLst>
+        </p:cNvPr>
+        <p:cNvGrpSpPr/>
+        <p:nvPr/>
+      </p:nvGrpSpPr>
+      <p:grpSpPr>
+        <a:xfrm>
+          <a:off x="0" y="0"/>
+          <a:ext cx="0" cy="0"/>
+          <a:chOff x="0" y="0"/>
+          <a:chExt cx="0" cy="0"/>
+        </a:xfrm>
+      </p:grpSpPr>
+      <p:sp>
+        <p:nvSpPr>
+          <p:cNvPr id="2" name="Title 1">
+            <a:extLst>
+              <a:ext uri="{FF2B5EF4-FFF2-40B4-BE49-F238E27FC236}">
+                <a16:creationId xmlns:a16="http://schemas.microsoft.com/office/drawing/2014/main" id="{830D6D1E-A224-5DBC-9562-181B2884792E}"/>
+              </a:ext>
+            </a:extLst>
+          </p:cNvPr>
+          <p:cNvSpPr>
+            <a:spLocks noGrp="1"/>
+          </p:cNvSpPr>
+          <p:nvPr>
+            <p:ph type="title"/>
+          </p:nvPr>
+        </p:nvSpPr>
+        <p:spPr/>
+        <p:txBody>
+          <a:bodyPr/>
+          <a:lstStyle/>
+          <a:p>
+            <a:r>
+              <a:rPr lang="en-US" dirty="0">
+                <a:latin typeface="Calibri" panose="020F0502020204030204" pitchFamily="34" charset="0"/>
+                <a:cs typeface="Calibri" panose="020F0502020204030204" pitchFamily="34" charset="0"/>
+              </a:rPr>
+              <a:t>My research (2)</a:t>
+            </a:r>
+          </a:p>
+        </p:txBody>
+      </p:sp>
+      <p:sp>
+        <p:nvSpPr>
+          <p:cNvPr id="3" name="Content Placeholder 2">
+            <a:extLst>
+              <a:ext uri="{FF2B5EF4-FFF2-40B4-BE49-F238E27FC236}">
+                <a16:creationId xmlns:a16="http://schemas.microsoft.com/office/drawing/2014/main" id="{A8FA5ABD-FF25-001B-A1A5-2988789DBCDC}"/>
+              </a:ext>
+            </a:extLst>
+          </p:cNvPr>
+          <p:cNvSpPr>
+            <a:spLocks noGrp="1"/>
+          </p:cNvSpPr>
+          <p:nvPr>
+            <p:ph idx="1"/>
+          </p:nvPr>
+        </p:nvSpPr>
+        <p:spPr/>
+        <p:txBody>
+          <a:bodyPr/>
+          <a:lstStyle/>
+          <a:p>
+            <a:r>
+              <a:rPr lang="en-US" b="1" dirty="0">
+                <a:solidFill>
+                  <a:srgbClr val="C00000"/>
+                </a:solidFill>
+              </a:rPr>
+              <a:t>AI Model Watermarking</a:t>
+            </a:r>
+          </a:p>
+          <a:p>
+            <a:pPr lvl="1"/>
+            <a:r>
+              <a:rPr lang="en-US" b="1" dirty="0">
+                <a:solidFill>
+                  <a:srgbClr val="C00000"/>
+                </a:solidFill>
+              </a:rPr>
+              <a:t>“invisible signal”? </a:t>
+            </a:r>
+            <a:endParaRPr lang="en-US" i="1" dirty="0">
+              <a:latin typeface="Calibri" panose="020F0502020204030204" pitchFamily="34" charset="0"/>
+              <a:cs typeface="Calibri" panose="020F0502020204030204" pitchFamily="34" charset="0"/>
+            </a:endParaRPr>
+          </a:p>
+          <a:p>
+            <a:r>
+              <a:rPr lang="en-US" i="1" dirty="0">
+                <a:latin typeface="Calibri" panose="020F0502020204030204" pitchFamily="34" charset="0"/>
+                <a:cs typeface="Calibri" panose="020F0502020204030204" pitchFamily="34" charset="0"/>
+              </a:rPr>
+              <a:t>Ours: “Anamorphic Effect”  based on the embedding vectors </a:t>
+            </a:r>
+          </a:p>
+          <a:p>
+            <a:r>
+              <a:rPr lang="en-US" i="1" dirty="0">
+                <a:latin typeface="Calibri" panose="020F0502020204030204" pitchFamily="34" charset="0"/>
+                <a:cs typeface="Calibri" panose="020F0502020204030204" pitchFamily="34" charset="0"/>
+              </a:rPr>
+              <a:t>(</a:t>
+            </a:r>
+            <a:r>
+              <a:rPr lang="en-US" i="1" dirty="0" err="1">
+                <a:latin typeface="Calibri" panose="020F0502020204030204" pitchFamily="34" charset="0"/>
+                <a:cs typeface="Calibri" panose="020F0502020204030204" pitchFamily="34" charset="0"/>
+              </a:rPr>
+              <a:t>歪像视觉效果</a:t>
+            </a:r>
+            <a:r>
+              <a:rPr lang="en-US" i="1" dirty="0">
+                <a:latin typeface="Calibri" panose="020F0502020204030204" pitchFamily="34" charset="0"/>
+                <a:cs typeface="Calibri" panose="020F0502020204030204" pitchFamily="34" charset="0"/>
+              </a:rPr>
+              <a:t>)</a:t>
+            </a:r>
+            <a:endParaRPr lang="en-US" b="1" dirty="0">
+              <a:solidFill>
+                <a:srgbClr val="C00000"/>
+              </a:solidFill>
+            </a:endParaRPr>
+          </a:p>
+          <a:p>
+            <a:endParaRPr lang="en-US" b="1" i="1" dirty="0">
+              <a:solidFill>
+                <a:srgbClr val="C00000"/>
+              </a:solidFill>
+            </a:endParaRPr>
+          </a:p>
+          <a:p>
+            <a:endParaRPr lang="en-US" i="1" dirty="0"/>
+          </a:p>
+          <a:p>
+            <a:endParaRPr lang="en-US" dirty="0"/>
+          </a:p>
+        </p:txBody>
+      </p:sp>
+      <p:pic>
+        <p:nvPicPr>
+          <p:cNvPr id="8" name="Picture 2" descr="Le sculture anamorfiche dell'artista Michael Murphy | Collater.al">
+            <a:extLst>
+              <a:ext uri="{FF2B5EF4-FFF2-40B4-BE49-F238E27FC236}">
+                <a16:creationId xmlns:a16="http://schemas.microsoft.com/office/drawing/2014/main" id="{B86A01C9-9081-8E95-4311-25773D1B87CF}"/>
+              </a:ext>
+            </a:extLst>
+          </p:cNvPr>
+          <p:cNvPicPr>
+            <a:picLocks noChangeAspect="1" noChangeArrowheads="1"/>
+          </p:cNvPicPr>
+          <p:nvPr/>
+        </p:nvPicPr>
+        <p:blipFill>
+          <a:blip r:embed="rId3">
+            <a:extLst>
+              <a:ext uri="{28A0092B-C50C-407E-A947-70E740481C1C}">
+                <a14:useLocalDpi xmlns:a14="http://schemas.microsoft.com/office/drawing/2010/main" val="0"/>
+              </a:ext>
+            </a:extLst>
+          </a:blip>
+          <a:srcRect/>
+          <a:stretch>
+            <a:fillRect/>
+          </a:stretch>
+        </p:blipFill>
+        <p:spPr bwMode="auto">
+          <a:xfrm>
+            <a:off x="1170710" y="3834807"/>
+            <a:ext cx="3775364" cy="2516910"/>
+          </a:xfrm>
+          <a:prstGeom prst="rect">
+            <a:avLst/>
+          </a:prstGeom>
+          <a:noFill/>
+          <a:extLst>
+            <a:ext uri="{909E8E84-426E-40DD-AFC4-6F175D3DCCD1}">
+              <a14:hiddenFill xmlns:a14="http://schemas.microsoft.com/office/drawing/2010/main">
+                <a:solidFill>
+                  <a:srgbClr val="FFFFFF"/>
+                </a:solidFill>
+              </a14:hiddenFill>
+            </a:ext>
+          </a:extLst>
+        </p:spPr>
+      </p:pic>
+      <p:sp>
+        <p:nvSpPr>
+          <p:cNvPr id="14" name="TextBox 13">
+            <a:extLst>
+              <a:ext uri="{FF2B5EF4-FFF2-40B4-BE49-F238E27FC236}">
+                <a16:creationId xmlns:a16="http://schemas.microsoft.com/office/drawing/2014/main" id="{2C3112E5-4439-E632-DE64-7CE9DCDC3B9E}"/>
+              </a:ext>
+            </a:extLst>
+          </p:cNvPr>
+          <p:cNvSpPr txBox="1"/>
+          <p:nvPr/>
+        </p:nvSpPr>
+        <p:spPr>
+          <a:xfrm>
+            <a:off x="1977006" y="6515423"/>
+            <a:ext cx="2162772" cy="369332"/>
+          </a:xfrm>
+          <a:prstGeom prst="rect">
+            <a:avLst/>
+          </a:prstGeom>
+          <a:noFill/>
+        </p:spPr>
+        <p:txBody>
+          <a:bodyPr wrap="none" rtlCol="0">
+            <a:spAutoFit/>
+          </a:bodyPr>
+          <a:lstStyle/>
+          <a:p>
+            <a:r>
+              <a:rPr lang="en-US" dirty="0"/>
+              <a:t>Ordinary Direction…</a:t>
+            </a:r>
+          </a:p>
+        </p:txBody>
+      </p:sp>
+      <p:pic>
+        <p:nvPicPr>
+          <p:cNvPr id="15" name="Picture 4" descr="Le sculture anamorfiche dell'artista Michael Murphy | Collater.al">
+            <a:extLst>
+              <a:ext uri="{FF2B5EF4-FFF2-40B4-BE49-F238E27FC236}">
+                <a16:creationId xmlns:a16="http://schemas.microsoft.com/office/drawing/2014/main" id="{47248E83-0712-B1B3-1931-5FD6017111ED}"/>
+              </a:ext>
+            </a:extLst>
+          </p:cNvPr>
+          <p:cNvPicPr>
+            <a:picLocks noChangeAspect="1" noChangeArrowheads="1"/>
+          </p:cNvPicPr>
+          <p:nvPr/>
+        </p:nvPicPr>
+        <p:blipFill>
+          <a:blip r:embed="rId4">
+            <a:extLst>
+              <a:ext uri="{28A0092B-C50C-407E-A947-70E740481C1C}">
+                <a14:useLocalDpi xmlns:a14="http://schemas.microsoft.com/office/drawing/2010/main" val="0"/>
+              </a:ext>
+            </a:extLst>
+          </a:blip>
+          <a:srcRect/>
+          <a:stretch>
+            <a:fillRect/>
+          </a:stretch>
+        </p:blipFill>
+        <p:spPr bwMode="auto">
+          <a:xfrm>
+            <a:off x="6375615" y="3835972"/>
+            <a:ext cx="3775364" cy="2515745"/>
+          </a:xfrm>
+          <a:prstGeom prst="rect">
+            <a:avLst/>
+          </a:prstGeom>
+          <a:noFill/>
+          <a:extLst>
+            <a:ext uri="{909E8E84-426E-40DD-AFC4-6F175D3DCCD1}">
+              <a14:hiddenFill xmlns:a14="http://schemas.microsoft.com/office/drawing/2010/main">
+                <a:solidFill>
+                  <a:srgbClr val="FFFFFF"/>
+                </a:solidFill>
+              </a14:hiddenFill>
+            </a:ext>
+          </a:extLst>
+        </p:spPr>
+      </p:pic>
+      <p:sp>
+        <p:nvSpPr>
+          <p:cNvPr id="16" name="TextBox 15">
+            <a:extLst>
+              <a:ext uri="{FF2B5EF4-FFF2-40B4-BE49-F238E27FC236}">
+                <a16:creationId xmlns:a16="http://schemas.microsoft.com/office/drawing/2014/main" id="{9ADD6F99-6384-E827-78FA-B262A0260E8D}"/>
+              </a:ext>
+            </a:extLst>
+          </p:cNvPr>
+          <p:cNvSpPr txBox="1"/>
+          <p:nvPr/>
+        </p:nvSpPr>
+        <p:spPr>
+          <a:xfrm>
+            <a:off x="7181911" y="6531104"/>
+            <a:ext cx="2581156" cy="369332"/>
+          </a:xfrm>
+          <a:prstGeom prst="rect">
+            <a:avLst/>
+          </a:prstGeom>
+          <a:noFill/>
+        </p:spPr>
+        <p:txBody>
+          <a:bodyPr wrap="none" rtlCol="0">
+            <a:spAutoFit/>
+          </a:bodyPr>
+          <a:lstStyle/>
+          <a:p>
+            <a:r>
+              <a:rPr lang="en-US" dirty="0"/>
+              <a:t>Only at 1 special angle…</a:t>
+            </a:r>
+          </a:p>
+        </p:txBody>
+      </p:sp>
+      <p:sp>
+        <p:nvSpPr>
+          <p:cNvPr id="17" name="TextBox 16">
+            <a:extLst>
+              <a:ext uri="{FF2B5EF4-FFF2-40B4-BE49-F238E27FC236}">
+                <a16:creationId xmlns:a16="http://schemas.microsoft.com/office/drawing/2014/main" id="{5510B7C1-16C8-6284-DDFF-5E7C880B5DFB}"/>
+              </a:ext>
+            </a:extLst>
+          </p:cNvPr>
+          <p:cNvSpPr txBox="1"/>
+          <p:nvPr/>
+        </p:nvSpPr>
+        <p:spPr>
+          <a:xfrm>
+            <a:off x="10150979" y="5883989"/>
+            <a:ext cx="2148345" cy="646331"/>
+          </a:xfrm>
+          <a:prstGeom prst="rect">
+            <a:avLst/>
+          </a:prstGeom>
+          <a:noFill/>
+        </p:spPr>
+        <p:txBody>
+          <a:bodyPr wrap="none" rtlCol="0">
+            <a:spAutoFit/>
+          </a:bodyPr>
+          <a:lstStyle/>
+          <a:p>
+            <a:r>
+              <a:rPr lang="en-US" dirty="0"/>
+              <a:t>Cr. Michael Murphy</a:t>
+            </a:r>
+          </a:p>
+          <a:p>
+            <a:endParaRPr lang="en-US" dirty="0"/>
+          </a:p>
+        </p:txBody>
+      </p:sp>
+    </p:spTree>
+    <p:extLst>
+      <p:ext uri="{BB962C8B-B14F-4D97-AF65-F5344CB8AC3E}">
+        <p14:creationId xmlns:p14="http://schemas.microsoft.com/office/powerpoint/2010/main" val="1049135936"/>
+      </p:ext>
+    </p:extLst>
+  </p:cSld>
+  <p:clrMapOvr>
+    <a:masterClrMapping/>
+  </p:clrMapOvr>
+  <mc:AlternateContent xmlns:mc="http://schemas.openxmlformats.org/markup-compatibility/2006">
+    <mc:Choice xmlns:p159="http://schemas.microsoft.com/office/powerpoint/2015/09/main" Requires="p159">
+      <p:transition xmlns:p14="http://schemas.microsoft.com/office/powerpoint/2010/main" spd="slow" p14:dur="2000">
+        <p159:morph option="byObject"/>
+      </p:transition>
+    </mc:Choice>
+    <mc:Fallback>
+      <p:transition spd="slow">
+        <p:fade/>
+      </p:transition>
+    </mc:Fallback>
+  </mc:AlternateContent>
+  <p:timing>
+    <p:tnLst>
+      <p:par>
+        <p:cTn id="1" dur="indefinite" restart="never" nodeType="tmRoot">
+          <p:childTnLst>
+            <p:seq concurrent="1" nextAc="seek">
+              <p:cTn id="2" dur="indefinite" nodeType="mainSeq">
+                <p:childTnLst>
+                  <p:par>
+                    <p:cTn id="3" fill="hold">
+                      <p:stCondLst>
+                        <p:cond delay="indefinite"/>
+                        <p:cond evt="onBegin" delay="0">
+                          <p:tn val="2"/>
+                        </p:cond>
+                      </p:stCondLst>
+                      <p:childTnLst>
+                        <p:par>
+                          <p:cTn id="4" fill="hold">
+                            <p:stCondLst>
+                              <p:cond delay="0"/>
+                            </p:stCondLst>
+                            <p:childTnLst>
+                              <p:par>
+                                <p:cTn id="5" presetID="9" presetClass="entr" presetSubtype="0" fill="hold" nodeType="withEffect">
+                                  <p:stCondLst>
+                                    <p:cond delay="0"/>
+                                  </p:stCondLst>
+                                  <p:childTnLst>
+                                    <p:set>
+                                      <p:cBhvr>
+                                        <p:cTn id="6" dur="1" fill="hold">
+                                          <p:stCondLst>
+                                            <p:cond delay="0"/>
+                                          </p:stCondLst>
+                                        </p:cTn>
+                                        <p:tgtEl>
+                                          <p:spTgt spid="3">
+                                            <p:txEl>
+                                              <p:pRg st="0" end="0"/>
+                                            </p:txEl>
+                                          </p:spTgt>
+                                        </p:tgtEl>
+                                        <p:attrNameLst>
+                                          <p:attrName>style.visibility</p:attrName>
+                                        </p:attrNameLst>
+                                      </p:cBhvr>
+                                      <p:to>
+                                        <p:strVal val="visible"/>
+                                      </p:to>
+                                    </p:set>
+                                    <p:animEffect transition="in" filter="dissolve">
+                                      <p:cBhvr>
+                                        <p:cTn id="7" dur="500"/>
+                                        <p:tgtEl>
+                                          <p:spTgt spid="3">
+                                            <p:txEl>
+                                              <p:pRg st="0" end="0"/>
+                                            </p:txEl>
+                                          </p:spTgt>
+                                        </p:tgtEl>
+                                      </p:cBhvr>
+                                    </p:animEffect>
+                                  </p:childTnLst>
+                                </p:cTn>
+                              </p:par>
+                              <p:par>
+                                <p:cTn id="8" presetID="9" presetClass="entr" presetSubtype="0" fill="hold" nodeType="withEffect">
+                                  <p:stCondLst>
+                                    <p:cond delay="0"/>
+                                  </p:stCondLst>
+                                  <p:childTnLst>
+                                    <p:set>
+                                      <p:cBhvr>
+                                        <p:cTn id="9" dur="1" fill="hold">
+                                          <p:stCondLst>
+                                            <p:cond delay="0"/>
+                                          </p:stCondLst>
+                                        </p:cTn>
+                                        <p:tgtEl>
+                                          <p:spTgt spid="3">
+                                            <p:txEl>
+                                              <p:pRg st="1" end="1"/>
+                                            </p:txEl>
+                                          </p:spTgt>
+                                        </p:tgtEl>
+                                        <p:attrNameLst>
+                                          <p:attrName>style.visibility</p:attrName>
+                                        </p:attrNameLst>
+                                      </p:cBhvr>
+                                      <p:to>
+                                        <p:strVal val="visible"/>
+                                      </p:to>
+                                    </p:set>
+                                    <p:animEffect transition="in" filter="dissolve">
+                                      <p:cBhvr>
+                                        <p:cTn id="10" dur="500"/>
+                                        <p:tgtEl>
+                                          <p:spTgt spid="3">
+                                            <p:txEl>
+                                              <p:pRg st="1" end="1"/>
+                                            </p:txEl>
+                                          </p:spTgt>
+                                        </p:tgtEl>
+                                      </p:cBhvr>
+                                    </p:animEffect>
+                                  </p:childTnLst>
+                                </p:cTn>
+                              </p:par>
+                              <p:par>
+                                <p:cTn id="11" presetID="9" presetClass="entr" presetSubtype="0" fill="hold" nodeType="withEffect">
+                                  <p:stCondLst>
+                                    <p:cond delay="0"/>
+                                  </p:stCondLst>
+                                  <p:childTnLst>
+                                    <p:set>
+                                      <p:cBhvr>
+                                        <p:cTn id="12" dur="1" fill="hold">
+                                          <p:stCondLst>
+                                            <p:cond delay="0"/>
+                                          </p:stCondLst>
+                                        </p:cTn>
+                                        <p:tgtEl>
+                                          <p:spTgt spid="3">
+                                            <p:txEl>
+                                              <p:pRg st="2" end="2"/>
+                                            </p:txEl>
+                                          </p:spTgt>
+                                        </p:tgtEl>
+                                        <p:attrNameLst>
+                                          <p:attrName>style.visibility</p:attrName>
+                                        </p:attrNameLst>
+                                      </p:cBhvr>
+                                      <p:to>
+                                        <p:strVal val="visible"/>
+                                      </p:to>
+                                    </p:set>
+                                    <p:animEffect transition="in" filter="dissolve">
+                                      <p:cBhvr>
+                                        <p:cTn id="13" dur="500"/>
+                                        <p:tgtEl>
+                                          <p:spTgt spid="3">
+                                            <p:txEl>
+                                              <p:pRg st="2" end="2"/>
+                                            </p:txEl>
+                                          </p:spTgt>
+                                        </p:tgtEl>
+                                      </p:cBhvr>
+                                    </p:animEffect>
+                                  </p:childTnLst>
+                                </p:cTn>
+                              </p:par>
+                              <p:par>
+                                <p:cTn id="14" presetID="9" presetClass="entr" presetSubtype="0" fill="hold" nodeType="withEffect">
+                                  <p:stCondLst>
+                                    <p:cond delay="0"/>
+                                  </p:stCondLst>
+                                  <p:childTnLst>
+                                    <p:set>
+                                      <p:cBhvr>
+                                        <p:cTn id="15" dur="1" fill="hold">
+                                          <p:stCondLst>
+                                            <p:cond delay="0"/>
+                                          </p:stCondLst>
+                                        </p:cTn>
+                                        <p:tgtEl>
+                                          <p:spTgt spid="3">
+                                            <p:txEl>
+                                              <p:pRg st="3" end="3"/>
+                                            </p:txEl>
+                                          </p:spTgt>
+                                        </p:tgtEl>
+                                        <p:attrNameLst>
+                                          <p:attrName>style.visibility</p:attrName>
+                                        </p:attrNameLst>
+                                      </p:cBhvr>
+                                      <p:to>
+                                        <p:strVal val="visible"/>
+                                      </p:to>
+                                    </p:set>
+                                    <p:animEffect transition="in" filter="dissolve">
+                                      <p:cBhvr>
+                                        <p:cTn id="16" dur="500"/>
+                                        <p:tgtEl>
+                                          <p:spTgt spid="3">
+                                            <p:txEl>
+                                              <p:pRg st="3" end="3"/>
+                                            </p:txEl>
+                                          </p:spTgt>
+                                        </p:tgtEl>
+                                      </p:cBhvr>
+                                    </p:animEffect>
+                                  </p:childTnLst>
+                                </p:cTn>
+                              </p:par>
+                            </p:childTnLst>
+                          </p:cTn>
+                        </p:par>
+                      </p:childTnLst>
+                    </p:cTn>
+                  </p:par>
+                </p:childTnLst>
+              </p:cTn>
+              <p:prevCondLst>
+                <p:cond evt="onPrev" delay="0">
+                  <p:tgtEl>
+                    <p:sldTgt/>
+                  </p:tgtEl>
+                </p:cond>
+              </p:prevCondLst>
+              <p:nextCondLst>
+                <p:cond evt="onNext" delay="0">
+                  <p:tgtEl>
+                    <p:sldTgt/>
+                  </p:tgtEl>
+                </p:cond>
+              </p:nextCondLst>
+            </p:seq>
+          </p:childTnLst>
+        </p:cTn>
+      </p:par>
+    </p:tnLst>
+  </p:timing>
+</p:sld>
+</file>
+
+<file path=ppt/slides/slide7.xml><?xml version="1.0" encoding="utf-8"?>
 <p:sld xmlns:a="http://schemas.openxmlformats.org/drawingml/2006/main" xmlns:r="http://schemas.openxmlformats.org/officeDocument/2006/relationships" xmlns:p="http://schemas.openxmlformats.org/presentationml/2006/main">
   <p:cSld>
     <p:spTree>
@@ -11123,7 +15205,7 @@
                 <a:latin typeface="Calibri" panose="020F0502020204030204" pitchFamily="34" charset="0"/>
                 <a:cs typeface="Calibri" panose="020F0502020204030204" pitchFamily="34" charset="0"/>
               </a:rPr>
-              <a:t>3</a:t>
+              <a:t>7</a:t>
             </a:fld>
             <a:endParaRPr lang="zh-CN" altLang="en-US">
               <a:latin typeface="Calibri" panose="020F0502020204030204" pitchFamily="34" charset="0"/>
@@ -11181,7 +15263,7 @@
 </p:sld>
 </file>
 
-<file path=ppt/slides/slide4.xml><?xml version="1.0" encoding="utf-8"?>
+<file path=ppt/slides/slide8.xml><?xml version="1.0" encoding="utf-8"?>
 <p:sld xmlns:a="http://schemas.openxmlformats.org/drawingml/2006/main" xmlns:r="http://schemas.openxmlformats.org/officeDocument/2006/relationships" xmlns:p="http://schemas.openxmlformats.org/presentationml/2006/main">
   <p:cSld>
     <p:spTree>
@@ -11343,7 +15425,7 @@
           <a:p>
             <a:fld id="{8B4C9E33-6753-472F-9C09-83153B974C9D}" type="slidenum">
               <a:rPr lang="zh-CN" altLang="en-US" smtClean="0"/>
-              <a:t>4</a:t>
+              <a:t>8</a:t>
             </a:fld>
             <a:endParaRPr lang="zh-CN" altLang="en-US"/>
           </a:p>
@@ -11362,7 +15444,7 @@
 </p:sld>
 </file>
 
-<file path=ppt/slides/slide5.xml><?xml version="1.0" encoding="utf-8"?>
+<file path=ppt/slides/slide9.xml><?xml version="1.0" encoding="utf-8"?>
 <p:sld xmlns:a="http://schemas.openxmlformats.org/drawingml/2006/main" xmlns:r="http://schemas.openxmlformats.org/officeDocument/2006/relationships" xmlns:p="http://schemas.openxmlformats.org/presentationml/2006/main">
   <p:cSld>
     <p:spTree>
@@ -11536,7 +15618,7 @@
           <a:p>
             <a:fld id="{8B4C9E33-6753-472F-9C09-83153B974C9D}" type="slidenum">
               <a:rPr lang="zh-CN" altLang="en-US" smtClean="0"/>
-              <a:t>5</a:t>
+              <a:t>9</a:t>
             </a:fld>
             <a:endParaRPr lang="zh-CN" altLang="en-US"/>
           </a:p>
@@ -11914,1259 +15996,6 @@
       </p:par>
     </p:tnLst>
   </p:timing>
-</p:sld>
-</file>
-
-<file path=ppt/slides/slide6.xml><?xml version="1.0" encoding="utf-8"?>
-<p:sld xmlns:a="http://schemas.openxmlformats.org/drawingml/2006/main" xmlns:r="http://schemas.openxmlformats.org/officeDocument/2006/relationships" xmlns:p="http://schemas.openxmlformats.org/presentationml/2006/main">
-  <p:cSld>
-    <p:spTree>
-      <p:nvGrpSpPr>
-        <p:cNvPr id="1" name=""/>
-        <p:cNvGrpSpPr/>
-        <p:nvPr/>
-      </p:nvGrpSpPr>
-      <p:grpSpPr>
-        <a:xfrm>
-          <a:off x="0" y="0"/>
-          <a:ext cx="0" cy="0"/>
-          <a:chOff x="0" y="0"/>
-          <a:chExt cx="0" cy="0"/>
-        </a:xfrm>
-      </p:grpSpPr>
-      <p:sp>
-        <p:nvSpPr>
-          <p:cNvPr id="2" name="Title 1">
-            <a:extLst>
-              <a:ext uri="{FF2B5EF4-FFF2-40B4-BE49-F238E27FC236}">
-                <a16:creationId xmlns:a16="http://schemas.microsoft.com/office/drawing/2014/main" id="{15AAB95B-7062-2EBE-2367-5281DAD2E79F}"/>
-              </a:ext>
-            </a:extLst>
-          </p:cNvPr>
-          <p:cNvSpPr>
-            <a:spLocks noGrp="1"/>
-          </p:cNvSpPr>
-          <p:nvPr>
-            <p:ph type="title"/>
-          </p:nvPr>
-        </p:nvSpPr>
-        <p:spPr/>
-        <p:txBody>
-          <a:bodyPr/>
-          <a:lstStyle/>
-          <a:p>
-            <a:r>
-              <a:rPr lang="en-US" b="1" dirty="0">
-                <a:latin typeface="Calibri" panose="020F0502020204030204" pitchFamily="34" charset="0"/>
-                <a:cs typeface="Calibri" panose="020F0502020204030204" pitchFamily="34" charset="0"/>
-              </a:rPr>
-              <a:t>What you are going to learn (2)</a:t>
-            </a:r>
-            <a:endParaRPr lang="en-US" dirty="0"/>
-          </a:p>
-        </p:txBody>
-      </p:sp>
-      <p:sp>
-        <p:nvSpPr>
-          <p:cNvPr id="3" name="Content Placeholder 2">
-            <a:extLst>
-              <a:ext uri="{FF2B5EF4-FFF2-40B4-BE49-F238E27FC236}">
-                <a16:creationId xmlns:a16="http://schemas.microsoft.com/office/drawing/2014/main" id="{3554BD20-64B7-FB96-D04A-B44C85BC1F15}"/>
-              </a:ext>
-            </a:extLst>
-          </p:cNvPr>
-          <p:cNvSpPr>
-            <a:spLocks noGrp="1"/>
-          </p:cNvSpPr>
-          <p:nvPr>
-            <p:ph idx="1"/>
-          </p:nvPr>
-        </p:nvSpPr>
-        <p:spPr>
-          <a:xfrm>
-            <a:off x="838200" y="1825625"/>
-            <a:ext cx="6664842" cy="4351338"/>
-          </a:xfrm>
-        </p:spPr>
-        <p:txBody>
-          <a:bodyPr>
-            <a:normAutofit/>
-          </a:bodyPr>
-          <a:lstStyle/>
-          <a:p>
-            <a:r>
-              <a:rPr lang="en-US" sz="4000" dirty="0">
-                <a:latin typeface="Calibri" panose="020F0502020204030204" pitchFamily="34" charset="0"/>
-                <a:cs typeface="Calibri" panose="020F0502020204030204" pitchFamily="34" charset="0"/>
-              </a:rPr>
-              <a:t>Counting </a:t>
-            </a:r>
-          </a:p>
-          <a:p>
-            <a:pPr lvl="1"/>
-            <a:r>
-              <a:rPr lang="en-US" sz="3600" dirty="0">
-                <a:solidFill>
-                  <a:srgbClr val="C00000"/>
-                </a:solidFill>
-                <a:latin typeface="Calibri" panose="020F0502020204030204" pitchFamily="34" charset="0"/>
-                <a:cs typeface="Calibri" panose="020F0502020204030204" pitchFamily="34" charset="0"/>
-              </a:rPr>
-              <a:t>Human’s first instincts of math</a:t>
-            </a:r>
-          </a:p>
-          <a:p>
-            <a:pPr lvl="1"/>
-            <a:endParaRPr lang="en-US" sz="3600" dirty="0">
-              <a:solidFill>
-                <a:srgbClr val="C00000"/>
-              </a:solidFill>
-              <a:latin typeface="Calibri" panose="020F0502020204030204" pitchFamily="34" charset="0"/>
-              <a:cs typeface="Calibri" panose="020F0502020204030204" pitchFamily="34" charset="0"/>
-            </a:endParaRPr>
-          </a:p>
-          <a:p>
-            <a:r>
-              <a:rPr lang="en-US" sz="4000" dirty="0">
-                <a:latin typeface="Calibri" panose="020F0502020204030204" pitchFamily="34" charset="0"/>
-                <a:cs typeface="Calibri" panose="020F0502020204030204" pitchFamily="34" charset="0"/>
-              </a:rPr>
-              <a:t>Basic Probability</a:t>
-            </a:r>
-          </a:p>
-          <a:p>
-            <a:pPr lvl="1"/>
-            <a:r>
-              <a:rPr lang="en-US" sz="3600" dirty="0">
-                <a:solidFill>
-                  <a:srgbClr val="C00000"/>
-                </a:solidFill>
-                <a:latin typeface="Calibri" panose="020F0502020204030204" pitchFamily="34" charset="0"/>
-                <a:cs typeface="Calibri" panose="020F0502020204030204" pitchFamily="34" charset="0"/>
-              </a:rPr>
-              <a:t>Your first step to understand “randomness”</a:t>
-            </a:r>
-          </a:p>
-          <a:p>
-            <a:pPr lvl="1"/>
-            <a:endParaRPr lang="en-US" sz="3600" dirty="0">
-              <a:latin typeface="Calibri" panose="020F0502020204030204" pitchFamily="34" charset="0"/>
-              <a:cs typeface="Calibri" panose="020F0502020204030204" pitchFamily="34" charset="0"/>
-            </a:endParaRPr>
-          </a:p>
-          <a:p>
-            <a:pPr lvl="1"/>
-            <a:endParaRPr lang="en-US" sz="3600" dirty="0">
-              <a:latin typeface="Calibri" panose="020F0502020204030204" pitchFamily="34" charset="0"/>
-              <a:cs typeface="Calibri" panose="020F0502020204030204" pitchFamily="34" charset="0"/>
-            </a:endParaRPr>
-          </a:p>
-          <a:p>
-            <a:pPr lvl="1"/>
-            <a:endParaRPr lang="en-US" sz="3600" dirty="0">
-              <a:latin typeface="Calibri" panose="020F0502020204030204" pitchFamily="34" charset="0"/>
-              <a:cs typeface="Calibri" panose="020F0502020204030204" pitchFamily="34" charset="0"/>
-            </a:endParaRPr>
-          </a:p>
-        </p:txBody>
-      </p:sp>
-      <p:sp>
-        <p:nvSpPr>
-          <p:cNvPr id="4" name="Slide Number Placeholder 3">
-            <a:extLst>
-              <a:ext uri="{FF2B5EF4-FFF2-40B4-BE49-F238E27FC236}">
-                <a16:creationId xmlns:a16="http://schemas.microsoft.com/office/drawing/2014/main" id="{D0A2FA63-07CE-AFED-749D-3BF8A28687B6}"/>
-              </a:ext>
-            </a:extLst>
-          </p:cNvPr>
-          <p:cNvSpPr>
-            <a:spLocks noGrp="1"/>
-          </p:cNvSpPr>
-          <p:nvPr>
-            <p:ph type="sldNum" sz="quarter" idx="12"/>
-          </p:nvPr>
-        </p:nvSpPr>
-        <p:spPr/>
-        <p:txBody>
-          <a:bodyPr/>
-          <a:lstStyle/>
-          <a:p>
-            <a:fld id="{8B4C9E33-6753-472F-9C09-83153B974C9D}" type="slidenum">
-              <a:rPr lang="zh-CN" altLang="en-US" smtClean="0"/>
-              <a:t>6</a:t>
-            </a:fld>
-            <a:endParaRPr lang="zh-CN" altLang="en-US"/>
-          </a:p>
-        </p:txBody>
-      </p:sp>
-      <p:pic>
-        <p:nvPicPr>
-          <p:cNvPr id="5" name="Picture 4" descr="Counting | numeracy - BBC Bitesize">
-            <a:extLst>
-              <a:ext uri="{FF2B5EF4-FFF2-40B4-BE49-F238E27FC236}">
-                <a16:creationId xmlns:a16="http://schemas.microsoft.com/office/drawing/2014/main" id="{92692EA8-0652-BB8F-76C5-99639E95DE5F}"/>
-              </a:ext>
-            </a:extLst>
-          </p:cNvPr>
-          <p:cNvPicPr>
-            <a:picLocks noChangeAspect="1"/>
-          </p:cNvPicPr>
-          <p:nvPr/>
-        </p:nvPicPr>
-        <p:blipFill>
-          <a:blip r:embed="rId2"/>
-          <a:stretch>
-            <a:fillRect/>
-          </a:stretch>
-        </p:blipFill>
-        <p:spPr>
-          <a:xfrm>
-            <a:off x="7886700" y="1646238"/>
-            <a:ext cx="3083442" cy="1734436"/>
-          </a:xfrm>
-          <a:prstGeom prst="rect">
-            <a:avLst/>
-          </a:prstGeom>
-        </p:spPr>
-      </p:pic>
-      <p:pic>
-        <p:nvPicPr>
-          <p:cNvPr id="6" name="Picture 5" descr="Dice - Wikipedia">
-            <a:extLst>
-              <a:ext uri="{FF2B5EF4-FFF2-40B4-BE49-F238E27FC236}">
-                <a16:creationId xmlns:a16="http://schemas.microsoft.com/office/drawing/2014/main" id="{4C8F0A02-2B10-8C34-AA74-B7F47C5A9E2A}"/>
-              </a:ext>
-            </a:extLst>
-          </p:cNvPr>
-          <p:cNvPicPr>
-            <a:picLocks noChangeAspect="1"/>
-          </p:cNvPicPr>
-          <p:nvPr/>
-        </p:nvPicPr>
-        <p:blipFill>
-          <a:blip r:embed="rId3"/>
-          <a:stretch>
-            <a:fillRect/>
-          </a:stretch>
-        </p:blipFill>
-        <p:spPr>
-          <a:xfrm>
-            <a:off x="8610600" y="4001294"/>
-            <a:ext cx="2095500" cy="1816100"/>
-          </a:xfrm>
-          <a:prstGeom prst="rect">
-            <a:avLst/>
-          </a:prstGeom>
-        </p:spPr>
-      </p:pic>
-    </p:spTree>
-    <p:extLst>
-      <p:ext uri="{BB962C8B-B14F-4D97-AF65-F5344CB8AC3E}">
-        <p14:creationId xmlns:p14="http://schemas.microsoft.com/office/powerpoint/2010/main" val="3433418147"/>
-      </p:ext>
-    </p:extLst>
-  </p:cSld>
-  <p:clrMapOvr>
-    <a:masterClrMapping/>
-  </p:clrMapOvr>
-  <p:timing>
-    <p:tnLst>
-      <p:par>
-        <p:cTn id="1" dur="indefinite" restart="never" nodeType="tmRoot">
-          <p:childTnLst>
-            <p:seq concurrent="1" nextAc="seek">
-              <p:cTn id="2" dur="indefinite" nodeType="mainSeq">
-                <p:childTnLst>
-                  <p:par>
-                    <p:cTn id="3" fill="hold">
-                      <p:stCondLst>
-                        <p:cond delay="indefinite"/>
-                      </p:stCondLst>
-                      <p:childTnLst>
-                        <p:par>
-                          <p:cTn id="4" fill="hold">
-                            <p:stCondLst>
-                              <p:cond delay="0"/>
-                            </p:stCondLst>
-                            <p:childTnLst>
-                              <p:par>
-                                <p:cTn id="5" presetID="9" presetClass="entr" presetSubtype="0" fill="hold" nodeType="clickEffect">
-                                  <p:stCondLst>
-                                    <p:cond delay="0"/>
-                                  </p:stCondLst>
-                                  <p:childTnLst>
-                                    <p:set>
-                                      <p:cBhvr>
-                                        <p:cTn id="6" dur="1" fill="hold">
-                                          <p:stCondLst>
-                                            <p:cond delay="0"/>
-                                          </p:stCondLst>
-                                        </p:cTn>
-                                        <p:tgtEl>
-                                          <p:spTgt spid="3">
-                                            <p:txEl>
-                                              <p:pRg st="3" end="3"/>
-                                            </p:txEl>
-                                          </p:spTgt>
-                                        </p:tgtEl>
-                                        <p:attrNameLst>
-                                          <p:attrName>style.visibility</p:attrName>
-                                        </p:attrNameLst>
-                                      </p:cBhvr>
-                                      <p:to>
-                                        <p:strVal val="visible"/>
-                                      </p:to>
-                                    </p:set>
-                                    <p:animEffect transition="in" filter="dissolve">
-                                      <p:cBhvr>
-                                        <p:cTn id="7" dur="500"/>
-                                        <p:tgtEl>
-                                          <p:spTgt spid="3">
-                                            <p:txEl>
-                                              <p:pRg st="3" end="3"/>
-                                            </p:txEl>
-                                          </p:spTgt>
-                                        </p:tgtEl>
-                                      </p:cBhvr>
-                                    </p:animEffect>
-                                  </p:childTnLst>
-                                </p:cTn>
-                              </p:par>
-                              <p:par>
-                                <p:cTn id="8" presetID="9" presetClass="entr" presetSubtype="0" fill="hold" nodeType="withEffect">
-                                  <p:stCondLst>
-                                    <p:cond delay="0"/>
-                                  </p:stCondLst>
-                                  <p:childTnLst>
-                                    <p:set>
-                                      <p:cBhvr>
-                                        <p:cTn id="9" dur="1" fill="hold">
-                                          <p:stCondLst>
-                                            <p:cond delay="0"/>
-                                          </p:stCondLst>
-                                        </p:cTn>
-                                        <p:tgtEl>
-                                          <p:spTgt spid="3">
-                                            <p:txEl>
-                                              <p:pRg st="4" end="4"/>
-                                            </p:txEl>
-                                          </p:spTgt>
-                                        </p:tgtEl>
-                                        <p:attrNameLst>
-                                          <p:attrName>style.visibility</p:attrName>
-                                        </p:attrNameLst>
-                                      </p:cBhvr>
-                                      <p:to>
-                                        <p:strVal val="visible"/>
-                                      </p:to>
-                                    </p:set>
-                                    <p:animEffect transition="in" filter="dissolve">
-                                      <p:cBhvr>
-                                        <p:cTn id="10" dur="500"/>
-                                        <p:tgtEl>
-                                          <p:spTgt spid="3">
-                                            <p:txEl>
-                                              <p:pRg st="4" end="4"/>
-                                            </p:txEl>
-                                          </p:spTgt>
-                                        </p:tgtEl>
-                                      </p:cBhvr>
-                                    </p:animEffect>
-                                  </p:childTnLst>
-                                </p:cTn>
-                              </p:par>
-                            </p:childTnLst>
-                          </p:cTn>
-                        </p:par>
-                      </p:childTnLst>
-                    </p:cTn>
-                  </p:par>
-                  <p:par>
-                    <p:cTn id="11" fill="hold">
-                      <p:stCondLst>
-                        <p:cond delay="indefinite"/>
-                      </p:stCondLst>
-                      <p:childTnLst>
-                        <p:par>
-                          <p:cTn id="12" fill="hold">
-                            <p:stCondLst>
-                              <p:cond delay="0"/>
-                            </p:stCondLst>
-                            <p:childTnLst>
-                              <p:par>
-                                <p:cTn id="13" presetID="9" presetClass="entr" presetSubtype="0" fill="hold" nodeType="clickEffect">
-                                  <p:stCondLst>
-                                    <p:cond delay="0"/>
-                                  </p:stCondLst>
-                                  <p:childTnLst>
-                                    <p:set>
-                                      <p:cBhvr>
-                                        <p:cTn id="14" dur="1" fill="hold">
-                                          <p:stCondLst>
-                                            <p:cond delay="0"/>
-                                          </p:stCondLst>
-                                        </p:cTn>
-                                        <p:tgtEl>
-                                          <p:spTgt spid="6"/>
-                                        </p:tgtEl>
-                                        <p:attrNameLst>
-                                          <p:attrName>style.visibility</p:attrName>
-                                        </p:attrNameLst>
-                                      </p:cBhvr>
-                                      <p:to>
-                                        <p:strVal val="visible"/>
-                                      </p:to>
-                                    </p:set>
-                                    <p:animEffect transition="in" filter="dissolve">
-                                      <p:cBhvr>
-                                        <p:cTn id="15" dur="500"/>
-                                        <p:tgtEl>
-                                          <p:spTgt spid="6"/>
-                                        </p:tgtEl>
-                                      </p:cBhvr>
-                                    </p:animEffect>
-                                  </p:childTnLst>
-                                </p:cTn>
-                              </p:par>
-                            </p:childTnLst>
-                          </p:cTn>
-                        </p:par>
-                      </p:childTnLst>
-                    </p:cTn>
-                  </p:par>
-                </p:childTnLst>
-              </p:cTn>
-              <p:prevCondLst>
-                <p:cond evt="onPrev" delay="0">
-                  <p:tgtEl>
-                    <p:sldTgt/>
-                  </p:tgtEl>
-                </p:cond>
-              </p:prevCondLst>
-              <p:nextCondLst>
-                <p:cond evt="onNext" delay="0">
-                  <p:tgtEl>
-                    <p:sldTgt/>
-                  </p:tgtEl>
-                </p:cond>
-              </p:nextCondLst>
-            </p:seq>
-          </p:childTnLst>
-        </p:cTn>
-      </p:par>
-    </p:tnLst>
-  </p:timing>
-</p:sld>
-</file>
-
-<file path=ppt/slides/slide7.xml><?xml version="1.0" encoding="utf-8"?>
-<p:sld xmlns:a="http://schemas.openxmlformats.org/drawingml/2006/main" xmlns:r="http://schemas.openxmlformats.org/officeDocument/2006/relationships" xmlns:p="http://schemas.openxmlformats.org/presentationml/2006/main">
-  <p:cSld>
-    <p:spTree>
-      <p:nvGrpSpPr>
-        <p:cNvPr id="1" name="">
-          <a:extLst>
-            <a:ext uri="{FF2B5EF4-FFF2-40B4-BE49-F238E27FC236}">
-              <a16:creationId xmlns:a16="http://schemas.microsoft.com/office/drawing/2014/main" id="{B221BE30-FC6B-4129-2AAD-1E1D2BFC5C45}"/>
-            </a:ext>
-          </a:extLst>
-        </p:cNvPr>
-        <p:cNvGrpSpPr/>
-        <p:nvPr/>
-      </p:nvGrpSpPr>
-      <p:grpSpPr>
-        <a:xfrm>
-          <a:off x="0" y="0"/>
-          <a:ext cx="0" cy="0"/>
-          <a:chOff x="0" y="0"/>
-          <a:chExt cx="0" cy="0"/>
-        </a:xfrm>
-      </p:grpSpPr>
-      <p:sp>
-        <p:nvSpPr>
-          <p:cNvPr id="2" name="Title 1">
-            <a:extLst>
-              <a:ext uri="{FF2B5EF4-FFF2-40B4-BE49-F238E27FC236}">
-                <a16:creationId xmlns:a16="http://schemas.microsoft.com/office/drawing/2014/main" id="{12064E3E-6DD6-C871-82D7-C3BD8576A904}"/>
-              </a:ext>
-            </a:extLst>
-          </p:cNvPr>
-          <p:cNvSpPr>
-            <a:spLocks noGrp="1"/>
-          </p:cNvSpPr>
-          <p:nvPr>
-            <p:ph type="title"/>
-          </p:nvPr>
-        </p:nvSpPr>
-        <p:spPr/>
-        <p:txBody>
-          <a:bodyPr/>
-          <a:lstStyle/>
-          <a:p>
-            <a:r>
-              <a:rPr lang="en-US" b="1" dirty="0">
-                <a:latin typeface="Calibri" panose="020F0502020204030204" pitchFamily="34" charset="0"/>
-                <a:cs typeface="Calibri" panose="020F0502020204030204" pitchFamily="34" charset="0"/>
-              </a:rPr>
-              <a:t>What you are going to learn (3)</a:t>
-            </a:r>
-            <a:endParaRPr lang="en-US" dirty="0"/>
-          </a:p>
-        </p:txBody>
-      </p:sp>
-      <mc:AlternateContent xmlns:mc="http://schemas.openxmlformats.org/markup-compatibility/2006" xmlns:a14="http://schemas.microsoft.com/office/drawing/2010/main">
-        <mc:Choice Requires="a14">
-          <p:sp>
-            <p:nvSpPr>
-              <p:cNvPr id="3" name="Content Placeholder 2">
-                <a:extLst>
-                  <a:ext uri="{FF2B5EF4-FFF2-40B4-BE49-F238E27FC236}">
-                    <a16:creationId xmlns:a16="http://schemas.microsoft.com/office/drawing/2014/main" id="{F7916E85-A319-0B86-3710-2B6D3A46AC9C}"/>
-                  </a:ext>
-                </a:extLst>
-              </p:cNvPr>
-              <p:cNvSpPr>
-                <a:spLocks noGrp="1"/>
-              </p:cNvSpPr>
-              <p:nvPr>
-                <p:ph idx="1"/>
-              </p:nvPr>
-            </p:nvSpPr>
-            <p:spPr>
-              <a:xfrm>
-                <a:off x="838200" y="1825625"/>
-                <a:ext cx="6664842" cy="4351338"/>
-              </a:xfrm>
-            </p:spPr>
-            <p:txBody>
-              <a:bodyPr>
-                <a:normAutofit/>
-              </a:bodyPr>
-              <a:lstStyle/>
-              <a:p>
-                <a:r>
-                  <a:rPr lang="en-US" sz="4000" dirty="0">
-                    <a:latin typeface="Calibri" panose="020F0502020204030204" pitchFamily="34" charset="0"/>
-                    <a:cs typeface="Calibri" panose="020F0502020204030204" pitchFamily="34" charset="0"/>
-                  </a:rPr>
-                  <a:t>Basic Number Theory </a:t>
-                </a:r>
-              </a:p>
-              <a:p>
-                <a:pPr lvl="1"/>
-                <a:r>
-                  <a:rPr lang="en-US" sz="3600" dirty="0">
-                    <a:solidFill>
-                      <a:srgbClr val="C00000"/>
-                    </a:solidFill>
-                    <a:latin typeface="Calibri" panose="020F0502020204030204" pitchFamily="34" charset="0"/>
-                    <a:cs typeface="Calibri" panose="020F0502020204030204" pitchFamily="34" charset="0"/>
-                  </a:rPr>
-                  <a:t>E.g. 17 </a:t>
-                </a:r>
-                <a14:m>
-                  <m:oMath xmlns:m="http://schemas.openxmlformats.org/officeDocument/2006/math">
-                    <m:r>
-                      <a:rPr lang="en-US" sz="3600" i="1" smtClean="0">
-                        <a:solidFill>
-                          <a:srgbClr val="C00000"/>
-                        </a:solidFill>
-                        <a:latin typeface="Cambria Math" panose="02040503050406030204" pitchFamily="18" charset="0"/>
-                        <a:ea typeface="Cambria Math" panose="02040503050406030204" pitchFamily="18" charset="0"/>
-                        <a:cs typeface="Calibri" panose="020F0502020204030204" pitchFamily="34" charset="0"/>
-                      </a:rPr>
-                      <m:t>≡</m:t>
-                    </m:r>
-                  </m:oMath>
-                </a14:m>
-                <a:r>
-                  <a:rPr lang="en-US" sz="3600" dirty="0">
-                    <a:solidFill>
-                      <a:srgbClr val="C00000"/>
-                    </a:solidFill>
-                    <a:latin typeface="Calibri" panose="020F0502020204030204" pitchFamily="34" charset="0"/>
-                    <a:cs typeface="Calibri" panose="020F0502020204030204" pitchFamily="34" charset="0"/>
-                  </a:rPr>
-                  <a:t> 2 (mod 5)</a:t>
-                </a:r>
-              </a:p>
-              <a:p>
-                <a:pPr lvl="1"/>
-                <a:endParaRPr lang="en-US" sz="3600" dirty="0">
-                  <a:solidFill>
-                    <a:srgbClr val="C00000"/>
-                  </a:solidFill>
-                  <a:latin typeface="Calibri" panose="020F0502020204030204" pitchFamily="34" charset="0"/>
-                  <a:cs typeface="Calibri" panose="020F0502020204030204" pitchFamily="34" charset="0"/>
-                </a:endParaRPr>
-              </a:p>
-              <a:p>
-                <a:pPr lvl="1"/>
-                <a:endParaRPr lang="en-US" sz="3600" dirty="0">
-                  <a:solidFill>
-                    <a:srgbClr val="C00000"/>
-                  </a:solidFill>
-                  <a:latin typeface="Calibri" panose="020F0502020204030204" pitchFamily="34" charset="0"/>
-                  <a:cs typeface="Calibri" panose="020F0502020204030204" pitchFamily="34" charset="0"/>
-                </a:endParaRPr>
-              </a:p>
-              <a:p>
-                <a:pPr marL="457200" lvl="1" indent="0">
-                  <a:buNone/>
-                </a:pPr>
-                <a:endParaRPr lang="en-US" sz="3600" dirty="0">
-                  <a:latin typeface="Calibri" panose="020F0502020204030204" pitchFamily="34" charset="0"/>
-                  <a:cs typeface="Calibri" panose="020F0502020204030204" pitchFamily="34" charset="0"/>
-                </a:endParaRPr>
-              </a:p>
-              <a:p>
-                <a:pPr lvl="1"/>
-                <a:r>
-                  <a:rPr lang="en-US" sz="3600" dirty="0">
-                    <a:latin typeface="Calibri" panose="020F0502020204030204" pitchFamily="34" charset="0"/>
-                    <a:cs typeface="Calibri" panose="020F0502020204030204" pitchFamily="34" charset="0"/>
-                  </a:rPr>
-                  <a:t>and some cryptography </a:t>
-                </a:r>
-                <a:r>
-                  <a:rPr lang="en-US" sz="3600" dirty="0">
-                    <a:latin typeface="Calibri" panose="020F0502020204030204" pitchFamily="34" charset="0"/>
-                    <a:cs typeface="Calibri" panose="020F0502020204030204" pitchFamily="34" charset="0"/>
-                    <a:sym typeface="Wingdings" pitchFamily="2" charset="2"/>
-                  </a:rPr>
-                  <a:t></a:t>
-                </a:r>
-                <a:endParaRPr lang="en-US" sz="3600" dirty="0">
-                  <a:latin typeface="Calibri" panose="020F0502020204030204" pitchFamily="34" charset="0"/>
-                  <a:cs typeface="Calibri" panose="020F0502020204030204" pitchFamily="34" charset="0"/>
-                </a:endParaRPr>
-              </a:p>
-              <a:p>
-                <a:pPr lvl="1"/>
-                <a:endParaRPr lang="en-US" sz="3600" dirty="0">
-                  <a:latin typeface="Calibri" panose="020F0502020204030204" pitchFamily="34" charset="0"/>
-                  <a:cs typeface="Calibri" panose="020F0502020204030204" pitchFamily="34" charset="0"/>
-                </a:endParaRPr>
-              </a:p>
-              <a:p>
-                <a:pPr lvl="1"/>
-                <a:endParaRPr lang="en-US" sz="3600" dirty="0">
-                  <a:latin typeface="Calibri" panose="020F0502020204030204" pitchFamily="34" charset="0"/>
-                  <a:cs typeface="Calibri" panose="020F0502020204030204" pitchFamily="34" charset="0"/>
-                </a:endParaRPr>
-              </a:p>
-            </p:txBody>
-          </p:sp>
-        </mc:Choice>
-        <mc:Fallback xmlns="">
-          <p:sp>
-            <p:nvSpPr>
-              <p:cNvPr id="3" name="Content Placeholder 2">
-                <a:extLst>
-                  <a:ext uri="{FF2B5EF4-FFF2-40B4-BE49-F238E27FC236}">
-                    <a16:creationId xmlns:a16="http://schemas.microsoft.com/office/drawing/2014/main" id="{F7916E85-A319-0B86-3710-2B6D3A46AC9C}"/>
-                  </a:ext>
-                </a:extLst>
-              </p:cNvPr>
-              <p:cNvSpPr>
-                <a:spLocks noGrp="1" noRot="1" noChangeAspect="1" noMove="1" noResize="1" noEditPoints="1" noAdjustHandles="1" noChangeArrowheads="1" noChangeShapeType="1" noTextEdit="1"/>
-              </p:cNvSpPr>
-              <p:nvPr>
-                <p:ph idx="1"/>
-              </p:nvPr>
-            </p:nvSpPr>
-            <p:spPr>
-              <a:xfrm>
-                <a:off x="838200" y="1825625"/>
-                <a:ext cx="6664842" cy="4351338"/>
-              </a:xfrm>
-              <a:blipFill>
-                <a:blip r:embed="rId2"/>
-                <a:stretch>
-                  <a:fillRect l="-3048" t="-3488"/>
-                </a:stretch>
-              </a:blipFill>
-            </p:spPr>
-            <p:txBody>
-              <a:bodyPr/>
-              <a:lstStyle/>
-              <a:p>
-                <a:r>
-                  <a:rPr lang="en-US">
-                    <a:noFill/>
-                  </a:rPr>
-                  <a:t> </a:t>
-                </a:r>
-              </a:p>
-            </p:txBody>
-          </p:sp>
-        </mc:Fallback>
-      </mc:AlternateContent>
-      <p:sp>
-        <p:nvSpPr>
-          <p:cNvPr id="4" name="Slide Number Placeholder 3">
-            <a:extLst>
-              <a:ext uri="{FF2B5EF4-FFF2-40B4-BE49-F238E27FC236}">
-                <a16:creationId xmlns:a16="http://schemas.microsoft.com/office/drawing/2014/main" id="{70C6553A-973E-003A-AC44-428CC3F5C831}"/>
-              </a:ext>
-            </a:extLst>
-          </p:cNvPr>
-          <p:cNvSpPr>
-            <a:spLocks noGrp="1"/>
-          </p:cNvSpPr>
-          <p:nvPr>
-            <p:ph type="sldNum" sz="quarter" idx="12"/>
-          </p:nvPr>
-        </p:nvSpPr>
-        <p:spPr/>
-        <p:txBody>
-          <a:bodyPr/>
-          <a:lstStyle/>
-          <a:p>
-            <a:fld id="{8B4C9E33-6753-472F-9C09-83153B974C9D}" type="slidenum">
-              <a:rPr lang="zh-CN" altLang="en-US" smtClean="0"/>
-              <a:t>7</a:t>
-            </a:fld>
-            <a:endParaRPr lang="zh-CN" altLang="en-US"/>
-          </a:p>
-        </p:txBody>
-      </p:sp>
-      <p:pic>
-        <p:nvPicPr>
-          <p:cNvPr id="8" name="Picture 7">
-            <a:extLst>
-              <a:ext uri="{FF2B5EF4-FFF2-40B4-BE49-F238E27FC236}">
-                <a16:creationId xmlns:a16="http://schemas.microsoft.com/office/drawing/2014/main" id="{FB9216CD-542D-FA70-0F9E-4B35E05D0B7D}"/>
-              </a:ext>
-            </a:extLst>
-          </p:cNvPr>
-          <p:cNvPicPr>
-            <a:picLocks noChangeAspect="1"/>
-          </p:cNvPicPr>
-          <p:nvPr/>
-        </p:nvPicPr>
-        <p:blipFill>
-          <a:blip r:embed="rId3">
-            <a:extLst>
-              <a:ext uri="{28A0092B-C50C-407E-A947-70E740481C1C}">
-                <a14:useLocalDpi xmlns:a14="http://schemas.microsoft.com/office/drawing/2010/main" val="0"/>
-              </a:ext>
-            </a:extLst>
-          </a:blip>
-          <a:stretch>
-            <a:fillRect/>
-          </a:stretch>
-        </p:blipFill>
-        <p:spPr>
-          <a:xfrm>
-            <a:off x="6310885" y="2255522"/>
-            <a:ext cx="2111085" cy="1516321"/>
-          </a:xfrm>
-          <a:prstGeom prst="rect">
-            <a:avLst/>
-          </a:prstGeom>
-        </p:spPr>
-      </p:pic>
-      <p:sp>
-        <p:nvSpPr>
-          <p:cNvPr id="9" name="TextBox 8">
-            <a:extLst>
-              <a:ext uri="{FF2B5EF4-FFF2-40B4-BE49-F238E27FC236}">
-                <a16:creationId xmlns:a16="http://schemas.microsoft.com/office/drawing/2014/main" id="{04286309-7FE7-0899-347C-0536CA671DBF}"/>
-              </a:ext>
-            </a:extLst>
-          </p:cNvPr>
-          <p:cNvSpPr txBox="1"/>
-          <p:nvPr/>
-        </p:nvSpPr>
-        <p:spPr>
-          <a:xfrm>
-            <a:off x="6018224" y="3905862"/>
-            <a:ext cx="3270895" cy="461665"/>
-          </a:xfrm>
-          <a:prstGeom prst="rect">
-            <a:avLst/>
-          </a:prstGeom>
-          <a:noFill/>
-        </p:spPr>
-        <p:txBody>
-          <a:bodyPr wrap="none" rtlCol="0">
-            <a:spAutoFit/>
-          </a:bodyPr>
-          <a:lstStyle/>
-          <a:p>
-            <a:r>
-              <a:rPr lang="en-US" sz="2400" dirty="0">
-                <a:latin typeface="Calibri" panose="020F0502020204030204" pitchFamily="34" charset="0"/>
-                <a:cs typeface="Calibri" panose="020F0502020204030204" pitchFamily="34" charset="0"/>
-              </a:rPr>
-              <a:t>”Number theory is hard”</a:t>
-            </a:r>
-          </a:p>
-        </p:txBody>
-      </p:sp>
-      <p:pic>
-        <p:nvPicPr>
-          <p:cNvPr id="11" name="Picture 10">
-            <a:extLst>
-              <a:ext uri="{FF2B5EF4-FFF2-40B4-BE49-F238E27FC236}">
-                <a16:creationId xmlns:a16="http://schemas.microsoft.com/office/drawing/2014/main" id="{24F8AC40-4368-8D2F-2967-2E0CC063632D}"/>
-              </a:ext>
-            </a:extLst>
-          </p:cNvPr>
-          <p:cNvPicPr>
-            <a:picLocks noChangeAspect="1"/>
-          </p:cNvPicPr>
-          <p:nvPr/>
-        </p:nvPicPr>
-        <p:blipFill>
-          <a:blip r:embed="rId4">
-            <a:extLst>
-              <a:ext uri="{28A0092B-C50C-407E-A947-70E740481C1C}">
-                <a14:useLocalDpi xmlns:a14="http://schemas.microsoft.com/office/drawing/2010/main" val="0"/>
-              </a:ext>
-            </a:extLst>
-          </a:blip>
-          <a:stretch>
-            <a:fillRect/>
-          </a:stretch>
-        </p:blipFill>
-        <p:spPr>
-          <a:xfrm>
-            <a:off x="9617519" y="1320800"/>
-            <a:ext cx="2195745" cy="2585062"/>
-          </a:xfrm>
-          <a:prstGeom prst="rect">
-            <a:avLst/>
-          </a:prstGeom>
-        </p:spPr>
-      </p:pic>
-      <p:sp>
-        <p:nvSpPr>
-          <p:cNvPr id="12" name="TextBox 11">
-            <a:extLst>
-              <a:ext uri="{FF2B5EF4-FFF2-40B4-BE49-F238E27FC236}">
-                <a16:creationId xmlns:a16="http://schemas.microsoft.com/office/drawing/2014/main" id="{FEBCCE3A-8C47-28B0-8A3C-CB74B7C7AE61}"/>
-              </a:ext>
-            </a:extLst>
-          </p:cNvPr>
-          <p:cNvSpPr txBox="1"/>
-          <p:nvPr/>
-        </p:nvSpPr>
-        <p:spPr>
-          <a:xfrm>
-            <a:off x="9982200" y="4001294"/>
-            <a:ext cx="1896332" cy="830997"/>
-          </a:xfrm>
-          <a:prstGeom prst="rect">
-            <a:avLst/>
-          </a:prstGeom>
-          <a:noFill/>
-        </p:spPr>
-        <p:txBody>
-          <a:bodyPr wrap="square" rtlCol="0">
-            <a:spAutoFit/>
-          </a:bodyPr>
-          <a:lstStyle/>
-          <a:p>
-            <a:r>
-              <a:rPr lang="en-US" sz="2400" dirty="0">
-                <a:latin typeface="Calibri" panose="020F0502020204030204" pitchFamily="34" charset="0"/>
-                <a:cs typeface="Calibri" panose="020F0502020204030204" pitchFamily="34" charset="0"/>
-              </a:rPr>
-              <a:t>”Yes, it’s really hard”</a:t>
-            </a:r>
-          </a:p>
-        </p:txBody>
-      </p:sp>
-    </p:spTree>
-    <p:extLst>
-      <p:ext uri="{BB962C8B-B14F-4D97-AF65-F5344CB8AC3E}">
-        <p14:creationId xmlns:p14="http://schemas.microsoft.com/office/powerpoint/2010/main" val="3945571883"/>
-      </p:ext>
-    </p:extLst>
-  </p:cSld>
-  <p:clrMapOvr>
-    <a:masterClrMapping/>
-  </p:clrMapOvr>
-  <p:timing>
-    <p:tnLst>
-      <p:par>
-        <p:cTn id="1" dur="indefinite" restart="never" nodeType="tmRoot">
-          <p:childTnLst>
-            <p:seq concurrent="1" nextAc="seek">
-              <p:cTn id="2" dur="indefinite" nodeType="mainSeq">
-                <p:childTnLst>
-                  <p:par>
-                    <p:cTn id="3" fill="hold">
-                      <p:stCondLst>
-                        <p:cond delay="indefinite"/>
-                      </p:stCondLst>
-                      <p:childTnLst>
-                        <p:par>
-                          <p:cTn id="4" fill="hold">
-                            <p:stCondLst>
-                              <p:cond delay="0"/>
-                            </p:stCondLst>
-                            <p:childTnLst>
-                              <p:par>
-                                <p:cTn id="5" presetID="9" presetClass="entr" presetSubtype="0" fill="hold" nodeType="clickEffect">
-                                  <p:stCondLst>
-                                    <p:cond delay="0"/>
-                                  </p:stCondLst>
-                                  <p:childTnLst>
-                                    <p:set>
-                                      <p:cBhvr>
-                                        <p:cTn id="6" dur="1" fill="hold">
-                                          <p:stCondLst>
-                                            <p:cond delay="0"/>
-                                          </p:stCondLst>
-                                        </p:cTn>
-                                        <p:tgtEl>
-                                          <p:spTgt spid="3">
-                                            <p:txEl>
-                                              <p:pRg st="5" end="5"/>
-                                            </p:txEl>
-                                          </p:spTgt>
-                                        </p:tgtEl>
-                                        <p:attrNameLst>
-                                          <p:attrName>style.visibility</p:attrName>
-                                        </p:attrNameLst>
-                                      </p:cBhvr>
-                                      <p:to>
-                                        <p:strVal val="visible"/>
-                                      </p:to>
-                                    </p:set>
-                                    <p:animEffect transition="in" filter="dissolve">
-                                      <p:cBhvr>
-                                        <p:cTn id="7" dur="500"/>
-                                        <p:tgtEl>
-                                          <p:spTgt spid="3">
-                                            <p:txEl>
-                                              <p:pRg st="5" end="5"/>
-                                            </p:txEl>
-                                          </p:spTgt>
-                                        </p:tgtEl>
-                                      </p:cBhvr>
-                                    </p:animEffect>
-                                  </p:childTnLst>
-                                </p:cTn>
-                              </p:par>
-                            </p:childTnLst>
-                          </p:cTn>
-                        </p:par>
-                      </p:childTnLst>
-                    </p:cTn>
-                  </p:par>
-                </p:childTnLst>
-              </p:cTn>
-              <p:prevCondLst>
-                <p:cond evt="onPrev" delay="0">
-                  <p:tgtEl>
-                    <p:sldTgt/>
-                  </p:tgtEl>
-                </p:cond>
-              </p:prevCondLst>
-              <p:nextCondLst>
-                <p:cond evt="onNext" delay="0">
-                  <p:tgtEl>
-                    <p:sldTgt/>
-                  </p:tgtEl>
-                </p:cond>
-              </p:nextCondLst>
-            </p:seq>
-          </p:childTnLst>
-        </p:cTn>
-      </p:par>
-    </p:tnLst>
-  </p:timing>
-</p:sld>
-</file>
-
-<file path=ppt/slides/slide8.xml><?xml version="1.0" encoding="utf-8"?>
-<p:sld xmlns:a="http://schemas.openxmlformats.org/drawingml/2006/main" xmlns:r="http://schemas.openxmlformats.org/officeDocument/2006/relationships" xmlns:p="http://schemas.openxmlformats.org/presentationml/2006/main">
-  <p:cSld>
-    <p:spTree>
-      <p:nvGrpSpPr>
-        <p:cNvPr id="1" name="">
-          <a:extLst>
-            <a:ext uri="{FF2B5EF4-FFF2-40B4-BE49-F238E27FC236}">
-              <a16:creationId xmlns:a16="http://schemas.microsoft.com/office/drawing/2014/main" id="{594A36CD-9E96-60E0-A453-23E9AF78B1DB}"/>
-            </a:ext>
-          </a:extLst>
-        </p:cNvPr>
-        <p:cNvGrpSpPr/>
-        <p:nvPr/>
-      </p:nvGrpSpPr>
-      <p:grpSpPr>
-        <a:xfrm>
-          <a:off x="0" y="0"/>
-          <a:ext cx="0" cy="0"/>
-          <a:chOff x="0" y="0"/>
-          <a:chExt cx="0" cy="0"/>
-        </a:xfrm>
-      </p:grpSpPr>
-      <p:sp>
-        <p:nvSpPr>
-          <p:cNvPr id="2" name="Title 1">
-            <a:extLst>
-              <a:ext uri="{FF2B5EF4-FFF2-40B4-BE49-F238E27FC236}">
-                <a16:creationId xmlns:a16="http://schemas.microsoft.com/office/drawing/2014/main" id="{732BE3B2-EED4-DDBB-6CA1-62A5216F3EA4}"/>
-              </a:ext>
-            </a:extLst>
-          </p:cNvPr>
-          <p:cNvSpPr>
-            <a:spLocks noGrp="1"/>
-          </p:cNvSpPr>
-          <p:nvPr>
-            <p:ph type="title"/>
-          </p:nvPr>
-        </p:nvSpPr>
-        <p:spPr/>
-        <p:txBody>
-          <a:bodyPr/>
-          <a:lstStyle/>
-          <a:p>
-            <a:r>
-              <a:rPr lang="en-US" b="1" dirty="0">
-                <a:latin typeface="Calibri" panose="020F0502020204030204" pitchFamily="34" charset="0"/>
-                <a:cs typeface="Calibri" panose="020F0502020204030204" pitchFamily="34" charset="0"/>
-              </a:rPr>
-              <a:t>What you are going to learn (4)</a:t>
-            </a:r>
-            <a:endParaRPr lang="en-US" dirty="0"/>
-          </a:p>
-        </p:txBody>
-      </p:sp>
-      <p:sp>
-        <p:nvSpPr>
-          <p:cNvPr id="3" name="Content Placeholder 2">
-            <a:extLst>
-              <a:ext uri="{FF2B5EF4-FFF2-40B4-BE49-F238E27FC236}">
-                <a16:creationId xmlns:a16="http://schemas.microsoft.com/office/drawing/2014/main" id="{17C29F7B-AF39-4C1C-5BCD-8AE2275BCC40}"/>
-              </a:ext>
-            </a:extLst>
-          </p:cNvPr>
-          <p:cNvSpPr>
-            <a:spLocks noGrp="1"/>
-          </p:cNvSpPr>
-          <p:nvPr>
-            <p:ph idx="1"/>
-          </p:nvPr>
-        </p:nvSpPr>
-        <p:spPr>
-          <a:xfrm>
-            <a:off x="838200" y="1825625"/>
-            <a:ext cx="6664842" cy="4351338"/>
-          </a:xfrm>
-        </p:spPr>
-        <p:txBody>
-          <a:bodyPr>
-            <a:normAutofit/>
-          </a:bodyPr>
-          <a:lstStyle/>
-          <a:p>
-            <a:r>
-              <a:rPr lang="en-US" sz="4000" dirty="0">
-                <a:latin typeface="Calibri" panose="020F0502020204030204" pitchFamily="34" charset="0"/>
-                <a:cs typeface="Calibri" panose="020F0502020204030204" pitchFamily="34" charset="0"/>
-              </a:rPr>
-              <a:t>Basic Algorithms</a:t>
-            </a:r>
-          </a:p>
-          <a:p>
-            <a:pPr lvl="1"/>
-            <a:r>
-              <a:rPr lang="en-US" sz="3200" dirty="0">
-                <a:solidFill>
-                  <a:srgbClr val="C00000"/>
-                </a:solidFill>
-                <a:latin typeface="Calibri" panose="020F0502020204030204" pitchFamily="34" charset="0"/>
-                <a:cs typeface="Calibri" panose="020F0502020204030204" pitchFamily="34" charset="0"/>
-              </a:rPr>
-              <a:t>“What can a computer do?”</a:t>
-            </a:r>
-          </a:p>
-          <a:p>
-            <a:pPr lvl="1"/>
-            <a:r>
-              <a:rPr lang="en-US" sz="3200" dirty="0">
-                <a:solidFill>
-                  <a:srgbClr val="C00000"/>
-                </a:solidFill>
-                <a:latin typeface="Calibri" panose="020F0502020204030204" pitchFamily="34" charset="0"/>
-                <a:cs typeface="Calibri" panose="020F0502020204030204" pitchFamily="34" charset="0"/>
-              </a:rPr>
-              <a:t>“At what cost?”</a:t>
-            </a:r>
-          </a:p>
-          <a:p>
-            <a:pPr lvl="1"/>
-            <a:endParaRPr lang="en-US" sz="3600" dirty="0">
-              <a:latin typeface="Calibri" panose="020F0502020204030204" pitchFamily="34" charset="0"/>
-              <a:cs typeface="Calibri" panose="020F0502020204030204" pitchFamily="34" charset="0"/>
-            </a:endParaRPr>
-          </a:p>
-          <a:p>
-            <a:pPr lvl="1"/>
-            <a:endParaRPr lang="en-US" sz="3600" dirty="0">
-              <a:latin typeface="Calibri" panose="020F0502020204030204" pitchFamily="34" charset="0"/>
-              <a:cs typeface="Calibri" panose="020F0502020204030204" pitchFamily="34" charset="0"/>
-            </a:endParaRPr>
-          </a:p>
-        </p:txBody>
-      </p:sp>
-      <p:sp>
-        <p:nvSpPr>
-          <p:cNvPr id="4" name="Slide Number Placeholder 3">
-            <a:extLst>
-              <a:ext uri="{FF2B5EF4-FFF2-40B4-BE49-F238E27FC236}">
-                <a16:creationId xmlns:a16="http://schemas.microsoft.com/office/drawing/2014/main" id="{3DCEFCA0-EC58-C919-8B7A-C2ADFBDAF28B}"/>
-              </a:ext>
-            </a:extLst>
-          </p:cNvPr>
-          <p:cNvSpPr>
-            <a:spLocks noGrp="1"/>
-          </p:cNvSpPr>
-          <p:nvPr>
-            <p:ph type="sldNum" sz="quarter" idx="12"/>
-          </p:nvPr>
-        </p:nvSpPr>
-        <p:spPr/>
-        <p:txBody>
-          <a:bodyPr/>
-          <a:lstStyle/>
-          <a:p>
-            <a:fld id="{8B4C9E33-6753-472F-9C09-83153B974C9D}" type="slidenum">
-              <a:rPr lang="zh-CN" altLang="en-US" smtClean="0"/>
-              <a:t>8</a:t>
-            </a:fld>
-            <a:endParaRPr lang="zh-CN" altLang="en-US"/>
-          </a:p>
-        </p:txBody>
-      </p:sp>
-      <p:pic>
-        <p:nvPicPr>
-          <p:cNvPr id="5" name="Picture 4" descr="Alan Turing - Wikipedia">
-            <a:extLst>
-              <a:ext uri="{FF2B5EF4-FFF2-40B4-BE49-F238E27FC236}">
-                <a16:creationId xmlns:a16="http://schemas.microsoft.com/office/drawing/2014/main" id="{A3F17E6E-F81A-0F22-14CF-99FE34D12BDD}"/>
-              </a:ext>
-            </a:extLst>
-          </p:cNvPr>
-          <p:cNvPicPr>
-            <a:picLocks noChangeAspect="1"/>
-          </p:cNvPicPr>
-          <p:nvPr/>
-        </p:nvPicPr>
-        <p:blipFill>
-          <a:blip r:embed="rId2"/>
-          <a:stretch>
-            <a:fillRect/>
-          </a:stretch>
-        </p:blipFill>
-        <p:spPr>
-          <a:xfrm>
-            <a:off x="8394700" y="2766604"/>
-            <a:ext cx="2280388" cy="3028355"/>
-          </a:xfrm>
-          <a:prstGeom prst="rect">
-            <a:avLst/>
-          </a:prstGeom>
-        </p:spPr>
-      </p:pic>
-    </p:spTree>
-    <p:extLst>
-      <p:ext uri="{BB962C8B-B14F-4D97-AF65-F5344CB8AC3E}">
-        <p14:creationId xmlns:p14="http://schemas.microsoft.com/office/powerpoint/2010/main" val="363905930"/>
-      </p:ext>
-    </p:extLst>
-  </p:cSld>
-  <p:clrMapOvr>
-    <a:masterClrMapping/>
-  </p:clrMapOvr>
-</p:sld>
-</file>
-
-<file path=ppt/slides/slide9.xml><?xml version="1.0" encoding="utf-8"?>
-<p:sld xmlns:a="http://schemas.openxmlformats.org/drawingml/2006/main" xmlns:r="http://schemas.openxmlformats.org/officeDocument/2006/relationships" xmlns:p="http://schemas.openxmlformats.org/presentationml/2006/main">
-  <p:cSld>
-    <p:bg>
-      <p:bgPr>
-        <a:solidFill>
-          <a:schemeClr val="accent6">
-            <a:lumMod val="20000"/>
-            <a:lumOff val="80000"/>
-          </a:schemeClr>
-        </a:solidFill>
-        <a:effectLst/>
-      </p:bgPr>
-    </p:bg>
-    <p:spTree>
-      <p:nvGrpSpPr>
-        <p:cNvPr id="1" name=""/>
-        <p:cNvGrpSpPr/>
-        <p:nvPr/>
-      </p:nvGrpSpPr>
-      <p:grpSpPr>
-        <a:xfrm>
-          <a:off x="0" y="0"/>
-          <a:ext cx="0" cy="0"/>
-          <a:chOff x="0" y="0"/>
-          <a:chExt cx="0" cy="0"/>
-        </a:xfrm>
-      </p:grpSpPr>
-      <p:sp>
-        <p:nvSpPr>
-          <p:cNvPr id="5" name="Title 1">
-            <a:extLst>
-              <a:ext uri="{FF2B5EF4-FFF2-40B4-BE49-F238E27FC236}">
-                <a16:creationId xmlns:a16="http://schemas.microsoft.com/office/drawing/2014/main" id="{5A45EFE3-9954-88B1-BC23-1AA2B73C5FA9}"/>
-              </a:ext>
-            </a:extLst>
-          </p:cNvPr>
-          <p:cNvSpPr>
-            <a:spLocks noGrp="1"/>
-          </p:cNvSpPr>
-          <p:nvPr>
-            <p:ph type="title"/>
-          </p:nvPr>
-        </p:nvSpPr>
-        <p:spPr>
-          <a:xfrm>
-            <a:off x="2807140" y="2766218"/>
-            <a:ext cx="10515600" cy="1325563"/>
-          </a:xfrm>
-        </p:spPr>
-        <p:txBody>
-          <a:bodyPr>
-            <a:normAutofit/>
-          </a:bodyPr>
-          <a:lstStyle/>
-          <a:p>
-            <a:pPr algn="l">
-              <a:buNone/>
-            </a:pPr>
-            <a:r>
-              <a:rPr lang="en-US" sz="7200" b="1" dirty="0">
-                <a:latin typeface="Calibri" panose="020F0502020204030204" pitchFamily="34" charset="0"/>
-                <a:cs typeface="Calibri" panose="020F0502020204030204" pitchFamily="34" charset="0"/>
-              </a:rPr>
-              <a:t>About the Class</a:t>
-            </a:r>
-          </a:p>
-        </p:txBody>
-      </p:sp>
-    </p:spTree>
-    <p:extLst>
-      <p:ext uri="{BB962C8B-B14F-4D97-AF65-F5344CB8AC3E}">
-        <p14:creationId xmlns:p14="http://schemas.microsoft.com/office/powerpoint/2010/main" val="185735343"/>
-      </p:ext>
-    </p:extLst>
-  </p:cSld>
-  <p:clrMapOvr>
-    <a:masterClrMapping/>
-  </p:clrMapOvr>
 </p:sld>
 </file>
 
